--- a/NCT-Slide-Template-Demo.pptx
+++ b/NCT-Slide-Template-Demo.pptx
@@ -12167,14 +12167,14 @@
             <a:pPr/>
             <a:r>
               <a:rPr lang="th-TH" dirty="0"/>
-              <a:t>ขอบคุณครับ</a:t>
-            </a:r>
-          </a:p>
-        </p:txBody>
-      </p:sp>
-      <p:sp>
-        <p:nvSpPr>
-          <p:cNvPr id="3" name="Contact"/>
+              <a:t>สภาพระบบบัญชีปัจจุบัน</a:t>
+            </a:r>
+          </a:p>
+        </p:txBody>
+      </p:sp>
+      <p:sp>
+        <p:nvSpPr>
+          <p:cNvPr id="3" name="CtxK"/>
           <p:cNvSpPr>
             <a:spLocks noGrp="1"/>
           </p:cNvSpPr>
@@ -12190,21 +12190,164 @@
             <a:pPr/>
             <a:r>
               <a:rPr lang="th-TH" dirty="0"/>
-              <a:t>โทร · 02-XXX-XXXX</a:t>
-            </a:r>
-          </a:p>
+              <a:t>สภาพปัจจุบัน</a:t>
+            </a:r>
+          </a:p>
+        </p:txBody>
+      </p:sp>
+      <p:sp>
+        <p:nvSpPr>
+          <p:cNvPr id="4" name="CtxB"/>
+          <p:cNvSpPr>
+            <a:spLocks noGrp="1"/>
+          </p:cNvSpPr>
+          <p:nvPr>
+            <p:ph type="body" idx="2"/>
+          </p:nvPr>
+        </p:nvSpPr>
+        <p:spPr/>
+        <p:txBody>
+          <a:bodyPr/>
+          <a:lstStyle/>
           <a:p>
             <a:pPr/>
             <a:r>
               <a:rPr lang="th-TH" dirty="0"/>
-              <a:t>อีเมล · contact@nctthai.com</a:t>
+              <a:t>คีย์เอกสารซ้ำสามระบบ ไม่มีจุดตรวจกลาง</a:t>
+            </a:r>
+          </a:p>
+          <a:p>
+            <a:pPr lvl="1"/>
+            <a:r>
+              <a:rPr lang="th-TH" dirty="0"/>
+              <a:t>เอกสารเข้าเฉลี่ย 1,200 ใบต่อเดือน</a:t>
             </a:r>
           </a:p>
           <a:p>
             <a:pPr/>
             <a:r>
               <a:rPr lang="th-TH" dirty="0"/>
-              <a:t>เว็บไซต์ · nctthai.com</a:t>
+              <a:t>ปิดงบล่าช้าเฉลี่ย 6 วันทำการ</a:t>
+            </a:r>
+          </a:p>
+          <a:p>
+            <a:pPr/>
+            <a:r>
+              <a:rPr lang="th-TH" dirty="0"/>
+              <a:t>ไม่มี audit trail ของการแก้ไขรายการ</a:t>
+            </a:r>
+          </a:p>
+        </p:txBody>
+      </p:sp>
+      <p:sp>
+        <p:nvSpPr>
+          <p:cNvPr id="5" name="OutK"/>
+          <p:cNvSpPr>
+            <a:spLocks noGrp="1"/>
+          </p:cNvSpPr>
+          <p:nvPr>
+            <p:ph type="body" idx="3"/>
+          </p:nvPr>
+        </p:nvSpPr>
+        <p:spPr/>
+        <p:txBody>
+          <a:bodyPr/>
+          <a:lstStyle/>
+          <a:p>
+            <a:pPr/>
+            <a:r>
+              <a:rPr lang="th-TH" dirty="0"/>
+              <a:t>สิ่งที่จะเกิดขึ้น</a:t>
+            </a:r>
+          </a:p>
+        </p:txBody>
+      </p:sp>
+      <p:sp>
+        <p:nvSpPr>
+          <p:cNvPr id="6" name="OutB"/>
+          <p:cNvSpPr>
+            <a:spLocks noGrp="1"/>
+          </p:cNvSpPr>
+          <p:nvPr>
+            <p:ph type="body" idx="4"/>
+          </p:nvPr>
+        </p:nvSpPr>
+        <p:spPr/>
+        <p:txBody>
+          <a:bodyPr/>
+          <a:lstStyle/>
+          <a:p>
+            <a:pPr/>
+            <a:r>
+              <a:rPr lang="th-TH" dirty="0"/>
+              <a:t>คีย์จุดเดียว ระบบกระจายต่อให้อัตโนมัติ</a:t>
+            </a:r>
+          </a:p>
+          <a:p>
+            <a:pPr lvl="1"/>
+            <a:r>
+              <a:rPr lang="th-TH" dirty="0"/>
+              <a:t>ลดเวลาคีย์ต่อใบจาก 4 นาที เหลือ 40 วินาที</a:t>
+            </a:r>
+          </a:p>
+          <a:p>
+            <a:pPr/>
+            <a:r>
+              <a:rPr lang="th-TH" dirty="0"/>
+              <a:t>ปิดงบภายใน 2 วันทำการ</a:t>
+            </a:r>
+          </a:p>
+          <a:p>
+            <a:pPr/>
+            <a:r>
+              <a:rPr lang="th-TH" dirty="0"/>
+              <a:t>บันทึกทุกการแก้ไขพร้อมผู้ทำและเวลา</a:t>
+            </a:r>
+          </a:p>
+        </p:txBody>
+      </p:sp>
+      <p:sp>
+        <p:nvSpPr>
+          <p:cNvPr id="7" name="TkL"/>
+          <p:cNvSpPr>
+            <a:spLocks noGrp="1"/>
+          </p:cNvSpPr>
+          <p:nvPr>
+            <p:ph type="body" idx="5"/>
+          </p:nvPr>
+        </p:nvSpPr>
+        <p:spPr/>
+        <p:txBody>
+          <a:bodyPr/>
+          <a:lstStyle/>
+          <a:p>
+            <a:pPr/>
+            <a:r>
+              <a:rPr lang="th-TH" dirty="0"/>
+              <a:t>สรุป</a:t>
+            </a:r>
+          </a:p>
+        </p:txBody>
+      </p:sp>
+      <p:sp>
+        <p:nvSpPr>
+          <p:cNvPr id="8" name="TkC"/>
+          <p:cNvSpPr>
+            <a:spLocks noGrp="1"/>
+          </p:cNvSpPr>
+          <p:nvPr>
+            <p:ph type="body" idx="6"/>
+          </p:nvPr>
+        </p:nvSpPr>
+        <p:spPr/>
+        <p:txBody>
+          <a:bodyPr/>
+          <a:lstStyle/>
+          <a:p>
+            <a:pPr/>
+            <a:r>
+              <a:rPr lang="th-TH" dirty="0"/>
+              <a:t>ปัญหาหลักคือการคีย์ซ้ำ ไม่ใช่จำนวนเอกสาร</a:t>
             </a:r>
           </a:p>
         </p:txBody>
@@ -12252,14 +12395,14 @@
             <a:pPr/>
             <a:r>
               <a:rPr lang="th-TH" dirty="0"/>
-              <a:t>สภาพระบบบัญชีปัจจุบัน</a:t>
-            </a:r>
-          </a:p>
-        </p:txBody>
-      </p:sp>
-      <p:sp>
-        <p:nvSpPr>
-          <p:cNvPr id="3" name="CtxK"/>
+              <a:t>สี่ผลลัพธ์ที่ข้อเสนอนี้ให้</a:t>
+            </a:r>
+          </a:p>
+        </p:txBody>
+      </p:sp>
+      <p:sp>
+        <p:nvSpPr>
+          <p:cNvPr id="3" name="N0"/>
           <p:cNvSpPr>
             <a:spLocks noGrp="1"/>
           </p:cNvSpPr>
@@ -12275,14 +12418,14 @@
             <a:pPr/>
             <a:r>
               <a:rPr lang="th-TH" dirty="0"/>
-              <a:t>สภาพปัจจุบัน</a:t>
-            </a:r>
-          </a:p>
-        </p:txBody>
-      </p:sp>
-      <p:sp>
-        <p:nvSpPr>
-          <p:cNvPr id="4" name="CtxB"/>
+              <a:t>01</a:t>
+            </a:r>
+          </a:p>
+        </p:txBody>
+      </p:sp>
+      <p:sp>
+        <p:nvSpPr>
+          <p:cNvPr id="4" name="H0"/>
           <p:cNvSpPr>
             <a:spLocks noGrp="1"/>
           </p:cNvSpPr>
@@ -12298,40 +12441,88 @@
             <a:pPr/>
             <a:r>
               <a:rPr lang="th-TH" dirty="0"/>
-              <a:t>คีย์เอกสารซ้ำสามระบบ ไม่มีจุดตรวจกลาง</a:t>
-            </a:r>
-          </a:p>
-          <a:p>
-            <a:pPr lvl="1"/>
+              <a:t>ลดงานคีย์ซ้ำ</a:t>
+            </a:r>
+          </a:p>
+        </p:txBody>
+      </p:sp>
+      <p:sp>
+        <p:nvSpPr>
+          <p:cNvPr id="5" name="B0"/>
+          <p:cNvSpPr>
+            <a:spLocks noGrp="1"/>
+          </p:cNvSpPr>
+          <p:nvPr>
+            <p:ph type="body" idx="3"/>
+          </p:nvPr>
+        </p:nvSpPr>
+        <p:spPr/>
+        <p:txBody>
+          <a:bodyPr/>
+          <a:lstStyle/>
+          <a:p>
+            <a:pPr/>
             <a:r>
               <a:rPr lang="th-TH" dirty="0"/>
-              <a:t>เอกสารเข้าเฉลี่ย 1,200 ใบต่อเดือน</a:t>
-            </a:r>
-          </a:p>
+              <a:t>รับเอกสารเข้าระบบเดียว แล้วกระจายต่อให้ทุกปลายทางอัตโนมัติ</a:t>
+            </a:r>
+          </a:p>
+        </p:txBody>
+      </p:sp>
+      <p:sp>
+        <p:nvSpPr>
+          <p:cNvPr id="6" name="N1"/>
+          <p:cNvSpPr>
+            <a:spLocks noGrp="1"/>
+          </p:cNvSpPr>
+          <p:nvPr>
+            <p:ph type="body" idx="4"/>
+          </p:nvPr>
+        </p:nvSpPr>
+        <p:spPr/>
+        <p:txBody>
+          <a:bodyPr/>
+          <a:lstStyle/>
           <a:p>
             <a:pPr/>
             <a:r>
               <a:rPr lang="th-TH" dirty="0"/>
-              <a:t>ปิดงบล่าช้าเฉลี่ย 6 วันทำการ</a:t>
-            </a:r>
-          </a:p>
+              <a:t>02</a:t>
+            </a:r>
+          </a:p>
+        </p:txBody>
+      </p:sp>
+      <p:sp>
+        <p:nvSpPr>
+          <p:cNvPr id="7" name="H1"/>
+          <p:cNvSpPr>
+            <a:spLocks noGrp="1"/>
+          </p:cNvSpPr>
+          <p:nvPr>
+            <p:ph type="body" idx="5"/>
+          </p:nvPr>
+        </p:nvSpPr>
+        <p:spPr/>
+        <p:txBody>
+          <a:bodyPr/>
+          <a:lstStyle/>
           <a:p>
             <a:pPr/>
             <a:r>
               <a:rPr lang="th-TH" dirty="0"/>
-              <a:t>ไม่มี audit trail ของการแก้ไขรายการ</a:t>
-            </a:r>
-          </a:p>
-        </p:txBody>
-      </p:sp>
-      <p:sp>
-        <p:nvSpPr>
-          <p:cNvPr id="5" name="OutK"/>
-          <p:cNvSpPr>
-            <a:spLocks noGrp="1"/>
-          </p:cNvSpPr>
-          <p:nvPr>
-            <p:ph type="body" idx="3"/>
+              <a:t>ตรวจสอบได้</a:t>
+            </a:r>
+          </a:p>
+        </p:txBody>
+      </p:sp>
+      <p:sp>
+        <p:nvSpPr>
+          <p:cNvPr id="8" name="B1"/>
+          <p:cNvSpPr>
+            <a:spLocks noGrp="1"/>
+          </p:cNvSpPr>
+          <p:nvPr>
+            <p:ph type="body" idx="6"/>
           </p:nvPr>
         </p:nvSpPr>
         <p:spPr/>
@@ -12342,19 +12533,19 @@
             <a:pPr/>
             <a:r>
               <a:rPr lang="th-TH" dirty="0"/>
-              <a:t>สิ่งที่จะเกิดขึ้น</a:t>
-            </a:r>
-          </a:p>
-        </p:txBody>
-      </p:sp>
-      <p:sp>
-        <p:nvSpPr>
-          <p:cNvPr id="6" name="OutB"/>
-          <p:cNvSpPr>
-            <a:spLocks noGrp="1"/>
-          </p:cNvSpPr>
-          <p:nvPr>
-            <p:ph type="body" idx="4"/>
+              <a:t>ทุกรายการมี audit trail ผู้ทำ เวลา และค่าก่อนหลัง</a:t>
+            </a:r>
+          </a:p>
+        </p:txBody>
+      </p:sp>
+      <p:sp>
+        <p:nvSpPr>
+          <p:cNvPr id="9" name="N2"/>
+          <p:cNvSpPr>
+            <a:spLocks noGrp="1"/>
+          </p:cNvSpPr>
+          <p:nvPr>
+            <p:ph type="body" idx="7"/>
           </p:nvPr>
         </p:nvSpPr>
         <p:spPr/>
@@ -12365,40 +12556,134 @@
             <a:pPr/>
             <a:r>
               <a:rPr lang="th-TH" dirty="0"/>
-              <a:t>คีย์จุดเดียว ระบบกระจายต่อให้อัตโนมัติ</a:t>
-            </a:r>
-          </a:p>
-          <a:p>
-            <a:pPr lvl="1"/>
+              <a:t>03</a:t>
+            </a:r>
+          </a:p>
+        </p:txBody>
+      </p:sp>
+      <p:sp>
+        <p:nvSpPr>
+          <p:cNvPr id="10" name="H2"/>
+          <p:cNvSpPr>
+            <a:spLocks noGrp="1"/>
+          </p:cNvSpPr>
+          <p:nvPr>
+            <p:ph type="body" idx="8"/>
+          </p:nvPr>
+        </p:nvSpPr>
+        <p:spPr/>
+        <p:txBody>
+          <a:bodyPr/>
+          <a:lstStyle/>
+          <a:p>
+            <a:pPr/>
             <a:r>
               <a:rPr lang="th-TH" dirty="0"/>
-              <a:t>ลดเวลาคีย์ต่อใบจาก 4 นาที เหลือ 40 วินาที</a:t>
-            </a:r>
-          </a:p>
+              <a:t>ปิดงบเร็วขึ้น</a:t>
+            </a:r>
+          </a:p>
+        </p:txBody>
+      </p:sp>
+      <p:sp>
+        <p:nvSpPr>
+          <p:cNvPr id="11" name="B2"/>
+          <p:cNvSpPr>
+            <a:spLocks noGrp="1"/>
+          </p:cNvSpPr>
+          <p:nvPr>
+            <p:ph type="body" idx="9"/>
+          </p:nvPr>
+        </p:nvSpPr>
+        <p:spPr/>
+        <p:txBody>
+          <a:bodyPr/>
+          <a:lstStyle/>
           <a:p>
             <a:pPr/>
             <a:r>
               <a:rPr lang="th-TH" dirty="0"/>
-              <a:t>ปิดงบภายใน 2 วันทำการ</a:t>
-            </a:r>
-          </a:p>
+              <a:t>กระทบยอดอัตโนมัติรายวัน ไม่ต้องรอสิ้นเดือน</a:t>
+            </a:r>
+          </a:p>
+        </p:txBody>
+      </p:sp>
+      <p:sp>
+        <p:nvSpPr>
+          <p:cNvPr id="12" name="N3"/>
+          <p:cNvSpPr>
+            <a:spLocks noGrp="1"/>
+          </p:cNvSpPr>
+          <p:nvPr>
+            <p:ph type="body" idx="10"/>
+          </p:nvPr>
+        </p:nvSpPr>
+        <p:spPr/>
+        <p:txBody>
+          <a:bodyPr/>
+          <a:lstStyle/>
           <a:p>
             <a:pPr/>
             <a:r>
               <a:rPr lang="th-TH" dirty="0"/>
-              <a:t>บันทึกทุกการแก้ไขพร้อมผู้ทำและเวลา</a:t>
-            </a:r>
-          </a:p>
-        </p:txBody>
-      </p:sp>
-      <p:sp>
-        <p:nvSpPr>
-          <p:cNvPr id="7" name="TkL"/>
-          <p:cNvSpPr>
-            <a:spLocks noGrp="1"/>
-          </p:cNvSpPr>
-          <p:nvPr>
-            <p:ph type="body" idx="5"/>
+              <a:t>04</a:t>
+            </a:r>
+          </a:p>
+        </p:txBody>
+      </p:sp>
+      <p:sp>
+        <p:nvSpPr>
+          <p:cNvPr id="13" name="H3"/>
+          <p:cNvSpPr>
+            <a:spLocks noGrp="1"/>
+          </p:cNvSpPr>
+          <p:nvPr>
+            <p:ph type="body" idx="11"/>
+          </p:nvPr>
+        </p:nvSpPr>
+        <p:spPr/>
+        <p:txBody>
+          <a:bodyPr/>
+          <a:lstStyle/>
+          <a:p>
+            <a:pPr/>
+            <a:r>
+              <a:rPr lang="th-TH" dirty="0"/>
+              <a:t>ขยายต่อได้</a:t>
+            </a:r>
+          </a:p>
+        </p:txBody>
+      </p:sp>
+      <p:sp>
+        <p:nvSpPr>
+          <p:cNvPr id="14" name="B3"/>
+          <p:cNvSpPr>
+            <a:spLocks noGrp="1"/>
+          </p:cNvSpPr>
+          <p:nvPr>
+            <p:ph type="body" idx="12"/>
+          </p:nvPr>
+        </p:nvSpPr>
+        <p:spPr/>
+        <p:txBody>
+          <a:bodyPr/>
+          <a:lstStyle/>
+          <a:p>
+            <a:pPr/>
+            <a:r>
+              <a:rPr lang="th-TH" dirty="0"/>
+              <a:t>เพิ่มกระบวนการใหม่โดยไม่แก้ของเดิม</a:t>
+            </a:r>
+          </a:p>
+        </p:txBody>
+      </p:sp>
+      <p:sp>
+        <p:nvSpPr>
+          <p:cNvPr id="15" name="BL"/>
+          <p:cNvSpPr>
+            <a:spLocks noGrp="1"/>
+          </p:cNvSpPr>
+          <p:nvPr>
+            <p:ph type="body" idx="13"/>
           </p:nvPr>
         </p:nvSpPr>
         <p:spPr/>
@@ -12416,12 +12701,12 @@
       </p:sp>
       <p:sp>
         <p:nvSpPr>
-          <p:cNvPr id="8" name="TkC"/>
-          <p:cNvSpPr>
-            <a:spLocks noGrp="1"/>
-          </p:cNvSpPr>
-          <p:nvPr>
-            <p:ph type="body" idx="6"/>
+          <p:cNvPr id="16" name="BC"/>
+          <p:cNvSpPr>
+            <a:spLocks noGrp="1"/>
+          </p:cNvSpPr>
+          <p:nvPr>
+            <p:ph type="body" idx="14"/>
           </p:nvPr>
         </p:nvSpPr>
         <p:spPr/>
@@ -12432,7 +12717,7 @@
             <a:pPr/>
             <a:r>
               <a:rPr lang="th-TH" dirty="0"/>
-              <a:t>ปัญหาหลักคือการคีย์ซ้ำ ไม่ใช่จำนวนเอกสาร</a:t>
+              <a:t>ทั้งสี่ข้อมาจากการแก้จุดเดียวกัน คือรวมจุดรับเอกสาร</a:t>
             </a:r>
           </a:p>
         </p:txBody>
@@ -12480,14 +12765,14 @@
             <a:pPr/>
             <a:r>
               <a:rPr lang="th-TH" dirty="0"/>
-              <a:t>สี่ผลลัพธ์ที่ข้อเสนอนี้ให้</a:t>
-            </a:r>
-          </a:p>
-        </p:txBody>
-      </p:sp>
-      <p:sp>
-        <p:nvSpPr>
-          <p:cNvPr id="3" name="N0"/>
+              <a:t>กระบวนการที่เสนอ</a:t>
+            </a:r>
+          </a:p>
+        </p:txBody>
+      </p:sp>
+      <p:sp>
+        <p:nvSpPr>
+          <p:cNvPr id="3" name="Sub"/>
           <p:cNvSpPr>
             <a:spLocks noGrp="1"/>
           </p:cNvSpPr>
@@ -12503,14 +12788,14 @@
             <a:pPr/>
             <a:r>
               <a:rPr lang="th-TH" dirty="0"/>
-              <a:t>01</a:t>
-            </a:r>
-          </a:p>
-        </p:txBody>
-      </p:sp>
-      <p:sp>
-        <p:nvSpPr>
-          <p:cNvPr id="4" name="H0"/>
+              <a:t>ห้าขั้นตอน ทำงานต่อเนื่องโดยไม่ต้องคีย์ซ้ำ</a:t>
+            </a:r>
+          </a:p>
+        </p:txBody>
+      </p:sp>
+      <p:sp>
+        <p:nvSpPr>
+          <p:cNvPr id="4" name="C0"/>
           <p:cNvSpPr>
             <a:spLocks noGrp="1"/>
           </p:cNvSpPr>
@@ -12526,14 +12811,14 @@
             <a:pPr/>
             <a:r>
               <a:rPr lang="th-TH" dirty="0"/>
-              <a:t>ลดงานคีย์ซ้ำ</a:t>
-            </a:r>
-          </a:p>
-        </p:txBody>
-      </p:sp>
-      <p:sp>
-        <p:nvSpPr>
-          <p:cNvPr id="5" name="B0"/>
+              <a:t>1</a:t>
+            </a:r>
+          </a:p>
+        </p:txBody>
+      </p:sp>
+      <p:sp>
+        <p:nvSpPr>
+          <p:cNvPr id="5" name="H0"/>
           <p:cNvSpPr>
             <a:spLocks noGrp="1"/>
           </p:cNvSpPr>
@@ -12549,14 +12834,14 @@
             <a:pPr/>
             <a:r>
               <a:rPr lang="th-TH" dirty="0"/>
-              <a:t>รับเอกสารเข้าระบบเดียว แล้วกระจายต่อให้ทุกปลายทางอัตโนมัติ</a:t>
-            </a:r>
-          </a:p>
-        </p:txBody>
-      </p:sp>
-      <p:sp>
-        <p:nvSpPr>
-          <p:cNvPr id="6" name="N1"/>
+              <a:t>รับเอกสาร</a:t>
+            </a:r>
+          </a:p>
+        </p:txBody>
+      </p:sp>
+      <p:sp>
+        <p:nvSpPr>
+          <p:cNvPr id="6" name="B0"/>
           <p:cNvSpPr>
             <a:spLocks noGrp="1"/>
           </p:cNvSpPr>
@@ -12572,14 +12857,14 @@
             <a:pPr/>
             <a:r>
               <a:rPr lang="th-TH" dirty="0"/>
-              <a:t>02</a:t>
-            </a:r>
-          </a:p>
-        </p:txBody>
-      </p:sp>
-      <p:sp>
-        <p:nvSpPr>
-          <p:cNvPr id="7" name="H1"/>
+              <a:t>สแกนหรือรับไฟล์เข้าคิวกลาง</a:t>
+            </a:r>
+          </a:p>
+        </p:txBody>
+      </p:sp>
+      <p:sp>
+        <p:nvSpPr>
+          <p:cNvPr id="7" name="C1"/>
           <p:cNvSpPr>
             <a:spLocks noGrp="1"/>
           </p:cNvSpPr>
@@ -12595,14 +12880,14 @@
             <a:pPr/>
             <a:r>
               <a:rPr lang="th-TH" dirty="0"/>
-              <a:t>ตรวจสอบได้</a:t>
-            </a:r>
-          </a:p>
-        </p:txBody>
-      </p:sp>
-      <p:sp>
-        <p:nvSpPr>
-          <p:cNvPr id="8" name="B1"/>
+              <a:t>2</a:t>
+            </a:r>
+          </a:p>
+        </p:txBody>
+      </p:sp>
+      <p:sp>
+        <p:nvSpPr>
+          <p:cNvPr id="8" name="H1"/>
           <p:cNvSpPr>
             <a:spLocks noGrp="1"/>
           </p:cNvSpPr>
@@ -12618,14 +12903,14 @@
             <a:pPr/>
             <a:r>
               <a:rPr lang="th-TH" dirty="0"/>
-              <a:t>ทุกรายการมี audit trail ผู้ทำ เวลา และค่าก่อนหลัง</a:t>
-            </a:r>
-          </a:p>
-        </p:txBody>
-      </p:sp>
-      <p:sp>
-        <p:nvSpPr>
-          <p:cNvPr id="9" name="N2"/>
+              <a:t>อ่านข้อมูล</a:t>
+            </a:r>
+          </a:p>
+        </p:txBody>
+      </p:sp>
+      <p:sp>
+        <p:nvSpPr>
+          <p:cNvPr id="9" name="B1"/>
           <p:cNvSpPr>
             <a:spLocks noGrp="1"/>
           </p:cNvSpPr>
@@ -12641,14 +12926,14 @@
             <a:pPr/>
             <a:r>
               <a:rPr lang="th-TH" dirty="0"/>
-              <a:t>03</a:t>
-            </a:r>
-          </a:p>
-        </p:txBody>
-      </p:sp>
-      <p:sp>
-        <p:nvSpPr>
-          <p:cNvPr id="10" name="H2"/>
+              <a:t>ดึงฟิลด์สำคัญ ตรวจกับต้นทาง</a:t>
+            </a:r>
+          </a:p>
+        </p:txBody>
+      </p:sp>
+      <p:sp>
+        <p:nvSpPr>
+          <p:cNvPr id="10" name="C2"/>
           <p:cNvSpPr>
             <a:spLocks noGrp="1"/>
           </p:cNvSpPr>
@@ -12664,14 +12949,14 @@
             <a:pPr/>
             <a:r>
               <a:rPr lang="th-TH" dirty="0"/>
-              <a:t>ปิดงบเร็วขึ้น</a:t>
-            </a:r>
-          </a:p>
-        </p:txBody>
-      </p:sp>
-      <p:sp>
-        <p:nvSpPr>
-          <p:cNvPr id="11" name="B2"/>
+              <a:t>3</a:t>
+            </a:r>
+          </a:p>
+        </p:txBody>
+      </p:sp>
+      <p:sp>
+        <p:nvSpPr>
+          <p:cNvPr id="11" name="H2"/>
           <p:cNvSpPr>
             <a:spLocks noGrp="1"/>
           </p:cNvSpPr>
@@ -12687,14 +12972,14 @@
             <a:pPr/>
             <a:r>
               <a:rPr lang="th-TH" dirty="0"/>
-              <a:t>กระทบยอดอัตโนมัติรายวัน ไม่ต้องรอสิ้นเดือน</a:t>
-            </a:r>
-          </a:p>
-        </p:txBody>
-      </p:sp>
-      <p:sp>
-        <p:nvSpPr>
-          <p:cNvPr id="12" name="N3"/>
+              <a:t>ตรวจสอบ</a:t>
+            </a:r>
+          </a:p>
+        </p:txBody>
+      </p:sp>
+      <p:sp>
+        <p:nvSpPr>
+          <p:cNvPr id="12" name="B2"/>
           <p:cNvSpPr>
             <a:spLocks noGrp="1"/>
           </p:cNvSpPr>
@@ -12710,14 +12995,14 @@
             <a:pPr/>
             <a:r>
               <a:rPr lang="th-TH" dirty="0"/>
-              <a:t>04</a:t>
-            </a:r>
-          </a:p>
-        </p:txBody>
-      </p:sp>
-      <p:sp>
-        <p:nvSpPr>
-          <p:cNvPr id="13" name="H3"/>
+              <a:t>กฎธุรกิจและวงเงินอนุมัติ</a:t>
+            </a:r>
+          </a:p>
+        </p:txBody>
+      </p:sp>
+      <p:sp>
+        <p:nvSpPr>
+          <p:cNvPr id="13" name="C3"/>
           <p:cNvSpPr>
             <a:spLocks noGrp="1"/>
           </p:cNvSpPr>
@@ -12733,14 +13018,14 @@
             <a:pPr/>
             <a:r>
               <a:rPr lang="th-TH" dirty="0"/>
-              <a:t>ขยายต่อได้</a:t>
-            </a:r>
-          </a:p>
-        </p:txBody>
-      </p:sp>
-      <p:sp>
-        <p:nvSpPr>
-          <p:cNvPr id="14" name="B3"/>
+              <a:t>4</a:t>
+            </a:r>
+          </a:p>
+        </p:txBody>
+      </p:sp>
+      <p:sp>
+        <p:nvSpPr>
+          <p:cNvPr id="14" name="H3"/>
           <p:cNvSpPr>
             <a:spLocks noGrp="1"/>
           </p:cNvSpPr>
@@ -12756,14 +13041,14 @@
             <a:pPr/>
             <a:r>
               <a:rPr lang="th-TH" dirty="0"/>
-              <a:t>เพิ่มกระบวนการใหม่โดยไม่แก้ของเดิม</a:t>
-            </a:r>
-          </a:p>
-        </p:txBody>
-      </p:sp>
-      <p:sp>
-        <p:nvSpPr>
-          <p:cNvPr id="15" name="BL"/>
+              <a:t>บันทึก</a:t>
+            </a:r>
+          </a:p>
+        </p:txBody>
+      </p:sp>
+      <p:sp>
+        <p:nvSpPr>
+          <p:cNvPr id="15" name="B3"/>
           <p:cNvSpPr>
             <a:spLocks noGrp="1"/>
           </p:cNvSpPr>
@@ -12779,14 +13064,14 @@
             <a:pPr/>
             <a:r>
               <a:rPr lang="th-TH" dirty="0"/>
-              <a:t>สรุป</a:t>
-            </a:r>
-          </a:p>
-        </p:txBody>
-      </p:sp>
-      <p:sp>
-        <p:nvSpPr>
-          <p:cNvPr id="16" name="BC"/>
+              <a:t>ลงระบบบัญชีพร้อม audit trail</a:t>
+            </a:r>
+          </a:p>
+        </p:txBody>
+      </p:sp>
+      <p:sp>
+        <p:nvSpPr>
+          <p:cNvPr id="16" name="C4"/>
           <p:cNvSpPr>
             <a:spLocks noGrp="1"/>
           </p:cNvSpPr>
@@ -12802,7 +13087,99 @@
             <a:pPr/>
             <a:r>
               <a:rPr lang="th-TH" dirty="0"/>
-              <a:t>ทั้งสี่ข้อมาจากการแก้จุดเดียวกัน คือรวมจุดรับเอกสาร</a:t>
+              <a:t>5</a:t>
+            </a:r>
+          </a:p>
+        </p:txBody>
+      </p:sp>
+      <p:sp>
+        <p:nvSpPr>
+          <p:cNvPr id="17" name="H4"/>
+          <p:cNvSpPr>
+            <a:spLocks noGrp="1"/>
+          </p:cNvSpPr>
+          <p:nvPr>
+            <p:ph type="body" idx="15"/>
+          </p:nvPr>
+        </p:nvSpPr>
+        <p:spPr/>
+        <p:txBody>
+          <a:bodyPr/>
+          <a:lstStyle/>
+          <a:p>
+            <a:pPr/>
+            <a:r>
+              <a:rPr lang="th-TH" dirty="0"/>
+              <a:t>กระทบยอด</a:t>
+            </a:r>
+          </a:p>
+        </p:txBody>
+      </p:sp>
+      <p:sp>
+        <p:nvSpPr>
+          <p:cNvPr id="18" name="B4"/>
+          <p:cNvSpPr>
+            <a:spLocks noGrp="1"/>
+          </p:cNvSpPr>
+          <p:nvPr>
+            <p:ph type="body" idx="16"/>
+          </p:nvPr>
+        </p:nvSpPr>
+        <p:spPr/>
+        <p:txBody>
+          <a:bodyPr/>
+          <a:lstStyle/>
+          <a:p>
+            <a:pPr/>
+            <a:r>
+              <a:rPr lang="th-TH" dirty="0"/>
+              <a:t>จับคู่อัตโนมัติ ส่งรายงาน</a:t>
+            </a:r>
+          </a:p>
+        </p:txBody>
+      </p:sp>
+      <p:sp>
+        <p:nvSpPr>
+          <p:cNvPr id="19" name="RL"/>
+          <p:cNvSpPr>
+            <a:spLocks noGrp="1"/>
+          </p:cNvSpPr>
+          <p:nvPr>
+            <p:ph type="body" idx="17"/>
+          </p:nvPr>
+        </p:nvSpPr>
+        <p:spPr/>
+        <p:txBody>
+          <a:bodyPr/>
+          <a:lstStyle/>
+          <a:p>
+            <a:pPr/>
+            <a:r>
+              <a:rPr lang="th-TH" dirty="0"/>
+              <a:t>ผลลัพธ์</a:t>
+            </a:r>
+          </a:p>
+        </p:txBody>
+      </p:sp>
+      <p:sp>
+        <p:nvSpPr>
+          <p:cNvPr id="20" name="RC"/>
+          <p:cNvSpPr>
+            <a:spLocks noGrp="1"/>
+          </p:cNvSpPr>
+          <p:nvPr>
+            <p:ph type="body" idx="18"/>
+          </p:nvPr>
+        </p:nvSpPr>
+        <p:spPr/>
+        <p:txBody>
+          <a:bodyPr/>
+          <a:lstStyle/>
+          <a:p>
+            <a:pPr/>
+            <a:r>
+              <a:rPr lang="th-TH" dirty="0"/>
+              <a:t>เอกสารหนึ่งใบผ่านครบห้าขั้นโดยไม่มีการคีย์ซ้ำเลย</a:t>
             </a:r>
           </a:p>
         </p:txBody>
@@ -12850,7 +13227,7 @@
             <a:pPr/>
             <a:r>
               <a:rPr lang="th-TH" dirty="0"/>
-              <a:t>กระบวนการที่เสนอ</a:t>
+              <a:t>ภาพรวมสถาปัตยกรรมระบบ</a:t>
             </a:r>
           </a:p>
         </p:txBody>
@@ -12873,14 +13250,14 @@
             <a:pPr/>
             <a:r>
               <a:rPr lang="th-TH" dirty="0"/>
-              <a:t>ห้าขั้นตอน ทำงานต่อเนื่องโดยไม่ต้องคีย์ซ้ำ</a:t>
-            </a:r>
-          </a:p>
-        </p:txBody>
-      </p:sp>
-      <p:sp>
-        <p:nvSpPr>
-          <p:cNvPr id="4" name="C0"/>
+              <a:t>ตัวอย่างการใช้ชุดชิ้นส่วนมาตรฐานตาม v2 §14</a:t>
+            </a:r>
+          </a:p>
+        </p:txBody>
+      </p:sp>
+      <p:sp>
+        <p:nvSpPr>
+          <p:cNvPr id="4" name="Leg"/>
           <p:cNvSpPr>
             <a:spLocks noGrp="1"/>
           </p:cNvSpPr>
@@ -12896,375 +13273,410 @@
             <a:pPr/>
             <a:r>
               <a:rPr lang="th-TH" dirty="0"/>
-              <a:t>1</a:t>
-            </a:r>
-          </a:p>
-        </p:txBody>
-      </p:sp>
-      <p:sp>
-        <p:nvSpPr>
-          <p:cNvPr id="5" name="H0"/>
-          <p:cNvSpPr>
-            <a:spLocks noGrp="1"/>
-          </p:cNvSpPr>
-          <p:nvPr>
-            <p:ph type="body" idx="3"/>
-          </p:nvPr>
-        </p:nvSpPr>
-        <p:spPr/>
+              <a:t>กล่องทึบ = ระบบที่มีอยู่  ·  กล่องมีสีหมวด = ส่วนที่เพิ่ม  ·  เส้นทึบ = ข้อมูลไหลอัตโนมัติ</a:t>
+            </a:r>
+          </a:p>
+        </p:txBody>
+      </p:sp>
+      <p:sp>
+        <p:nvSpPr>
+          <p:cNvPr id="10" name="Group Frame"/>
+          <p:cNvSpPr/>
+          <p:nvPr/>
+        </p:nvSpPr>
+        <p:spPr>
+          <a:xfrm>
+            <a:off x="3657600" y="2560320"/>
+            <a:ext cx="5074920" cy="1554480"/>
+          </a:xfrm>
+          <a:prstGeom prst="rect">
+            <a:avLst/>
+          </a:prstGeom>
+          <a:noFill/>
+          <a:ln w="12700">
+            <a:solidFill>
+              <a:srgbClr val="E5E5E5"/>
+            </a:solidFill>
+            <a:prstDash val="dash"/>
+          </a:ln>
+        </p:spPr>
         <p:txBody>
           <a:bodyPr/>
           <a:lstStyle/>
           <a:p>
-            <a:pPr/>
-            <a:r>
-              <a:rPr lang="th-TH" dirty="0"/>
-              <a:t>รับเอกสาร</a:t>
-            </a:r>
-          </a:p>
-        </p:txBody>
-      </p:sp>
-      <p:sp>
-        <p:nvSpPr>
-          <p:cNvPr id="6" name="B0"/>
-          <p:cNvSpPr>
-            <a:spLocks noGrp="1"/>
-          </p:cNvSpPr>
-          <p:nvPr>
-            <p:ph type="body" idx="4"/>
-          </p:nvPr>
-        </p:nvSpPr>
-        <p:spPr/>
+            <a:endParaRPr lang="th-TH"/>
+          </a:p>
+        </p:txBody>
+      </p:sp>
+      <p:sp>
+        <p:nvSpPr>
+          <p:cNvPr id="11" name="Group Label"/>
+          <p:cNvSpPr/>
+          <p:nvPr/>
+        </p:nvSpPr>
+        <p:spPr>
+          <a:xfrm>
+            <a:off x="3749040" y="2606040"/>
+            <a:ext cx="3200400" cy="274320"/>
+          </a:xfrm>
+          <a:prstGeom prst="rect">
+            <a:avLst/>
+          </a:prstGeom>
+          <a:noFill/>
+          <a:ln>
+            <a:noFill/>
+          </a:ln>
+        </p:spPr>
+        <p:txBody>
+          <a:bodyPr wrap="square" anchor="ctr" lIns="0" tIns="0" rIns="0" bIns="0" rtlCol="0"/>
+          <a:lstStyle/>
+          <a:p>
+            <a:pPr algn="l" marL="0" indent="0">
+              <a:lnSpc>
+                <a:spcPct val="100000"/>
+              </a:lnSpc>
+              <a:buNone/>
+            </a:pPr>
+            <a:r>
+              <a:rPr lang="th-TH" sz="1200" b="1" spc="120" dirty="0">
+                <a:solidFill>
+                  <a:srgbClr val="A4A4A4"/>
+                </a:solidFill>
+                <a:latin typeface="+mn-lt"/>
+                <a:ea typeface="+mn-ea"/>
+                <a:cs typeface="+mn-cs"/>
+              </a:rPr>
+              <a:t>ส่วนที่เพิ่มใหม่</a:t>
+            </a:r>
+          </a:p>
+        </p:txBody>
+      </p:sp>
+      <p:sp>
+        <p:nvSpPr>
+          <p:cNvPr id="12" name="Box 1"/>
+          <p:cNvSpPr/>
+          <p:nvPr/>
+        </p:nvSpPr>
+        <p:spPr>
+          <a:xfrm>
+            <a:off x="1143000" y="3017520"/>
+            <a:ext cx="2011680" cy="548640"/>
+          </a:xfrm>
+          <a:prstGeom prst="rect">
+            <a:avLst/>
+          </a:prstGeom>
+          <a:solidFill>
+            <a:srgbClr val="E8F6F5"/>
+          </a:solidFill>
+          <a:ln w="12700">
+            <a:solidFill>
+              <a:srgbClr val="216B7F"/>
+            </a:solidFill>
+          </a:ln>
+        </p:spPr>
+        <p:txBody>
+          <a:bodyPr wrap="square" anchor="ctr" lIns="0" tIns="0" rIns="0" bIns="0" rtlCol="0"/>
+          <a:lstStyle/>
+          <a:p>
+            <a:pPr algn="ctr" marL="0" indent="0">
+              <a:lnSpc>
+                <a:spcPct val="110000"/>
+              </a:lnSpc>
+              <a:buNone/>
+            </a:pPr>
+            <a:r>
+              <a:rPr lang="th-TH" sz="1200" dirty="0">
+                <a:solidFill>
+                  <a:srgbClr val="333333"/>
+                </a:solidFill>
+                <a:latin typeface="+mn-lt"/>
+                <a:ea typeface="+mn-ea"/>
+                <a:cs typeface="+mn-cs"/>
+              </a:rPr>
+              <a:t>ระบบ ERP ปัจจุบัน</a:t>
+            </a:r>
+          </a:p>
+        </p:txBody>
+      </p:sp>
+      <p:sp>
+        <p:nvSpPr>
+          <p:cNvPr id="13" name="Box 2"/>
+          <p:cNvSpPr/>
+          <p:nvPr/>
+        </p:nvSpPr>
+        <p:spPr>
+          <a:xfrm>
+            <a:off x="3840480" y="3017520"/>
+            <a:ext cx="2011680" cy="548640"/>
+          </a:xfrm>
+          <a:prstGeom prst="rect">
+            <a:avLst/>
+          </a:prstGeom>
+          <a:solidFill>
+            <a:srgbClr val="23436D">
+              <a:alpha val="15000"/>
+            </a:srgbClr>
+          </a:solidFill>
+          <a:ln w="12700">
+            <a:solidFill>
+              <a:srgbClr val="23436D"/>
+            </a:solidFill>
+          </a:ln>
+        </p:spPr>
+        <p:txBody>
+          <a:bodyPr wrap="square" anchor="ctr" lIns="0" tIns="0" rIns="0" bIns="0" rtlCol="0"/>
+          <a:lstStyle/>
+          <a:p>
+            <a:pPr algn="ctr" marL="0" indent="0">
+              <a:lnSpc>
+                <a:spcPct val="110000"/>
+              </a:lnSpc>
+              <a:buNone/>
+            </a:pPr>
+            <a:r>
+              <a:rPr lang="th-TH" sz="1200" dirty="0">
+                <a:solidFill>
+                  <a:srgbClr val="333333"/>
+                </a:solidFill>
+                <a:latin typeface="+mn-lt"/>
+                <a:ea typeface="+mn-ea"/>
+                <a:cs typeface="+mn-cs"/>
+              </a:rPr>
+              <a:t>คิวเอกสารกลาง</a:t>
+            </a:r>
+          </a:p>
+        </p:txBody>
+      </p:sp>
+      <p:sp>
+        <p:nvSpPr>
+          <p:cNvPr id="14" name="Box 3"/>
+          <p:cNvSpPr/>
+          <p:nvPr/>
+        </p:nvSpPr>
+        <p:spPr>
+          <a:xfrm>
+            <a:off x="6537960" y="3017520"/>
+            <a:ext cx="2011680" cy="548640"/>
+          </a:xfrm>
+          <a:prstGeom prst="rect">
+            <a:avLst/>
+          </a:prstGeom>
+          <a:solidFill>
+            <a:srgbClr val="216B7F">
+              <a:alpha val="15000"/>
+            </a:srgbClr>
+          </a:solidFill>
+          <a:ln w="12700">
+            <a:solidFill>
+              <a:srgbClr val="216B7F"/>
+            </a:solidFill>
+          </a:ln>
+        </p:spPr>
+        <p:txBody>
+          <a:bodyPr wrap="square" anchor="ctr" lIns="0" tIns="0" rIns="0" bIns="0" rtlCol="0"/>
+          <a:lstStyle/>
+          <a:p>
+            <a:pPr algn="ctr" marL="0" indent="0">
+              <a:lnSpc>
+                <a:spcPct val="110000"/>
+              </a:lnSpc>
+              <a:buNone/>
+            </a:pPr>
+            <a:r>
+              <a:rPr lang="th-TH" sz="1200" dirty="0">
+                <a:solidFill>
+                  <a:srgbClr val="333333"/>
+                </a:solidFill>
+                <a:latin typeface="+mn-lt"/>
+                <a:ea typeface="+mn-ea"/>
+                <a:cs typeface="+mn-cs"/>
+              </a:rPr>
+              <a:t>ตัวตรวจกฎธุรกิจ</a:t>
+            </a:r>
+          </a:p>
+        </p:txBody>
+      </p:sp>
+      <p:sp>
+        <p:nvSpPr>
+          <p:cNvPr id="15" name="Box 4"/>
+          <p:cNvSpPr/>
+          <p:nvPr/>
+        </p:nvSpPr>
+        <p:spPr>
+          <a:xfrm>
+            <a:off x="9235440" y="3017520"/>
+            <a:ext cx="2011680" cy="548640"/>
+          </a:xfrm>
+          <a:prstGeom prst="rect">
+            <a:avLst/>
+          </a:prstGeom>
+          <a:solidFill>
+            <a:srgbClr val="E8F6F5"/>
+          </a:solidFill>
+          <a:ln w="12700">
+            <a:solidFill>
+              <a:srgbClr val="216B7F"/>
+            </a:solidFill>
+          </a:ln>
+        </p:spPr>
+        <p:txBody>
+          <a:bodyPr wrap="square" anchor="ctr" lIns="0" tIns="0" rIns="0" bIns="0" rtlCol="0"/>
+          <a:lstStyle/>
+          <a:p>
+            <a:pPr algn="ctr" marL="0" indent="0">
+              <a:lnSpc>
+                <a:spcPct val="110000"/>
+              </a:lnSpc>
+              <a:buNone/>
+            </a:pPr>
+            <a:r>
+              <a:rPr lang="th-TH" sz="1200" dirty="0">
+                <a:solidFill>
+                  <a:srgbClr val="333333"/>
+                </a:solidFill>
+                <a:latin typeface="+mn-lt"/>
+                <a:ea typeface="+mn-ea"/>
+                <a:cs typeface="+mn-cs"/>
+              </a:rPr>
+              <a:t>ระบบบัญชี</a:t>
+            </a:r>
+          </a:p>
+        </p:txBody>
+      </p:sp>
+      <p:sp>
+        <p:nvSpPr>
+          <p:cNvPr id="16" name="Link 1"/>
+          <p:cNvSpPr/>
+          <p:nvPr/>
+        </p:nvSpPr>
+        <p:spPr>
+          <a:xfrm>
+            <a:off x="3268980" y="3291840"/>
+            <a:ext cx="457200" cy="0"/>
+          </a:xfrm>
+          <a:prstGeom prst="line">
+            <a:avLst/>
+          </a:prstGeom>
+          <a:noFill/>
+          <a:ln w="15875" cap="flat">
+            <a:solidFill>
+              <a:srgbClr val="216B7F"/>
+            </a:solidFill>
+            <a:prstDash val="solid"/>
+            <a:tailEnd type="triangle" w="med" len="med"/>
+          </a:ln>
+        </p:spPr>
         <p:txBody>
           <a:bodyPr/>
           <a:lstStyle/>
           <a:p>
-            <a:pPr/>
-            <a:r>
-              <a:rPr lang="th-TH" dirty="0"/>
-              <a:t>สแกนหรือรับไฟล์เข้าคิวกลาง</a:t>
-            </a:r>
-          </a:p>
-        </p:txBody>
-      </p:sp>
-      <p:sp>
-        <p:nvSpPr>
-          <p:cNvPr id="7" name="C1"/>
-          <p:cNvSpPr>
-            <a:spLocks noGrp="1"/>
-          </p:cNvSpPr>
-          <p:nvPr>
-            <p:ph type="body" idx="5"/>
-          </p:nvPr>
-        </p:nvSpPr>
-        <p:spPr/>
+            <a:endParaRPr lang="th-TH"/>
+          </a:p>
+        </p:txBody>
+      </p:sp>
+      <p:sp>
+        <p:nvSpPr>
+          <p:cNvPr id="17" name="Link 2"/>
+          <p:cNvSpPr/>
+          <p:nvPr/>
+        </p:nvSpPr>
+        <p:spPr>
+          <a:xfrm>
+            <a:off x="5966460" y="3291840"/>
+            <a:ext cx="457200" cy="0"/>
+          </a:xfrm>
+          <a:prstGeom prst="line">
+            <a:avLst/>
+          </a:prstGeom>
+          <a:noFill/>
+          <a:ln w="15875" cap="flat">
+            <a:solidFill>
+              <a:srgbClr val="216B7F"/>
+            </a:solidFill>
+            <a:prstDash val="solid"/>
+            <a:tailEnd type="triangle" w="med" len="med"/>
+          </a:ln>
+        </p:spPr>
         <p:txBody>
           <a:bodyPr/>
           <a:lstStyle/>
           <a:p>
-            <a:pPr/>
-            <a:r>
-              <a:rPr lang="th-TH" dirty="0"/>
-              <a:t>2</a:t>
-            </a:r>
-          </a:p>
-        </p:txBody>
-      </p:sp>
-      <p:sp>
-        <p:nvSpPr>
-          <p:cNvPr id="8" name="H1"/>
-          <p:cNvSpPr>
-            <a:spLocks noGrp="1"/>
-          </p:cNvSpPr>
-          <p:nvPr>
-            <p:ph type="body" idx="6"/>
-          </p:nvPr>
-        </p:nvSpPr>
-        <p:spPr/>
+            <a:endParaRPr lang="th-TH"/>
+          </a:p>
+        </p:txBody>
+      </p:sp>
+      <p:sp>
+        <p:nvSpPr>
+          <p:cNvPr id="18" name="Link 3"/>
+          <p:cNvSpPr/>
+          <p:nvPr/>
+        </p:nvSpPr>
+        <p:spPr>
+          <a:xfrm>
+            <a:off x="8663940" y="3291840"/>
+            <a:ext cx="457200" cy="0"/>
+          </a:xfrm>
+          <a:prstGeom prst="line">
+            <a:avLst/>
+          </a:prstGeom>
+          <a:noFill/>
+          <a:ln w="15875" cap="flat">
+            <a:solidFill>
+              <a:srgbClr val="216B7F"/>
+            </a:solidFill>
+            <a:prstDash val="solid"/>
+            <a:tailEnd type="triangle" w="med" len="med"/>
+          </a:ln>
+        </p:spPr>
         <p:txBody>
           <a:bodyPr/>
           <a:lstStyle/>
           <a:p>
-            <a:pPr/>
-            <a:r>
-              <a:rPr lang="th-TH" dirty="0"/>
-              <a:t>อ่านข้อมูล</a:t>
-            </a:r>
-          </a:p>
-        </p:txBody>
-      </p:sp>
-      <p:sp>
-        <p:nvSpPr>
-          <p:cNvPr id="9" name="B1"/>
-          <p:cNvSpPr>
-            <a:spLocks noGrp="1"/>
-          </p:cNvSpPr>
-          <p:nvPr>
-            <p:ph type="body" idx="7"/>
-          </p:nvPr>
-        </p:nvSpPr>
-        <p:spPr/>
-        <p:txBody>
-          <a:bodyPr/>
-          <a:lstStyle/>
-          <a:p>
-            <a:pPr/>
-            <a:r>
-              <a:rPr lang="th-TH" dirty="0"/>
-              <a:t>ดึงฟิลด์สำคัญ ตรวจกับต้นทาง</a:t>
-            </a:r>
-          </a:p>
-        </p:txBody>
-      </p:sp>
-      <p:sp>
-        <p:nvSpPr>
-          <p:cNvPr id="10" name="C2"/>
-          <p:cNvSpPr>
-            <a:spLocks noGrp="1"/>
-          </p:cNvSpPr>
-          <p:nvPr>
-            <p:ph type="body" idx="8"/>
-          </p:nvPr>
-        </p:nvSpPr>
-        <p:spPr/>
-        <p:txBody>
-          <a:bodyPr/>
-          <a:lstStyle/>
-          <a:p>
-            <a:pPr/>
-            <a:r>
-              <a:rPr lang="th-TH" dirty="0"/>
-              <a:t>3</a:t>
-            </a:r>
-          </a:p>
-        </p:txBody>
-      </p:sp>
-      <p:sp>
-        <p:nvSpPr>
-          <p:cNvPr id="11" name="H2"/>
-          <p:cNvSpPr>
-            <a:spLocks noGrp="1"/>
-          </p:cNvSpPr>
-          <p:nvPr>
-            <p:ph type="body" idx="9"/>
-          </p:nvPr>
-        </p:nvSpPr>
-        <p:spPr/>
-        <p:txBody>
-          <a:bodyPr/>
-          <a:lstStyle/>
-          <a:p>
-            <a:pPr/>
-            <a:r>
-              <a:rPr lang="th-TH" dirty="0"/>
-              <a:t>ตรวจสอบ</a:t>
-            </a:r>
-          </a:p>
-        </p:txBody>
-      </p:sp>
-      <p:sp>
-        <p:nvSpPr>
-          <p:cNvPr id="12" name="B2"/>
-          <p:cNvSpPr>
-            <a:spLocks noGrp="1"/>
-          </p:cNvSpPr>
-          <p:nvPr>
-            <p:ph type="body" idx="10"/>
-          </p:nvPr>
-        </p:nvSpPr>
-        <p:spPr/>
-        <p:txBody>
-          <a:bodyPr/>
-          <a:lstStyle/>
-          <a:p>
-            <a:pPr/>
-            <a:r>
-              <a:rPr lang="th-TH" dirty="0"/>
-              <a:t>กฎธุรกิจและวงเงินอนุมัติ</a:t>
-            </a:r>
-          </a:p>
-        </p:txBody>
-      </p:sp>
-      <p:sp>
-        <p:nvSpPr>
-          <p:cNvPr id="13" name="C3"/>
-          <p:cNvSpPr>
-            <a:spLocks noGrp="1"/>
-          </p:cNvSpPr>
-          <p:nvPr>
-            <p:ph type="body" idx="11"/>
-          </p:nvPr>
-        </p:nvSpPr>
-        <p:spPr/>
-        <p:txBody>
-          <a:bodyPr/>
-          <a:lstStyle/>
-          <a:p>
-            <a:pPr/>
-            <a:r>
-              <a:rPr lang="th-TH" dirty="0"/>
-              <a:t>4</a:t>
-            </a:r>
-          </a:p>
-        </p:txBody>
-      </p:sp>
-      <p:sp>
-        <p:nvSpPr>
-          <p:cNvPr id="14" name="H3"/>
-          <p:cNvSpPr>
-            <a:spLocks noGrp="1"/>
-          </p:cNvSpPr>
-          <p:nvPr>
-            <p:ph type="body" idx="12"/>
-          </p:nvPr>
-        </p:nvSpPr>
-        <p:spPr/>
-        <p:txBody>
-          <a:bodyPr/>
-          <a:lstStyle/>
-          <a:p>
-            <a:pPr/>
-            <a:r>
-              <a:rPr lang="th-TH" dirty="0"/>
-              <a:t>บันทึก</a:t>
-            </a:r>
-          </a:p>
-        </p:txBody>
-      </p:sp>
-      <p:sp>
-        <p:nvSpPr>
-          <p:cNvPr id="15" name="B3"/>
-          <p:cNvSpPr>
-            <a:spLocks noGrp="1"/>
-          </p:cNvSpPr>
-          <p:nvPr>
-            <p:ph type="body" idx="13"/>
-          </p:nvPr>
-        </p:nvSpPr>
-        <p:spPr/>
-        <p:txBody>
-          <a:bodyPr/>
-          <a:lstStyle/>
-          <a:p>
-            <a:pPr/>
-            <a:r>
-              <a:rPr lang="th-TH" dirty="0"/>
-              <a:t>ลงระบบบัญชีพร้อม audit trail</a:t>
-            </a:r>
-          </a:p>
-        </p:txBody>
-      </p:sp>
-      <p:sp>
-        <p:nvSpPr>
-          <p:cNvPr id="16" name="C4"/>
-          <p:cNvSpPr>
-            <a:spLocks noGrp="1"/>
-          </p:cNvSpPr>
-          <p:nvPr>
-            <p:ph type="body" idx="14"/>
-          </p:nvPr>
-        </p:nvSpPr>
-        <p:spPr/>
-        <p:txBody>
-          <a:bodyPr/>
-          <a:lstStyle/>
-          <a:p>
-            <a:pPr/>
-            <a:r>
-              <a:rPr lang="th-TH" dirty="0"/>
-              <a:t>5</a:t>
-            </a:r>
-          </a:p>
-        </p:txBody>
-      </p:sp>
-      <p:sp>
-        <p:nvSpPr>
-          <p:cNvPr id="17" name="H4"/>
-          <p:cNvSpPr>
-            <a:spLocks noGrp="1"/>
-          </p:cNvSpPr>
-          <p:nvPr>
-            <p:ph type="body" idx="15"/>
-          </p:nvPr>
-        </p:nvSpPr>
-        <p:spPr/>
-        <p:txBody>
-          <a:bodyPr/>
-          <a:lstStyle/>
-          <a:p>
-            <a:pPr/>
-            <a:r>
-              <a:rPr lang="th-TH" dirty="0"/>
-              <a:t>กระทบยอด</a:t>
-            </a:r>
-          </a:p>
-        </p:txBody>
-      </p:sp>
-      <p:sp>
-        <p:nvSpPr>
-          <p:cNvPr id="18" name="B4"/>
-          <p:cNvSpPr>
-            <a:spLocks noGrp="1"/>
-          </p:cNvSpPr>
-          <p:nvPr>
-            <p:ph type="body" idx="16"/>
-          </p:nvPr>
-        </p:nvSpPr>
-        <p:spPr/>
-        <p:txBody>
-          <a:bodyPr/>
-          <a:lstStyle/>
-          <a:p>
-            <a:pPr/>
-            <a:r>
-              <a:rPr lang="th-TH" dirty="0"/>
-              <a:t>จับคู่อัตโนมัติ ส่งรายงาน</a:t>
-            </a:r>
-          </a:p>
-        </p:txBody>
-      </p:sp>
-      <p:sp>
-        <p:nvSpPr>
-          <p:cNvPr id="19" name="RL"/>
-          <p:cNvSpPr>
-            <a:spLocks noGrp="1"/>
-          </p:cNvSpPr>
-          <p:nvPr>
-            <p:ph type="body" idx="17"/>
-          </p:nvPr>
-        </p:nvSpPr>
-        <p:spPr/>
-        <p:txBody>
-          <a:bodyPr/>
-          <a:lstStyle/>
-          <a:p>
-            <a:pPr/>
-            <a:r>
-              <a:rPr lang="th-TH" dirty="0"/>
-              <a:t>ผลลัพธ์</a:t>
-            </a:r>
-          </a:p>
-        </p:txBody>
-      </p:sp>
-      <p:sp>
-        <p:nvSpPr>
-          <p:cNvPr id="20" name="RC"/>
-          <p:cNvSpPr>
-            <a:spLocks noGrp="1"/>
-          </p:cNvSpPr>
-          <p:nvPr>
-            <p:ph type="body" idx="18"/>
-          </p:nvPr>
-        </p:nvSpPr>
-        <p:spPr/>
-        <p:txBody>
-          <a:bodyPr/>
-          <a:lstStyle/>
-          <a:p>
-            <a:pPr/>
-            <a:r>
-              <a:rPr lang="th-TH" dirty="0"/>
-              <a:t>เอกสารหนึ่งใบผ่านครบห้าขั้นโดยไม่มีการคีย์ซ้ำเลย</a:t>
+            <a:endParaRPr lang="th-TH"/>
+          </a:p>
+        </p:txBody>
+      </p:sp>
+      <p:sp>
+        <p:nvSpPr>
+          <p:cNvPr id="19" name="Edge Label"/>
+          <p:cNvSpPr/>
+          <p:nvPr/>
+        </p:nvSpPr>
+        <p:spPr>
+          <a:xfrm>
+            <a:off x="5806440" y="2743200"/>
+            <a:ext cx="822960" cy="228600"/>
+          </a:xfrm>
+          <a:prstGeom prst="rect">
+            <a:avLst/>
+          </a:prstGeom>
+          <a:solidFill>
+            <a:srgbClr val="FFFFFF"/>
+          </a:solidFill>
+          <a:ln>
+            <a:noFill/>
+          </a:ln>
+        </p:spPr>
+        <p:txBody>
+          <a:bodyPr wrap="square" anchor="ctr" lIns="0" tIns="0" rIns="0" bIns="0" rtlCol="0"/>
+          <a:lstStyle/>
+          <a:p>
+            <a:pPr algn="ctr" marL="0" indent="0">
+              <a:lnSpc>
+                <a:spcPct val="100000"/>
+              </a:lnSpc>
+              <a:buNone/>
+            </a:pPr>
+            <a:r>
+              <a:rPr lang="th-TH" sz="1000" dirty="0">
+                <a:solidFill>
+                  <a:srgbClr val="A4A4A4"/>
+                </a:solidFill>
+                <a:latin typeface="+mn-lt"/>
+                <a:ea typeface="+mn-ea"/>
+                <a:cs typeface="+mn-cs"/>
+              </a:rPr>
+              <a:t>ผ่านกฎ</a:t>
             </a:r>
           </a:p>
         </p:txBody>
@@ -13296,7 +13708,30 @@
       </p:grpSpPr>
       <p:sp>
         <p:nvSpPr>
-          <p:cNvPr id="2" name="Title"/>
+          <p:cNvPr id="2" name="Num"/>
+          <p:cNvSpPr>
+            <a:spLocks noGrp="1"/>
+          </p:cNvSpPr>
+          <p:nvPr>
+            <p:ph type="body" idx="1"/>
+          </p:nvPr>
+        </p:nvSpPr>
+        <p:spPr/>
+        <p:txBody>
+          <a:bodyPr/>
+          <a:lstStyle/>
+          <a:p>
+            <a:pPr/>
+            <a:r>
+              <a:rPr lang="th-TH" dirty="0"/>
+              <a:t>02</a:t>
+            </a:r>
+          </a:p>
+        </p:txBody>
+      </p:sp>
+      <p:sp>
+        <p:nvSpPr>
+          <p:cNvPr id="3" name="Title"/>
           <p:cNvSpPr>
             <a:spLocks noGrp="1"/>
           </p:cNvSpPr>
@@ -13312,19 +13747,19 @@
             <a:pPr/>
             <a:r>
               <a:rPr lang="th-TH" dirty="0"/>
-              <a:t>ภาพรวมสถาปัตยกรรมระบบ</a:t>
-            </a:r>
-          </a:p>
-        </p:txBody>
-      </p:sp>
-      <p:sp>
-        <p:nvSpPr>
-          <p:cNvPr id="3" name="Sub"/>
-          <p:cNvSpPr>
-            <a:spLocks noGrp="1"/>
-          </p:cNvSpPr>
-          <p:nvPr>
-            <p:ph type="body" idx="1"/>
+              <a:t>หัวข้อนำเสนอ</a:t>
+            </a:r>
+          </a:p>
+        </p:txBody>
+      </p:sp>
+      <p:sp>
+        <p:nvSpPr>
+          <p:cNvPr id="4" name="List"/>
+          <p:cNvSpPr>
+            <a:spLocks noGrp="1"/>
+          </p:cNvSpPr>
+          <p:nvPr>
+            <p:ph type="body" idx="2"/>
           </p:nvPr>
         </p:nvSpPr>
         <p:spPr/>
@@ -13335,433 +13770,35 @@
             <a:pPr/>
             <a:r>
               <a:rPr lang="th-TH" dirty="0"/>
-              <a:t>ตัวอย่างการใช้ชุดชิ้นส่วนมาตรฐานตาม v2 §14</a:t>
-            </a:r>
-          </a:p>
-        </p:txBody>
-      </p:sp>
-      <p:sp>
-        <p:nvSpPr>
-          <p:cNvPr id="4" name="Leg"/>
-          <p:cNvSpPr>
-            <a:spLocks noGrp="1"/>
-          </p:cNvSpPr>
-          <p:nvPr>
-            <p:ph type="body" idx="2"/>
-          </p:nvPr>
-        </p:nvSpPr>
-        <p:spPr/>
-        <p:txBody>
-          <a:bodyPr/>
-          <a:lstStyle/>
+              <a:t>บริบทและปัญหาที่พบ</a:t>
+            </a:r>
+          </a:p>
           <a:p>
             <a:pPr/>
             <a:r>
               <a:rPr lang="th-TH" dirty="0"/>
-              <a:t>กล่องทึบ = ระบบที่มีอยู่  ·  กล่องมีสีหมวด = ส่วนที่เพิ่ม  ·  เส้นทึบ = ข้อมูลไหลอัตโนมัติ</a:t>
-            </a:r>
-          </a:p>
-        </p:txBody>
-      </p:sp>
-      <p:sp>
-        <p:nvSpPr>
-          <p:cNvPr id="10" name="Group Frame"/>
-          <p:cNvSpPr/>
-          <p:nvPr/>
-        </p:nvSpPr>
-        <p:spPr>
-          <a:xfrm>
-            <a:off x="3657600" y="2560320"/>
-            <a:ext cx="5074920" cy="1554480"/>
-          </a:xfrm>
-          <a:prstGeom prst="rect">
-            <a:avLst/>
-          </a:prstGeom>
-          <a:noFill/>
-          <a:ln w="12700">
-            <a:solidFill>
-              <a:srgbClr val="E5E5E5"/>
-            </a:solidFill>
-            <a:prstDash val="dash"/>
-          </a:ln>
-        </p:spPr>
-        <p:txBody>
-          <a:bodyPr/>
-          <a:lstStyle/>
-          <a:p>
-            <a:endParaRPr lang="th-TH"/>
-          </a:p>
-        </p:txBody>
-      </p:sp>
-      <p:sp>
-        <p:nvSpPr>
-          <p:cNvPr id="11" name="Group Label"/>
-          <p:cNvSpPr/>
-          <p:nvPr/>
-        </p:nvSpPr>
-        <p:spPr>
-          <a:xfrm>
-            <a:off x="3749040" y="2606040"/>
-            <a:ext cx="3200400" cy="274320"/>
-          </a:xfrm>
-          <a:prstGeom prst="rect">
-            <a:avLst/>
-          </a:prstGeom>
-          <a:noFill/>
-          <a:ln>
-            <a:noFill/>
-          </a:ln>
-        </p:spPr>
-        <p:txBody>
-          <a:bodyPr wrap="square" anchor="ctr" lIns="0" tIns="0" rIns="0" bIns="0" rtlCol="0"/>
-          <a:lstStyle/>
-          <a:p>
-            <a:pPr algn="l" marL="0" indent="0">
-              <a:lnSpc>
-                <a:spcPct val="100000"/>
-              </a:lnSpc>
-              <a:buNone/>
-            </a:pPr>
-            <a:r>
-              <a:rPr lang="th-TH" sz="1200" b="1" spc="120" dirty="0">
-                <a:solidFill>
-                  <a:srgbClr val="A4A4A4"/>
-                </a:solidFill>
-                <a:latin typeface="+mn-lt"/>
-                <a:ea typeface="+mn-ea"/>
-                <a:cs typeface="+mn-cs"/>
-              </a:rPr>
-              <a:t>ส่วนที่เพิ่มใหม่</a:t>
-            </a:r>
-          </a:p>
-        </p:txBody>
-      </p:sp>
-      <p:sp>
-        <p:nvSpPr>
-          <p:cNvPr id="12" name="Box 1"/>
-          <p:cNvSpPr/>
-          <p:nvPr/>
-        </p:nvSpPr>
-        <p:spPr>
-          <a:xfrm>
-            <a:off x="1143000" y="3017520"/>
-            <a:ext cx="2011680" cy="548640"/>
-          </a:xfrm>
-          <a:prstGeom prst="rect">
-            <a:avLst/>
-          </a:prstGeom>
-          <a:solidFill>
-            <a:srgbClr val="E8F6F5"/>
-          </a:solidFill>
-          <a:ln w="12700">
-            <a:solidFill>
-              <a:srgbClr val="216B7F"/>
-            </a:solidFill>
-          </a:ln>
-        </p:spPr>
-        <p:txBody>
-          <a:bodyPr wrap="square" anchor="ctr" lIns="0" tIns="0" rIns="0" bIns="0" rtlCol="0"/>
-          <a:lstStyle/>
-          <a:p>
-            <a:pPr algn="ctr" marL="0" indent="0">
-              <a:lnSpc>
-                <a:spcPct val="110000"/>
-              </a:lnSpc>
-              <a:buNone/>
-            </a:pPr>
-            <a:r>
-              <a:rPr lang="th-TH" sz="1200" dirty="0">
-                <a:solidFill>
-                  <a:srgbClr val="333333"/>
-                </a:solidFill>
-                <a:latin typeface="+mn-lt"/>
-                <a:ea typeface="+mn-ea"/>
-                <a:cs typeface="+mn-cs"/>
-              </a:rPr>
-              <a:t>ระบบ ERP ปัจจุบัน</a:t>
-            </a:r>
-          </a:p>
-        </p:txBody>
-      </p:sp>
-      <p:sp>
-        <p:nvSpPr>
-          <p:cNvPr id="13" name="Box 2"/>
-          <p:cNvSpPr/>
-          <p:nvPr/>
-        </p:nvSpPr>
-        <p:spPr>
-          <a:xfrm>
-            <a:off x="3840480" y="3017520"/>
-            <a:ext cx="2011680" cy="548640"/>
-          </a:xfrm>
-          <a:prstGeom prst="rect">
-            <a:avLst/>
-          </a:prstGeom>
-          <a:solidFill>
-            <a:srgbClr val="23436D">
-              <a:alpha val="15000"/>
-            </a:srgbClr>
-          </a:solidFill>
-          <a:ln w="12700">
-            <a:solidFill>
-              <a:srgbClr val="23436D"/>
-            </a:solidFill>
-          </a:ln>
-        </p:spPr>
-        <p:txBody>
-          <a:bodyPr wrap="square" anchor="ctr" lIns="0" tIns="0" rIns="0" bIns="0" rtlCol="0"/>
-          <a:lstStyle/>
-          <a:p>
-            <a:pPr algn="ctr" marL="0" indent="0">
-              <a:lnSpc>
-                <a:spcPct val="110000"/>
-              </a:lnSpc>
-              <a:buNone/>
-            </a:pPr>
-            <a:r>
-              <a:rPr lang="th-TH" sz="1200" dirty="0">
-                <a:solidFill>
-                  <a:srgbClr val="333333"/>
-                </a:solidFill>
-                <a:latin typeface="+mn-lt"/>
-                <a:ea typeface="+mn-ea"/>
-                <a:cs typeface="+mn-cs"/>
-              </a:rPr>
-              <a:t>คิวเอกสารกลาง</a:t>
-            </a:r>
-          </a:p>
-        </p:txBody>
-      </p:sp>
-      <p:sp>
-        <p:nvSpPr>
-          <p:cNvPr id="14" name="Box 3"/>
-          <p:cNvSpPr/>
-          <p:nvPr/>
-        </p:nvSpPr>
-        <p:spPr>
-          <a:xfrm>
-            <a:off x="6537960" y="3017520"/>
-            <a:ext cx="2011680" cy="548640"/>
-          </a:xfrm>
-          <a:prstGeom prst="rect">
-            <a:avLst/>
-          </a:prstGeom>
-          <a:solidFill>
-            <a:srgbClr val="216B7F">
-              <a:alpha val="15000"/>
-            </a:srgbClr>
-          </a:solidFill>
-          <a:ln w="12700">
-            <a:solidFill>
-              <a:srgbClr val="216B7F"/>
-            </a:solidFill>
-          </a:ln>
-        </p:spPr>
-        <p:txBody>
-          <a:bodyPr wrap="square" anchor="ctr" lIns="0" tIns="0" rIns="0" bIns="0" rtlCol="0"/>
-          <a:lstStyle/>
-          <a:p>
-            <a:pPr algn="ctr" marL="0" indent="0">
-              <a:lnSpc>
-                <a:spcPct val="110000"/>
-              </a:lnSpc>
-              <a:buNone/>
-            </a:pPr>
-            <a:r>
-              <a:rPr lang="th-TH" sz="1200" dirty="0">
-                <a:solidFill>
-                  <a:srgbClr val="333333"/>
-                </a:solidFill>
-                <a:latin typeface="+mn-lt"/>
-                <a:ea typeface="+mn-ea"/>
-                <a:cs typeface="+mn-cs"/>
-              </a:rPr>
-              <a:t>ตัวตรวจกฎธุรกิจ</a:t>
-            </a:r>
-          </a:p>
-        </p:txBody>
-      </p:sp>
-      <p:sp>
-        <p:nvSpPr>
-          <p:cNvPr id="15" name="Box 4"/>
-          <p:cNvSpPr/>
-          <p:nvPr/>
-        </p:nvSpPr>
-        <p:spPr>
-          <a:xfrm>
-            <a:off x="9235440" y="3017520"/>
-            <a:ext cx="2011680" cy="548640"/>
-          </a:xfrm>
-          <a:prstGeom prst="rect">
-            <a:avLst/>
-          </a:prstGeom>
-          <a:solidFill>
-            <a:srgbClr val="E8F6F5"/>
-          </a:solidFill>
-          <a:ln w="12700">
-            <a:solidFill>
-              <a:srgbClr val="216B7F"/>
-            </a:solidFill>
-          </a:ln>
-        </p:spPr>
-        <p:txBody>
-          <a:bodyPr wrap="square" anchor="ctr" lIns="0" tIns="0" rIns="0" bIns="0" rtlCol="0"/>
-          <a:lstStyle/>
-          <a:p>
-            <a:pPr algn="ctr" marL="0" indent="0">
-              <a:lnSpc>
-                <a:spcPct val="110000"/>
-              </a:lnSpc>
-              <a:buNone/>
-            </a:pPr>
-            <a:r>
-              <a:rPr lang="th-TH" sz="1200" dirty="0">
-                <a:solidFill>
-                  <a:srgbClr val="333333"/>
-                </a:solidFill>
-                <a:latin typeface="+mn-lt"/>
-                <a:ea typeface="+mn-ea"/>
-                <a:cs typeface="+mn-cs"/>
-              </a:rPr>
-              <a:t>ระบบบัญชี</a:t>
-            </a:r>
-          </a:p>
-        </p:txBody>
-      </p:sp>
-      <p:sp>
-        <p:nvSpPr>
-          <p:cNvPr id="16" name="Link 1"/>
-          <p:cNvSpPr/>
-          <p:nvPr/>
-        </p:nvSpPr>
-        <p:spPr>
-          <a:xfrm>
-            <a:off x="3268980" y="3291840"/>
-            <a:ext cx="457200" cy="0"/>
-          </a:xfrm>
-          <a:prstGeom prst="line">
-            <a:avLst/>
-          </a:prstGeom>
-          <a:noFill/>
-          <a:ln w="15875" cap="flat">
-            <a:solidFill>
-              <a:srgbClr val="216B7F"/>
-            </a:solidFill>
-            <a:prstDash val="solid"/>
-            <a:tailEnd type="triangle" w="med" len="med"/>
-          </a:ln>
-        </p:spPr>
-        <p:txBody>
-          <a:bodyPr/>
-          <a:lstStyle/>
-          <a:p>
-            <a:endParaRPr lang="th-TH"/>
-          </a:p>
-        </p:txBody>
-      </p:sp>
-      <p:sp>
-        <p:nvSpPr>
-          <p:cNvPr id="17" name="Link 2"/>
-          <p:cNvSpPr/>
-          <p:nvPr/>
-        </p:nvSpPr>
-        <p:spPr>
-          <a:xfrm>
-            <a:off x="5966460" y="3291840"/>
-            <a:ext cx="457200" cy="0"/>
-          </a:xfrm>
-          <a:prstGeom prst="line">
-            <a:avLst/>
-          </a:prstGeom>
-          <a:noFill/>
-          <a:ln w="15875" cap="flat">
-            <a:solidFill>
-              <a:srgbClr val="216B7F"/>
-            </a:solidFill>
-            <a:prstDash val="solid"/>
-            <a:tailEnd type="triangle" w="med" len="med"/>
-          </a:ln>
-        </p:spPr>
-        <p:txBody>
-          <a:bodyPr/>
-          <a:lstStyle/>
-          <a:p>
-            <a:endParaRPr lang="th-TH"/>
-          </a:p>
-        </p:txBody>
-      </p:sp>
-      <p:sp>
-        <p:nvSpPr>
-          <p:cNvPr id="18" name="Link 3"/>
-          <p:cNvSpPr/>
-          <p:nvPr/>
-        </p:nvSpPr>
-        <p:spPr>
-          <a:xfrm>
-            <a:off x="8663940" y="3291840"/>
-            <a:ext cx="457200" cy="0"/>
-          </a:xfrm>
-          <a:prstGeom prst="line">
-            <a:avLst/>
-          </a:prstGeom>
-          <a:noFill/>
-          <a:ln w="15875" cap="flat">
-            <a:solidFill>
-              <a:srgbClr val="216B7F"/>
-            </a:solidFill>
-            <a:prstDash val="solid"/>
-            <a:tailEnd type="triangle" w="med" len="med"/>
-          </a:ln>
-        </p:spPr>
-        <p:txBody>
-          <a:bodyPr/>
-          <a:lstStyle/>
-          <a:p>
-            <a:endParaRPr lang="th-TH"/>
-          </a:p>
-        </p:txBody>
-      </p:sp>
-      <p:sp>
-        <p:nvSpPr>
-          <p:cNvPr id="19" name="Edge Label"/>
-          <p:cNvSpPr/>
-          <p:nvPr/>
-        </p:nvSpPr>
-        <p:spPr>
-          <a:xfrm>
-            <a:off x="5806440" y="2743200"/>
-            <a:ext cx="822960" cy="228600"/>
-          </a:xfrm>
-          <a:prstGeom prst="rect">
-            <a:avLst/>
-          </a:prstGeom>
-          <a:solidFill>
-            <a:srgbClr val="FFFFFF"/>
-          </a:solidFill>
-          <a:ln>
-            <a:noFill/>
-          </a:ln>
-        </p:spPr>
-        <p:txBody>
-          <a:bodyPr wrap="square" anchor="ctr" lIns="0" tIns="0" rIns="0" bIns="0" rtlCol="0"/>
-          <a:lstStyle/>
-          <a:p>
-            <a:pPr algn="ctr" marL="0" indent="0">
-              <a:lnSpc>
-                <a:spcPct val="100000"/>
-              </a:lnSpc>
-              <a:buNone/>
-            </a:pPr>
-            <a:r>
-              <a:rPr lang="th-TH" sz="1000" dirty="0">
-                <a:solidFill>
-                  <a:srgbClr val="A4A4A4"/>
-                </a:solidFill>
-                <a:latin typeface="+mn-lt"/>
-                <a:ea typeface="+mn-ea"/>
-                <a:cs typeface="+mn-cs"/>
-              </a:rPr>
-              <a:t>ผ่านกฎ</a:t>
+              <a:t>วัตถุประสงค์ของโครงการ</a:t>
+            </a:r>
+          </a:p>
+          <a:p>
+            <a:pPr/>
+            <a:r>
+              <a:rPr lang="th-TH" dirty="0"/>
+              <a:t>ขอบเขตงานรายกระบวนการ</a:t>
+            </a:r>
+          </a:p>
+          <a:p>
+            <a:pPr/>
+            <a:r>
+              <a:rPr lang="th-TH" dirty="0"/>
+              <a:t>แผนดำเนินงานและผู้รับผิดชอบ</a:t>
+            </a:r>
+          </a:p>
+          <a:p>
+            <a:pPr/>
+            <a:r>
+              <a:rPr lang="th-TH" dirty="0"/>
+              <a:t>งบประมาณและเงื่อนไข</a:t>
             </a:r>
           </a:p>
         </p:txBody>
@@ -13775,128 +13812,6 @@
 </file>
 
 <file path=ppt/slides/slide15.xml><?xml version="1.0" encoding="utf-8"?>
-<p:sld xmlns:a="http://schemas.openxmlformats.org/drawingml/2006/main" xmlns:r="http://schemas.openxmlformats.org/officeDocument/2006/relationships" xmlns:p="http://schemas.openxmlformats.org/presentationml/2006/main">
-  <p:cSld name="">
-    <p:spTree>
-      <p:nvGrpSpPr>
-        <p:cNvPr id="1" name=""/>
-        <p:cNvGrpSpPr/>
-        <p:nvPr/>
-      </p:nvGrpSpPr>
-      <p:grpSpPr>
-        <a:xfrm>
-          <a:off x="0" y="0"/>
-          <a:ext cx="0" cy="0"/>
-          <a:chOff x="0" y="0"/>
-          <a:chExt cx="0" cy="0"/>
-        </a:xfrm>
-      </p:grpSpPr>
-      <p:sp>
-        <p:nvSpPr>
-          <p:cNvPr id="2" name="Num"/>
-          <p:cNvSpPr>
-            <a:spLocks noGrp="1"/>
-          </p:cNvSpPr>
-          <p:nvPr>
-            <p:ph type="body" idx="1"/>
-          </p:nvPr>
-        </p:nvSpPr>
-        <p:spPr/>
-        <p:txBody>
-          <a:bodyPr/>
-          <a:lstStyle/>
-          <a:p>
-            <a:pPr/>
-            <a:r>
-              <a:rPr lang="th-TH" dirty="0"/>
-              <a:t>02</a:t>
-            </a:r>
-          </a:p>
-        </p:txBody>
-      </p:sp>
-      <p:sp>
-        <p:nvSpPr>
-          <p:cNvPr id="3" name="Title"/>
-          <p:cNvSpPr>
-            <a:spLocks noGrp="1"/>
-          </p:cNvSpPr>
-          <p:nvPr>
-            <p:ph type="title"/>
-          </p:nvPr>
-        </p:nvSpPr>
-        <p:spPr/>
-        <p:txBody>
-          <a:bodyPr/>
-          <a:lstStyle/>
-          <a:p>
-            <a:pPr/>
-            <a:r>
-              <a:rPr lang="th-TH" dirty="0"/>
-              <a:t>หัวข้อนำเสนอ</a:t>
-            </a:r>
-          </a:p>
-        </p:txBody>
-      </p:sp>
-      <p:sp>
-        <p:nvSpPr>
-          <p:cNvPr id="4" name="List"/>
-          <p:cNvSpPr>
-            <a:spLocks noGrp="1"/>
-          </p:cNvSpPr>
-          <p:nvPr>
-            <p:ph type="body" idx="2"/>
-          </p:nvPr>
-        </p:nvSpPr>
-        <p:spPr/>
-        <p:txBody>
-          <a:bodyPr/>
-          <a:lstStyle/>
-          <a:p>
-            <a:pPr/>
-            <a:r>
-              <a:rPr lang="th-TH" dirty="0"/>
-              <a:t>บริบทและปัญหาที่พบ</a:t>
-            </a:r>
-          </a:p>
-          <a:p>
-            <a:pPr/>
-            <a:r>
-              <a:rPr lang="th-TH" dirty="0"/>
-              <a:t>วัตถุประสงค์ของโครงการ</a:t>
-            </a:r>
-          </a:p>
-          <a:p>
-            <a:pPr/>
-            <a:r>
-              <a:rPr lang="th-TH" dirty="0"/>
-              <a:t>ขอบเขตงานรายกระบวนการ</a:t>
-            </a:r>
-          </a:p>
-          <a:p>
-            <a:pPr/>
-            <a:r>
-              <a:rPr lang="th-TH" dirty="0"/>
-              <a:t>แผนดำเนินงานและผู้รับผิดชอบ</a:t>
-            </a:r>
-          </a:p>
-          <a:p>
-            <a:pPr/>
-            <a:r>
-              <a:rPr lang="th-TH" dirty="0"/>
-              <a:t>งบประมาณและเงื่อนไข</a:t>
-            </a:r>
-          </a:p>
-        </p:txBody>
-      </p:sp>
-    </p:spTree>
-  </p:cSld>
-  <p:clrMapOvr>
-    <a:masterClrMapping/>
-  </p:clrMapOvr>
-</p:sld>
-</file>
-
-<file path=ppt/slides/slide16.xml><?xml version="1.0" encoding="utf-8"?>
 <p:sld xmlns:a="http://schemas.openxmlformats.org/drawingml/2006/main" xmlns:r="http://schemas.openxmlformats.org/officeDocument/2006/relationships" xmlns:p="http://schemas.openxmlformats.org/presentationml/2006/main">
   <p:cSld name="">
     <p:spTree>
@@ -15292,6 +15207,91 @@
 </p:sld>
 </file>
 
+<file path=ppt/slides/slide16.xml><?xml version="1.0" encoding="utf-8"?>
+<p:sld xmlns:a="http://schemas.openxmlformats.org/drawingml/2006/main" xmlns:r="http://schemas.openxmlformats.org/officeDocument/2006/relationships" xmlns:p="http://schemas.openxmlformats.org/presentationml/2006/main">
+  <p:cSld name="">
+    <p:spTree>
+      <p:nvGrpSpPr>
+        <p:cNvPr id="1" name=""/>
+        <p:cNvGrpSpPr/>
+        <p:nvPr/>
+      </p:nvGrpSpPr>
+      <p:grpSpPr>
+        <a:xfrm>
+          <a:off x="0" y="0"/>
+          <a:ext cx="0" cy="0"/>
+          <a:chOff x="0" y="0"/>
+          <a:chExt cx="0" cy="0"/>
+        </a:xfrm>
+      </p:grpSpPr>
+      <p:sp>
+        <p:nvSpPr>
+          <p:cNvPr id="2" name="Title"/>
+          <p:cNvSpPr>
+            <a:spLocks noGrp="1"/>
+          </p:cNvSpPr>
+          <p:nvPr>
+            <p:ph type="title"/>
+          </p:nvPr>
+        </p:nvSpPr>
+        <p:spPr/>
+        <p:txBody>
+          <a:bodyPr/>
+          <a:lstStyle/>
+          <a:p>
+            <a:pPr/>
+            <a:r>
+              <a:rPr lang="th-TH" dirty="0"/>
+              <a:t>ขอบคุณครับ</a:t>
+            </a:r>
+          </a:p>
+        </p:txBody>
+      </p:sp>
+      <p:sp>
+        <p:nvSpPr>
+          <p:cNvPr id="3" name="Contact"/>
+          <p:cNvSpPr>
+            <a:spLocks noGrp="1"/>
+          </p:cNvSpPr>
+          <p:nvPr>
+            <p:ph type="body" idx="1"/>
+          </p:nvPr>
+        </p:nvSpPr>
+        <p:spPr/>
+        <p:txBody>
+          <a:bodyPr/>
+          <a:lstStyle/>
+          <a:p>
+            <a:pPr/>
+            <a:r>
+              <a:rPr lang="th-TH" dirty="0"/>
+              <a:t>โทร · 02-XXX-XXXX</a:t>
+            </a:r>
+          </a:p>
+          <a:p>
+            <a:pPr/>
+            <a:r>
+              <a:rPr lang="th-TH" dirty="0"/>
+              <a:t>อีเมล · contact@nctthai.com</a:t>
+            </a:r>
+          </a:p>
+          <a:p>
+            <a:pPr/>
+            <a:r>
+              <a:rPr lang="th-TH" dirty="0"/>
+              <a:t>เว็บไซต์ · nctthai.com</a:t>
+            </a:r>
+          </a:p>
+        </p:txBody>
+      </p:sp>
+    </p:spTree>
+  </p:cSld>
+  <p:clrMapOvr>
+    <a:masterClrMapping/>
+  </p:clrMapOvr>
+</p:sld>
+</file>
+
 <file path=ppt/slides/slide2.xml><?xml version="1.0" encoding="utf-8"?>
 <p:sld xmlns:a="http://schemas.openxmlformats.org/drawingml/2006/main" xmlns:r="http://schemas.openxmlformats.org/officeDocument/2006/relationships" xmlns:p="http://schemas.openxmlformats.org/presentationml/2006/main">
   <p:cSld name="">

--- a/NCT-Slide-Template-Demo.pptx
+++ b/NCT-Slide-Template-Demo.pptx
@@ -675,27 +675,71 @@
           </a:p>
         </p:txBody>
       </p:sp>
-      <p:sp>
-        <p:nvSpPr>
-          <p:cNvPr id="11" name="Decor Diamond"/>
+      <p:pic>
+        <p:nvPicPr>
+          <p:cNvPr id="11" name="Section Photo"/>
+          <p:cNvPicPr>
+            <a:picLocks noChangeAspect="1"/>
+          </p:cNvPicPr>
+          <p:nvPr/>
+        </p:nvPicPr>
+        <p:blipFill>
+          <a:blip r:embed="rId3"/>
+          <a:stretch>
+            <a:fillRect/>
+          </a:stretch>
+        </p:blipFill>
+        <p:spPr>
+          <a:xfrm>
+            <a:off x="7315200" y="0"/>
+            <a:ext cx="4876800" cy="6858000"/>
+          </a:xfrm>
+          <a:prstGeom prst="rect">
+            <a:avLst/>
+          </a:prstGeom>
+        </p:spPr>
+      </p:pic>
+      <p:sp>
+        <p:nvSpPr>
+          <p:cNvPr id="16" name="Photo Fade"/>
           <p:cNvSpPr/>
           <p:nvPr/>
         </p:nvSpPr>
         <p:spPr>
           <a:xfrm>
-            <a:off x="9448800" y="-457200"/>
-            <a:ext cx="3200400" cy="3200400"/>
-          </a:xfrm>
-          <a:prstGeom prst="diamond">
-            <a:avLst/>
-          </a:prstGeom>
-          <a:noFill/>
-          <a:ln w="19050">
-            <a:solidFill>
-              <a:srgbClr val="FFFFFF">
-                <a:alpha val="7000"/>
-              </a:srgbClr>
-            </a:solidFill>
+            <a:off x="7315200" y="0"/>
+            <a:ext cx="4876800" cy="6858000"/>
+          </a:xfrm>
+          <a:prstGeom prst="rect">
+            <a:avLst/>
+          </a:prstGeom>
+          <a:gradFill rotWithShape="1">
+            <a:gsLst>
+              <a:gs pos="0">
+                <a:srgbClr val="23436D">
+                  <a:alpha val="100000"/>
+                </a:srgbClr>
+              </a:gs>
+              <a:gs pos="26000">
+                <a:srgbClr val="23436D">
+                  <a:alpha val="84000"/>
+                </a:srgbClr>
+              </a:gs>
+              <a:gs pos="62000">
+                <a:srgbClr val="23436D">
+                  <a:alpha val="30000"/>
+                </a:srgbClr>
+              </a:gs>
+              <a:gs pos="100000">
+                <a:srgbClr val="23436D">
+                  <a:alpha val="12000"/>
+                </a:srgbClr>
+              </a:gs>
+            </a:gsLst>
+            <a:lin ang="0" scaled="0"/>
+          </a:gradFill>
+          <a:ln>
+            <a:noFill/>
           </a:ln>
         </p:spPr>
         <p:txBody>
@@ -708,6 +752,52 @@
       </p:sp>
       <p:sp>
         <p:nvSpPr>
+          <p:cNvPr id="17" name="Photo Foot Scrim"/>
+          <p:cNvSpPr/>
+          <p:nvPr/>
+        </p:nvSpPr>
+        <p:spPr>
+          <a:xfrm>
+            <a:off x="7315200" y="4800600"/>
+            <a:ext cx="4876800" cy="2057400"/>
+          </a:xfrm>
+          <a:prstGeom prst="rect">
+            <a:avLst/>
+          </a:prstGeom>
+          <a:gradFill rotWithShape="1">
+            <a:gsLst>
+              <a:gs pos="0">
+                <a:srgbClr val="23436D">
+                  <a:alpha val="0"/>
+                </a:srgbClr>
+              </a:gs>
+              <a:gs pos="55000">
+                <a:srgbClr val="23436D">
+                  <a:alpha val="60000"/>
+                </a:srgbClr>
+              </a:gs>
+              <a:gs pos="100000">
+                <a:srgbClr val="23436D">
+                  <a:alpha val="90000"/>
+                </a:srgbClr>
+              </a:gs>
+            </a:gsLst>
+            <a:lin ang="5400000" scaled="0"/>
+          </a:gradFill>
+          <a:ln>
+            <a:noFill/>
+          </a:ln>
+        </p:spPr>
+        <p:txBody>
+          <a:bodyPr/>
+          <a:lstStyle/>
+          <a:p>
+            <a:endParaRPr lang="th-TH"/>
+          </a:p>
+        </p:txBody>
+      </p:sp>
+      <p:sp>
+        <p:nvSpPr>
           <p:cNvPr id="12" name="Title Placeholder"/>
           <p:cNvSpPr>
             <a:spLocks noGrp="1"/>
@@ -719,7 +809,7 @@
         <p:spPr>
           <a:xfrm>
             <a:off x="914400" y="1554480"/>
-            <a:ext cx="8229600" cy="1188720"/>
+            <a:ext cx="6217920" cy="1188720"/>
           </a:xfrm>
           <a:prstGeom prst="rect">
             <a:avLst/>
@@ -879,7 +969,7 @@
         </p:blipFill>
         <p:spPr>
           <a:xfrm>
-            <a:off x="8717280" y="3383280"/>
+            <a:off x="914400" y="4476750"/>
             <a:ext cx="2560320" cy="1302864"/>
           </a:xfrm>
           <a:prstGeom prst="rect">
@@ -5671,25 +5761,115 @@
           <a:chExt cx="0" cy="0"/>
         </a:xfrm>
       </p:grpSpPr>
-      <p:sp>
-        <p:nvSpPr>
-          <p:cNvPr id="10" name="Accent Wedge"/>
+      <p:pic>
+        <p:nvPicPr>
+          <p:cNvPr id="9" name="Section Photo"/>
+          <p:cNvPicPr>
+            <a:picLocks noChangeAspect="1"/>
+          </p:cNvPicPr>
+          <p:nvPr/>
+        </p:nvPicPr>
+        <p:blipFill>
+          <a:blip r:embed="rId3"/>
+          <a:stretch>
+            <a:fillRect/>
+          </a:stretch>
+        </p:blipFill>
+        <p:spPr>
+          <a:xfrm>
+            <a:off x="7315200" y="0"/>
+            <a:ext cx="4876800" cy="6858000"/>
+          </a:xfrm>
+          <a:prstGeom prst="rect">
+            <a:avLst/>
+          </a:prstGeom>
+        </p:spPr>
+      </p:pic>
+      <p:sp>
+        <p:nvSpPr>
+          <p:cNvPr id="10" name="Photo Fade"/>
           <p:cNvSpPr/>
           <p:nvPr/>
         </p:nvSpPr>
         <p:spPr>
           <a:xfrm>
-            <a:off x="8991600" y="0"/>
-            <a:ext cx="3200400" cy="6858000"/>
-          </a:xfrm>
-          <a:prstGeom prst="rtTriangle">
-            <a:avLst/>
-          </a:prstGeom>
-          <a:solidFill>
-            <a:srgbClr val="216B7F">
-              <a:alpha val="20000"/>
-            </a:srgbClr>
-          </a:solidFill>
+            <a:off x="7315200" y="0"/>
+            <a:ext cx="4876800" cy="6858000"/>
+          </a:xfrm>
+          <a:prstGeom prst="rect">
+            <a:avLst/>
+          </a:prstGeom>
+          <a:gradFill rotWithShape="1">
+            <a:gsLst>
+              <a:gs pos="0">
+                <a:srgbClr val="23436D">
+                  <a:alpha val="100000"/>
+                </a:srgbClr>
+              </a:gs>
+              <a:gs pos="26000">
+                <a:srgbClr val="23436D">
+                  <a:alpha val="84000"/>
+                </a:srgbClr>
+              </a:gs>
+              <a:gs pos="62000">
+                <a:srgbClr val="23436D">
+                  <a:alpha val="30000"/>
+                </a:srgbClr>
+              </a:gs>
+              <a:gs pos="100000">
+                <a:srgbClr val="23436D">
+                  <a:alpha val="12000"/>
+                </a:srgbClr>
+              </a:gs>
+            </a:gsLst>
+            <a:lin ang="0" scaled="0"/>
+          </a:gradFill>
+          <a:ln>
+            <a:noFill/>
+          </a:ln>
+        </p:spPr>
+        <p:txBody>
+          <a:bodyPr/>
+          <a:lstStyle/>
+          <a:p>
+            <a:endParaRPr lang="th-TH"/>
+          </a:p>
+        </p:txBody>
+      </p:sp>
+      <p:sp>
+        <p:nvSpPr>
+          <p:cNvPr id="19" name="Photo Foot Scrim"/>
+          <p:cNvSpPr/>
+          <p:nvPr/>
+        </p:nvSpPr>
+        <p:spPr>
+          <a:xfrm>
+            <a:off x="7315200" y="4800600"/>
+            <a:ext cx="4876800" cy="2057400"/>
+          </a:xfrm>
+          <a:prstGeom prst="rect">
+            <a:avLst/>
+          </a:prstGeom>
+          <a:gradFill rotWithShape="1">
+            <a:gsLst>
+              <a:gs pos="0">
+                <a:srgbClr val="23436D">
+                  <a:alpha val="0"/>
+                </a:srgbClr>
+              </a:gs>
+              <a:gs pos="55000">
+                <a:srgbClr val="23436D">
+                  <a:alpha val="60000"/>
+                </a:srgbClr>
+              </a:gs>
+              <a:gs pos="100000">
+                <a:srgbClr val="23436D">
+                  <a:alpha val="90000"/>
+                </a:srgbClr>
+              </a:gs>
+            </a:gsLst>
+            <a:lin ang="5400000" scaled="0"/>
+          </a:gradFill>
           <a:ln>
             <a:noFill/>
           </a:ln>
@@ -5802,7 +5982,7 @@
         <p:spPr>
           <a:xfrm>
             <a:off x="914400" y="2926080"/>
-            <a:ext cx="8229600" cy="1188720"/>
+            <a:ext cx="6217920" cy="1188720"/>
           </a:xfrm>
           <a:prstGeom prst="rect">
             <a:avLst/>
@@ -5860,7 +6040,7 @@
         <p:spPr>
           <a:xfrm>
             <a:off x="914400" y="4297680"/>
-            <a:ext cx="7315200" cy="2194560"/>
+            <a:ext cx="6217920" cy="2194560"/>
           </a:xfrm>
           <a:prstGeom prst="rect">
             <a:avLst/>
@@ -6766,25 +6946,115 @@
           <a:chExt cx="0" cy="0"/>
         </a:xfrm>
       </p:grpSpPr>
-      <p:sp>
-        <p:nvSpPr>
-          <p:cNvPr id="10" name="Accent Wedge"/>
+      <p:pic>
+        <p:nvPicPr>
+          <p:cNvPr id="9" name="Section Photo"/>
+          <p:cNvPicPr>
+            <a:picLocks noChangeAspect="1"/>
+          </p:cNvPicPr>
+          <p:nvPr/>
+        </p:nvPicPr>
+        <p:blipFill>
+          <a:blip r:embed="rId3"/>
+          <a:stretch>
+            <a:fillRect/>
+          </a:stretch>
+        </p:blipFill>
+        <p:spPr>
+          <a:xfrm>
+            <a:off x="7315200" y="0"/>
+            <a:ext cx="4876800" cy="6858000"/>
+          </a:xfrm>
+          <a:prstGeom prst="rect">
+            <a:avLst/>
+          </a:prstGeom>
+        </p:spPr>
+      </p:pic>
+      <p:sp>
+        <p:nvSpPr>
+          <p:cNvPr id="10" name="Photo Fade"/>
           <p:cNvSpPr/>
           <p:nvPr/>
         </p:nvSpPr>
         <p:spPr>
           <a:xfrm>
-            <a:off x="8991600" y="0"/>
-            <a:ext cx="3200400" cy="6858000"/>
-          </a:xfrm>
-          <a:prstGeom prst="rtTriangle">
-            <a:avLst/>
-          </a:prstGeom>
-          <a:solidFill>
-            <a:srgbClr val="216B7F">
-              <a:alpha val="20000"/>
-            </a:srgbClr>
-          </a:solidFill>
+            <a:off x="7315200" y="0"/>
+            <a:ext cx="4876800" cy="6858000"/>
+          </a:xfrm>
+          <a:prstGeom prst="rect">
+            <a:avLst/>
+          </a:prstGeom>
+          <a:gradFill rotWithShape="1">
+            <a:gsLst>
+              <a:gs pos="0">
+                <a:srgbClr val="23436D">
+                  <a:alpha val="100000"/>
+                </a:srgbClr>
+              </a:gs>
+              <a:gs pos="26000">
+                <a:srgbClr val="23436D">
+                  <a:alpha val="84000"/>
+                </a:srgbClr>
+              </a:gs>
+              <a:gs pos="62000">
+                <a:srgbClr val="23436D">
+                  <a:alpha val="30000"/>
+                </a:srgbClr>
+              </a:gs>
+              <a:gs pos="100000">
+                <a:srgbClr val="23436D">
+                  <a:alpha val="12000"/>
+                </a:srgbClr>
+              </a:gs>
+            </a:gsLst>
+            <a:lin ang="0" scaled="0"/>
+          </a:gradFill>
+          <a:ln>
+            <a:noFill/>
+          </a:ln>
+        </p:spPr>
+        <p:txBody>
+          <a:bodyPr/>
+          <a:lstStyle/>
+          <a:p>
+            <a:endParaRPr lang="th-TH"/>
+          </a:p>
+        </p:txBody>
+      </p:sp>
+      <p:sp>
+        <p:nvSpPr>
+          <p:cNvPr id="15" name="Photo Foot Scrim"/>
+          <p:cNvSpPr/>
+          <p:nvPr/>
+        </p:nvSpPr>
+        <p:spPr>
+          <a:xfrm>
+            <a:off x="7315200" y="4800600"/>
+            <a:ext cx="4876800" cy="2057400"/>
+          </a:xfrm>
+          <a:prstGeom prst="rect">
+            <a:avLst/>
+          </a:prstGeom>
+          <a:gradFill rotWithShape="1">
+            <a:gsLst>
+              <a:gs pos="0">
+                <a:srgbClr val="23436D">
+                  <a:alpha val="0"/>
+                </a:srgbClr>
+              </a:gs>
+              <a:gs pos="55000">
+                <a:srgbClr val="23436D">
+                  <a:alpha val="60000"/>
+                </a:srgbClr>
+              </a:gs>
+              <a:gs pos="100000">
+                <a:srgbClr val="23436D">
+                  <a:alpha val="90000"/>
+                </a:srgbClr>
+              </a:gs>
+            </a:gsLst>
+            <a:lin ang="5400000" scaled="0"/>
+          </a:gradFill>
           <a:ln>
             <a:noFill/>
           </a:ln>
@@ -6897,7 +7167,7 @@
         <p:spPr>
           <a:xfrm>
             <a:off x="914400" y="2926080"/>
-            <a:ext cx="8229600" cy="1188720"/>
+            <a:ext cx="6217920" cy="1188720"/>
           </a:xfrm>
           <a:prstGeom prst="rect">
             <a:avLst/>
@@ -6955,7 +7225,7 @@
         <p:spPr>
           <a:xfrm>
             <a:off x="914400" y="4297680"/>
-            <a:ext cx="6858000" cy="731520"/>
+            <a:ext cx="6217920" cy="731520"/>
           </a:xfrm>
           <a:prstGeom prst="rect">
             <a:avLst/>

--- a/NCT-Slide-Template-Demo.pptx
+++ b/NCT-Slide-Template-Demo.pptx
@@ -1404,7 +1404,7 @@
                 <a:spcPts val="500"/>
               </a:spcBef>
               <a:buClr>
-                <a:srgbClr val="4E8FA8"/>
+                <a:srgbClr val="8FBACE"/>
               </a:buClr>
               <a:buSzPct val="90000"/>
               <a:buFont typeface="Arial"/>
@@ -1428,7 +1428,7 @@
                 <a:spcPts val="350"/>
               </a:spcBef>
               <a:buClr>
-                <a:srgbClr val="4E8FA8"/>
+                <a:srgbClr val="8FBACE"/>
               </a:buClr>
               <a:buSzPct val="90000"/>
               <a:buFont typeface="Arial"/>
@@ -1454,7 +1454,7 @@
                 <a:spcPts val="500"/>
               </a:spcBef>
               <a:buClr>
-                <a:srgbClr val="4E8FA8"/>
+                <a:srgbClr val="8FBACE"/>
               </a:buClr>
               <a:buSzPct val="90000"/>
               <a:buFont typeface="Arial"/>
@@ -1483,7 +1483,7 @@
                 <a:spcPts val="350"/>
               </a:spcBef>
               <a:buClr>
-                <a:srgbClr val="4E8FA8"/>
+                <a:srgbClr val="8FBACE"/>
               </a:buClr>
               <a:buSzPct val="90000"/>
               <a:buFont typeface="Arial"/>
@@ -1644,7 +1644,7 @@
                 <a:spcPts val="350"/>
               </a:spcBef>
               <a:buClr>
-                <a:srgbClr val="A4A4A4"/>
+                <a:srgbClr val="5F5F5F"/>
               </a:buClr>
               <a:buSzPct val="90000"/>
               <a:buFont typeface="Arial"/>
@@ -1695,7 +1695,7 @@
                 <a:spcPts val="350"/>
               </a:spcBef>
               <a:buClr>
-                <a:srgbClr val="A4A4A4"/>
+                <a:srgbClr val="5F5F5F"/>
               </a:buClr>
               <a:buSzPct val="90000"/>
               <a:buFont typeface="Arial"/>
@@ -1918,7 +1918,7 @@
               <a:buNone/>
               <a:defRPr lang="th-TH" sz="1000" dirty="0">
                 <a:solidFill>
-                  <a:srgbClr val="A4A4A4"/>
+                  <a:srgbClr val="5F5F5F"/>
                 </a:solidFill>
                 <a:latin typeface="+mn-lt"/>
                 <a:ea typeface="+mn-ea"/>
@@ -1966,7 +1966,7 @@
               <a:buNone/>
               <a:defRPr lang="th-TH" sz="1000" dirty="0">
                 <a:solidFill>
-                  <a:srgbClr val="A4A4A4"/>
+                  <a:srgbClr val="5F5F5F"/>
                 </a:solidFill>
                 <a:latin typeface="+mn-lt"/>
                 <a:ea typeface="+mn-ea"/>
@@ -2014,7 +2014,7 @@
               <a:buNone/>
               <a:defRPr lang="th-TH" sz="1000" dirty="0">
                 <a:solidFill>
-                  <a:srgbClr val="A4A4A4"/>
+                  <a:srgbClr val="5F5F5F"/>
                 </a:solidFill>
                 <a:latin typeface="+mn-lt"/>
                 <a:ea typeface="+mn-ea"/>
@@ -2029,7 +2029,7 @@
             <a:fld id="{B7E3A1C2-4F5D-4A88-9C1E-6D2F0A93B451}" type="slidenum">
               <a:rPr lang="th-TH" sz="1000">
                 <a:solidFill>
-                  <a:srgbClr val="A4A4A4"/>
+                  <a:srgbClr val="5F5F5F"/>
                 </a:solidFill>
                 <a:latin typeface="+mn-lt"/>
                 <a:cs typeface="+mn-cs"/>
@@ -3194,7 +3194,7 @@
               <a:buNone/>
               <a:defRPr lang="th-TH" sz="1200" b="1" spc="120" dirty="0">
                 <a:solidFill>
-                  <a:srgbClr val="4E8FA8"/>
+                  <a:srgbClr val="8FBACE"/>
                 </a:solidFill>
                 <a:latin typeface="+mn-lt"/>
                 <a:ea typeface="+mn-ea"/>
@@ -3212,7 +3212,7 @@
             <a:r>
               <a:rPr lang="th-TH" sz="1200" b="1" spc="120" dirty="0">
                 <a:solidFill>
-                  <a:srgbClr val="4E8FA8"/>
+                  <a:srgbClr val="8FBACE"/>
                 </a:solidFill>
                 <a:latin typeface="+mn-lt"/>
                 <a:ea typeface="+mn-ea"/>
@@ -3339,7 +3339,7 @@
               <a:buNone/>
               <a:defRPr lang="th-TH" sz="1000" dirty="0">
                 <a:solidFill>
-                  <a:srgbClr val="A4A4A4"/>
+                  <a:srgbClr val="5F5F5F"/>
                 </a:solidFill>
                 <a:latin typeface="+mn-lt"/>
                 <a:ea typeface="+mn-ea"/>
@@ -3387,7 +3387,7 @@
               <a:buNone/>
               <a:defRPr lang="th-TH" sz="1000" dirty="0">
                 <a:solidFill>
-                  <a:srgbClr val="A4A4A4"/>
+                  <a:srgbClr val="5F5F5F"/>
                 </a:solidFill>
                 <a:latin typeface="+mn-lt"/>
                 <a:ea typeface="+mn-ea"/>
@@ -3435,7 +3435,7 @@
               <a:buNone/>
               <a:defRPr lang="th-TH" sz="1000" dirty="0">
                 <a:solidFill>
-                  <a:srgbClr val="A4A4A4"/>
+                  <a:srgbClr val="5F5F5F"/>
                 </a:solidFill>
                 <a:latin typeface="+mn-lt"/>
                 <a:ea typeface="+mn-ea"/>
@@ -3450,7 +3450,7 @@
             <a:fld id="{B7E3A1C2-4F5D-4A88-9C1E-6D2F0A93B451}" type="slidenum">
               <a:rPr lang="th-TH" sz="1000">
                 <a:solidFill>
-                  <a:srgbClr val="A4A4A4"/>
+                  <a:srgbClr val="5F5F5F"/>
                 </a:solidFill>
                 <a:latin typeface="+mn-lt"/>
                 <a:cs typeface="+mn-cs"/>
@@ -3634,7 +3634,7 @@
               <a:buNone/>
               <a:defRPr lang="th-TH" sz="1400" dirty="0">
                 <a:solidFill>
-                  <a:srgbClr val="A4A4A4"/>
+                  <a:srgbClr val="5F5F5F"/>
                 </a:solidFill>
                 <a:latin typeface="+mn-lt"/>
                 <a:ea typeface="+mn-ea"/>
@@ -3652,7 +3652,7 @@
             <a:r>
               <a:rPr lang="th-TH" sz="1400" dirty="0">
                 <a:solidFill>
-                  <a:srgbClr val="A4A4A4"/>
+                  <a:srgbClr val="5F5F5F"/>
                 </a:solidFill>
                 <a:latin typeface="+mn-lt"/>
                 <a:ea typeface="+mn-ea"/>
@@ -5142,7 +5142,7 @@
               <a:buNone/>
               <a:defRPr lang="th-TH" sz="1000" dirty="0">
                 <a:solidFill>
-                  <a:srgbClr val="A4A4A4"/>
+                  <a:srgbClr val="5F5F5F"/>
                 </a:solidFill>
                 <a:latin typeface="+mn-lt"/>
                 <a:ea typeface="+mn-ea"/>
@@ -5190,7 +5190,7 @@
               <a:buNone/>
               <a:defRPr lang="th-TH" sz="1000" dirty="0">
                 <a:solidFill>
-                  <a:srgbClr val="A4A4A4"/>
+                  <a:srgbClr val="5F5F5F"/>
                 </a:solidFill>
                 <a:latin typeface="+mn-lt"/>
                 <a:ea typeface="+mn-ea"/>
@@ -5238,7 +5238,7 @@
               <a:buNone/>
               <a:defRPr lang="th-TH" sz="1000" dirty="0">
                 <a:solidFill>
-                  <a:srgbClr val="A4A4A4"/>
+                  <a:srgbClr val="5F5F5F"/>
                 </a:solidFill>
                 <a:latin typeface="+mn-lt"/>
                 <a:ea typeface="+mn-ea"/>
@@ -5253,7 +5253,7 @@
             <a:fld id="{B7E3A1C2-4F5D-4A88-9C1E-6D2F0A93B451}" type="slidenum">
               <a:rPr lang="th-TH" sz="1000">
                 <a:solidFill>
-                  <a:srgbClr val="A4A4A4"/>
+                  <a:srgbClr val="5F5F5F"/>
                 </a:solidFill>
                 <a:latin typeface="+mn-lt"/>
                 <a:cs typeface="+mn-cs"/>
@@ -5421,7 +5421,7 @@
         <p:spPr>
           <a:xfrm>
             <a:off x="914400" y="1691640"/>
-            <a:ext cx="10363200" cy="365760"/>
+            <a:ext cx="10363200" cy="228600"/>
           </a:xfrm>
           <a:prstGeom prst="rect">
             <a:avLst/>
@@ -5437,7 +5437,7 @@
               <a:buNone/>
               <a:defRPr lang="th-TH" sz="1400" dirty="0">
                 <a:solidFill>
-                  <a:srgbClr val="A4A4A4"/>
+                  <a:srgbClr val="5F5F5F"/>
                 </a:solidFill>
                 <a:latin typeface="+mn-lt"/>
                 <a:ea typeface="+mn-ea"/>
@@ -5455,7 +5455,7 @@
             <a:r>
               <a:rPr lang="th-TH" sz="1400" dirty="0">
                 <a:solidFill>
-                  <a:srgbClr val="A4A4A4"/>
+                  <a:srgbClr val="5F5F5F"/>
                 </a:solidFill>
                 <a:latin typeface="+mn-lt"/>
                 <a:ea typeface="+mn-ea"/>
@@ -5478,8 +5478,8 @@
         </p:nvSpPr>
         <p:spPr>
           <a:xfrm>
-            <a:off x="914400" y="5669280"/>
-            <a:ext cx="10363200" cy="365760"/>
+            <a:off x="914400" y="5257800"/>
+            <a:ext cx="10363200" cy="274320"/>
           </a:xfrm>
           <a:prstGeom prst="rect">
             <a:avLst/>
@@ -5495,7 +5495,7 @@
               <a:buNone/>
               <a:defRPr lang="th-TH" sz="1200" dirty="0">
                 <a:solidFill>
-                  <a:srgbClr val="A4A4A4"/>
+                  <a:srgbClr val="5F5F5F"/>
                 </a:solidFill>
                 <a:latin typeface="+mn-lt"/>
                 <a:ea typeface="+mn-ea"/>
@@ -5513,13 +5513,158 @@
             <a:r>
               <a:rPr lang="th-TH" sz="1200" dirty="0">
                 <a:solidFill>
-                  <a:srgbClr val="A4A4A4"/>
+                  <a:srgbClr val="5F5F5F"/>
                 </a:solidFill>
                 <a:latin typeface="+mn-lt"/>
                 <a:ea typeface="+mn-ea"/>
                 <a:cs typeface="+mn-cs"/>
               </a:rPr>
               <a:t>คำอธิบายสัญลักษณ์</a:t>
+            </a:r>
+          </a:p>
+        </p:txBody>
+      </p:sp>
+      <p:sp>
+        <p:nvSpPr>
+          <p:cNvPr id="15" name="Takeaway Band"/>
+          <p:cNvSpPr/>
+          <p:nvPr/>
+        </p:nvSpPr>
+        <p:spPr>
+          <a:xfrm>
+            <a:off x="914400" y="5623560"/>
+            <a:ext cx="10363200" cy="411480"/>
+          </a:xfrm>
+          <a:prstGeom prst="rect">
+            <a:avLst/>
+          </a:prstGeom>
+          <a:solidFill>
+            <a:srgbClr val="E8F6F5"/>
+          </a:solidFill>
+          <a:ln>
+            <a:noFill/>
+          </a:ln>
+        </p:spPr>
+        <p:txBody>
+          <a:bodyPr/>
+          <a:lstStyle/>
+          <a:p>
+            <a:endParaRPr lang="th-TH"/>
+          </a:p>
+        </p:txBody>
+      </p:sp>
+      <p:sp>
+        <p:nvSpPr>
+          <p:cNvPr id="16" name="Takeaway Label"/>
+          <p:cNvSpPr>
+            <a:spLocks noGrp="1"/>
+          </p:cNvSpPr>
+          <p:nvPr>
+            <p:ph type="body" idx="3"/>
+          </p:nvPr>
+        </p:nvSpPr>
+        <p:spPr>
+          <a:xfrm>
+            <a:off x="1097280" y="5684520"/>
+            <a:ext cx="1828800" cy="289560"/>
+          </a:xfrm>
+          <a:prstGeom prst="rect">
+            <a:avLst/>
+          </a:prstGeom>
+        </p:spPr>
+        <p:txBody>
+          <a:bodyPr wrap="square" anchor="ctr" lIns="0" tIns="0" rIns="0" bIns="0" rtlCol="0"/>
+          <a:lstStyle>
+            <a:lvl1pPr algn="l" marL="0" indent="0">
+              <a:lnSpc>
+                <a:spcPct val="100000"/>
+              </a:lnSpc>
+              <a:buNone/>
+              <a:defRPr lang="th-TH" sz="1200" b="1" spc="120" dirty="0">
+                <a:solidFill>
+                  <a:srgbClr val="216B7F"/>
+                </a:solidFill>
+                <a:latin typeface="+mn-lt"/>
+                <a:ea typeface="+mn-ea"/>
+                <a:cs typeface="+mn-cs"/>
+              </a:defRPr>
+            </a:lvl1pPr>
+          </a:lstStyle>
+          <a:p>
+            <a:pPr algn="l" marL="0" indent="0">
+              <a:lnSpc>
+                <a:spcPct val="100000"/>
+              </a:lnSpc>
+              <a:buNone/>
+            </a:pPr>
+            <a:r>
+              <a:rPr lang="th-TH" sz="1200" b="1" spc="120" dirty="0">
+                <a:solidFill>
+                  <a:srgbClr val="216B7F"/>
+                </a:solidFill>
+                <a:latin typeface="+mn-lt"/>
+                <a:ea typeface="+mn-ea"/>
+                <a:cs typeface="+mn-cs"/>
+              </a:rPr>
+              <a:t>สรุป</a:t>
+            </a:r>
+          </a:p>
+        </p:txBody>
+      </p:sp>
+      <p:sp>
+        <p:nvSpPr>
+          <p:cNvPr id="17" name="Takeaway Copy"/>
+          <p:cNvSpPr>
+            <a:spLocks noGrp="1"/>
+          </p:cNvSpPr>
+          <p:nvPr>
+            <p:ph type="body" idx="4"/>
+          </p:nvPr>
+        </p:nvSpPr>
+        <p:spPr>
+          <a:xfrm>
+            <a:off x="2926080" y="5684520"/>
+            <a:ext cx="8168640" cy="289560"/>
+          </a:xfrm>
+          <a:prstGeom prst="rect">
+            <a:avLst/>
+          </a:prstGeom>
+        </p:spPr>
+        <p:txBody>
+          <a:bodyPr wrap="square" anchor="ctr" lIns="0" tIns="0" rIns="0" bIns="0" rtlCol="0"/>
+          <a:lstStyle>
+            <a:lvl1pPr algn="l" marL="0" indent="0">
+              <a:lnSpc>
+                <a:spcPct val="100000"/>
+              </a:lnSpc>
+              <a:buNone/>
+              <a:defRPr lang="th-TH" sz="1400" dirty="0">
+                <a:solidFill>
+                  <a:srgbClr val="333333"/>
+                </a:solidFill>
+                <a:latin typeface="+mn-lt"/>
+                <a:ea typeface="+mn-ea"/>
+                <a:cs typeface="+mn-cs"/>
+              </a:defRPr>
+            </a:lvl1pPr>
+          </a:lstStyle>
+          <a:p>
+            <a:pPr algn="l" marL="0" indent="0">
+              <a:lnSpc>
+                <a:spcPct val="100000"/>
+              </a:lnSpc>
+              <a:buNone/>
+            </a:pPr>
+            <a:r>
+              <a:rPr lang="th-TH" sz="1400" dirty="0">
+                <a:solidFill>
+                  <a:srgbClr val="333333"/>
+                </a:solidFill>
+                <a:latin typeface="+mn-lt"/>
+                <a:ea typeface="+mn-ea"/>
+                <a:cs typeface="+mn-cs"/>
+              </a:rPr>
+              <a:t>ประเด็นสรุปหนึ่งบรรทัด</a:t>
             </a:r>
           </a:p>
         </p:txBody>
@@ -5582,7 +5727,7 @@
               <a:buNone/>
               <a:defRPr lang="th-TH" sz="1000" dirty="0">
                 <a:solidFill>
-                  <a:srgbClr val="A4A4A4"/>
+                  <a:srgbClr val="5F5F5F"/>
                 </a:solidFill>
                 <a:latin typeface="+mn-lt"/>
                 <a:ea typeface="+mn-ea"/>
@@ -5630,7 +5775,7 @@
               <a:buNone/>
               <a:defRPr lang="th-TH" sz="1000" dirty="0">
                 <a:solidFill>
-                  <a:srgbClr val="A4A4A4"/>
+                  <a:srgbClr val="5F5F5F"/>
                 </a:solidFill>
                 <a:latin typeface="+mn-lt"/>
                 <a:ea typeface="+mn-ea"/>
@@ -5678,7 +5823,7 @@
               <a:buNone/>
               <a:defRPr lang="th-TH" sz="1000" dirty="0">
                 <a:solidFill>
-                  <a:srgbClr val="A4A4A4"/>
+                  <a:srgbClr val="5F5F5F"/>
                 </a:solidFill>
                 <a:latin typeface="+mn-lt"/>
                 <a:ea typeface="+mn-ea"/>
@@ -5693,7 +5838,7 @@
             <a:fld id="{B7E3A1C2-4F5D-4A88-9C1E-6D2F0A93B451}" type="slidenum">
               <a:rPr lang="th-TH" sz="1000">
                 <a:solidFill>
-                  <a:srgbClr val="A4A4A4"/>
+                  <a:srgbClr val="5F5F5F"/>
                 </a:solidFill>
                 <a:latin typeface="+mn-lt"/>
                 <a:cs typeface="+mn-cs"/>
@@ -5911,7 +6056,7 @@
               <a:buNone/>
               <a:defRPr lang="th-TH" sz="6000" b="1" dirty="0">
                 <a:solidFill>
-                  <a:srgbClr val="4E8FA8"/>
+                  <a:srgbClr val="8FBACE"/>
                 </a:solidFill>
                 <a:latin typeface="+mj-lt"/>
                 <a:ea typeface="+mj-ea"/>
@@ -5929,7 +6074,7 @@
             <a:r>
               <a:rPr lang="th-TH" sz="6000" b="1" dirty="0">
                 <a:solidFill>
-                  <a:srgbClr val="4E8FA8"/>
+                  <a:srgbClr val="8FBACE"/>
                 </a:solidFill>
                 <a:latin typeface="+mj-lt"/>
                 <a:ea typeface="+mj-ea"/>
@@ -5955,7 +6100,7 @@
             <a:avLst/>
           </a:prstGeom>
           <a:solidFill>
-            <a:srgbClr val="4E8FA8"/>
+            <a:srgbClr val="8FBACE"/>
           </a:solidFill>
           <a:ln>
             <a:noFill/>
@@ -6057,7 +6202,7 @@
                 <a:spcPts val="300"/>
               </a:spcBef>
               <a:buClr>
-                <a:srgbClr val="4E8FA8"/>
+                <a:srgbClr val="8FBACE"/>
               </a:buClr>
               <a:buSzPct val="90000"/>
               <a:buFont typeface="Arial"/>
@@ -6081,7 +6226,7 @@
                 <a:spcPts val="300"/>
               </a:spcBef>
               <a:buClr>
-                <a:srgbClr val="4E8FA8"/>
+                <a:srgbClr val="8FBACE"/>
               </a:buClr>
               <a:buSzPct val="90000"/>
               <a:buFont typeface="Arial"/>
@@ -6105,7 +6250,7 @@
                 <a:spcPts val="300"/>
               </a:spcBef>
               <a:buClr>
-                <a:srgbClr val="4E8FA8"/>
+                <a:srgbClr val="8FBACE"/>
               </a:buClr>
               <a:buSzPct val="90000"/>
               <a:buFont typeface="Arial"/>
@@ -6131,7 +6276,7 @@
                 <a:spcPts val="300"/>
               </a:spcBef>
               <a:buClr>
-                <a:srgbClr val="4E8FA8"/>
+                <a:srgbClr val="8FBACE"/>
               </a:buClr>
               <a:buSzPct val="90000"/>
               <a:buFont typeface="Arial"/>
@@ -6160,7 +6305,7 @@
                 <a:spcPts val="300"/>
               </a:spcBef>
               <a:buClr>
-                <a:srgbClr val="4E8FA8"/>
+                <a:srgbClr val="8FBACE"/>
               </a:buClr>
               <a:buSzPct val="90000"/>
               <a:buFont typeface="Arial"/>
@@ -6189,7 +6334,7 @@
                 <a:spcPts val="300"/>
               </a:spcBef>
               <a:buClr>
-                <a:srgbClr val="4E8FA8"/>
+                <a:srgbClr val="8FBACE"/>
               </a:buClr>
               <a:buSzPct val="90000"/>
               <a:buFont typeface="Arial"/>
@@ -6558,7 +6703,7 @@
         <p:spPr>
           <a:xfrm>
             <a:off x="914400" y="1691640"/>
-            <a:ext cx="10363200" cy="365760"/>
+            <a:ext cx="10363200" cy="228600"/>
           </a:xfrm>
           <a:prstGeom prst="rect">
             <a:avLst/>
@@ -6574,7 +6719,7 @@
               <a:buNone/>
               <a:defRPr lang="th-TH" sz="1200" dirty="0">
                 <a:solidFill>
-                  <a:srgbClr val="A4A4A4"/>
+                  <a:srgbClr val="5F5F5F"/>
                 </a:solidFill>
                 <a:latin typeface="+mn-lt"/>
                 <a:ea typeface="+mn-ea"/>
@@ -6592,7 +6737,7 @@
             <a:r>
               <a:rPr lang="th-TH" sz="1200" dirty="0">
                 <a:solidFill>
-                  <a:srgbClr val="A4A4A4"/>
+                  <a:srgbClr val="5F5F5F"/>
                 </a:solidFill>
                 <a:latin typeface="+mn-lt"/>
                 <a:ea typeface="+mn-ea"/>
@@ -6615,8 +6760,8 @@
         </p:nvSpPr>
         <p:spPr>
           <a:xfrm>
-            <a:off x="914400" y="2148840"/>
-            <a:ext cx="10363200" cy="3520440"/>
+            <a:off x="914400" y="2011680"/>
+            <a:ext cx="10363200" cy="3154680"/>
           </a:xfrm>
           <a:prstGeom prst="rect">
             <a:avLst/>
@@ -6663,7 +6808,7 @@
         </p:nvSpPr>
         <p:spPr>
           <a:xfrm>
-            <a:off x="914400" y="5761200"/>
+            <a:off x="914400" y="5257800"/>
             <a:ext cx="10363200" cy="274320"/>
           </a:xfrm>
           <a:prstGeom prst="rect">
@@ -6680,7 +6825,7 @@
               <a:buNone/>
               <a:defRPr lang="th-TH" sz="1000" dirty="0">
                 <a:solidFill>
-                  <a:srgbClr val="A4A4A4"/>
+                  <a:srgbClr val="5F5F5F"/>
                 </a:solidFill>
                 <a:latin typeface="+mn-lt"/>
                 <a:ea typeface="+mn-ea"/>
@@ -6698,13 +6843,158 @@
             <a:r>
               <a:rPr lang="th-TH" sz="1000" dirty="0">
                 <a:solidFill>
-                  <a:srgbClr val="A4A4A4"/>
+                  <a:srgbClr val="5F5F5F"/>
                 </a:solidFill>
                 <a:latin typeface="+mn-lt"/>
                 <a:ea typeface="+mn-ea"/>
                 <a:cs typeface="+mn-cs"/>
               </a:rPr>
               <a:t>ที่มาของข้อมูล / หมายเหตุ</a:t>
+            </a:r>
+          </a:p>
+        </p:txBody>
+      </p:sp>
+      <p:sp>
+        <p:nvSpPr>
+          <p:cNvPr id="15" name="Takeaway Band"/>
+          <p:cNvSpPr/>
+          <p:nvPr/>
+        </p:nvSpPr>
+        <p:spPr>
+          <a:xfrm>
+            <a:off x="914400" y="5623560"/>
+            <a:ext cx="10363200" cy="411480"/>
+          </a:xfrm>
+          <a:prstGeom prst="rect">
+            <a:avLst/>
+          </a:prstGeom>
+          <a:solidFill>
+            <a:srgbClr val="E8F6F5"/>
+          </a:solidFill>
+          <a:ln>
+            <a:noFill/>
+          </a:ln>
+        </p:spPr>
+        <p:txBody>
+          <a:bodyPr/>
+          <a:lstStyle/>
+          <a:p>
+            <a:endParaRPr lang="th-TH"/>
+          </a:p>
+        </p:txBody>
+      </p:sp>
+      <p:sp>
+        <p:nvSpPr>
+          <p:cNvPr id="16" name="Takeaway Label"/>
+          <p:cNvSpPr>
+            <a:spLocks noGrp="1"/>
+          </p:cNvSpPr>
+          <p:nvPr>
+            <p:ph type="body" idx="4"/>
+          </p:nvPr>
+        </p:nvSpPr>
+        <p:spPr>
+          <a:xfrm>
+            <a:off x="1097280" y="5684520"/>
+            <a:ext cx="1828800" cy="289560"/>
+          </a:xfrm>
+          <a:prstGeom prst="rect">
+            <a:avLst/>
+          </a:prstGeom>
+        </p:spPr>
+        <p:txBody>
+          <a:bodyPr wrap="square" anchor="ctr" lIns="0" tIns="0" rIns="0" bIns="0" rtlCol="0"/>
+          <a:lstStyle>
+            <a:lvl1pPr algn="l" marL="0" indent="0">
+              <a:lnSpc>
+                <a:spcPct val="100000"/>
+              </a:lnSpc>
+              <a:buNone/>
+              <a:defRPr lang="th-TH" sz="1200" b="1" spc="120" dirty="0">
+                <a:solidFill>
+                  <a:srgbClr val="216B7F"/>
+                </a:solidFill>
+                <a:latin typeface="+mn-lt"/>
+                <a:ea typeface="+mn-ea"/>
+                <a:cs typeface="+mn-cs"/>
+              </a:defRPr>
+            </a:lvl1pPr>
+          </a:lstStyle>
+          <a:p>
+            <a:pPr algn="l" marL="0" indent="0">
+              <a:lnSpc>
+                <a:spcPct val="100000"/>
+              </a:lnSpc>
+              <a:buNone/>
+            </a:pPr>
+            <a:r>
+              <a:rPr lang="th-TH" sz="1200" b="1" spc="120" dirty="0">
+                <a:solidFill>
+                  <a:srgbClr val="216B7F"/>
+                </a:solidFill>
+                <a:latin typeface="+mn-lt"/>
+                <a:ea typeface="+mn-ea"/>
+                <a:cs typeface="+mn-cs"/>
+              </a:rPr>
+              <a:t>สรุป</a:t>
+            </a:r>
+          </a:p>
+        </p:txBody>
+      </p:sp>
+      <p:sp>
+        <p:nvSpPr>
+          <p:cNvPr id="17" name="Takeaway Copy"/>
+          <p:cNvSpPr>
+            <a:spLocks noGrp="1"/>
+          </p:cNvSpPr>
+          <p:nvPr>
+            <p:ph type="body" idx="5"/>
+          </p:nvPr>
+        </p:nvSpPr>
+        <p:spPr>
+          <a:xfrm>
+            <a:off x="2926080" y="5684520"/>
+            <a:ext cx="8168640" cy="289560"/>
+          </a:xfrm>
+          <a:prstGeom prst="rect">
+            <a:avLst/>
+          </a:prstGeom>
+        </p:spPr>
+        <p:txBody>
+          <a:bodyPr wrap="square" anchor="ctr" lIns="0" tIns="0" rIns="0" bIns="0" rtlCol="0"/>
+          <a:lstStyle>
+            <a:lvl1pPr algn="l" marL="0" indent="0">
+              <a:lnSpc>
+                <a:spcPct val="100000"/>
+              </a:lnSpc>
+              <a:buNone/>
+              <a:defRPr lang="th-TH" sz="1400" dirty="0">
+                <a:solidFill>
+                  <a:srgbClr val="333333"/>
+                </a:solidFill>
+                <a:latin typeface="+mn-lt"/>
+                <a:ea typeface="+mn-ea"/>
+                <a:cs typeface="+mn-cs"/>
+              </a:defRPr>
+            </a:lvl1pPr>
+          </a:lstStyle>
+          <a:p>
+            <a:pPr algn="l" marL="0" indent="0">
+              <a:lnSpc>
+                <a:spcPct val="100000"/>
+              </a:lnSpc>
+              <a:buNone/>
+            </a:pPr>
+            <a:r>
+              <a:rPr lang="th-TH" sz="1400" dirty="0">
+                <a:solidFill>
+                  <a:srgbClr val="333333"/>
+                </a:solidFill>
+                <a:latin typeface="+mn-lt"/>
+                <a:ea typeface="+mn-ea"/>
+                <a:cs typeface="+mn-cs"/>
+              </a:rPr>
+              <a:t>ประเด็นสรุปหนึ่งบรรทัด</a:t>
             </a:r>
           </a:p>
         </p:txBody>
@@ -6767,7 +7057,7 @@
               <a:buNone/>
               <a:defRPr lang="th-TH" sz="1000" dirty="0">
                 <a:solidFill>
-                  <a:srgbClr val="A4A4A4"/>
+                  <a:srgbClr val="5F5F5F"/>
                 </a:solidFill>
                 <a:latin typeface="+mn-lt"/>
                 <a:ea typeface="+mn-ea"/>
@@ -6815,7 +7105,7 @@
               <a:buNone/>
               <a:defRPr lang="th-TH" sz="1000" dirty="0">
                 <a:solidFill>
-                  <a:srgbClr val="A4A4A4"/>
+                  <a:srgbClr val="5F5F5F"/>
                 </a:solidFill>
                 <a:latin typeface="+mn-lt"/>
                 <a:ea typeface="+mn-ea"/>
@@ -6863,7 +7153,7 @@
               <a:buNone/>
               <a:defRPr lang="th-TH" sz="1000" dirty="0">
                 <a:solidFill>
-                  <a:srgbClr val="A4A4A4"/>
+                  <a:srgbClr val="5F5F5F"/>
                 </a:solidFill>
                 <a:latin typeface="+mn-lt"/>
                 <a:ea typeface="+mn-ea"/>
@@ -6878,7 +7168,7 @@
             <a:fld id="{B7E3A1C2-4F5D-4A88-9C1E-6D2F0A93B451}" type="slidenum">
               <a:rPr lang="th-TH" sz="1000">
                 <a:solidFill>
-                  <a:srgbClr val="A4A4A4"/>
+                  <a:srgbClr val="5F5F5F"/>
                 </a:solidFill>
                 <a:latin typeface="+mn-lt"/>
                 <a:cs typeface="+mn-cs"/>
@@ -7096,7 +7386,7 @@
               <a:buNone/>
               <a:defRPr lang="th-TH" sz="6000" b="1" dirty="0">
                 <a:solidFill>
-                  <a:srgbClr val="4E8FA8"/>
+                  <a:srgbClr val="8FBACE"/>
                 </a:solidFill>
                 <a:latin typeface="+mj-lt"/>
                 <a:ea typeface="+mj-ea"/>
@@ -7114,7 +7404,7 @@
             <a:r>
               <a:rPr lang="th-TH" sz="6000" b="1" dirty="0">
                 <a:solidFill>
-                  <a:srgbClr val="4E8FA8"/>
+                  <a:srgbClr val="8FBACE"/>
                 </a:solidFill>
                 <a:latin typeface="+mj-lt"/>
                 <a:ea typeface="+mj-ea"/>
@@ -7140,7 +7430,7 @@
             <a:avLst/>
           </a:prstGeom>
           <a:solidFill>
-            <a:srgbClr val="4E8FA8"/>
+            <a:srgbClr val="8FBACE"/>
           </a:solidFill>
           <a:ln>
             <a:noFill/>
@@ -7660,7 +7950,7 @@
                 <a:spcPts val="700"/>
               </a:spcBef>
               <a:buClr>
-                <a:srgbClr val="A4A4A4"/>
+                <a:srgbClr val="5F5F5F"/>
               </a:buClr>
               <a:buSzPct val="90000"/>
               <a:buFont typeface="Arial"/>
@@ -7682,14 +7972,14 @@
                 <a:spcPts val="500"/>
               </a:spcBef>
               <a:buClr>
-                <a:srgbClr val="A4A4A4"/>
+                <a:srgbClr val="5F5F5F"/>
               </a:buClr>
               <a:buSzPct val="90000"/>
               <a:buFont typeface="Arial"/>
               <a:buChar char="·"/>
               <a:defRPr lang="th-TH" sz="1400" dirty="0">
                 <a:solidFill>
-                  <a:srgbClr val="A4A4A4"/>
+                  <a:srgbClr val="5F5F5F"/>
                 </a:solidFill>
                 <a:latin typeface="+mn-lt"/>
                 <a:ea typeface="+mn-ea"/>
@@ -7733,7 +8023,7 @@
                 <a:spcPts val="700"/>
               </a:spcBef>
               <a:buClr>
-                <a:srgbClr val="A4A4A4"/>
+                <a:srgbClr val="5F5F5F"/>
               </a:buClr>
               <a:buSzPct val="90000"/>
               <a:buFont typeface="Arial"/>
@@ -7760,7 +8050,7 @@
                 <a:spcPts val="500"/>
               </a:spcBef>
               <a:buClr>
-                <a:srgbClr val="A4A4A4"/>
+                <a:srgbClr val="5F5F5F"/>
               </a:buClr>
               <a:buSzPct val="90000"/>
               <a:buFont typeface="Arial"/>
@@ -7769,7 +8059,7 @@
             <a:r>
               <a:rPr lang="th-TH" sz="1400" dirty="0">
                 <a:solidFill>
-                  <a:srgbClr val="A4A4A4"/>
+                  <a:srgbClr val="5F5F5F"/>
                 </a:solidFill>
                 <a:latin typeface="+mn-lt"/>
                 <a:ea typeface="+mn-ea"/>
@@ -7838,7 +8128,7 @@
               <a:buNone/>
               <a:defRPr lang="th-TH" sz="1000" dirty="0">
                 <a:solidFill>
-                  <a:srgbClr val="A4A4A4"/>
+                  <a:srgbClr val="5F5F5F"/>
                 </a:solidFill>
                 <a:latin typeface="+mn-lt"/>
                 <a:ea typeface="+mn-ea"/>
@@ -7886,7 +8176,7 @@
               <a:buNone/>
               <a:defRPr lang="th-TH" sz="1000" dirty="0">
                 <a:solidFill>
-                  <a:srgbClr val="A4A4A4"/>
+                  <a:srgbClr val="5F5F5F"/>
                 </a:solidFill>
                 <a:latin typeface="+mn-lt"/>
                 <a:ea typeface="+mn-ea"/>
@@ -7934,7 +8224,7 @@
               <a:buNone/>
               <a:defRPr lang="th-TH" sz="1000" dirty="0">
                 <a:solidFill>
-                  <a:srgbClr val="A4A4A4"/>
+                  <a:srgbClr val="5F5F5F"/>
                 </a:solidFill>
                 <a:latin typeface="+mn-lt"/>
                 <a:ea typeface="+mn-ea"/>
@@ -7949,7 +8239,7 @@
             <a:fld id="{B7E3A1C2-4F5D-4A88-9C1E-6D2F0A93B451}" type="slidenum">
               <a:rPr lang="th-TH" sz="1000">
                 <a:solidFill>
-                  <a:srgbClr val="A4A4A4"/>
+                  <a:srgbClr val="5F5F5F"/>
                 </a:solidFill>
                 <a:latin typeface="+mn-lt"/>
                 <a:cs typeface="+mn-cs"/>
@@ -8156,7 +8446,7 @@
                 <a:spcPts val="700"/>
               </a:spcBef>
               <a:buClr>
-                <a:srgbClr val="A4A4A4"/>
+                <a:srgbClr val="5F5F5F"/>
               </a:buClr>
               <a:buSzPct val="90000"/>
               <a:buFont typeface="Arial"/>
@@ -8178,14 +8468,14 @@
                 <a:spcPts val="500"/>
               </a:spcBef>
               <a:buClr>
-                <a:srgbClr val="A4A4A4"/>
+                <a:srgbClr val="5F5F5F"/>
               </a:buClr>
               <a:buSzPct val="90000"/>
               <a:buFont typeface="Arial"/>
               <a:buChar char="·"/>
               <a:defRPr lang="th-TH" sz="1400" dirty="0">
                 <a:solidFill>
-                  <a:srgbClr val="A4A4A4"/>
+                  <a:srgbClr val="5F5F5F"/>
                 </a:solidFill>
                 <a:latin typeface="+mn-lt"/>
                 <a:ea typeface="+mn-ea"/>
@@ -8229,7 +8519,7 @@
                 <a:spcPts val="700"/>
               </a:spcBef>
               <a:buClr>
-                <a:srgbClr val="A4A4A4"/>
+                <a:srgbClr val="5F5F5F"/>
               </a:buClr>
               <a:buSzPct val="90000"/>
               <a:buFont typeface="Arial"/>
@@ -8256,7 +8546,7 @@
                 <a:spcPts val="500"/>
               </a:spcBef>
               <a:buClr>
-                <a:srgbClr val="A4A4A4"/>
+                <a:srgbClr val="5F5F5F"/>
               </a:buClr>
               <a:buSzPct val="90000"/>
               <a:buFont typeface="Arial"/>
@@ -8265,7 +8555,7 @@
             <a:r>
               <a:rPr lang="th-TH" sz="1400" dirty="0">
                 <a:solidFill>
-                  <a:srgbClr val="A4A4A4"/>
+                  <a:srgbClr val="5F5F5F"/>
                 </a:solidFill>
                 <a:latin typeface="+mn-lt"/>
                 <a:ea typeface="+mn-ea"/>
@@ -8328,7 +8618,7 @@
                 <a:spcPts val="700"/>
               </a:spcBef>
               <a:buClr>
-                <a:srgbClr val="A4A4A4"/>
+                <a:srgbClr val="5F5F5F"/>
               </a:buClr>
               <a:buSzPct val="90000"/>
               <a:buFont typeface="Arial"/>
@@ -8350,14 +8640,14 @@
                 <a:spcPts val="500"/>
               </a:spcBef>
               <a:buClr>
-                <a:srgbClr val="A4A4A4"/>
+                <a:srgbClr val="5F5F5F"/>
               </a:buClr>
               <a:buSzPct val="90000"/>
               <a:buFont typeface="Arial"/>
               <a:buChar char="·"/>
               <a:defRPr lang="th-TH" sz="1400" dirty="0">
                 <a:solidFill>
-                  <a:srgbClr val="A4A4A4"/>
+                  <a:srgbClr val="5F5F5F"/>
                 </a:solidFill>
                 <a:latin typeface="+mn-lt"/>
                 <a:ea typeface="+mn-ea"/>
@@ -8401,7 +8691,7 @@
                 <a:spcPts val="700"/>
               </a:spcBef>
               <a:buClr>
-                <a:srgbClr val="A4A4A4"/>
+                <a:srgbClr val="5F5F5F"/>
               </a:buClr>
               <a:buSzPct val="90000"/>
               <a:buFont typeface="Arial"/>
@@ -8428,7 +8718,7 @@
                 <a:spcPts val="500"/>
               </a:spcBef>
               <a:buClr>
-                <a:srgbClr val="A4A4A4"/>
+                <a:srgbClr val="5F5F5F"/>
               </a:buClr>
               <a:buSzPct val="90000"/>
               <a:buFont typeface="Arial"/>
@@ -8437,7 +8727,7 @@
             <a:r>
               <a:rPr lang="th-TH" sz="1400" dirty="0">
                 <a:solidFill>
-                  <a:srgbClr val="A4A4A4"/>
+                  <a:srgbClr val="5F5F5F"/>
                 </a:solidFill>
                 <a:latin typeface="+mn-lt"/>
                 <a:ea typeface="+mn-ea"/>
@@ -8506,7 +8796,7 @@
               <a:buNone/>
               <a:defRPr lang="th-TH" sz="1000" dirty="0">
                 <a:solidFill>
-                  <a:srgbClr val="A4A4A4"/>
+                  <a:srgbClr val="5F5F5F"/>
                 </a:solidFill>
                 <a:latin typeface="+mn-lt"/>
                 <a:ea typeface="+mn-ea"/>
@@ -8554,7 +8844,7 @@
               <a:buNone/>
               <a:defRPr lang="th-TH" sz="1000" dirty="0">
                 <a:solidFill>
-                  <a:srgbClr val="A4A4A4"/>
+                  <a:srgbClr val="5F5F5F"/>
                 </a:solidFill>
                 <a:latin typeface="+mn-lt"/>
                 <a:ea typeface="+mn-ea"/>
@@ -8602,7 +8892,7 @@
               <a:buNone/>
               <a:defRPr lang="th-TH" sz="1000" dirty="0">
                 <a:solidFill>
-                  <a:srgbClr val="A4A4A4"/>
+                  <a:srgbClr val="5F5F5F"/>
                 </a:solidFill>
                 <a:latin typeface="+mn-lt"/>
                 <a:ea typeface="+mn-ea"/>
@@ -8617,7 +8907,7 @@
             <a:fld id="{B7E3A1C2-4F5D-4A88-9C1E-6D2F0A93B451}" type="slidenum">
               <a:rPr lang="th-TH" sz="1000">
                 <a:solidFill>
-                  <a:srgbClr val="A4A4A4"/>
+                  <a:srgbClr val="5F5F5F"/>
                 </a:solidFill>
                 <a:latin typeface="+mn-lt"/>
                 <a:cs typeface="+mn-cs"/>
@@ -9376,7 +9666,7 @@
               <a:buNone/>
               <a:defRPr lang="th-TH" sz="1000" dirty="0">
                 <a:solidFill>
-                  <a:srgbClr val="A4A4A4"/>
+                  <a:srgbClr val="5F5F5F"/>
                 </a:solidFill>
                 <a:latin typeface="+mn-lt"/>
                 <a:ea typeface="+mn-ea"/>
@@ -9424,7 +9714,7 @@
               <a:buNone/>
               <a:defRPr lang="th-TH" sz="1000" dirty="0">
                 <a:solidFill>
-                  <a:srgbClr val="A4A4A4"/>
+                  <a:srgbClr val="5F5F5F"/>
                 </a:solidFill>
                 <a:latin typeface="+mn-lt"/>
                 <a:ea typeface="+mn-ea"/>
@@ -9472,7 +9762,7 @@
               <a:buNone/>
               <a:defRPr lang="th-TH" sz="1000" dirty="0">
                 <a:solidFill>
-                  <a:srgbClr val="A4A4A4"/>
+                  <a:srgbClr val="5F5F5F"/>
                 </a:solidFill>
                 <a:latin typeface="+mn-lt"/>
                 <a:ea typeface="+mn-ea"/>
@@ -9487,7 +9777,7 @@
             <a:fld id="{B7E3A1C2-4F5D-4A88-9C1E-6D2F0A93B451}" type="slidenum">
               <a:rPr lang="th-TH" sz="1000">
                 <a:solidFill>
-                  <a:srgbClr val="A4A4A4"/>
+                  <a:srgbClr val="5F5F5F"/>
                 </a:solidFill>
                 <a:latin typeface="+mn-lt"/>
                 <a:cs typeface="+mn-cs"/>
@@ -9729,7 +10019,7 @@
               <a:buNone/>
               <a:defRPr lang="th-TH" sz="1200" b="1" spc="120" dirty="0">
                 <a:solidFill>
-                  <a:srgbClr val="A4A4A4"/>
+                  <a:srgbClr val="5F5F5F"/>
                 </a:solidFill>
                 <a:latin typeface="+mn-lt"/>
                 <a:ea typeface="+mn-ea"/>
@@ -9747,7 +10037,7 @@
             <a:r>
               <a:rPr lang="th-TH" sz="1200" b="1" spc="120" dirty="0">
                 <a:solidFill>
-                  <a:srgbClr val="A4A4A4"/>
+                  <a:srgbClr val="5F5F5F"/>
                 </a:solidFill>
                 <a:latin typeface="+mn-lt"/>
                 <a:ea typeface="+mn-ea"/>
@@ -9874,7 +10164,7 @@
               <a:buNone/>
               <a:defRPr lang="th-TH" sz="1200" b="1" spc="120" dirty="0">
                 <a:solidFill>
-                  <a:srgbClr val="A4A4A4"/>
+                  <a:srgbClr val="5F5F5F"/>
                 </a:solidFill>
                 <a:latin typeface="+mn-lt"/>
                 <a:ea typeface="+mn-ea"/>
@@ -9892,7 +10182,7 @@
             <a:r>
               <a:rPr lang="th-TH" sz="1200" b="1" spc="120" dirty="0">
                 <a:solidFill>
-                  <a:srgbClr val="A4A4A4"/>
+                  <a:srgbClr val="5F5F5F"/>
                 </a:solidFill>
                 <a:latin typeface="+mn-lt"/>
                 <a:ea typeface="+mn-ea"/>
@@ -10019,7 +10309,7 @@
               <a:buNone/>
               <a:defRPr lang="th-TH" sz="1200" b="1" spc="120" dirty="0">
                 <a:solidFill>
-                  <a:srgbClr val="A4A4A4"/>
+                  <a:srgbClr val="5F5F5F"/>
                 </a:solidFill>
                 <a:latin typeface="+mn-lt"/>
                 <a:ea typeface="+mn-ea"/>
@@ -10037,7 +10327,7 @@
             <a:r>
               <a:rPr lang="th-TH" sz="1200" b="1" spc="120" dirty="0">
                 <a:solidFill>
-                  <a:srgbClr val="A4A4A4"/>
+                  <a:srgbClr val="5F5F5F"/>
                 </a:solidFill>
                 <a:latin typeface="+mn-lt"/>
                 <a:ea typeface="+mn-ea"/>
@@ -10077,7 +10367,7 @@
               <a:buNone/>
               <a:defRPr lang="th-TH" sz="1400" dirty="0">
                 <a:solidFill>
-                  <a:srgbClr val="A4A4A4"/>
+                  <a:srgbClr val="5F5F5F"/>
                 </a:solidFill>
                 <a:latin typeface="+mn-lt"/>
                 <a:ea typeface="+mn-ea"/>
@@ -10095,7 +10385,7 @@
             <a:r>
               <a:rPr lang="th-TH" sz="1400" dirty="0">
                 <a:solidFill>
-                  <a:srgbClr val="A4A4A4"/>
+                  <a:srgbClr val="5F5F5F"/>
                 </a:solidFill>
                 <a:latin typeface="+mn-lt"/>
                 <a:ea typeface="+mn-ea"/>
@@ -10164,7 +10454,7 @@
               <a:buNone/>
               <a:defRPr lang="th-TH" sz="1000" dirty="0">
                 <a:solidFill>
-                  <a:srgbClr val="A4A4A4"/>
+                  <a:srgbClr val="5F5F5F"/>
                 </a:solidFill>
                 <a:latin typeface="+mn-lt"/>
                 <a:ea typeface="+mn-ea"/>
@@ -10212,7 +10502,7 @@
               <a:buNone/>
               <a:defRPr lang="th-TH" sz="1000" dirty="0">
                 <a:solidFill>
-                  <a:srgbClr val="A4A4A4"/>
+                  <a:srgbClr val="5F5F5F"/>
                 </a:solidFill>
                 <a:latin typeface="+mn-lt"/>
                 <a:ea typeface="+mn-ea"/>
@@ -10260,7 +10550,7 @@
               <a:buNone/>
               <a:defRPr lang="th-TH" sz="1000" dirty="0">
                 <a:solidFill>
-                  <a:srgbClr val="A4A4A4"/>
+                  <a:srgbClr val="5F5F5F"/>
                 </a:solidFill>
                 <a:latin typeface="+mn-lt"/>
                 <a:ea typeface="+mn-ea"/>
@@ -10275,7 +10565,7 @@
             <a:fld id="{B7E3A1C2-4F5D-4A88-9C1E-6D2F0A93B451}" type="slidenum">
               <a:rPr lang="th-TH" sz="1000">
                 <a:solidFill>
-                  <a:srgbClr val="A4A4A4"/>
+                  <a:srgbClr val="5F5F5F"/>
                 </a:solidFill>
                 <a:latin typeface="+mn-lt"/>
                 <a:cs typeface="+mn-cs"/>
@@ -10541,7 +10831,7 @@
               <a:buNone/>
               <a:defRPr lang="th-TH" sz="1400" spc="60" dirty="0">
                 <a:solidFill>
-                  <a:srgbClr val="A4A4A4"/>
+                  <a:srgbClr val="5F5F5F"/>
                 </a:solidFill>
                 <a:latin typeface="+mn-lt"/>
                 <a:ea typeface="+mn-ea"/>
@@ -10559,7 +10849,7 @@
             <a:r>
               <a:rPr lang="th-TH" sz="1400" spc="60" dirty="0">
                 <a:solidFill>
-                  <a:srgbClr val="A4A4A4"/>
+                  <a:srgbClr val="5F5F5F"/>
                 </a:solidFill>
                 <a:latin typeface="+mn-lt"/>
                 <a:ea typeface="+mn-ea"/>
@@ -10628,7 +10918,7 @@
               <a:buNone/>
               <a:defRPr lang="th-TH" sz="1000" dirty="0">
                 <a:solidFill>
-                  <a:srgbClr val="A4A4A4"/>
+                  <a:srgbClr val="5F5F5F"/>
                 </a:solidFill>
                 <a:latin typeface="+mn-lt"/>
                 <a:ea typeface="+mn-ea"/>
@@ -10676,7 +10966,7 @@
               <a:buNone/>
               <a:defRPr lang="th-TH" sz="1000" dirty="0">
                 <a:solidFill>
-                  <a:srgbClr val="A4A4A4"/>
+                  <a:srgbClr val="5F5F5F"/>
                 </a:solidFill>
                 <a:latin typeface="+mn-lt"/>
                 <a:ea typeface="+mn-ea"/>
@@ -10724,7 +11014,7 @@
               <a:buNone/>
               <a:defRPr lang="th-TH" sz="1000" dirty="0">
                 <a:solidFill>
-                  <a:srgbClr val="A4A4A4"/>
+                  <a:srgbClr val="5F5F5F"/>
                 </a:solidFill>
                 <a:latin typeface="+mn-lt"/>
                 <a:ea typeface="+mn-ea"/>
@@ -10739,7 +11029,7 @@
             <a:fld id="{B7E3A1C2-4F5D-4A88-9C1E-6D2F0A93B451}" type="slidenum">
               <a:rPr lang="th-TH" sz="1000">
                 <a:solidFill>
-                  <a:srgbClr val="A4A4A4"/>
+                  <a:srgbClr val="5F5F5F"/>
                 </a:solidFill>
                 <a:latin typeface="+mn-lt"/>
                 <a:cs typeface="+mn-cs"/>
@@ -10836,7 +11126,7 @@
               <a:buNone/>
               <a:defRPr lang="th-TH" sz="1400" dirty="0">
                 <a:solidFill>
-                  <a:srgbClr val="A4A4A4"/>
+                  <a:srgbClr val="5F5F5F"/>
                 </a:solidFill>
                 <a:latin typeface="+mn-lt"/>
                 <a:ea typeface="+mn-ea"/>
@@ -11384,7 +11674,7 @@
               <a:buNone/>
               <a:defRPr lang="th-TH" sz="1400" dirty="0">
                 <a:solidFill>
-                  <a:srgbClr val="A4A4A4"/>
+                  <a:srgbClr val="5F5F5F"/>
                 </a:solidFill>
                 <a:latin typeface="+mn-lt"/>
                 <a:ea typeface="+mn-ea"/>
@@ -11402,7 +11692,7 @@
             <a:r>
               <a:rPr lang="th-TH" sz="1400" dirty="0">
                 <a:solidFill>
-                  <a:srgbClr val="A4A4A4"/>
+                  <a:srgbClr val="5F5F5F"/>
                 </a:solidFill>
                 <a:latin typeface="+mn-lt"/>
                 <a:ea typeface="+mn-ea"/>
@@ -11458,6 +11748,151 @@
               <a:buNone/>
             </a:pPr>
             <a:endParaRPr lang="th-TH" sz="1800"/>
+          </a:p>
+        </p:txBody>
+      </p:sp>
+      <p:sp>
+        <p:nvSpPr>
+          <p:cNvPr id="14" name="Takeaway Band"/>
+          <p:cNvSpPr/>
+          <p:nvPr/>
+        </p:nvSpPr>
+        <p:spPr>
+          <a:xfrm>
+            <a:off x="914400" y="5623560"/>
+            <a:ext cx="10363200" cy="411480"/>
+          </a:xfrm>
+          <a:prstGeom prst="rect">
+            <a:avLst/>
+          </a:prstGeom>
+          <a:solidFill>
+            <a:srgbClr val="E8F6F5"/>
+          </a:solidFill>
+          <a:ln>
+            <a:noFill/>
+          </a:ln>
+        </p:spPr>
+        <p:txBody>
+          <a:bodyPr/>
+          <a:lstStyle/>
+          <a:p>
+            <a:endParaRPr lang="th-TH"/>
+          </a:p>
+        </p:txBody>
+      </p:sp>
+      <p:sp>
+        <p:nvSpPr>
+          <p:cNvPr id="15" name="Takeaway Label"/>
+          <p:cNvSpPr>
+            <a:spLocks noGrp="1"/>
+          </p:cNvSpPr>
+          <p:nvPr>
+            <p:ph type="body" idx="3"/>
+          </p:nvPr>
+        </p:nvSpPr>
+        <p:spPr>
+          <a:xfrm>
+            <a:off x="1097280" y="5684520"/>
+            <a:ext cx="1828800" cy="289560"/>
+          </a:xfrm>
+          <a:prstGeom prst="rect">
+            <a:avLst/>
+          </a:prstGeom>
+        </p:spPr>
+        <p:txBody>
+          <a:bodyPr wrap="square" anchor="ctr" lIns="0" tIns="0" rIns="0" bIns="0" rtlCol="0"/>
+          <a:lstStyle>
+            <a:lvl1pPr algn="l" marL="0" indent="0">
+              <a:lnSpc>
+                <a:spcPct val="100000"/>
+              </a:lnSpc>
+              <a:buNone/>
+              <a:defRPr lang="th-TH" sz="1200" b="1" spc="120" dirty="0">
+                <a:solidFill>
+                  <a:srgbClr val="216B7F"/>
+                </a:solidFill>
+                <a:latin typeface="+mn-lt"/>
+                <a:ea typeface="+mn-ea"/>
+                <a:cs typeface="+mn-cs"/>
+              </a:defRPr>
+            </a:lvl1pPr>
+          </a:lstStyle>
+          <a:p>
+            <a:pPr algn="l" marL="0" indent="0">
+              <a:lnSpc>
+                <a:spcPct val="100000"/>
+              </a:lnSpc>
+              <a:buNone/>
+            </a:pPr>
+            <a:r>
+              <a:rPr lang="th-TH" sz="1200" b="1" spc="120" dirty="0">
+                <a:solidFill>
+                  <a:srgbClr val="216B7F"/>
+                </a:solidFill>
+                <a:latin typeface="+mn-lt"/>
+                <a:ea typeface="+mn-ea"/>
+                <a:cs typeface="+mn-cs"/>
+              </a:rPr>
+              <a:t>สรุป</a:t>
+            </a:r>
+          </a:p>
+        </p:txBody>
+      </p:sp>
+      <p:sp>
+        <p:nvSpPr>
+          <p:cNvPr id="16" name="Takeaway Copy"/>
+          <p:cNvSpPr>
+            <a:spLocks noGrp="1"/>
+          </p:cNvSpPr>
+          <p:nvPr>
+            <p:ph type="body" idx="4"/>
+          </p:nvPr>
+        </p:nvSpPr>
+        <p:spPr>
+          <a:xfrm>
+            <a:off x="2926080" y="5684520"/>
+            <a:ext cx="8168640" cy="289560"/>
+          </a:xfrm>
+          <a:prstGeom prst="rect">
+            <a:avLst/>
+          </a:prstGeom>
+        </p:spPr>
+        <p:txBody>
+          <a:bodyPr wrap="square" anchor="ctr" lIns="0" tIns="0" rIns="0" bIns="0" rtlCol="0"/>
+          <a:lstStyle>
+            <a:lvl1pPr algn="l" marL="0" indent="0">
+              <a:lnSpc>
+                <a:spcPct val="100000"/>
+              </a:lnSpc>
+              <a:buNone/>
+              <a:defRPr lang="th-TH" sz="1400" dirty="0">
+                <a:solidFill>
+                  <a:srgbClr val="333333"/>
+                </a:solidFill>
+                <a:latin typeface="+mn-lt"/>
+                <a:ea typeface="+mn-ea"/>
+                <a:cs typeface="+mn-cs"/>
+              </a:defRPr>
+            </a:lvl1pPr>
+          </a:lstStyle>
+          <a:p>
+            <a:pPr algn="l" marL="0" indent="0">
+              <a:lnSpc>
+                <a:spcPct val="100000"/>
+              </a:lnSpc>
+              <a:buNone/>
+            </a:pPr>
+            <a:r>
+              <a:rPr lang="th-TH" sz="1400" dirty="0">
+                <a:solidFill>
+                  <a:srgbClr val="333333"/>
+                </a:solidFill>
+                <a:latin typeface="+mn-lt"/>
+                <a:ea typeface="+mn-ea"/>
+                <a:cs typeface="+mn-cs"/>
+              </a:rPr>
+              <a:t>ประเด็นสรุปหนึ่งบรรทัด</a:t>
+            </a:r>
           </a:p>
         </p:txBody>
       </p:sp>
@@ -11519,7 +11954,7 @@
               <a:buNone/>
               <a:defRPr lang="th-TH" sz="1000" dirty="0">
                 <a:solidFill>
-                  <a:srgbClr val="A4A4A4"/>
+                  <a:srgbClr val="5F5F5F"/>
                 </a:solidFill>
                 <a:latin typeface="+mn-lt"/>
                 <a:ea typeface="+mn-ea"/>
@@ -11567,7 +12002,7 @@
               <a:buNone/>
               <a:defRPr lang="th-TH" sz="1000" dirty="0">
                 <a:solidFill>
-                  <a:srgbClr val="A4A4A4"/>
+                  <a:srgbClr val="5F5F5F"/>
                 </a:solidFill>
                 <a:latin typeface="+mn-lt"/>
                 <a:ea typeface="+mn-ea"/>
@@ -11615,7 +12050,7 @@
               <a:buNone/>
               <a:defRPr lang="th-TH" sz="1000" dirty="0">
                 <a:solidFill>
-                  <a:srgbClr val="A4A4A4"/>
+                  <a:srgbClr val="5F5F5F"/>
                 </a:solidFill>
                 <a:latin typeface="+mn-lt"/>
                 <a:ea typeface="+mn-ea"/>
@@ -11630,7 +12065,7 @@
             <a:fld id="{B7E3A1C2-4F5D-4A88-9C1E-6D2F0A93B451}" type="slidenum">
               <a:rPr lang="th-TH" sz="1000">
                 <a:solidFill>
-                  <a:srgbClr val="A4A4A4"/>
+                  <a:srgbClr val="5F5F5F"/>
                 </a:solidFill>
                 <a:latin typeface="+mn-lt"/>
                 <a:cs typeface="+mn-cs"/>
@@ -11837,7 +12272,7 @@
                 <a:spcPts val="700"/>
               </a:spcBef>
               <a:buClr>
-                <a:srgbClr val="A4A4A4"/>
+                <a:srgbClr val="5F5F5F"/>
               </a:buClr>
               <a:buSzPct val="90000"/>
               <a:buFont typeface="Arial"/>
@@ -11859,14 +12294,14 @@
                 <a:spcPts val="500"/>
               </a:spcBef>
               <a:buClr>
-                <a:srgbClr val="A4A4A4"/>
+                <a:srgbClr val="5F5F5F"/>
               </a:buClr>
               <a:buSzPct val="90000"/>
               <a:buFont typeface="Arial"/>
               <a:buChar char="·"/>
               <a:defRPr lang="th-TH" sz="1400" dirty="0">
                 <a:solidFill>
-                  <a:srgbClr val="A4A4A4"/>
+                  <a:srgbClr val="5F5F5F"/>
                 </a:solidFill>
                 <a:latin typeface="+mn-lt"/>
                 <a:ea typeface="+mn-ea"/>
@@ -11910,7 +12345,7 @@
                 <a:spcPts val="700"/>
               </a:spcBef>
               <a:buClr>
-                <a:srgbClr val="A4A4A4"/>
+                <a:srgbClr val="5F5F5F"/>
               </a:buClr>
               <a:buSzPct val="90000"/>
               <a:buFont typeface="Arial"/>
@@ -11937,7 +12372,7 @@
                 <a:spcPts val="500"/>
               </a:spcBef>
               <a:buClr>
-                <a:srgbClr val="A4A4A4"/>
+                <a:srgbClr val="5F5F5F"/>
               </a:buClr>
               <a:buSzPct val="90000"/>
               <a:buFont typeface="Arial"/>
@@ -11946,7 +12381,7 @@
             <a:r>
               <a:rPr lang="th-TH" sz="1400" dirty="0">
                 <a:solidFill>
-                  <a:srgbClr val="A4A4A4"/>
+                  <a:srgbClr val="5F5F5F"/>
                 </a:solidFill>
                 <a:latin typeface="+mn-lt"/>
                 <a:ea typeface="+mn-ea"/>
@@ -12015,7 +12450,7 @@
               <a:buNone/>
               <a:defRPr lang="th-TH" sz="1000" dirty="0">
                 <a:solidFill>
-                  <a:srgbClr val="A4A4A4"/>
+                  <a:srgbClr val="5F5F5F"/>
                 </a:solidFill>
                 <a:latin typeface="+mn-lt"/>
                 <a:ea typeface="+mn-ea"/>
@@ -12063,7 +12498,7 @@
               <a:buNone/>
               <a:defRPr lang="th-TH" sz="1000" dirty="0">
                 <a:solidFill>
-                  <a:srgbClr val="A4A4A4"/>
+                  <a:srgbClr val="5F5F5F"/>
                 </a:solidFill>
                 <a:latin typeface="+mn-lt"/>
                 <a:ea typeface="+mn-ea"/>
@@ -12111,7 +12546,7 @@
               <a:buNone/>
               <a:defRPr lang="th-TH" sz="1000" dirty="0">
                 <a:solidFill>
-                  <a:srgbClr val="A4A4A4"/>
+                  <a:srgbClr val="5F5F5F"/>
                 </a:solidFill>
                 <a:latin typeface="+mn-lt"/>
                 <a:ea typeface="+mn-ea"/>
@@ -12126,7 +12561,7 @@
             <a:fld id="{B7E3A1C2-4F5D-4A88-9C1E-6D2F0A93B451}" type="slidenum">
               <a:rPr lang="th-TH" sz="1000">
                 <a:solidFill>
-                  <a:srgbClr val="A4A4A4"/>
+                  <a:srgbClr val="5F5F5F"/>
                 </a:solidFill>
                 <a:latin typeface="+mn-lt"/>
                 <a:cs typeface="+mn-cs"/>
@@ -12230,7 +12665,7 @@
           <a:spcPts val="700"/>
         </a:spcBef>
         <a:buClr>
-          <a:srgbClr val="A4A4A4"/>
+          <a:srgbClr val="5F5F5F"/>
         </a:buClr>
         <a:buSzPct val="90000"/>
         <a:buFont typeface="Arial"/>
@@ -12252,14 +12687,14 @@
           <a:spcPts val="500"/>
         </a:spcBef>
         <a:buClr>
-          <a:srgbClr val="A4A4A4"/>
+          <a:srgbClr val="5F5F5F"/>
         </a:buClr>
         <a:buSzPct val="90000"/>
         <a:buFont typeface="Arial"/>
         <a:buChar char="·"/>
         <a:defRPr lang="th-TH" sz="1400" dirty="0">
           <a:solidFill>
-            <a:srgbClr val="A4A4A4"/>
+            <a:srgbClr val="5F5F5F"/>
           </a:solidFill>
           <a:latin typeface="+mn-lt"/>
           <a:ea typeface="+mn-ea"/>
@@ -12274,14 +12709,14 @@
           <a:spcPts val="400"/>
         </a:spcBef>
         <a:buClr>
-          <a:srgbClr val="A4A4A4"/>
+          <a:srgbClr val="5F5F5F"/>
         </a:buClr>
         <a:buSzPct val="90000"/>
         <a:buFont typeface="Arial"/>
         <a:buChar char="·"/>
         <a:defRPr lang="th-TH" sz="1400" dirty="0">
           <a:solidFill>
-            <a:srgbClr val="A4A4A4"/>
+            <a:srgbClr val="5F5F5F"/>
           </a:solidFill>
           <a:latin typeface="+mn-lt"/>
           <a:ea typeface="+mn-ea"/>
@@ -12296,14 +12731,14 @@
           <a:spcPts val="400"/>
         </a:spcBef>
         <a:buClr>
-          <a:srgbClr val="A4A4A4"/>
+          <a:srgbClr val="5F5F5F"/>
         </a:buClr>
         <a:buSzPct val="90000"/>
         <a:buFont typeface="Arial"/>
         <a:buChar char="·"/>
         <a:defRPr lang="th-TH" sz="1400" dirty="0">
           <a:solidFill>
-            <a:srgbClr val="A4A4A4"/>
+            <a:srgbClr val="5F5F5F"/>
           </a:solidFill>
           <a:latin typeface="+mn-lt"/>
           <a:ea typeface="+mn-ea"/>
@@ -13550,6 +13985,52 @@
       </p:sp>
       <p:sp>
         <p:nvSpPr>
+          <p:cNvPr id="5" name="TL"/>
+          <p:cNvSpPr>
+            <a:spLocks noGrp="1"/>
+          </p:cNvSpPr>
+          <p:nvPr>
+            <p:ph type="body" idx="3"/>
+          </p:nvPr>
+        </p:nvSpPr>
+        <p:spPr/>
+        <p:txBody>
+          <a:bodyPr/>
+          <a:lstStyle/>
+          <a:p>
+            <a:pPr/>
+            <a:r>
+              <a:rPr lang="th-TH" dirty="0"/>
+              <a:t>สรุป</a:t>
+            </a:r>
+          </a:p>
+        </p:txBody>
+      </p:sp>
+      <p:sp>
+        <p:nvSpPr>
+          <p:cNvPr id="6" name="TC"/>
+          <p:cNvSpPr>
+            <a:spLocks noGrp="1"/>
+          </p:cNvSpPr>
+          <p:nvPr>
+            <p:ph type="body" idx="4"/>
+          </p:nvPr>
+        </p:nvSpPr>
+        <p:spPr/>
+        <p:txBody>
+          <a:bodyPr/>
+          <a:lstStyle/>
+          <a:p>
+            <a:pPr/>
+            <a:r>
+              <a:rPr lang="th-TH" dirty="0"/>
+              <a:t>ระบบเดิมไม่ถูกแก้ ของใหม่แทรกเป็นคิวและตัวตรวจกฎคั่นกลางเท่านั้น</a:t>
+            </a:r>
+          </a:p>
+        </p:txBody>
+      </p:sp>
+      <p:sp>
+        <p:nvSpPr>
           <p:cNvPr id="10" name="Group Frame"/>
           <p:cNvSpPr/>
           <p:nvPr/>
@@ -13610,7 +14091,7 @@
             <a:r>
               <a:rPr lang="th-TH" sz="1200" b="1" spc="120" dirty="0">
                 <a:solidFill>
-                  <a:srgbClr val="A4A4A4"/>
+                  <a:srgbClr val="5F5F5F"/>
                 </a:solidFill>
                 <a:latin typeface="+mn-lt"/>
                 <a:ea typeface="+mn-ea"/>
@@ -13940,7 +14421,7 @@
             <a:r>
               <a:rPr lang="th-TH" sz="1000" dirty="0">
                 <a:solidFill>
-                  <a:srgbClr val="A4A4A4"/>
+                  <a:srgbClr val="5F5F5F"/>
                 </a:solidFill>
                 <a:latin typeface="+mn-lt"/>
                 <a:ea typeface="+mn-ea"/>
@@ -14155,7 +14636,7 @@
           </p:nvPr>
         </p:nvGraphicFramePr>
         <p:xfrm>
-          <a:off x="914400" y="2148840"/>
+          <a:off x="914400" y="2011680"/>
           <a:ext cx="10363200" cy="3163824"/>
         </p:xfrm>
         <a:graphic>
@@ -14836,7 +15317,7 @@
                       <a:r>
                         <a:rPr lang="th-TH" sz="1000" b="1" dirty="0">
                           <a:solidFill>
-                            <a:srgbClr val="B26B00"/>
+                            <a:srgbClr val="965900"/>
                           </a:solidFill>
                           <a:latin typeface="+mn-lt"/>
                           <a:cs typeface="+mn-cs"/>
@@ -14978,7 +15459,7 @@
                       <a:r>
                         <a:rPr lang="th-TH" sz="1000" b="1" dirty="0">
                           <a:solidFill>
-                            <a:srgbClr val="B26B00"/>
+                            <a:srgbClr val="965900"/>
                           </a:solidFill>
                           <a:latin typeface="+mn-lt"/>
                           <a:cs typeface="+mn-cs"/>
@@ -15469,6 +15950,52 @@
           </a:p>
         </p:txBody>
       </p:sp>
+      <p:sp>
+        <p:nvSpPr>
+          <p:cNvPr id="6" name="TL"/>
+          <p:cNvSpPr>
+            <a:spLocks noGrp="1"/>
+          </p:cNvSpPr>
+          <p:nvPr>
+            <p:ph type="body" idx="4"/>
+          </p:nvPr>
+        </p:nvSpPr>
+        <p:spPr/>
+        <p:txBody>
+          <a:bodyPr/>
+          <a:lstStyle/>
+          <a:p>
+            <a:pPr/>
+            <a:r>
+              <a:rPr lang="th-TH" dirty="0"/>
+              <a:t>สรุป</a:t>
+            </a:r>
+          </a:p>
+        </p:txBody>
+      </p:sp>
+      <p:sp>
+        <p:nvSpPr>
+          <p:cNvPr id="7" name="TC"/>
+          <p:cNvSpPr>
+            <a:spLocks noGrp="1"/>
+          </p:cNvSpPr>
+          <p:nvPr>
+            <p:ph type="body" idx="5"/>
+          </p:nvPr>
+        </p:nvSpPr>
+        <p:spPr/>
+        <p:txBody>
+          <a:bodyPr/>
+          <a:lstStyle/>
+          <a:p>
+            <a:pPr/>
+            <a:r>
+              <a:rPr lang="th-TH" dirty="0"/>
+              <a:t>หกในแปดกระบวนการเริ่มได้ทันทีในรอบ 1-2 อีกสองรายการรอสิทธิ์เข้าระบบ ยืนยันภายใน 15 วัน</a:t>
+            </a:r>
+          </a:p>
+        </p:txBody>
+      </p:sp>
     </p:spTree>
   </p:cSld>
   <p:clrMapOvr>
@@ -16948,6 +17475,52 @@
           </a:graphicData>
         </a:graphic>
       </p:graphicFrame>
+      <p:sp>
+        <p:nvSpPr>
+          <p:cNvPr id="5" name="TL"/>
+          <p:cNvSpPr>
+            <a:spLocks noGrp="1"/>
+          </p:cNvSpPr>
+          <p:nvPr>
+            <p:ph type="body" idx="3"/>
+          </p:nvPr>
+        </p:nvSpPr>
+        <p:spPr/>
+        <p:txBody>
+          <a:bodyPr/>
+          <a:lstStyle/>
+          <a:p>
+            <a:pPr/>
+            <a:r>
+              <a:rPr lang="th-TH" dirty="0"/>
+              <a:t>สรุป</a:t>
+            </a:r>
+          </a:p>
+        </p:txBody>
+      </p:sp>
+      <p:sp>
+        <p:nvSpPr>
+          <p:cNvPr id="6" name="TC"/>
+          <p:cNvSpPr>
+            <a:spLocks noGrp="1"/>
+          </p:cNvSpPr>
+          <p:nvPr>
+            <p:ph type="body" idx="4"/>
+          </p:nvPr>
+        </p:nvSpPr>
+        <p:spPr/>
+        <p:txBody>
+          <a:bodyPr/>
+          <a:lstStyle/>
+          <a:p>
+            <a:pPr/>
+            <a:r>
+              <a:rPr lang="th-TH" dirty="0"/>
+              <a:t>องค์กร 50-200 ที่นั่งเลือก Business เป็นค่าเริ่มต้น ตอบกลับ 4 ชั่วโมงครอบคลุมงานปิดงบรายเดือน</a:t>
+            </a:r>
+          </a:p>
+        </p:txBody>
+      </p:sp>
     </p:spTree>
   </p:cSld>
   <p:clrMapOvr>
@@ -16985,7 +17558,7 @@
         <a:srgbClr val="16324F"/>
       </a:accent4>
       <a:accent5>
-        <a:srgbClr val="A4A4A4"/>
+        <a:srgbClr val="5F5F5F"/>
       </a:accent5>
       <a:accent6>
         <a:srgbClr val="E8F6F5"/>

--- a/NCT-Slide-Template-Demo.pptx
+++ b/NCT-Slide-Template-Demo.pptx
@@ -14891,7 +14891,7 @@
                       <a:r>
                         <a:rPr lang="th-TH" sz="1000" b="1" dirty="0">
                           <a:solidFill>
-                            <a:srgbClr val="1F7A54"/>
+                            <a:srgbClr val="1A6647"/>
                           </a:solidFill>
                           <a:latin typeface="+mn-lt"/>
                           <a:cs typeface="+mn-cs"/>
@@ -14902,7 +14902,7 @@
                   </a:txBody>
                   <a:tcPr marL="73152" marR="73152" marT="73152" marB="73152" anchor="ctr">
                     <a:solidFill>
-                      <a:srgbClr val="E6F4EE"/>
+                      <a:srgbClr val="BFE3CA"/>
                     </a:solidFill>
                   </a:tcPr>
                 </a:tc>
@@ -15033,7 +15033,7 @@
                       <a:r>
                         <a:rPr lang="th-TH" sz="1000" b="1" dirty="0">
                           <a:solidFill>
-                            <a:srgbClr val="1F7A54"/>
+                            <a:srgbClr val="1A6647"/>
                           </a:solidFill>
                           <a:latin typeface="+mn-lt"/>
                           <a:cs typeface="+mn-cs"/>
@@ -15044,7 +15044,7 @@
                   </a:txBody>
                   <a:tcPr marL="73152" marR="73152" marT="73152" marB="73152" anchor="ctr">
                     <a:solidFill>
-                      <a:srgbClr val="E6F4EE"/>
+                      <a:srgbClr val="BFE3CA"/>
                     </a:solidFill>
                   </a:tcPr>
                 </a:tc>
@@ -15175,7 +15175,7 @@
                       <a:r>
                         <a:rPr lang="th-TH" sz="1000" b="1" dirty="0">
                           <a:solidFill>
-                            <a:srgbClr val="1F7A54"/>
+                            <a:srgbClr val="1A6647"/>
                           </a:solidFill>
                           <a:latin typeface="+mn-lt"/>
                           <a:cs typeface="+mn-cs"/>
@@ -15186,7 +15186,7 @@
                   </a:txBody>
                   <a:tcPr marL="73152" marR="73152" marT="73152" marB="73152" anchor="ctr">
                     <a:solidFill>
-                      <a:srgbClr val="E6F4EE"/>
+                      <a:srgbClr val="BFE3CA"/>
                     </a:solidFill>
                   </a:tcPr>
                 </a:tc>
@@ -15317,7 +15317,7 @@
                       <a:r>
                         <a:rPr lang="th-TH" sz="1000" b="1" dirty="0">
                           <a:solidFill>
-                            <a:srgbClr val="965900"/>
+                            <a:srgbClr val="7F4B00"/>
                           </a:solidFill>
                           <a:latin typeface="+mn-lt"/>
                           <a:cs typeface="+mn-cs"/>
@@ -15328,7 +15328,7 @@
                   </a:txBody>
                   <a:tcPr marL="73152" marR="73152" marT="73152" marB="73152" anchor="ctr">
                     <a:solidFill>
-                      <a:srgbClr val="FBF1E3"/>
+                      <a:srgbClr val="F2D9AC"/>
                     </a:solidFill>
                   </a:tcPr>
                 </a:tc>
@@ -15459,7 +15459,7 @@
                       <a:r>
                         <a:rPr lang="th-TH" sz="1000" b="1" dirty="0">
                           <a:solidFill>
-                            <a:srgbClr val="965900"/>
+                            <a:srgbClr val="7F4B00"/>
                           </a:solidFill>
                           <a:latin typeface="+mn-lt"/>
                           <a:cs typeface="+mn-cs"/>
@@ -15470,7 +15470,7 @@
                   </a:txBody>
                   <a:tcPr marL="73152" marR="73152" marT="73152" marB="73152" anchor="ctr">
                     <a:solidFill>
-                      <a:srgbClr val="FBF1E3"/>
+                      <a:srgbClr val="F2D9AC"/>
                     </a:solidFill>
                   </a:tcPr>
                 </a:tc>
@@ -15612,7 +15612,7 @@
                   </a:txBody>
                   <a:tcPr marL="73152" marR="73152" marT="73152" marB="73152" anchor="ctr">
                     <a:solidFill>
-                      <a:srgbClr val="FBEAE8"/>
+                      <a:srgbClr val="F6D0CC"/>
                     </a:solidFill>
                   </a:tcPr>
                 </a:tc>
@@ -15743,7 +15743,7 @@
                       <a:r>
                         <a:rPr lang="th-TH" sz="1000" b="1" dirty="0">
                           <a:solidFill>
-                            <a:srgbClr val="1F7A54"/>
+                            <a:srgbClr val="1A6647"/>
                           </a:solidFill>
                           <a:latin typeface="+mn-lt"/>
                           <a:cs typeface="+mn-cs"/>
@@ -15754,7 +15754,7 @@
                   </a:txBody>
                   <a:tcPr marL="73152" marR="73152" marT="73152" marB="73152" anchor="ctr">
                     <a:solidFill>
-                      <a:srgbClr val="E6F4EE"/>
+                      <a:srgbClr val="BFE3CA"/>
                     </a:solidFill>
                   </a:tcPr>
                 </a:tc>
@@ -15896,7 +15896,7 @@
                   </a:txBody>
                   <a:tcPr marL="73152" marR="73152" marT="73152" marB="73152" anchor="ctr">
                     <a:solidFill>
-                      <a:srgbClr val="FBEAE8"/>
+                      <a:srgbClr val="F6D0CC"/>
                     </a:solidFill>
                   </a:tcPr>
                 </a:tc>

--- a/NCT-Slide-Template-Demo.pptx
+++ b/NCT-Slide-Template-Demo.pptx
@@ -14031,24 +14031,23 @@
       </p:sp>
       <p:sp>
         <p:nvSpPr>
-          <p:cNvPr id="10" name="Group Frame"/>
+          <p:cNvPr id="10" name="Group Zone"/>
           <p:cNvSpPr/>
           <p:nvPr/>
         </p:nvSpPr>
         <p:spPr>
           <a:xfrm>
-            <a:off x="3657600" y="2560320"/>
-            <a:ext cx="5074920" cy="1554480"/>
-          </a:xfrm>
-          <a:prstGeom prst="rect">
-            <a:avLst/>
-          </a:prstGeom>
-          <a:noFill/>
-          <a:ln w="12700">
-            <a:solidFill>
-              <a:srgbClr val="E5E5E5"/>
-            </a:solidFill>
-            <a:prstDash val="dash"/>
+            <a:off x="3566160" y="2766060"/>
+            <a:ext cx="5257800" cy="1645920"/>
+          </a:xfrm>
+          <a:prstGeom prst="rect">
+            <a:avLst/>
+          </a:prstGeom>
+          <a:solidFill>
+            <a:srgbClr val="E8F6F5"/>
+          </a:solidFill>
+          <a:ln>
+            <a:noFill/>
           </a:ln>
         </p:spPr>
         <p:txBody>
@@ -14067,8 +14066,8 @@
         </p:nvSpPr>
         <p:spPr>
           <a:xfrm>
-            <a:off x="3749040" y="2606040"/>
-            <a:ext cx="3200400" cy="274320"/>
+            <a:off x="3840480" y="2926080"/>
+            <a:ext cx="3200400" cy="228600"/>
           </a:xfrm>
           <a:prstGeom prst="rect">
             <a:avLst/>
@@ -14091,7 +14090,7 @@
             <a:r>
               <a:rPr lang="th-TH" sz="1200" b="1" spc="120" dirty="0">
                 <a:solidFill>
-                  <a:srgbClr val="5F5F5F"/>
+                  <a:srgbClr val="216B7F"/>
                 </a:solidFill>
                 <a:latin typeface="+mn-lt"/>
                 <a:ea typeface="+mn-ea"/>
@@ -14110,14 +14109,135 @@
         </p:nvSpPr>
         <p:spPr>
           <a:xfrm>
-            <a:off x="1143000" y="3017520"/>
-            <a:ext cx="2011680" cy="548640"/>
+            <a:off x="1143000" y="3223260"/>
+            <a:ext cx="2011680" cy="731520"/>
           </a:xfrm>
           <a:prstGeom prst="rect">
             <a:avLst/>
           </a:prstGeom>
           <a:solidFill>
-            <a:srgbClr val="E8F6F5"/>
+            <a:srgbClr val="23436D"/>
+          </a:solidFill>
+          <a:ln>
+            <a:noFill/>
+          </a:ln>
+        </p:spPr>
+        <p:txBody>
+          <a:bodyPr wrap="square" anchor="ctr" lIns="0" tIns="0" rIns="0" bIns="0" rtlCol="0"/>
+          <a:lstStyle/>
+          <a:p>
+            <a:pPr algn="ctr" marL="0" indent="0">
+              <a:lnSpc>
+                <a:spcPct val="110000"/>
+              </a:lnSpc>
+              <a:buNone/>
+            </a:pPr>
+            <a:r>
+              <a:rPr lang="th-TH" sz="1200" dirty="0">
+                <a:solidFill>
+                  <a:srgbClr val="FFFFFF"/>
+                </a:solidFill>
+                <a:latin typeface="+mn-lt"/>
+                <a:ea typeface="+mn-ea"/>
+                <a:cs typeface="+mn-cs"/>
+              </a:rPr>
+              <a:t>ระบบ ERP ปัจจุบัน</a:t>
+            </a:r>
+          </a:p>
+        </p:txBody>
+      </p:sp>
+      <p:sp>
+        <p:nvSpPr>
+          <p:cNvPr id="13" name="Box 2"/>
+          <p:cNvSpPr/>
+          <p:nvPr/>
+        </p:nvSpPr>
+        <p:spPr>
+          <a:xfrm>
+            <a:off x="3840480" y="3223260"/>
+            <a:ext cx="2011680" cy="731520"/>
+          </a:xfrm>
+          <a:prstGeom prst="rect">
+            <a:avLst/>
+          </a:prstGeom>
+          <a:solidFill>
+            <a:srgbClr val="FFFFFF"/>
+          </a:solidFill>
+          <a:ln w="12700">
+            <a:solidFill>
+              <a:srgbClr val="23436D"/>
+            </a:solidFill>
+          </a:ln>
+        </p:spPr>
+        <p:txBody>
+          <a:bodyPr wrap="square" anchor="ctr" lIns="0" tIns="0" rIns="0" bIns="0" rtlCol="0"/>
+          <a:lstStyle/>
+          <a:p>
+            <a:pPr algn="ctr" marL="0" indent="0">
+              <a:lnSpc>
+                <a:spcPct val="110000"/>
+              </a:lnSpc>
+              <a:buNone/>
+            </a:pPr>
+            <a:r>
+              <a:rPr lang="th-TH" sz="1200" dirty="0">
+                <a:solidFill>
+                  <a:srgbClr val="333333"/>
+                </a:solidFill>
+                <a:latin typeface="+mn-lt"/>
+                <a:ea typeface="+mn-ea"/>
+                <a:cs typeface="+mn-cs"/>
+              </a:rPr>
+              <a:t>คิวเอกสารกลาง</a:t>
+            </a:r>
+          </a:p>
+        </p:txBody>
+      </p:sp>
+      <p:sp>
+        <p:nvSpPr>
+          <p:cNvPr id="113" name="Box 2 Tab"/>
+          <p:cNvSpPr/>
+          <p:nvPr/>
+        </p:nvSpPr>
+        <p:spPr>
+          <a:xfrm>
+            <a:off x="3954780" y="3337560"/>
+            <a:ext cx="205740" cy="45720"/>
+          </a:xfrm>
+          <a:prstGeom prst="rect">
+            <a:avLst/>
+          </a:prstGeom>
+          <a:solidFill>
+            <a:srgbClr val="23436D"/>
+          </a:solidFill>
+          <a:ln>
+            <a:noFill/>
+          </a:ln>
+        </p:spPr>
+        <p:txBody>
+          <a:bodyPr/>
+          <a:lstStyle/>
+          <a:p>
+            <a:endParaRPr lang="th-TH"/>
+          </a:p>
+        </p:txBody>
+      </p:sp>
+      <p:sp>
+        <p:nvSpPr>
+          <p:cNvPr id="14" name="Box 3"/>
+          <p:cNvSpPr/>
+          <p:nvPr/>
+        </p:nvSpPr>
+        <p:spPr>
+          <a:xfrm>
+            <a:off x="6537960" y="3223260"/>
+            <a:ext cx="2011680" cy="731520"/>
+          </a:xfrm>
+          <a:prstGeom prst="rect">
+            <a:avLst/>
+          </a:prstGeom>
+          <a:solidFill>
+            <a:srgbClr val="FFFFFF"/>
           </a:solidFill>
           <a:ln w="12700">
             <a:solidFill>
@@ -14144,106 +14264,37 @@
                 <a:ea typeface="+mn-ea"/>
                 <a:cs typeface="+mn-cs"/>
               </a:rPr>
-              <a:t>ระบบ ERP ปัจจุบัน</a:t>
-            </a:r>
-          </a:p>
-        </p:txBody>
-      </p:sp>
-      <p:sp>
-        <p:nvSpPr>
-          <p:cNvPr id="13" name="Box 2"/>
+              <a:t>ตัวตรวจกฎธุรกิจ</a:t>
+            </a:r>
+          </a:p>
+        </p:txBody>
+      </p:sp>
+      <p:sp>
+        <p:nvSpPr>
+          <p:cNvPr id="114" name="Box 3 Tab"/>
           <p:cNvSpPr/>
           <p:nvPr/>
         </p:nvSpPr>
         <p:spPr>
           <a:xfrm>
-            <a:off x="3840480" y="3017520"/>
-            <a:ext cx="2011680" cy="548640"/>
+            <a:off x="6652260" y="3337560"/>
+            <a:ext cx="205740" cy="45720"/>
           </a:xfrm>
           <a:prstGeom prst="rect">
             <a:avLst/>
           </a:prstGeom>
           <a:solidFill>
-            <a:srgbClr val="23436D">
-              <a:alpha val="15000"/>
-            </a:srgbClr>
+            <a:srgbClr val="216B7F"/>
           </a:solidFill>
-          <a:ln w="12700">
-            <a:solidFill>
-              <a:srgbClr val="23436D"/>
-            </a:solidFill>
+          <a:ln>
+            <a:noFill/>
           </a:ln>
         </p:spPr>
         <p:txBody>
-          <a:bodyPr wrap="square" anchor="ctr" lIns="0" tIns="0" rIns="0" bIns="0" rtlCol="0"/>
-          <a:lstStyle/>
-          <a:p>
-            <a:pPr algn="ctr" marL="0" indent="0">
-              <a:lnSpc>
-                <a:spcPct val="110000"/>
-              </a:lnSpc>
-              <a:buNone/>
-            </a:pPr>
-            <a:r>
-              <a:rPr lang="th-TH" sz="1200" dirty="0">
-                <a:solidFill>
-                  <a:srgbClr val="333333"/>
-                </a:solidFill>
-                <a:latin typeface="+mn-lt"/>
-                <a:ea typeface="+mn-ea"/>
-                <a:cs typeface="+mn-cs"/>
-              </a:rPr>
-              <a:t>คิวเอกสารกลาง</a:t>
-            </a:r>
-          </a:p>
-        </p:txBody>
-      </p:sp>
-      <p:sp>
-        <p:nvSpPr>
-          <p:cNvPr id="14" name="Box 3"/>
-          <p:cNvSpPr/>
-          <p:nvPr/>
-        </p:nvSpPr>
-        <p:spPr>
-          <a:xfrm>
-            <a:off x="6537960" y="3017520"/>
-            <a:ext cx="2011680" cy="548640"/>
-          </a:xfrm>
-          <a:prstGeom prst="rect">
-            <a:avLst/>
-          </a:prstGeom>
-          <a:solidFill>
-            <a:srgbClr val="216B7F">
-              <a:alpha val="15000"/>
-            </a:srgbClr>
-          </a:solidFill>
-          <a:ln w="12700">
-            <a:solidFill>
-              <a:srgbClr val="216B7F"/>
-            </a:solidFill>
-          </a:ln>
-        </p:spPr>
-        <p:txBody>
-          <a:bodyPr wrap="square" anchor="ctr" lIns="0" tIns="0" rIns="0" bIns="0" rtlCol="0"/>
-          <a:lstStyle/>
-          <a:p>
-            <a:pPr algn="ctr" marL="0" indent="0">
-              <a:lnSpc>
-                <a:spcPct val="110000"/>
-              </a:lnSpc>
-              <a:buNone/>
-            </a:pPr>
-            <a:r>
-              <a:rPr lang="th-TH" sz="1200" dirty="0">
-                <a:solidFill>
-                  <a:srgbClr val="333333"/>
-                </a:solidFill>
-                <a:latin typeface="+mn-lt"/>
-                <a:ea typeface="+mn-ea"/>
-                <a:cs typeface="+mn-cs"/>
-              </a:rPr>
-              <a:t>ตัวตรวจกฎธุรกิจ</a:t>
-            </a:r>
+          <a:bodyPr/>
+          <a:lstStyle/>
+          <a:p>
+            <a:endParaRPr lang="th-TH"/>
           </a:p>
         </p:txBody>
       </p:sp>
@@ -14255,19 +14306,17 @@
         </p:nvSpPr>
         <p:spPr>
           <a:xfrm>
-            <a:off x="9235440" y="3017520"/>
-            <a:ext cx="2011680" cy="548640"/>
+            <a:off x="9235440" y="3223260"/>
+            <a:ext cx="2011680" cy="731520"/>
           </a:xfrm>
           <a:prstGeom prst="rect">
             <a:avLst/>
           </a:prstGeom>
           <a:solidFill>
-            <a:srgbClr val="E8F6F5"/>
+            <a:srgbClr val="23436D"/>
           </a:solidFill>
-          <a:ln w="12700">
-            <a:solidFill>
-              <a:srgbClr val="216B7F"/>
-            </a:solidFill>
+          <a:ln>
+            <a:noFill/>
           </a:ln>
         </p:spPr>
         <p:txBody>
@@ -14283,7 +14332,7 @@
             <a:r>
               <a:rPr lang="th-TH" sz="1200" dirty="0">
                 <a:solidFill>
-                  <a:srgbClr val="333333"/>
+                  <a:srgbClr val="FFFFFF"/>
                 </a:solidFill>
                 <a:latin typeface="+mn-lt"/>
                 <a:ea typeface="+mn-ea"/>
@@ -14302,7 +14351,7 @@
         </p:nvSpPr>
         <p:spPr>
           <a:xfrm>
-            <a:off x="3268980" y="3291840"/>
+            <a:off x="3268980" y="3589020"/>
             <a:ext cx="457200" cy="0"/>
           </a:xfrm>
           <a:prstGeom prst="line">
@@ -14333,7 +14382,7 @@
         </p:nvSpPr>
         <p:spPr>
           <a:xfrm>
-            <a:off x="5966460" y="3291840"/>
+            <a:off x="5966460" y="3589020"/>
             <a:ext cx="457200" cy="0"/>
           </a:xfrm>
           <a:prstGeom prst="line">
@@ -14364,7 +14413,7 @@
         </p:nvSpPr>
         <p:spPr>
           <a:xfrm>
-            <a:off x="8663940" y="3291840"/>
+            <a:off x="8663940" y="3589020"/>
             <a:ext cx="457200" cy="0"/>
           </a:xfrm>
           <a:prstGeom prst="line">
@@ -14395,15 +14444,13 @@
         </p:nvSpPr>
         <p:spPr>
           <a:xfrm>
-            <a:off x="5806440" y="2743200"/>
+            <a:off x="5806440" y="3268980"/>
             <a:ext cx="822960" cy="228600"/>
           </a:xfrm>
           <a:prstGeom prst="rect">
             <a:avLst/>
           </a:prstGeom>
-          <a:solidFill>
-            <a:srgbClr val="FFFFFF"/>
-          </a:solidFill>
+          <a:noFill/>
           <a:ln>
             <a:noFill/>
           </a:ln>

--- a/NCT-Slide-Template-Demo.pptx
+++ b/NCT-Slide-Template-Demo.pptx
@@ -388,6 +388,52 @@
       </p:sp>
       <p:sp>
         <p:nvSpPr>
+          <p:cNvPr id="16" name="Footer Scrim"/>
+          <p:cNvSpPr/>
+          <p:nvPr/>
+        </p:nvSpPr>
+        <p:spPr>
+          <a:xfrm>
+            <a:off x="0" y="5394960"/>
+            <a:ext cx="12192000" cy="1463040"/>
+          </a:xfrm>
+          <a:prstGeom prst="rect">
+            <a:avLst/>
+          </a:prstGeom>
+          <a:gradFill rotWithShape="1">
+            <a:gsLst>
+              <a:gs pos="0">
+                <a:srgbClr val="16324F">
+                  <a:alpha val="0"/>
+                </a:srgbClr>
+              </a:gs>
+              <a:gs pos="55000">
+                <a:srgbClr val="16324F">
+                  <a:alpha val="60000"/>
+                </a:srgbClr>
+              </a:gs>
+              <a:gs pos="100000">
+                <a:srgbClr val="16324F">
+                  <a:alpha val="90000"/>
+                </a:srgbClr>
+              </a:gs>
+            </a:gsLst>
+            <a:lin ang="5400000" scaled="0"/>
+          </a:gradFill>
+          <a:ln>
+            <a:noFill/>
+          </a:ln>
+        </p:spPr>
+        <p:txBody>
+          <a:bodyPr/>
+          <a:lstStyle/>
+          <a:p>
+            <a:endParaRPr lang="th-TH"/>
+          </a:p>
+        </p:txBody>
+      </p:sp>
+      <p:sp>
+        <p:nvSpPr>
           <p:cNvPr id="90" name="Footer Rule"/>
           <p:cNvSpPr/>
           <p:nvPr/>
@@ -447,7 +493,7 @@
               <a:defRPr lang="th-TH" sz="1000" dirty="0">
                 <a:solidFill>
                   <a:srgbClr val="FFFFFF">
-                    <a:alpha val="55000"/>
+                    <a:alpha val="72000"/>
                   </a:srgbClr>
                 </a:solidFill>
                 <a:latin typeface="+mn-lt"/>
@@ -497,7 +543,7 @@
               <a:defRPr lang="th-TH" sz="1000" dirty="0">
                 <a:solidFill>
                   <a:srgbClr val="FFFFFF">
-                    <a:alpha val="55000"/>
+                    <a:alpha val="72000"/>
                   </a:srgbClr>
                 </a:solidFill>
                 <a:latin typeface="+mn-lt"/>
@@ -547,7 +593,7 @@
               <a:defRPr lang="th-TH" sz="1000" dirty="0">
                 <a:solidFill>
                   <a:srgbClr val="FFFFFF">
-                    <a:alpha val="60000"/>
+                    <a:alpha val="72000"/>
                   </a:srgbClr>
                 </a:solidFill>
                 <a:latin typeface="+mn-lt"/>
@@ -887,7 +933,7 @@
       </p:sp>
       <p:sp>
         <p:nvSpPr>
-          <p:cNvPr id="14" name="Contact"/>
+          <p:cNvPr id="14" name="Next Steps Label"/>
           <p:cNvSpPr>
             <a:spLocks noGrp="1"/>
           </p:cNvSpPr>
@@ -898,7 +944,201 @@
         <p:spPr>
           <a:xfrm>
             <a:off x="914400" y="3200400"/>
-            <a:ext cx="5486400" cy="1828800"/>
+            <a:ext cx="2743200" cy="228600"/>
+          </a:xfrm>
+          <a:prstGeom prst="rect">
+            <a:avLst/>
+          </a:prstGeom>
+        </p:spPr>
+        <p:txBody>
+          <a:bodyPr wrap="square" anchor="ctr" lIns="0" tIns="0" rIns="0" bIns="0" rtlCol="0"/>
+          <a:lstStyle>
+            <a:lvl1pPr algn="l" marL="0" indent="0">
+              <a:lnSpc>
+                <a:spcPct val="100000"/>
+              </a:lnSpc>
+              <a:buNone/>
+              <a:defRPr lang="th-TH" sz="1200" b="1" spc="120" dirty="0">
+                <a:solidFill>
+                  <a:srgbClr val="8FBACE"/>
+                </a:solidFill>
+                <a:latin typeface="+mn-lt"/>
+                <a:ea typeface="+mn-ea"/>
+                <a:cs typeface="+mn-cs"/>
+              </a:defRPr>
+            </a:lvl1pPr>
+          </a:lstStyle>
+          <a:p>
+            <a:pPr algn="l" marL="0" indent="0">
+              <a:lnSpc>
+                <a:spcPct val="100000"/>
+              </a:lnSpc>
+              <a:buNone/>
+            </a:pPr>
+            <a:r>
+              <a:rPr lang="th-TH" sz="1200" b="1" spc="120" dirty="0">
+                <a:solidFill>
+                  <a:srgbClr val="8FBACE"/>
+                </a:solidFill>
+                <a:latin typeface="+mn-lt"/>
+                <a:ea typeface="+mn-ea"/>
+                <a:cs typeface="+mn-cs"/>
+              </a:rPr>
+              <a:t>ขั้นตอนถัดไป</a:t>
+            </a:r>
+          </a:p>
+        </p:txBody>
+      </p:sp>
+      <p:sp>
+        <p:nvSpPr>
+          <p:cNvPr id="15" name="Next Steps"/>
+          <p:cNvSpPr>
+            <a:spLocks noGrp="1"/>
+          </p:cNvSpPr>
+          <p:nvPr>
+            <p:ph type="body" idx="2"/>
+          </p:nvPr>
+        </p:nvSpPr>
+        <p:spPr>
+          <a:xfrm>
+            <a:off x="914400" y="3474720"/>
+            <a:ext cx="5486400" cy="1188720"/>
+          </a:xfrm>
+          <a:prstGeom prst="rect">
+            <a:avLst/>
+          </a:prstGeom>
+        </p:spPr>
+        <p:txBody>
+          <a:bodyPr wrap="square" anchor="t" lIns="0" tIns="0" rIns="0" bIns="0" rtlCol="0"/>
+          <a:lstStyle>
+            <a:lvl1pPr algn="l" marL="320040" indent="-320040">
+              <a:lnSpc>
+                <a:spcPct val="140000"/>
+              </a:lnSpc>
+              <a:spcBef>
+                <a:spcPts val="400"/>
+              </a:spcBef>
+              <a:buClr>
+                <a:srgbClr val="8FBACE"/>
+              </a:buClr>
+              <a:buSzPct val="90000"/>
+              <a:buFont typeface="Arial"/>
+              <a:buAutoNum type="arabicPeriod"/>
+              <a:defRPr lang="th-TH" sz="1600" dirty="0">
+                <a:solidFill>
+                  <a:srgbClr val="FFFFFF">
+                    <a:alpha val="92000"/>
+                  </a:srgbClr>
+                </a:solidFill>
+                <a:latin typeface="+mn-lt"/>
+                <a:ea typeface="+mn-ea"/>
+                <a:cs typeface="+mn-cs"/>
+              </a:defRPr>
+            </a:lvl1pPr>
+          </a:lstStyle>
+          <a:p>
+            <a:pPr algn="l" marL="320040" indent="-320040">
+              <a:lnSpc>
+                <a:spcPct val="140000"/>
+              </a:lnSpc>
+              <a:spcBef>
+                <a:spcPts val="400"/>
+              </a:spcBef>
+              <a:buClr>
+                <a:srgbClr val="8FBACE"/>
+              </a:buClr>
+              <a:buSzPct val="90000"/>
+              <a:buFont typeface="Arial"/>
+              <a:buAutoNum type="arabicPeriod"/>
+            </a:pPr>
+            <a:r>
+              <a:rPr lang="th-TH" sz="1600" dirty="0">
+                <a:solidFill>
+                  <a:srgbClr val="FFFFFF">
+                    <a:alpha val="92000"/>
+                  </a:srgbClr>
+                </a:solidFill>
+                <a:latin typeface="+mn-lt"/>
+                <a:ea typeface="+mn-ea"/>
+                <a:cs typeface="+mn-cs"/>
+              </a:rPr>
+              <a:t>สิ่งที่ต้องเกิดขึ้นต่อ พร้อมผู้รับผิดชอบ</a:t>
+            </a:r>
+          </a:p>
+        </p:txBody>
+      </p:sp>
+      <p:sp>
+        <p:nvSpPr>
+          <p:cNvPr id="18" name="Decision By"/>
+          <p:cNvSpPr>
+            <a:spLocks noGrp="1"/>
+          </p:cNvSpPr>
+          <p:nvPr>
+            <p:ph type="body" idx="3"/>
+          </p:nvPr>
+        </p:nvSpPr>
+        <p:spPr>
+          <a:xfrm>
+            <a:off x="914400" y="4709160"/>
+            <a:ext cx="5486400" cy="228600"/>
+          </a:xfrm>
+          <a:prstGeom prst="rect">
+            <a:avLst/>
+          </a:prstGeom>
+        </p:spPr>
+        <p:txBody>
+          <a:bodyPr wrap="square" anchor="ctr" lIns="0" tIns="0" rIns="0" bIns="0" rtlCol="0"/>
+          <a:lstStyle>
+            <a:lvl1pPr algn="l" marL="0" indent="0">
+              <a:lnSpc>
+                <a:spcPct val="100000"/>
+              </a:lnSpc>
+              <a:buNone/>
+              <a:defRPr lang="th-TH" sz="1400" b="1" dirty="0">
+                <a:solidFill>
+                  <a:srgbClr val="8FBACE"/>
+                </a:solidFill>
+                <a:latin typeface="+mn-lt"/>
+                <a:ea typeface="+mn-ea"/>
+                <a:cs typeface="+mn-cs"/>
+              </a:defRPr>
+            </a:lvl1pPr>
+          </a:lstStyle>
+          <a:p>
+            <a:pPr algn="l" marL="0" indent="0">
+              <a:lnSpc>
+                <a:spcPct val="100000"/>
+              </a:lnSpc>
+              <a:buNone/>
+            </a:pPr>
+            <a:r>
+              <a:rPr lang="th-TH" sz="1400" b="1" dirty="0">
+                <a:solidFill>
+                  <a:srgbClr val="8FBACE"/>
+                </a:solidFill>
+                <a:latin typeface="+mn-lt"/>
+                <a:ea typeface="+mn-ea"/>
+                <a:cs typeface="+mn-cs"/>
+              </a:rPr>
+              <a:t>ต้องการคำตอบภายในวันที่ ...</a:t>
+            </a:r>
+          </a:p>
+        </p:txBody>
+      </p:sp>
+      <p:sp>
+        <p:nvSpPr>
+          <p:cNvPr id="19" name="Contact"/>
+          <p:cNvSpPr>
+            <a:spLocks noGrp="1"/>
+          </p:cNvSpPr>
+          <p:nvPr>
+            <p:ph type="body" idx="4"/>
+          </p:nvPr>
+        </p:nvSpPr>
+        <p:spPr>
+          <a:xfrm>
+            <a:off x="914400" y="5303520"/>
+            <a:ext cx="5486400" cy="731520"/>
           </a:xfrm>
           <a:prstGeom prst="rect">
             <a:avLst/>
@@ -909,13 +1149,10 @@
           <a:lstStyle>
             <a:lvl1pPr algn="l" marL="0" indent="0">
               <a:lnSpc>
-                <a:spcPct val="100000"/>
-              </a:lnSpc>
-              <a:spcBef>
-                <a:spcPts val="600"/>
-              </a:spcBef>
-              <a:buNone/>
-              <a:defRPr lang="th-TH" sz="1800" dirty="0">
+                <a:spcPct val="135000"/>
+              </a:lnSpc>
+              <a:buNone/>
+              <a:defRPr lang="th-TH" sz="1400" dirty="0">
                 <a:solidFill>
                   <a:srgbClr val="FFFFFF">
                     <a:alpha val="88000"/>
@@ -930,15 +1167,12 @@
           <a:p>
             <a:pPr algn="l" marL="0" indent="0">
               <a:lnSpc>
-                <a:spcPct val="100000"/>
-              </a:lnSpc>
-              <a:spcBef>
-                <a:spcPts val="600"/>
-              </a:spcBef>
+                <a:spcPct val="135000"/>
+              </a:lnSpc>
               <a:buNone/>
             </a:pPr>
             <a:r>
-              <a:rPr lang="th-TH" sz="1800" dirty="0">
+              <a:rPr lang="th-TH" sz="1400" dirty="0">
                 <a:solidFill>
                   <a:srgbClr val="FFFFFF">
                     <a:alpha val="88000"/>
@@ -953,9 +1187,245 @@
           </a:p>
         </p:txBody>
       </p:sp>
+      <p:sp>
+        <p:nvSpPr>
+          <p:cNvPr id="20" name="Footer Scrim"/>
+          <p:cNvSpPr/>
+          <p:nvPr/>
+        </p:nvSpPr>
+        <p:spPr>
+          <a:xfrm>
+            <a:off x="0" y="5394960"/>
+            <a:ext cx="12192000" cy="1463040"/>
+          </a:xfrm>
+          <a:prstGeom prst="rect">
+            <a:avLst/>
+          </a:prstGeom>
+          <a:gradFill rotWithShape="1">
+            <a:gsLst>
+              <a:gs pos="0">
+                <a:srgbClr val="16324F">
+                  <a:alpha val="0"/>
+                </a:srgbClr>
+              </a:gs>
+              <a:gs pos="55000">
+                <a:srgbClr val="16324F">
+                  <a:alpha val="60000"/>
+                </a:srgbClr>
+              </a:gs>
+              <a:gs pos="100000">
+                <a:srgbClr val="16324F">
+                  <a:alpha val="90000"/>
+                </a:srgbClr>
+              </a:gs>
+            </a:gsLst>
+            <a:lin ang="5400000" scaled="0"/>
+          </a:gradFill>
+          <a:ln>
+            <a:noFill/>
+          </a:ln>
+        </p:spPr>
+        <p:txBody>
+          <a:bodyPr/>
+          <a:lstStyle/>
+          <a:p>
+            <a:endParaRPr lang="th-TH"/>
+          </a:p>
+        </p:txBody>
+      </p:sp>
+      <p:sp>
+        <p:nvSpPr>
+          <p:cNvPr id="90" name="Footer Rule"/>
+          <p:cNvSpPr/>
+          <p:nvPr/>
+        </p:nvSpPr>
+        <p:spPr>
+          <a:xfrm>
+            <a:off x="914400" y="6172200"/>
+            <a:ext cx="10363200" cy="12700"/>
+          </a:xfrm>
+          <a:prstGeom prst="rect">
+            <a:avLst/>
+          </a:prstGeom>
+          <a:solidFill>
+            <a:srgbClr val="FFFFFF">
+              <a:alpha val="22000"/>
+            </a:srgbClr>
+          </a:solidFill>
+          <a:ln>
+            <a:noFill/>
+          </a:ln>
+        </p:spPr>
+        <p:txBody>
+          <a:bodyPr/>
+          <a:lstStyle/>
+          <a:p>
+            <a:endParaRPr lang="th-TH"/>
+          </a:p>
+        </p:txBody>
+      </p:sp>
+      <p:sp>
+        <p:nvSpPr>
+          <p:cNvPr id="91" name="Date Placeholder"/>
+          <p:cNvSpPr>
+            <a:spLocks noGrp="1"/>
+          </p:cNvSpPr>
+          <p:nvPr>
+            <p:ph type="dt" idx="10"/>
+          </p:nvPr>
+        </p:nvSpPr>
+        <p:spPr>
+          <a:xfrm>
+            <a:off x="914400" y="6309360"/>
+            <a:ext cx="2743200" cy="274320"/>
+          </a:xfrm>
+          <a:prstGeom prst="rect">
+            <a:avLst/>
+          </a:prstGeom>
+        </p:spPr>
+        <p:txBody>
+          <a:bodyPr wrap="square" anchor="ctr" lIns="0" tIns="0" rIns="0" bIns="0" rtlCol="0"/>
+          <a:lstStyle>
+            <a:lvl1pPr algn="l" marL="0" indent="0">
+              <a:lnSpc>
+                <a:spcPct val="100000"/>
+              </a:lnSpc>
+              <a:buNone/>
+              <a:defRPr lang="th-TH" sz="1000" dirty="0">
+                <a:solidFill>
+                  <a:srgbClr val="FFFFFF">
+                    <a:alpha val="72000"/>
+                  </a:srgbClr>
+                </a:solidFill>
+                <a:latin typeface="+mn-lt"/>
+                <a:ea typeface="+mn-ea"/>
+                <a:cs typeface="+mn-cs"/>
+              </a:defRPr>
+            </a:lvl1pPr>
+          </a:lstStyle>
+          <a:p>
+            <a:pPr algn="l" marL="0" indent="0">
+              <a:lnSpc>
+                <a:spcPct val="100000"/>
+              </a:lnSpc>
+              <a:buNone/>
+            </a:pPr>
+            <a:endParaRPr lang="th-TH" sz="1000"/>
+          </a:p>
+        </p:txBody>
+      </p:sp>
+      <p:sp>
+        <p:nvSpPr>
+          <p:cNvPr id="92" name="Footer Placeholder"/>
+          <p:cNvSpPr>
+            <a:spLocks noGrp="1"/>
+          </p:cNvSpPr>
+          <p:nvPr>
+            <p:ph type="ftr" idx="11"/>
+          </p:nvPr>
+        </p:nvSpPr>
+        <p:spPr>
+          <a:xfrm>
+            <a:off x="4572000" y="6309360"/>
+            <a:ext cx="3657600" cy="274320"/>
+          </a:xfrm>
+          <a:prstGeom prst="rect">
+            <a:avLst/>
+          </a:prstGeom>
+        </p:spPr>
+        <p:txBody>
+          <a:bodyPr wrap="square" anchor="ctr" lIns="0" tIns="0" rIns="0" bIns="0" rtlCol="0"/>
+          <a:lstStyle>
+            <a:lvl1pPr algn="ctr" marL="0" indent="0">
+              <a:lnSpc>
+                <a:spcPct val="100000"/>
+              </a:lnSpc>
+              <a:buNone/>
+              <a:defRPr lang="th-TH" sz="1000" dirty="0">
+                <a:solidFill>
+                  <a:srgbClr val="FFFFFF">
+                    <a:alpha val="72000"/>
+                  </a:srgbClr>
+                </a:solidFill>
+                <a:latin typeface="+mn-lt"/>
+                <a:ea typeface="+mn-ea"/>
+                <a:cs typeface="+mn-cs"/>
+              </a:defRPr>
+            </a:lvl1pPr>
+          </a:lstStyle>
+          <a:p>
+            <a:pPr algn="ctr" marL="0" indent="0">
+              <a:lnSpc>
+                <a:spcPct val="100000"/>
+              </a:lnSpc>
+              <a:buNone/>
+            </a:pPr>
+            <a:endParaRPr lang="th-TH" sz="1000"/>
+          </a:p>
+        </p:txBody>
+      </p:sp>
+      <p:sp>
+        <p:nvSpPr>
+          <p:cNvPr id="93" name="Slide Number Placeholder"/>
+          <p:cNvSpPr>
+            <a:spLocks noGrp="1"/>
+          </p:cNvSpPr>
+          <p:nvPr>
+            <p:ph type="sldNum" sz="quarter" idx="12"/>
+          </p:nvPr>
+        </p:nvSpPr>
+        <p:spPr>
+          <a:xfrm>
+            <a:off x="9906000" y="6309360"/>
+            <a:ext cx="1371600" cy="274320"/>
+          </a:xfrm>
+          <a:prstGeom prst="rect">
+            <a:avLst/>
+          </a:prstGeom>
+        </p:spPr>
+        <p:txBody>
+          <a:bodyPr anchor="ctr"/>
+          <a:lstStyle>
+            <a:lvl1pPr algn="r" marL="0" indent="0">
+              <a:lnSpc>
+                <a:spcPct val="100000"/>
+              </a:lnSpc>
+              <a:buNone/>
+              <a:defRPr lang="th-TH" sz="1000" dirty="0">
+                <a:solidFill>
+                  <a:srgbClr val="FFFFFF">
+                    <a:alpha val="72000"/>
+                  </a:srgbClr>
+                </a:solidFill>
+                <a:latin typeface="+mn-lt"/>
+                <a:ea typeface="+mn-ea"/>
+                <a:cs typeface="+mn-cs"/>
+              </a:defRPr>
+            </a:lvl1pPr>
+          </a:lstStyle>
+          <a:p>
+            <a:pPr algn="r" marL="0" indent="0">
+              <a:buNone/>
+            </a:pPr>
+            <a:fld id="{B7E3A1C2-4F5D-4A88-9C1E-6D2F0A93B451}" type="slidenum">
+              <a:rPr lang="th-TH" sz="1000">
+                <a:solidFill>
+                  <a:srgbClr val="FFFFFF">
+                    <a:alpha val="60000"/>
+                  </a:srgbClr>
+                </a:solidFill>
+                <a:latin typeface="+mn-lt"/>
+                <a:cs typeface="+mn-cs"/>
+              </a:rPr>
+              <a:t>2</a:t>
+            </a:fld>
+            <a:endParaRPr lang="th-TH" sz="1000"/>
+          </a:p>
+        </p:txBody>
+      </p:sp>
       <p:pic>
         <p:nvPicPr>
-          <p:cNvPr id="15" name="NCT Logo"/>
+          <p:cNvPr id="94" name="NCT Mark"/>
           <p:cNvPicPr>
             <a:picLocks noChangeAspect="1"/>
           </p:cNvPicPr>
@@ -969,204 +1439,14 @@
         </p:blipFill>
         <p:spPr>
           <a:xfrm>
-            <a:off x="914400" y="4476750"/>
-            <a:ext cx="2560320" cy="1302864"/>
+            <a:off x="9494520" y="6289360"/>
+            <a:ext cx="274320" cy="174498"/>
           </a:xfrm>
           <a:prstGeom prst="rect">
             <a:avLst/>
           </a:prstGeom>
         </p:spPr>
       </p:pic>
-      <p:sp>
-        <p:nvSpPr>
-          <p:cNvPr id="90" name="Footer Rule"/>
-          <p:cNvSpPr/>
-          <p:nvPr/>
-        </p:nvSpPr>
-        <p:spPr>
-          <a:xfrm>
-            <a:off x="914400" y="6172200"/>
-            <a:ext cx="10363200" cy="12700"/>
-          </a:xfrm>
-          <a:prstGeom prst="rect">
-            <a:avLst/>
-          </a:prstGeom>
-          <a:solidFill>
-            <a:srgbClr val="FFFFFF">
-              <a:alpha val="22000"/>
-            </a:srgbClr>
-          </a:solidFill>
-          <a:ln>
-            <a:noFill/>
-          </a:ln>
-        </p:spPr>
-        <p:txBody>
-          <a:bodyPr/>
-          <a:lstStyle/>
-          <a:p>
-            <a:endParaRPr lang="th-TH"/>
-          </a:p>
-        </p:txBody>
-      </p:sp>
-      <p:sp>
-        <p:nvSpPr>
-          <p:cNvPr id="91" name="Date Placeholder"/>
-          <p:cNvSpPr>
-            <a:spLocks noGrp="1"/>
-          </p:cNvSpPr>
-          <p:nvPr>
-            <p:ph type="dt" idx="10"/>
-          </p:nvPr>
-        </p:nvSpPr>
-        <p:spPr>
-          <a:xfrm>
-            <a:off x="914400" y="6309360"/>
-            <a:ext cx="2743200" cy="274320"/>
-          </a:xfrm>
-          <a:prstGeom prst="rect">
-            <a:avLst/>
-          </a:prstGeom>
-        </p:spPr>
-        <p:txBody>
-          <a:bodyPr wrap="square" anchor="ctr" lIns="0" tIns="0" rIns="0" bIns="0" rtlCol="0"/>
-          <a:lstStyle>
-            <a:lvl1pPr algn="l" marL="0" indent="0">
-              <a:lnSpc>
-                <a:spcPct val="100000"/>
-              </a:lnSpc>
-              <a:buNone/>
-              <a:defRPr lang="th-TH" sz="1000" dirty="0">
-                <a:solidFill>
-                  <a:srgbClr val="FFFFFF">
-                    <a:alpha val="55000"/>
-                  </a:srgbClr>
-                </a:solidFill>
-                <a:latin typeface="+mn-lt"/>
-                <a:ea typeface="+mn-ea"/>
-                <a:cs typeface="+mn-cs"/>
-              </a:defRPr>
-            </a:lvl1pPr>
-          </a:lstStyle>
-          <a:p>
-            <a:pPr algn="l" marL="0" indent="0">
-              <a:lnSpc>
-                <a:spcPct val="100000"/>
-              </a:lnSpc>
-              <a:buNone/>
-            </a:pPr>
-            <a:endParaRPr lang="th-TH" sz="1000"/>
-          </a:p>
-        </p:txBody>
-      </p:sp>
-      <p:sp>
-        <p:nvSpPr>
-          <p:cNvPr id="92" name="Footer Placeholder"/>
-          <p:cNvSpPr>
-            <a:spLocks noGrp="1"/>
-          </p:cNvSpPr>
-          <p:nvPr>
-            <p:ph type="ftr" idx="11"/>
-          </p:nvPr>
-        </p:nvSpPr>
-        <p:spPr>
-          <a:xfrm>
-            <a:off x="4572000" y="6309360"/>
-            <a:ext cx="3657600" cy="274320"/>
-          </a:xfrm>
-          <a:prstGeom prst="rect">
-            <a:avLst/>
-          </a:prstGeom>
-        </p:spPr>
-        <p:txBody>
-          <a:bodyPr wrap="square" anchor="ctr" lIns="0" tIns="0" rIns="0" bIns="0" rtlCol="0"/>
-          <a:lstStyle>
-            <a:lvl1pPr algn="ctr" marL="0" indent="0">
-              <a:lnSpc>
-                <a:spcPct val="100000"/>
-              </a:lnSpc>
-              <a:buNone/>
-              <a:defRPr lang="th-TH" sz="1000" dirty="0">
-                <a:solidFill>
-                  <a:srgbClr val="FFFFFF">
-                    <a:alpha val="55000"/>
-                  </a:srgbClr>
-                </a:solidFill>
-                <a:latin typeface="+mn-lt"/>
-                <a:ea typeface="+mn-ea"/>
-                <a:cs typeface="+mn-cs"/>
-              </a:defRPr>
-            </a:lvl1pPr>
-          </a:lstStyle>
-          <a:p>
-            <a:pPr algn="ctr" marL="0" indent="0">
-              <a:lnSpc>
-                <a:spcPct val="100000"/>
-              </a:lnSpc>
-              <a:buNone/>
-            </a:pPr>
-            <a:endParaRPr lang="th-TH" sz="1000"/>
-          </a:p>
-        </p:txBody>
-      </p:sp>
-      <p:sp>
-        <p:nvSpPr>
-          <p:cNvPr id="93" name="Slide Number Placeholder"/>
-          <p:cNvSpPr>
-            <a:spLocks noGrp="1"/>
-          </p:cNvSpPr>
-          <p:nvPr>
-            <p:ph type="sldNum" sz="quarter" idx="12"/>
-          </p:nvPr>
-        </p:nvSpPr>
-        <p:spPr>
-          <a:xfrm>
-            <a:off x="9906000" y="6309360"/>
-            <a:ext cx="1371600" cy="274320"/>
-          </a:xfrm>
-          <a:prstGeom prst="rect">
-            <a:avLst/>
-          </a:prstGeom>
-        </p:spPr>
-        <p:txBody>
-          <a:bodyPr anchor="ctr"/>
-          <a:lstStyle>
-            <a:lvl1pPr algn="r" marL="0" indent="0">
-              <a:lnSpc>
-                <a:spcPct val="100000"/>
-              </a:lnSpc>
-              <a:buNone/>
-              <a:defRPr lang="th-TH" sz="1000" dirty="0">
-                <a:solidFill>
-                  <a:srgbClr val="FFFFFF">
-                    <a:alpha val="60000"/>
-                  </a:srgbClr>
-                </a:solidFill>
-                <a:latin typeface="+mn-lt"/>
-                <a:ea typeface="+mn-ea"/>
-                <a:cs typeface="+mn-cs"/>
-              </a:defRPr>
-            </a:lvl1pPr>
-          </a:lstStyle>
-          <a:p>
-            <a:pPr algn="r" marL="0" indent="0">
-              <a:buNone/>
-            </a:pPr>
-            <a:fld id="{B7E3A1C2-4F5D-4A88-9C1E-6D2F0A93B451}" type="slidenum">
-              <a:rPr lang="th-TH" sz="1000">
-                <a:solidFill>
-                  <a:srgbClr val="FFFFFF">
-                    <a:alpha val="60000"/>
-                  </a:srgbClr>
-                </a:solidFill>
-                <a:latin typeface="+mn-lt"/>
-                <a:cs typeface="+mn-cs"/>
-              </a:rPr>
-              <a:t>2</a:t>
-            </a:fld>
-            <a:endParaRPr lang="th-TH" sz="1000"/>
-          </a:p>
-        </p:txBody>
-      </p:sp>
     </p:spTree>
   </p:cSld>
   <p:clrMapOvr>
@@ -6184,7 +6464,7 @@
         </p:nvSpPr>
         <p:spPr>
           <a:xfrm>
-            <a:off x="914400" y="4297680"/>
+            <a:off x="914400" y="3931920"/>
             <a:ext cx="6217920" cy="2194560"/>
           </a:xfrm>
           <a:prstGeom prst="rect">
@@ -6417,7 +6697,7 @@
               <a:defRPr lang="th-TH" sz="1000" dirty="0">
                 <a:solidFill>
                   <a:srgbClr val="FFFFFF">
-                    <a:alpha val="55000"/>
+                    <a:alpha val="72000"/>
                   </a:srgbClr>
                 </a:solidFill>
                 <a:latin typeface="+mn-lt"/>
@@ -6467,7 +6747,7 @@
               <a:defRPr lang="th-TH" sz="1000" dirty="0">
                 <a:solidFill>
                   <a:srgbClr val="FFFFFF">
-                    <a:alpha val="55000"/>
+                    <a:alpha val="72000"/>
                   </a:srgbClr>
                 </a:solidFill>
                 <a:latin typeface="+mn-lt"/>
@@ -6517,7 +6797,7 @@
               <a:defRPr lang="th-TH" sz="1000" dirty="0">
                 <a:solidFill>
                   <a:srgbClr val="FFFFFF">
-                    <a:alpha val="60000"/>
+                    <a:alpha val="72000"/>
                   </a:srgbClr>
                 </a:solidFill>
                 <a:latin typeface="+mn-lt"/>
@@ -6798,7 +7078,7 @@
       </p:sp>
       <p:sp>
         <p:nvSpPr>
-          <p:cNvPr id="14" name="Footnote"/>
+          <p:cNvPr id="14" name="Category Key"/>
           <p:cNvSpPr>
             <a:spLocks noGrp="1"/>
           </p:cNvSpPr>
@@ -6809,7 +7089,7 @@
         <p:spPr>
           <a:xfrm>
             <a:off x="914400" y="5257800"/>
-            <a:ext cx="10363200" cy="274320"/>
+            <a:ext cx="5181600" cy="274320"/>
           </a:xfrm>
           <a:prstGeom prst="rect">
             <a:avLst/>
@@ -6835,6 +7115,64 @@
           </a:lstStyle>
           <a:p>
             <a:pPr algn="l" marL="0" indent="0">
+              <a:lnSpc>
+                <a:spcPct val="130000"/>
+              </a:lnSpc>
+              <a:buNone/>
+            </a:pPr>
+            <a:r>
+              <a:rPr lang="th-TH" sz="1000" dirty="0">
+                <a:solidFill>
+                  <a:srgbClr val="5F5F5F"/>
+                </a:solidFill>
+                <a:latin typeface="+mn-lt"/>
+                <a:ea typeface="+mn-ea"/>
+                <a:cs typeface="+mn-cs"/>
+              </a:rPr>
+              <a:t>■ หมวด 1  ■ หมวด 2  ■ หมวด 3</a:t>
+            </a:r>
+          </a:p>
+        </p:txBody>
+      </p:sp>
+      <p:sp>
+        <p:nvSpPr>
+          <p:cNvPr id="19" name="Footnote"/>
+          <p:cNvSpPr>
+            <a:spLocks noGrp="1"/>
+          </p:cNvSpPr>
+          <p:nvPr>
+            <p:ph type="body" idx="4"/>
+          </p:nvPr>
+        </p:nvSpPr>
+        <p:spPr>
+          <a:xfrm>
+            <a:off x="6096000" y="5257800"/>
+            <a:ext cx="5181600" cy="274320"/>
+          </a:xfrm>
+          <a:prstGeom prst="rect">
+            <a:avLst/>
+          </a:prstGeom>
+        </p:spPr>
+        <p:txBody>
+          <a:bodyPr wrap="square" anchor="t" lIns="0" tIns="0" rIns="0" bIns="0" rtlCol="0"/>
+          <a:lstStyle>
+            <a:lvl1pPr algn="r" marL="0" indent="0">
+              <a:lnSpc>
+                <a:spcPct val="130000"/>
+              </a:lnSpc>
+              <a:buNone/>
+              <a:defRPr lang="th-TH" sz="1000" dirty="0">
+                <a:solidFill>
+                  <a:srgbClr val="5F5F5F"/>
+                </a:solidFill>
+                <a:latin typeface="+mn-lt"/>
+                <a:ea typeface="+mn-ea"/>
+                <a:cs typeface="+mn-cs"/>
+              </a:defRPr>
+            </a:lvl1pPr>
+          </a:lstStyle>
+          <a:p>
+            <a:pPr algn="r" marL="0" indent="0">
               <a:lnSpc>
                 <a:spcPct val="130000"/>
               </a:lnSpc>
@@ -6890,7 +7228,7 @@
             <a:spLocks noGrp="1"/>
           </p:cNvSpPr>
           <p:nvPr>
-            <p:ph type="body" idx="4"/>
+            <p:ph type="body" idx="5"/>
           </p:nvPr>
         </p:nvSpPr>
         <p:spPr>
@@ -6948,7 +7286,7 @@
             <a:spLocks noGrp="1"/>
           </p:cNvSpPr>
           <p:nvPr>
-            <p:ph type="body" idx="5"/>
+            <p:ph type="body" idx="6"/>
           </p:nvPr>
         </p:nvSpPr>
         <p:spPr>
@@ -7625,7 +7963,7 @@
               <a:defRPr lang="th-TH" sz="1000" dirty="0">
                 <a:solidFill>
                   <a:srgbClr val="FFFFFF">
-                    <a:alpha val="55000"/>
+                    <a:alpha val="72000"/>
                   </a:srgbClr>
                 </a:solidFill>
                 <a:latin typeface="+mn-lt"/>
@@ -7675,7 +8013,7 @@
               <a:defRPr lang="th-TH" sz="1000" dirty="0">
                 <a:solidFill>
                   <a:srgbClr val="FFFFFF">
-                    <a:alpha val="55000"/>
+                    <a:alpha val="72000"/>
                   </a:srgbClr>
                 </a:solidFill>
                 <a:latin typeface="+mn-lt"/>
@@ -7725,7 +8063,7 @@
               <a:defRPr lang="th-TH" sz="1000" dirty="0">
                 <a:solidFill>
                   <a:srgbClr val="FFFFFF">
-                    <a:alpha val="60000"/>
+                    <a:alpha val="72000"/>
                   </a:srgbClr>
                 </a:solidFill>
                 <a:latin typeface="+mn-lt"/>
@@ -11372,7 +11710,7 @@
               <a:defRPr lang="th-TH" sz="1000" dirty="0">
                 <a:solidFill>
                   <a:srgbClr val="FFFFFF">
-                    <a:alpha val="55000"/>
+                    <a:alpha val="72000"/>
                   </a:srgbClr>
                 </a:solidFill>
                 <a:latin typeface="+mn-lt"/>
@@ -11422,7 +11760,7 @@
               <a:defRPr lang="th-TH" sz="1000" dirty="0">
                 <a:solidFill>
                   <a:srgbClr val="FFFFFF">
-                    <a:alpha val="55000"/>
+                    <a:alpha val="72000"/>
                   </a:srgbClr>
                 </a:solidFill>
                 <a:latin typeface="+mn-lt"/>
@@ -11472,7 +11810,7 @@
               <a:defRPr lang="th-TH" sz="1000" dirty="0">
                 <a:solidFill>
                   <a:srgbClr val="FFFFFF">
-                    <a:alpha val="60000"/>
+                    <a:alpha val="72000"/>
                   </a:srgbClr>
                 </a:solidFill>
                 <a:latin typeface="+mn-lt"/>
@@ -12801,7 +13139,7 @@
             <a:pPr/>
             <a:r>
               <a:rPr lang="th-TH" dirty="0"/>
-              <a:t>บริการที่ปรึกษาเทคโนโลยีสารสนเทศ</a:t>
+              <a:t>ข้อเสนอโครงการวางระบบบัญชีอัตโนมัติ</a:t>
             </a:r>
           </a:p>
         </p:txBody>
@@ -12838,1778 +13176,6 @@
 </file>
 
 <file path=ppt/slides/slide10.xml><?xml version="1.0" encoding="utf-8"?>
-<p:sld xmlns:a="http://schemas.openxmlformats.org/drawingml/2006/main" xmlns:r="http://schemas.openxmlformats.org/officeDocument/2006/relationships" xmlns:p="http://schemas.openxmlformats.org/presentationml/2006/main">
-  <p:cSld name="">
-    <p:spTree>
-      <p:nvGrpSpPr>
-        <p:cNvPr id="1" name=""/>
-        <p:cNvGrpSpPr/>
-        <p:nvPr/>
-      </p:nvGrpSpPr>
-      <p:grpSpPr>
-        <a:xfrm>
-          <a:off x="0" y="0"/>
-          <a:ext cx="0" cy="0"/>
-          <a:chOff x="0" y="0"/>
-          <a:chExt cx="0" cy="0"/>
-        </a:xfrm>
-      </p:grpSpPr>
-      <p:sp>
-        <p:nvSpPr>
-          <p:cNvPr id="2" name="Title"/>
-          <p:cNvSpPr>
-            <a:spLocks noGrp="1"/>
-          </p:cNvSpPr>
-          <p:nvPr>
-            <p:ph type="title"/>
-          </p:nvPr>
-        </p:nvSpPr>
-        <p:spPr/>
-        <p:txBody>
-          <a:bodyPr/>
-          <a:lstStyle/>
-          <a:p>
-            <a:pPr/>
-            <a:r>
-              <a:rPr lang="th-TH" dirty="0"/>
-              <a:t>สภาพระบบบัญชีปัจจุบัน</a:t>
-            </a:r>
-          </a:p>
-        </p:txBody>
-      </p:sp>
-      <p:sp>
-        <p:nvSpPr>
-          <p:cNvPr id="3" name="CtxK"/>
-          <p:cNvSpPr>
-            <a:spLocks noGrp="1"/>
-          </p:cNvSpPr>
-          <p:nvPr>
-            <p:ph type="body" idx="1"/>
-          </p:nvPr>
-        </p:nvSpPr>
-        <p:spPr/>
-        <p:txBody>
-          <a:bodyPr/>
-          <a:lstStyle/>
-          <a:p>
-            <a:pPr/>
-            <a:r>
-              <a:rPr lang="th-TH" dirty="0"/>
-              <a:t>สภาพปัจจุบัน</a:t>
-            </a:r>
-          </a:p>
-        </p:txBody>
-      </p:sp>
-      <p:sp>
-        <p:nvSpPr>
-          <p:cNvPr id="4" name="CtxB"/>
-          <p:cNvSpPr>
-            <a:spLocks noGrp="1"/>
-          </p:cNvSpPr>
-          <p:nvPr>
-            <p:ph type="body" idx="2"/>
-          </p:nvPr>
-        </p:nvSpPr>
-        <p:spPr/>
-        <p:txBody>
-          <a:bodyPr/>
-          <a:lstStyle/>
-          <a:p>
-            <a:pPr/>
-            <a:r>
-              <a:rPr lang="th-TH" dirty="0"/>
-              <a:t>คีย์เอกสารซ้ำสามระบบ ไม่มีจุดตรวจกลาง</a:t>
-            </a:r>
-          </a:p>
-          <a:p>
-            <a:pPr lvl="1"/>
-            <a:r>
-              <a:rPr lang="th-TH" dirty="0"/>
-              <a:t>เอกสารเข้าเฉลี่ย 1,200 ใบต่อเดือน</a:t>
-            </a:r>
-          </a:p>
-          <a:p>
-            <a:pPr/>
-            <a:r>
-              <a:rPr lang="th-TH" dirty="0"/>
-              <a:t>ปิดงบล่าช้าเฉลี่ย 6 วันทำการ</a:t>
-            </a:r>
-          </a:p>
-          <a:p>
-            <a:pPr/>
-            <a:r>
-              <a:rPr lang="th-TH" dirty="0"/>
-              <a:t>ไม่มี audit trail ของการแก้ไขรายการ</a:t>
-            </a:r>
-          </a:p>
-        </p:txBody>
-      </p:sp>
-      <p:sp>
-        <p:nvSpPr>
-          <p:cNvPr id="5" name="OutK"/>
-          <p:cNvSpPr>
-            <a:spLocks noGrp="1"/>
-          </p:cNvSpPr>
-          <p:nvPr>
-            <p:ph type="body" idx="3"/>
-          </p:nvPr>
-        </p:nvSpPr>
-        <p:spPr/>
-        <p:txBody>
-          <a:bodyPr/>
-          <a:lstStyle/>
-          <a:p>
-            <a:pPr/>
-            <a:r>
-              <a:rPr lang="th-TH" dirty="0"/>
-              <a:t>สิ่งที่จะเกิดขึ้น</a:t>
-            </a:r>
-          </a:p>
-        </p:txBody>
-      </p:sp>
-      <p:sp>
-        <p:nvSpPr>
-          <p:cNvPr id="6" name="OutB"/>
-          <p:cNvSpPr>
-            <a:spLocks noGrp="1"/>
-          </p:cNvSpPr>
-          <p:nvPr>
-            <p:ph type="body" idx="4"/>
-          </p:nvPr>
-        </p:nvSpPr>
-        <p:spPr/>
-        <p:txBody>
-          <a:bodyPr/>
-          <a:lstStyle/>
-          <a:p>
-            <a:pPr/>
-            <a:r>
-              <a:rPr lang="th-TH" dirty="0"/>
-              <a:t>คีย์จุดเดียว ระบบกระจายต่อให้อัตโนมัติ</a:t>
-            </a:r>
-          </a:p>
-          <a:p>
-            <a:pPr lvl="1"/>
-            <a:r>
-              <a:rPr lang="th-TH" dirty="0"/>
-              <a:t>ลดเวลาคีย์ต่อใบจาก 4 นาที เหลือ 40 วินาที</a:t>
-            </a:r>
-          </a:p>
-          <a:p>
-            <a:pPr/>
-            <a:r>
-              <a:rPr lang="th-TH" dirty="0"/>
-              <a:t>ปิดงบภายใน 2 วันทำการ</a:t>
-            </a:r>
-          </a:p>
-          <a:p>
-            <a:pPr/>
-            <a:r>
-              <a:rPr lang="th-TH" dirty="0"/>
-              <a:t>บันทึกทุกการแก้ไขพร้อมผู้ทำและเวลา</a:t>
-            </a:r>
-          </a:p>
-        </p:txBody>
-      </p:sp>
-      <p:sp>
-        <p:nvSpPr>
-          <p:cNvPr id="7" name="TkL"/>
-          <p:cNvSpPr>
-            <a:spLocks noGrp="1"/>
-          </p:cNvSpPr>
-          <p:nvPr>
-            <p:ph type="body" idx="5"/>
-          </p:nvPr>
-        </p:nvSpPr>
-        <p:spPr/>
-        <p:txBody>
-          <a:bodyPr/>
-          <a:lstStyle/>
-          <a:p>
-            <a:pPr/>
-            <a:r>
-              <a:rPr lang="th-TH" dirty="0"/>
-              <a:t>สรุป</a:t>
-            </a:r>
-          </a:p>
-        </p:txBody>
-      </p:sp>
-      <p:sp>
-        <p:nvSpPr>
-          <p:cNvPr id="8" name="TkC"/>
-          <p:cNvSpPr>
-            <a:spLocks noGrp="1"/>
-          </p:cNvSpPr>
-          <p:nvPr>
-            <p:ph type="body" idx="6"/>
-          </p:nvPr>
-        </p:nvSpPr>
-        <p:spPr/>
-        <p:txBody>
-          <a:bodyPr/>
-          <a:lstStyle/>
-          <a:p>
-            <a:pPr/>
-            <a:r>
-              <a:rPr lang="th-TH" dirty="0"/>
-              <a:t>ปัญหาหลักคือการคีย์ซ้ำ ไม่ใช่จำนวนเอกสาร</a:t>
-            </a:r>
-          </a:p>
-        </p:txBody>
-      </p:sp>
-    </p:spTree>
-  </p:cSld>
-  <p:clrMapOvr>
-    <a:masterClrMapping/>
-  </p:clrMapOvr>
-</p:sld>
-</file>
-
-<file path=ppt/slides/slide11.xml><?xml version="1.0" encoding="utf-8"?>
-<p:sld xmlns:a="http://schemas.openxmlformats.org/drawingml/2006/main" xmlns:r="http://schemas.openxmlformats.org/officeDocument/2006/relationships" xmlns:p="http://schemas.openxmlformats.org/presentationml/2006/main">
-  <p:cSld name="">
-    <p:spTree>
-      <p:nvGrpSpPr>
-        <p:cNvPr id="1" name=""/>
-        <p:cNvGrpSpPr/>
-        <p:nvPr/>
-      </p:nvGrpSpPr>
-      <p:grpSpPr>
-        <a:xfrm>
-          <a:off x="0" y="0"/>
-          <a:ext cx="0" cy="0"/>
-          <a:chOff x="0" y="0"/>
-          <a:chExt cx="0" cy="0"/>
-        </a:xfrm>
-      </p:grpSpPr>
-      <p:sp>
-        <p:nvSpPr>
-          <p:cNvPr id="2" name="Title"/>
-          <p:cNvSpPr>
-            <a:spLocks noGrp="1"/>
-          </p:cNvSpPr>
-          <p:nvPr>
-            <p:ph type="title"/>
-          </p:nvPr>
-        </p:nvSpPr>
-        <p:spPr/>
-        <p:txBody>
-          <a:bodyPr/>
-          <a:lstStyle/>
-          <a:p>
-            <a:pPr/>
-            <a:r>
-              <a:rPr lang="th-TH" dirty="0"/>
-              <a:t>สี่ผลลัพธ์ที่ข้อเสนอนี้ให้</a:t>
-            </a:r>
-          </a:p>
-        </p:txBody>
-      </p:sp>
-      <p:sp>
-        <p:nvSpPr>
-          <p:cNvPr id="3" name="N0"/>
-          <p:cNvSpPr>
-            <a:spLocks noGrp="1"/>
-          </p:cNvSpPr>
-          <p:nvPr>
-            <p:ph type="body" idx="1"/>
-          </p:nvPr>
-        </p:nvSpPr>
-        <p:spPr/>
-        <p:txBody>
-          <a:bodyPr/>
-          <a:lstStyle/>
-          <a:p>
-            <a:pPr/>
-            <a:r>
-              <a:rPr lang="th-TH" dirty="0"/>
-              <a:t>01</a:t>
-            </a:r>
-          </a:p>
-        </p:txBody>
-      </p:sp>
-      <p:sp>
-        <p:nvSpPr>
-          <p:cNvPr id="4" name="H0"/>
-          <p:cNvSpPr>
-            <a:spLocks noGrp="1"/>
-          </p:cNvSpPr>
-          <p:nvPr>
-            <p:ph type="body" idx="2"/>
-          </p:nvPr>
-        </p:nvSpPr>
-        <p:spPr/>
-        <p:txBody>
-          <a:bodyPr/>
-          <a:lstStyle/>
-          <a:p>
-            <a:pPr/>
-            <a:r>
-              <a:rPr lang="th-TH" dirty="0"/>
-              <a:t>ลดงานคีย์ซ้ำ</a:t>
-            </a:r>
-          </a:p>
-        </p:txBody>
-      </p:sp>
-      <p:sp>
-        <p:nvSpPr>
-          <p:cNvPr id="5" name="B0"/>
-          <p:cNvSpPr>
-            <a:spLocks noGrp="1"/>
-          </p:cNvSpPr>
-          <p:nvPr>
-            <p:ph type="body" idx="3"/>
-          </p:nvPr>
-        </p:nvSpPr>
-        <p:spPr/>
-        <p:txBody>
-          <a:bodyPr/>
-          <a:lstStyle/>
-          <a:p>
-            <a:pPr/>
-            <a:r>
-              <a:rPr lang="th-TH" dirty="0"/>
-              <a:t>รับเอกสารเข้าระบบเดียว แล้วกระจายต่อให้ทุกปลายทางอัตโนมัติ</a:t>
-            </a:r>
-          </a:p>
-        </p:txBody>
-      </p:sp>
-      <p:sp>
-        <p:nvSpPr>
-          <p:cNvPr id="6" name="N1"/>
-          <p:cNvSpPr>
-            <a:spLocks noGrp="1"/>
-          </p:cNvSpPr>
-          <p:nvPr>
-            <p:ph type="body" idx="4"/>
-          </p:nvPr>
-        </p:nvSpPr>
-        <p:spPr/>
-        <p:txBody>
-          <a:bodyPr/>
-          <a:lstStyle/>
-          <a:p>
-            <a:pPr/>
-            <a:r>
-              <a:rPr lang="th-TH" dirty="0"/>
-              <a:t>02</a:t>
-            </a:r>
-          </a:p>
-        </p:txBody>
-      </p:sp>
-      <p:sp>
-        <p:nvSpPr>
-          <p:cNvPr id="7" name="H1"/>
-          <p:cNvSpPr>
-            <a:spLocks noGrp="1"/>
-          </p:cNvSpPr>
-          <p:nvPr>
-            <p:ph type="body" idx="5"/>
-          </p:nvPr>
-        </p:nvSpPr>
-        <p:spPr/>
-        <p:txBody>
-          <a:bodyPr/>
-          <a:lstStyle/>
-          <a:p>
-            <a:pPr/>
-            <a:r>
-              <a:rPr lang="th-TH" dirty="0"/>
-              <a:t>ตรวจสอบได้</a:t>
-            </a:r>
-          </a:p>
-        </p:txBody>
-      </p:sp>
-      <p:sp>
-        <p:nvSpPr>
-          <p:cNvPr id="8" name="B1"/>
-          <p:cNvSpPr>
-            <a:spLocks noGrp="1"/>
-          </p:cNvSpPr>
-          <p:nvPr>
-            <p:ph type="body" idx="6"/>
-          </p:nvPr>
-        </p:nvSpPr>
-        <p:spPr/>
-        <p:txBody>
-          <a:bodyPr/>
-          <a:lstStyle/>
-          <a:p>
-            <a:pPr/>
-            <a:r>
-              <a:rPr lang="th-TH" dirty="0"/>
-              <a:t>ทุกรายการมี audit trail ผู้ทำ เวลา และค่าก่อนหลัง</a:t>
-            </a:r>
-          </a:p>
-        </p:txBody>
-      </p:sp>
-      <p:sp>
-        <p:nvSpPr>
-          <p:cNvPr id="9" name="N2"/>
-          <p:cNvSpPr>
-            <a:spLocks noGrp="1"/>
-          </p:cNvSpPr>
-          <p:nvPr>
-            <p:ph type="body" idx="7"/>
-          </p:nvPr>
-        </p:nvSpPr>
-        <p:spPr/>
-        <p:txBody>
-          <a:bodyPr/>
-          <a:lstStyle/>
-          <a:p>
-            <a:pPr/>
-            <a:r>
-              <a:rPr lang="th-TH" dirty="0"/>
-              <a:t>03</a:t>
-            </a:r>
-          </a:p>
-        </p:txBody>
-      </p:sp>
-      <p:sp>
-        <p:nvSpPr>
-          <p:cNvPr id="10" name="H2"/>
-          <p:cNvSpPr>
-            <a:spLocks noGrp="1"/>
-          </p:cNvSpPr>
-          <p:nvPr>
-            <p:ph type="body" idx="8"/>
-          </p:nvPr>
-        </p:nvSpPr>
-        <p:spPr/>
-        <p:txBody>
-          <a:bodyPr/>
-          <a:lstStyle/>
-          <a:p>
-            <a:pPr/>
-            <a:r>
-              <a:rPr lang="th-TH" dirty="0"/>
-              <a:t>ปิดงบเร็วขึ้น</a:t>
-            </a:r>
-          </a:p>
-        </p:txBody>
-      </p:sp>
-      <p:sp>
-        <p:nvSpPr>
-          <p:cNvPr id="11" name="B2"/>
-          <p:cNvSpPr>
-            <a:spLocks noGrp="1"/>
-          </p:cNvSpPr>
-          <p:nvPr>
-            <p:ph type="body" idx="9"/>
-          </p:nvPr>
-        </p:nvSpPr>
-        <p:spPr/>
-        <p:txBody>
-          <a:bodyPr/>
-          <a:lstStyle/>
-          <a:p>
-            <a:pPr/>
-            <a:r>
-              <a:rPr lang="th-TH" dirty="0"/>
-              <a:t>กระทบยอดอัตโนมัติรายวัน ไม่ต้องรอสิ้นเดือน</a:t>
-            </a:r>
-          </a:p>
-        </p:txBody>
-      </p:sp>
-      <p:sp>
-        <p:nvSpPr>
-          <p:cNvPr id="12" name="N3"/>
-          <p:cNvSpPr>
-            <a:spLocks noGrp="1"/>
-          </p:cNvSpPr>
-          <p:nvPr>
-            <p:ph type="body" idx="10"/>
-          </p:nvPr>
-        </p:nvSpPr>
-        <p:spPr/>
-        <p:txBody>
-          <a:bodyPr/>
-          <a:lstStyle/>
-          <a:p>
-            <a:pPr/>
-            <a:r>
-              <a:rPr lang="th-TH" dirty="0"/>
-              <a:t>04</a:t>
-            </a:r>
-          </a:p>
-        </p:txBody>
-      </p:sp>
-      <p:sp>
-        <p:nvSpPr>
-          <p:cNvPr id="13" name="H3"/>
-          <p:cNvSpPr>
-            <a:spLocks noGrp="1"/>
-          </p:cNvSpPr>
-          <p:nvPr>
-            <p:ph type="body" idx="11"/>
-          </p:nvPr>
-        </p:nvSpPr>
-        <p:spPr/>
-        <p:txBody>
-          <a:bodyPr/>
-          <a:lstStyle/>
-          <a:p>
-            <a:pPr/>
-            <a:r>
-              <a:rPr lang="th-TH" dirty="0"/>
-              <a:t>ขยายต่อได้</a:t>
-            </a:r>
-          </a:p>
-        </p:txBody>
-      </p:sp>
-      <p:sp>
-        <p:nvSpPr>
-          <p:cNvPr id="14" name="B3"/>
-          <p:cNvSpPr>
-            <a:spLocks noGrp="1"/>
-          </p:cNvSpPr>
-          <p:nvPr>
-            <p:ph type="body" idx="12"/>
-          </p:nvPr>
-        </p:nvSpPr>
-        <p:spPr/>
-        <p:txBody>
-          <a:bodyPr/>
-          <a:lstStyle/>
-          <a:p>
-            <a:pPr/>
-            <a:r>
-              <a:rPr lang="th-TH" dirty="0"/>
-              <a:t>เพิ่มกระบวนการใหม่โดยไม่แก้ของเดิม</a:t>
-            </a:r>
-          </a:p>
-        </p:txBody>
-      </p:sp>
-      <p:sp>
-        <p:nvSpPr>
-          <p:cNvPr id="15" name="BL"/>
-          <p:cNvSpPr>
-            <a:spLocks noGrp="1"/>
-          </p:cNvSpPr>
-          <p:nvPr>
-            <p:ph type="body" idx="13"/>
-          </p:nvPr>
-        </p:nvSpPr>
-        <p:spPr/>
-        <p:txBody>
-          <a:bodyPr/>
-          <a:lstStyle/>
-          <a:p>
-            <a:pPr/>
-            <a:r>
-              <a:rPr lang="th-TH" dirty="0"/>
-              <a:t>สรุป</a:t>
-            </a:r>
-          </a:p>
-        </p:txBody>
-      </p:sp>
-      <p:sp>
-        <p:nvSpPr>
-          <p:cNvPr id="16" name="BC"/>
-          <p:cNvSpPr>
-            <a:spLocks noGrp="1"/>
-          </p:cNvSpPr>
-          <p:nvPr>
-            <p:ph type="body" idx="14"/>
-          </p:nvPr>
-        </p:nvSpPr>
-        <p:spPr/>
-        <p:txBody>
-          <a:bodyPr/>
-          <a:lstStyle/>
-          <a:p>
-            <a:pPr/>
-            <a:r>
-              <a:rPr lang="th-TH" dirty="0"/>
-              <a:t>ทั้งสี่ข้อมาจากการแก้จุดเดียวกัน คือรวมจุดรับเอกสาร</a:t>
-            </a:r>
-          </a:p>
-        </p:txBody>
-      </p:sp>
-    </p:spTree>
-  </p:cSld>
-  <p:clrMapOvr>
-    <a:masterClrMapping/>
-  </p:clrMapOvr>
-</p:sld>
-</file>
-
-<file path=ppt/slides/slide12.xml><?xml version="1.0" encoding="utf-8"?>
-<p:sld xmlns:a="http://schemas.openxmlformats.org/drawingml/2006/main" xmlns:r="http://schemas.openxmlformats.org/officeDocument/2006/relationships" xmlns:p="http://schemas.openxmlformats.org/presentationml/2006/main">
-  <p:cSld name="">
-    <p:spTree>
-      <p:nvGrpSpPr>
-        <p:cNvPr id="1" name=""/>
-        <p:cNvGrpSpPr/>
-        <p:nvPr/>
-      </p:nvGrpSpPr>
-      <p:grpSpPr>
-        <a:xfrm>
-          <a:off x="0" y="0"/>
-          <a:ext cx="0" cy="0"/>
-          <a:chOff x="0" y="0"/>
-          <a:chExt cx="0" cy="0"/>
-        </a:xfrm>
-      </p:grpSpPr>
-      <p:sp>
-        <p:nvSpPr>
-          <p:cNvPr id="2" name="Title"/>
-          <p:cNvSpPr>
-            <a:spLocks noGrp="1"/>
-          </p:cNvSpPr>
-          <p:nvPr>
-            <p:ph type="title"/>
-          </p:nvPr>
-        </p:nvSpPr>
-        <p:spPr/>
-        <p:txBody>
-          <a:bodyPr/>
-          <a:lstStyle/>
-          <a:p>
-            <a:pPr/>
-            <a:r>
-              <a:rPr lang="th-TH" dirty="0"/>
-              <a:t>กระบวนการที่เสนอ</a:t>
-            </a:r>
-          </a:p>
-        </p:txBody>
-      </p:sp>
-      <p:sp>
-        <p:nvSpPr>
-          <p:cNvPr id="3" name="Sub"/>
-          <p:cNvSpPr>
-            <a:spLocks noGrp="1"/>
-          </p:cNvSpPr>
-          <p:nvPr>
-            <p:ph type="body" idx="1"/>
-          </p:nvPr>
-        </p:nvSpPr>
-        <p:spPr/>
-        <p:txBody>
-          <a:bodyPr/>
-          <a:lstStyle/>
-          <a:p>
-            <a:pPr/>
-            <a:r>
-              <a:rPr lang="th-TH" dirty="0"/>
-              <a:t>ห้าขั้นตอน ทำงานต่อเนื่องโดยไม่ต้องคีย์ซ้ำ</a:t>
-            </a:r>
-          </a:p>
-        </p:txBody>
-      </p:sp>
-      <p:sp>
-        <p:nvSpPr>
-          <p:cNvPr id="4" name="C0"/>
-          <p:cNvSpPr>
-            <a:spLocks noGrp="1"/>
-          </p:cNvSpPr>
-          <p:nvPr>
-            <p:ph type="body" idx="2"/>
-          </p:nvPr>
-        </p:nvSpPr>
-        <p:spPr/>
-        <p:txBody>
-          <a:bodyPr/>
-          <a:lstStyle/>
-          <a:p>
-            <a:pPr/>
-            <a:r>
-              <a:rPr lang="th-TH" dirty="0"/>
-              <a:t>1</a:t>
-            </a:r>
-          </a:p>
-        </p:txBody>
-      </p:sp>
-      <p:sp>
-        <p:nvSpPr>
-          <p:cNvPr id="5" name="H0"/>
-          <p:cNvSpPr>
-            <a:spLocks noGrp="1"/>
-          </p:cNvSpPr>
-          <p:nvPr>
-            <p:ph type="body" idx="3"/>
-          </p:nvPr>
-        </p:nvSpPr>
-        <p:spPr/>
-        <p:txBody>
-          <a:bodyPr/>
-          <a:lstStyle/>
-          <a:p>
-            <a:pPr/>
-            <a:r>
-              <a:rPr lang="th-TH" dirty="0"/>
-              <a:t>รับเอกสาร</a:t>
-            </a:r>
-          </a:p>
-        </p:txBody>
-      </p:sp>
-      <p:sp>
-        <p:nvSpPr>
-          <p:cNvPr id="6" name="B0"/>
-          <p:cNvSpPr>
-            <a:spLocks noGrp="1"/>
-          </p:cNvSpPr>
-          <p:nvPr>
-            <p:ph type="body" idx="4"/>
-          </p:nvPr>
-        </p:nvSpPr>
-        <p:spPr/>
-        <p:txBody>
-          <a:bodyPr/>
-          <a:lstStyle/>
-          <a:p>
-            <a:pPr/>
-            <a:r>
-              <a:rPr lang="th-TH" dirty="0"/>
-              <a:t>สแกนหรือรับไฟล์เข้าคิวกลาง</a:t>
-            </a:r>
-          </a:p>
-        </p:txBody>
-      </p:sp>
-      <p:sp>
-        <p:nvSpPr>
-          <p:cNvPr id="7" name="C1"/>
-          <p:cNvSpPr>
-            <a:spLocks noGrp="1"/>
-          </p:cNvSpPr>
-          <p:nvPr>
-            <p:ph type="body" idx="5"/>
-          </p:nvPr>
-        </p:nvSpPr>
-        <p:spPr/>
-        <p:txBody>
-          <a:bodyPr/>
-          <a:lstStyle/>
-          <a:p>
-            <a:pPr/>
-            <a:r>
-              <a:rPr lang="th-TH" dirty="0"/>
-              <a:t>2</a:t>
-            </a:r>
-          </a:p>
-        </p:txBody>
-      </p:sp>
-      <p:sp>
-        <p:nvSpPr>
-          <p:cNvPr id="8" name="H1"/>
-          <p:cNvSpPr>
-            <a:spLocks noGrp="1"/>
-          </p:cNvSpPr>
-          <p:nvPr>
-            <p:ph type="body" idx="6"/>
-          </p:nvPr>
-        </p:nvSpPr>
-        <p:spPr/>
-        <p:txBody>
-          <a:bodyPr/>
-          <a:lstStyle/>
-          <a:p>
-            <a:pPr/>
-            <a:r>
-              <a:rPr lang="th-TH" dirty="0"/>
-              <a:t>อ่านข้อมูล</a:t>
-            </a:r>
-          </a:p>
-        </p:txBody>
-      </p:sp>
-      <p:sp>
-        <p:nvSpPr>
-          <p:cNvPr id="9" name="B1"/>
-          <p:cNvSpPr>
-            <a:spLocks noGrp="1"/>
-          </p:cNvSpPr>
-          <p:nvPr>
-            <p:ph type="body" idx="7"/>
-          </p:nvPr>
-        </p:nvSpPr>
-        <p:spPr/>
-        <p:txBody>
-          <a:bodyPr/>
-          <a:lstStyle/>
-          <a:p>
-            <a:pPr/>
-            <a:r>
-              <a:rPr lang="th-TH" dirty="0"/>
-              <a:t>ดึงฟิลด์สำคัญ ตรวจกับต้นทาง</a:t>
-            </a:r>
-          </a:p>
-        </p:txBody>
-      </p:sp>
-      <p:sp>
-        <p:nvSpPr>
-          <p:cNvPr id="10" name="C2"/>
-          <p:cNvSpPr>
-            <a:spLocks noGrp="1"/>
-          </p:cNvSpPr>
-          <p:nvPr>
-            <p:ph type="body" idx="8"/>
-          </p:nvPr>
-        </p:nvSpPr>
-        <p:spPr/>
-        <p:txBody>
-          <a:bodyPr/>
-          <a:lstStyle/>
-          <a:p>
-            <a:pPr/>
-            <a:r>
-              <a:rPr lang="th-TH" dirty="0"/>
-              <a:t>3</a:t>
-            </a:r>
-          </a:p>
-        </p:txBody>
-      </p:sp>
-      <p:sp>
-        <p:nvSpPr>
-          <p:cNvPr id="11" name="H2"/>
-          <p:cNvSpPr>
-            <a:spLocks noGrp="1"/>
-          </p:cNvSpPr>
-          <p:nvPr>
-            <p:ph type="body" idx="9"/>
-          </p:nvPr>
-        </p:nvSpPr>
-        <p:spPr/>
-        <p:txBody>
-          <a:bodyPr/>
-          <a:lstStyle/>
-          <a:p>
-            <a:pPr/>
-            <a:r>
-              <a:rPr lang="th-TH" dirty="0"/>
-              <a:t>ตรวจสอบ</a:t>
-            </a:r>
-          </a:p>
-        </p:txBody>
-      </p:sp>
-      <p:sp>
-        <p:nvSpPr>
-          <p:cNvPr id="12" name="B2"/>
-          <p:cNvSpPr>
-            <a:spLocks noGrp="1"/>
-          </p:cNvSpPr>
-          <p:nvPr>
-            <p:ph type="body" idx="10"/>
-          </p:nvPr>
-        </p:nvSpPr>
-        <p:spPr/>
-        <p:txBody>
-          <a:bodyPr/>
-          <a:lstStyle/>
-          <a:p>
-            <a:pPr/>
-            <a:r>
-              <a:rPr lang="th-TH" dirty="0"/>
-              <a:t>กฎธุรกิจและวงเงินอนุมัติ</a:t>
-            </a:r>
-          </a:p>
-        </p:txBody>
-      </p:sp>
-      <p:sp>
-        <p:nvSpPr>
-          <p:cNvPr id="13" name="C3"/>
-          <p:cNvSpPr>
-            <a:spLocks noGrp="1"/>
-          </p:cNvSpPr>
-          <p:nvPr>
-            <p:ph type="body" idx="11"/>
-          </p:nvPr>
-        </p:nvSpPr>
-        <p:spPr/>
-        <p:txBody>
-          <a:bodyPr/>
-          <a:lstStyle/>
-          <a:p>
-            <a:pPr/>
-            <a:r>
-              <a:rPr lang="th-TH" dirty="0"/>
-              <a:t>4</a:t>
-            </a:r>
-          </a:p>
-        </p:txBody>
-      </p:sp>
-      <p:sp>
-        <p:nvSpPr>
-          <p:cNvPr id="14" name="H3"/>
-          <p:cNvSpPr>
-            <a:spLocks noGrp="1"/>
-          </p:cNvSpPr>
-          <p:nvPr>
-            <p:ph type="body" idx="12"/>
-          </p:nvPr>
-        </p:nvSpPr>
-        <p:spPr/>
-        <p:txBody>
-          <a:bodyPr/>
-          <a:lstStyle/>
-          <a:p>
-            <a:pPr/>
-            <a:r>
-              <a:rPr lang="th-TH" dirty="0"/>
-              <a:t>บันทึก</a:t>
-            </a:r>
-          </a:p>
-        </p:txBody>
-      </p:sp>
-      <p:sp>
-        <p:nvSpPr>
-          <p:cNvPr id="15" name="B3"/>
-          <p:cNvSpPr>
-            <a:spLocks noGrp="1"/>
-          </p:cNvSpPr>
-          <p:nvPr>
-            <p:ph type="body" idx="13"/>
-          </p:nvPr>
-        </p:nvSpPr>
-        <p:spPr/>
-        <p:txBody>
-          <a:bodyPr/>
-          <a:lstStyle/>
-          <a:p>
-            <a:pPr/>
-            <a:r>
-              <a:rPr lang="th-TH" dirty="0"/>
-              <a:t>ลงระบบบัญชีพร้อม audit trail</a:t>
-            </a:r>
-          </a:p>
-        </p:txBody>
-      </p:sp>
-      <p:sp>
-        <p:nvSpPr>
-          <p:cNvPr id="16" name="C4"/>
-          <p:cNvSpPr>
-            <a:spLocks noGrp="1"/>
-          </p:cNvSpPr>
-          <p:nvPr>
-            <p:ph type="body" idx="14"/>
-          </p:nvPr>
-        </p:nvSpPr>
-        <p:spPr/>
-        <p:txBody>
-          <a:bodyPr/>
-          <a:lstStyle/>
-          <a:p>
-            <a:pPr/>
-            <a:r>
-              <a:rPr lang="th-TH" dirty="0"/>
-              <a:t>5</a:t>
-            </a:r>
-          </a:p>
-        </p:txBody>
-      </p:sp>
-      <p:sp>
-        <p:nvSpPr>
-          <p:cNvPr id="17" name="H4"/>
-          <p:cNvSpPr>
-            <a:spLocks noGrp="1"/>
-          </p:cNvSpPr>
-          <p:nvPr>
-            <p:ph type="body" idx="15"/>
-          </p:nvPr>
-        </p:nvSpPr>
-        <p:spPr/>
-        <p:txBody>
-          <a:bodyPr/>
-          <a:lstStyle/>
-          <a:p>
-            <a:pPr/>
-            <a:r>
-              <a:rPr lang="th-TH" dirty="0"/>
-              <a:t>กระทบยอด</a:t>
-            </a:r>
-          </a:p>
-        </p:txBody>
-      </p:sp>
-      <p:sp>
-        <p:nvSpPr>
-          <p:cNvPr id="18" name="B4"/>
-          <p:cNvSpPr>
-            <a:spLocks noGrp="1"/>
-          </p:cNvSpPr>
-          <p:nvPr>
-            <p:ph type="body" idx="16"/>
-          </p:nvPr>
-        </p:nvSpPr>
-        <p:spPr/>
-        <p:txBody>
-          <a:bodyPr/>
-          <a:lstStyle/>
-          <a:p>
-            <a:pPr/>
-            <a:r>
-              <a:rPr lang="th-TH" dirty="0"/>
-              <a:t>จับคู่อัตโนมัติ ส่งรายงาน</a:t>
-            </a:r>
-          </a:p>
-        </p:txBody>
-      </p:sp>
-      <p:sp>
-        <p:nvSpPr>
-          <p:cNvPr id="19" name="RL"/>
-          <p:cNvSpPr>
-            <a:spLocks noGrp="1"/>
-          </p:cNvSpPr>
-          <p:nvPr>
-            <p:ph type="body" idx="17"/>
-          </p:nvPr>
-        </p:nvSpPr>
-        <p:spPr/>
-        <p:txBody>
-          <a:bodyPr/>
-          <a:lstStyle/>
-          <a:p>
-            <a:pPr/>
-            <a:r>
-              <a:rPr lang="th-TH" dirty="0"/>
-              <a:t>ผลลัพธ์</a:t>
-            </a:r>
-          </a:p>
-        </p:txBody>
-      </p:sp>
-      <p:sp>
-        <p:nvSpPr>
-          <p:cNvPr id="20" name="RC"/>
-          <p:cNvSpPr>
-            <a:spLocks noGrp="1"/>
-          </p:cNvSpPr>
-          <p:nvPr>
-            <p:ph type="body" idx="18"/>
-          </p:nvPr>
-        </p:nvSpPr>
-        <p:spPr/>
-        <p:txBody>
-          <a:bodyPr/>
-          <a:lstStyle/>
-          <a:p>
-            <a:pPr/>
-            <a:r>
-              <a:rPr lang="th-TH" dirty="0"/>
-              <a:t>เอกสารหนึ่งใบผ่านครบห้าขั้นโดยไม่มีการคีย์ซ้ำเลย</a:t>
-            </a:r>
-          </a:p>
-        </p:txBody>
-      </p:sp>
-    </p:spTree>
-  </p:cSld>
-  <p:clrMapOvr>
-    <a:masterClrMapping/>
-  </p:clrMapOvr>
-</p:sld>
-</file>
-
-<file path=ppt/slides/slide13.xml><?xml version="1.0" encoding="utf-8"?>
-<p:sld xmlns:a="http://schemas.openxmlformats.org/drawingml/2006/main" xmlns:r="http://schemas.openxmlformats.org/officeDocument/2006/relationships" xmlns:p="http://schemas.openxmlformats.org/presentationml/2006/main">
-  <p:cSld name="">
-    <p:spTree>
-      <p:nvGrpSpPr>
-        <p:cNvPr id="1" name=""/>
-        <p:cNvGrpSpPr/>
-        <p:nvPr/>
-      </p:nvGrpSpPr>
-      <p:grpSpPr>
-        <a:xfrm>
-          <a:off x="0" y="0"/>
-          <a:ext cx="0" cy="0"/>
-          <a:chOff x="0" y="0"/>
-          <a:chExt cx="0" cy="0"/>
-        </a:xfrm>
-      </p:grpSpPr>
-      <p:sp>
-        <p:nvSpPr>
-          <p:cNvPr id="2" name="Title"/>
-          <p:cNvSpPr>
-            <a:spLocks noGrp="1"/>
-          </p:cNvSpPr>
-          <p:nvPr>
-            <p:ph type="title"/>
-          </p:nvPr>
-        </p:nvSpPr>
-        <p:spPr/>
-        <p:txBody>
-          <a:bodyPr/>
-          <a:lstStyle/>
-          <a:p>
-            <a:pPr/>
-            <a:r>
-              <a:rPr lang="th-TH" dirty="0"/>
-              <a:t>ภาพรวมสถาปัตยกรรมระบบ</a:t>
-            </a:r>
-          </a:p>
-        </p:txBody>
-      </p:sp>
-      <p:sp>
-        <p:nvSpPr>
-          <p:cNvPr id="3" name="Sub"/>
-          <p:cNvSpPr>
-            <a:spLocks noGrp="1"/>
-          </p:cNvSpPr>
-          <p:nvPr>
-            <p:ph type="body" idx="1"/>
-          </p:nvPr>
-        </p:nvSpPr>
-        <p:spPr/>
-        <p:txBody>
-          <a:bodyPr/>
-          <a:lstStyle/>
-          <a:p>
-            <a:pPr/>
-            <a:r>
-              <a:rPr lang="th-TH" dirty="0"/>
-              <a:t>ตัวอย่างการใช้ชุดชิ้นส่วนมาตรฐานตาม v2 §14</a:t>
-            </a:r>
-          </a:p>
-        </p:txBody>
-      </p:sp>
-      <p:sp>
-        <p:nvSpPr>
-          <p:cNvPr id="4" name="Leg"/>
-          <p:cNvSpPr>
-            <a:spLocks noGrp="1"/>
-          </p:cNvSpPr>
-          <p:nvPr>
-            <p:ph type="body" idx="2"/>
-          </p:nvPr>
-        </p:nvSpPr>
-        <p:spPr/>
-        <p:txBody>
-          <a:bodyPr/>
-          <a:lstStyle/>
-          <a:p>
-            <a:pPr/>
-            <a:r>
-              <a:rPr lang="th-TH" dirty="0"/>
-              <a:t>กล่องทึบ = ระบบที่มีอยู่  ·  กล่องมีสีหมวด = ส่วนที่เพิ่ม  ·  เส้นทึบ = ข้อมูลไหลอัตโนมัติ</a:t>
-            </a:r>
-          </a:p>
-        </p:txBody>
-      </p:sp>
-      <p:sp>
-        <p:nvSpPr>
-          <p:cNvPr id="5" name="TL"/>
-          <p:cNvSpPr>
-            <a:spLocks noGrp="1"/>
-          </p:cNvSpPr>
-          <p:nvPr>
-            <p:ph type="body" idx="3"/>
-          </p:nvPr>
-        </p:nvSpPr>
-        <p:spPr/>
-        <p:txBody>
-          <a:bodyPr/>
-          <a:lstStyle/>
-          <a:p>
-            <a:pPr/>
-            <a:r>
-              <a:rPr lang="th-TH" dirty="0"/>
-              <a:t>สรุป</a:t>
-            </a:r>
-          </a:p>
-        </p:txBody>
-      </p:sp>
-      <p:sp>
-        <p:nvSpPr>
-          <p:cNvPr id="6" name="TC"/>
-          <p:cNvSpPr>
-            <a:spLocks noGrp="1"/>
-          </p:cNvSpPr>
-          <p:nvPr>
-            <p:ph type="body" idx="4"/>
-          </p:nvPr>
-        </p:nvSpPr>
-        <p:spPr/>
-        <p:txBody>
-          <a:bodyPr/>
-          <a:lstStyle/>
-          <a:p>
-            <a:pPr/>
-            <a:r>
-              <a:rPr lang="th-TH" dirty="0"/>
-              <a:t>ระบบเดิมไม่ถูกแก้ ของใหม่แทรกเป็นคิวและตัวตรวจกฎคั่นกลางเท่านั้น</a:t>
-            </a:r>
-          </a:p>
-        </p:txBody>
-      </p:sp>
-      <p:sp>
-        <p:nvSpPr>
-          <p:cNvPr id="10" name="Group Zone"/>
-          <p:cNvSpPr/>
-          <p:nvPr/>
-        </p:nvSpPr>
-        <p:spPr>
-          <a:xfrm>
-            <a:off x="3566160" y="2766060"/>
-            <a:ext cx="5257800" cy="1645920"/>
-          </a:xfrm>
-          <a:prstGeom prst="rect">
-            <a:avLst/>
-          </a:prstGeom>
-          <a:solidFill>
-            <a:srgbClr val="E8F6F5"/>
-          </a:solidFill>
-          <a:ln>
-            <a:noFill/>
-          </a:ln>
-        </p:spPr>
-        <p:txBody>
-          <a:bodyPr/>
-          <a:lstStyle/>
-          <a:p>
-            <a:endParaRPr lang="th-TH"/>
-          </a:p>
-        </p:txBody>
-      </p:sp>
-      <p:sp>
-        <p:nvSpPr>
-          <p:cNvPr id="11" name="Group Label"/>
-          <p:cNvSpPr/>
-          <p:nvPr/>
-        </p:nvSpPr>
-        <p:spPr>
-          <a:xfrm>
-            <a:off x="3840480" y="2926080"/>
-            <a:ext cx="3200400" cy="228600"/>
-          </a:xfrm>
-          <a:prstGeom prst="rect">
-            <a:avLst/>
-          </a:prstGeom>
-          <a:noFill/>
-          <a:ln>
-            <a:noFill/>
-          </a:ln>
-        </p:spPr>
-        <p:txBody>
-          <a:bodyPr wrap="square" anchor="ctr" lIns="0" tIns="0" rIns="0" bIns="0" rtlCol="0"/>
-          <a:lstStyle/>
-          <a:p>
-            <a:pPr algn="l" marL="0" indent="0">
-              <a:lnSpc>
-                <a:spcPct val="100000"/>
-              </a:lnSpc>
-              <a:buNone/>
-            </a:pPr>
-            <a:r>
-              <a:rPr lang="th-TH" sz="1200" b="1" spc="120" dirty="0">
-                <a:solidFill>
-                  <a:srgbClr val="216B7F"/>
-                </a:solidFill>
-                <a:latin typeface="+mn-lt"/>
-                <a:ea typeface="+mn-ea"/>
-                <a:cs typeface="+mn-cs"/>
-              </a:rPr>
-              <a:t>ส่วนที่เพิ่มใหม่</a:t>
-            </a:r>
-          </a:p>
-        </p:txBody>
-      </p:sp>
-      <p:sp>
-        <p:nvSpPr>
-          <p:cNvPr id="12" name="Box 1"/>
-          <p:cNvSpPr/>
-          <p:nvPr/>
-        </p:nvSpPr>
-        <p:spPr>
-          <a:xfrm>
-            <a:off x="1143000" y="3223260"/>
-            <a:ext cx="2011680" cy="731520"/>
-          </a:xfrm>
-          <a:prstGeom prst="rect">
-            <a:avLst/>
-          </a:prstGeom>
-          <a:solidFill>
-            <a:srgbClr val="23436D"/>
-          </a:solidFill>
-          <a:ln>
-            <a:noFill/>
-          </a:ln>
-        </p:spPr>
-        <p:txBody>
-          <a:bodyPr wrap="square" anchor="ctr" lIns="0" tIns="0" rIns="0" bIns="0" rtlCol="0"/>
-          <a:lstStyle/>
-          <a:p>
-            <a:pPr algn="ctr" marL="0" indent="0">
-              <a:lnSpc>
-                <a:spcPct val="110000"/>
-              </a:lnSpc>
-              <a:buNone/>
-            </a:pPr>
-            <a:r>
-              <a:rPr lang="th-TH" sz="1200" dirty="0">
-                <a:solidFill>
-                  <a:srgbClr val="FFFFFF"/>
-                </a:solidFill>
-                <a:latin typeface="+mn-lt"/>
-                <a:ea typeface="+mn-ea"/>
-                <a:cs typeface="+mn-cs"/>
-              </a:rPr>
-              <a:t>ระบบ ERP ปัจจุบัน</a:t>
-            </a:r>
-          </a:p>
-        </p:txBody>
-      </p:sp>
-      <p:sp>
-        <p:nvSpPr>
-          <p:cNvPr id="13" name="Box 2"/>
-          <p:cNvSpPr/>
-          <p:nvPr/>
-        </p:nvSpPr>
-        <p:spPr>
-          <a:xfrm>
-            <a:off x="3840480" y="3223260"/>
-            <a:ext cx="2011680" cy="731520"/>
-          </a:xfrm>
-          <a:prstGeom prst="rect">
-            <a:avLst/>
-          </a:prstGeom>
-          <a:solidFill>
-            <a:srgbClr val="FFFFFF"/>
-          </a:solidFill>
-          <a:ln w="12700">
-            <a:solidFill>
-              <a:srgbClr val="23436D"/>
-            </a:solidFill>
-          </a:ln>
-        </p:spPr>
-        <p:txBody>
-          <a:bodyPr wrap="square" anchor="ctr" lIns="0" tIns="0" rIns="0" bIns="0" rtlCol="0"/>
-          <a:lstStyle/>
-          <a:p>
-            <a:pPr algn="ctr" marL="0" indent="0">
-              <a:lnSpc>
-                <a:spcPct val="110000"/>
-              </a:lnSpc>
-              <a:buNone/>
-            </a:pPr>
-            <a:r>
-              <a:rPr lang="th-TH" sz="1200" dirty="0">
-                <a:solidFill>
-                  <a:srgbClr val="333333"/>
-                </a:solidFill>
-                <a:latin typeface="+mn-lt"/>
-                <a:ea typeface="+mn-ea"/>
-                <a:cs typeface="+mn-cs"/>
-              </a:rPr>
-              <a:t>คิวเอกสารกลาง</a:t>
-            </a:r>
-          </a:p>
-        </p:txBody>
-      </p:sp>
-      <p:sp>
-        <p:nvSpPr>
-          <p:cNvPr id="113" name="Box 2 Tab"/>
-          <p:cNvSpPr/>
-          <p:nvPr/>
-        </p:nvSpPr>
-        <p:spPr>
-          <a:xfrm>
-            <a:off x="3954780" y="3337560"/>
-            <a:ext cx="205740" cy="45720"/>
-          </a:xfrm>
-          <a:prstGeom prst="rect">
-            <a:avLst/>
-          </a:prstGeom>
-          <a:solidFill>
-            <a:srgbClr val="23436D"/>
-          </a:solidFill>
-          <a:ln>
-            <a:noFill/>
-          </a:ln>
-        </p:spPr>
-        <p:txBody>
-          <a:bodyPr/>
-          <a:lstStyle/>
-          <a:p>
-            <a:endParaRPr lang="th-TH"/>
-          </a:p>
-        </p:txBody>
-      </p:sp>
-      <p:sp>
-        <p:nvSpPr>
-          <p:cNvPr id="14" name="Box 3"/>
-          <p:cNvSpPr/>
-          <p:nvPr/>
-        </p:nvSpPr>
-        <p:spPr>
-          <a:xfrm>
-            <a:off x="6537960" y="3223260"/>
-            <a:ext cx="2011680" cy="731520"/>
-          </a:xfrm>
-          <a:prstGeom prst="rect">
-            <a:avLst/>
-          </a:prstGeom>
-          <a:solidFill>
-            <a:srgbClr val="FFFFFF"/>
-          </a:solidFill>
-          <a:ln w="12700">
-            <a:solidFill>
-              <a:srgbClr val="216B7F"/>
-            </a:solidFill>
-          </a:ln>
-        </p:spPr>
-        <p:txBody>
-          <a:bodyPr wrap="square" anchor="ctr" lIns="0" tIns="0" rIns="0" bIns="0" rtlCol="0"/>
-          <a:lstStyle/>
-          <a:p>
-            <a:pPr algn="ctr" marL="0" indent="0">
-              <a:lnSpc>
-                <a:spcPct val="110000"/>
-              </a:lnSpc>
-              <a:buNone/>
-            </a:pPr>
-            <a:r>
-              <a:rPr lang="th-TH" sz="1200" dirty="0">
-                <a:solidFill>
-                  <a:srgbClr val="333333"/>
-                </a:solidFill>
-                <a:latin typeface="+mn-lt"/>
-                <a:ea typeface="+mn-ea"/>
-                <a:cs typeface="+mn-cs"/>
-              </a:rPr>
-              <a:t>ตัวตรวจกฎธุรกิจ</a:t>
-            </a:r>
-          </a:p>
-        </p:txBody>
-      </p:sp>
-      <p:sp>
-        <p:nvSpPr>
-          <p:cNvPr id="114" name="Box 3 Tab"/>
-          <p:cNvSpPr/>
-          <p:nvPr/>
-        </p:nvSpPr>
-        <p:spPr>
-          <a:xfrm>
-            <a:off x="6652260" y="3337560"/>
-            <a:ext cx="205740" cy="45720"/>
-          </a:xfrm>
-          <a:prstGeom prst="rect">
-            <a:avLst/>
-          </a:prstGeom>
-          <a:solidFill>
-            <a:srgbClr val="216B7F"/>
-          </a:solidFill>
-          <a:ln>
-            <a:noFill/>
-          </a:ln>
-        </p:spPr>
-        <p:txBody>
-          <a:bodyPr/>
-          <a:lstStyle/>
-          <a:p>
-            <a:endParaRPr lang="th-TH"/>
-          </a:p>
-        </p:txBody>
-      </p:sp>
-      <p:sp>
-        <p:nvSpPr>
-          <p:cNvPr id="15" name="Box 4"/>
-          <p:cNvSpPr/>
-          <p:nvPr/>
-        </p:nvSpPr>
-        <p:spPr>
-          <a:xfrm>
-            <a:off x="9235440" y="3223260"/>
-            <a:ext cx="2011680" cy="731520"/>
-          </a:xfrm>
-          <a:prstGeom prst="rect">
-            <a:avLst/>
-          </a:prstGeom>
-          <a:solidFill>
-            <a:srgbClr val="23436D"/>
-          </a:solidFill>
-          <a:ln>
-            <a:noFill/>
-          </a:ln>
-        </p:spPr>
-        <p:txBody>
-          <a:bodyPr wrap="square" anchor="ctr" lIns="0" tIns="0" rIns="0" bIns="0" rtlCol="0"/>
-          <a:lstStyle/>
-          <a:p>
-            <a:pPr algn="ctr" marL="0" indent="0">
-              <a:lnSpc>
-                <a:spcPct val="110000"/>
-              </a:lnSpc>
-              <a:buNone/>
-            </a:pPr>
-            <a:r>
-              <a:rPr lang="th-TH" sz="1200" dirty="0">
-                <a:solidFill>
-                  <a:srgbClr val="FFFFFF"/>
-                </a:solidFill>
-                <a:latin typeface="+mn-lt"/>
-                <a:ea typeface="+mn-ea"/>
-                <a:cs typeface="+mn-cs"/>
-              </a:rPr>
-              <a:t>ระบบบัญชี</a:t>
-            </a:r>
-          </a:p>
-        </p:txBody>
-      </p:sp>
-      <p:sp>
-        <p:nvSpPr>
-          <p:cNvPr id="16" name="Link 1"/>
-          <p:cNvSpPr/>
-          <p:nvPr/>
-        </p:nvSpPr>
-        <p:spPr>
-          <a:xfrm>
-            <a:off x="3268980" y="3589020"/>
-            <a:ext cx="457200" cy="0"/>
-          </a:xfrm>
-          <a:prstGeom prst="line">
-            <a:avLst/>
-          </a:prstGeom>
-          <a:noFill/>
-          <a:ln w="15875" cap="flat">
-            <a:solidFill>
-              <a:srgbClr val="216B7F"/>
-            </a:solidFill>
-            <a:prstDash val="solid"/>
-            <a:tailEnd type="triangle" w="med" len="med"/>
-          </a:ln>
-        </p:spPr>
-        <p:txBody>
-          <a:bodyPr/>
-          <a:lstStyle/>
-          <a:p>
-            <a:endParaRPr lang="th-TH"/>
-          </a:p>
-        </p:txBody>
-      </p:sp>
-      <p:sp>
-        <p:nvSpPr>
-          <p:cNvPr id="17" name="Link 2"/>
-          <p:cNvSpPr/>
-          <p:nvPr/>
-        </p:nvSpPr>
-        <p:spPr>
-          <a:xfrm>
-            <a:off x="5966460" y="3589020"/>
-            <a:ext cx="457200" cy="0"/>
-          </a:xfrm>
-          <a:prstGeom prst="line">
-            <a:avLst/>
-          </a:prstGeom>
-          <a:noFill/>
-          <a:ln w="15875" cap="flat">
-            <a:solidFill>
-              <a:srgbClr val="216B7F"/>
-            </a:solidFill>
-            <a:prstDash val="solid"/>
-            <a:tailEnd type="triangle" w="med" len="med"/>
-          </a:ln>
-        </p:spPr>
-        <p:txBody>
-          <a:bodyPr/>
-          <a:lstStyle/>
-          <a:p>
-            <a:endParaRPr lang="th-TH"/>
-          </a:p>
-        </p:txBody>
-      </p:sp>
-      <p:sp>
-        <p:nvSpPr>
-          <p:cNvPr id="18" name="Link 3"/>
-          <p:cNvSpPr/>
-          <p:nvPr/>
-        </p:nvSpPr>
-        <p:spPr>
-          <a:xfrm>
-            <a:off x="8663940" y="3589020"/>
-            <a:ext cx="457200" cy="0"/>
-          </a:xfrm>
-          <a:prstGeom prst="line">
-            <a:avLst/>
-          </a:prstGeom>
-          <a:noFill/>
-          <a:ln w="15875" cap="flat">
-            <a:solidFill>
-              <a:srgbClr val="216B7F"/>
-            </a:solidFill>
-            <a:prstDash val="solid"/>
-            <a:tailEnd type="triangle" w="med" len="med"/>
-          </a:ln>
-        </p:spPr>
-        <p:txBody>
-          <a:bodyPr/>
-          <a:lstStyle/>
-          <a:p>
-            <a:endParaRPr lang="th-TH"/>
-          </a:p>
-        </p:txBody>
-      </p:sp>
-      <p:sp>
-        <p:nvSpPr>
-          <p:cNvPr id="19" name="Edge Label"/>
-          <p:cNvSpPr/>
-          <p:nvPr/>
-        </p:nvSpPr>
-        <p:spPr>
-          <a:xfrm>
-            <a:off x="5806440" y="3268980"/>
-            <a:ext cx="822960" cy="228600"/>
-          </a:xfrm>
-          <a:prstGeom prst="rect">
-            <a:avLst/>
-          </a:prstGeom>
-          <a:noFill/>
-          <a:ln>
-            <a:noFill/>
-          </a:ln>
-        </p:spPr>
-        <p:txBody>
-          <a:bodyPr wrap="square" anchor="ctr" lIns="0" tIns="0" rIns="0" bIns="0" rtlCol="0"/>
-          <a:lstStyle/>
-          <a:p>
-            <a:pPr algn="ctr" marL="0" indent="0">
-              <a:lnSpc>
-                <a:spcPct val="100000"/>
-              </a:lnSpc>
-              <a:buNone/>
-            </a:pPr>
-            <a:r>
-              <a:rPr lang="th-TH" sz="1000" dirty="0">
-                <a:solidFill>
-                  <a:srgbClr val="5F5F5F"/>
-                </a:solidFill>
-                <a:latin typeface="+mn-lt"/>
-                <a:ea typeface="+mn-ea"/>
-                <a:cs typeface="+mn-cs"/>
-              </a:rPr>
-              <a:t>ผ่านกฎ</a:t>
-            </a:r>
-          </a:p>
-        </p:txBody>
-      </p:sp>
-    </p:spTree>
-  </p:cSld>
-  <p:clrMapOvr>
-    <a:masterClrMapping/>
-  </p:clrMapOvr>
-</p:sld>
-</file>
-
-<file path=ppt/slides/slide14.xml><?xml version="1.0" encoding="utf-8"?>
-<p:sld xmlns:a="http://schemas.openxmlformats.org/drawingml/2006/main" xmlns:r="http://schemas.openxmlformats.org/officeDocument/2006/relationships" xmlns:p="http://schemas.openxmlformats.org/presentationml/2006/main">
-  <p:cSld name="">
-    <p:spTree>
-      <p:nvGrpSpPr>
-        <p:cNvPr id="1" name=""/>
-        <p:cNvGrpSpPr/>
-        <p:nvPr/>
-      </p:nvGrpSpPr>
-      <p:grpSpPr>
-        <a:xfrm>
-          <a:off x="0" y="0"/>
-          <a:ext cx="0" cy="0"/>
-          <a:chOff x="0" y="0"/>
-          <a:chExt cx="0" cy="0"/>
-        </a:xfrm>
-      </p:grpSpPr>
-      <p:sp>
-        <p:nvSpPr>
-          <p:cNvPr id="2" name="Num"/>
-          <p:cNvSpPr>
-            <a:spLocks noGrp="1"/>
-          </p:cNvSpPr>
-          <p:nvPr>
-            <p:ph type="body" idx="1"/>
-          </p:nvPr>
-        </p:nvSpPr>
-        <p:spPr/>
-        <p:txBody>
-          <a:bodyPr/>
-          <a:lstStyle/>
-          <a:p>
-            <a:pPr/>
-            <a:r>
-              <a:rPr lang="th-TH" dirty="0"/>
-              <a:t>02</a:t>
-            </a:r>
-          </a:p>
-        </p:txBody>
-      </p:sp>
-      <p:sp>
-        <p:nvSpPr>
-          <p:cNvPr id="3" name="Title"/>
-          <p:cNvSpPr>
-            <a:spLocks noGrp="1"/>
-          </p:cNvSpPr>
-          <p:nvPr>
-            <p:ph type="title"/>
-          </p:nvPr>
-        </p:nvSpPr>
-        <p:spPr/>
-        <p:txBody>
-          <a:bodyPr/>
-          <a:lstStyle/>
-          <a:p>
-            <a:pPr/>
-            <a:r>
-              <a:rPr lang="th-TH" dirty="0"/>
-              <a:t>หัวข้อนำเสนอ</a:t>
-            </a:r>
-          </a:p>
-        </p:txBody>
-      </p:sp>
-      <p:sp>
-        <p:nvSpPr>
-          <p:cNvPr id="4" name="List"/>
-          <p:cNvSpPr>
-            <a:spLocks noGrp="1"/>
-          </p:cNvSpPr>
-          <p:nvPr>
-            <p:ph type="body" idx="2"/>
-          </p:nvPr>
-        </p:nvSpPr>
-        <p:spPr/>
-        <p:txBody>
-          <a:bodyPr/>
-          <a:lstStyle/>
-          <a:p>
-            <a:pPr/>
-            <a:r>
-              <a:rPr lang="th-TH" dirty="0"/>
-              <a:t>บริบทและปัญหาที่พบ</a:t>
-            </a:r>
-          </a:p>
-          <a:p>
-            <a:pPr/>
-            <a:r>
-              <a:rPr lang="th-TH" dirty="0"/>
-              <a:t>วัตถุประสงค์ของโครงการ</a:t>
-            </a:r>
-          </a:p>
-          <a:p>
-            <a:pPr/>
-            <a:r>
-              <a:rPr lang="th-TH" dirty="0"/>
-              <a:t>ขอบเขตงานรายกระบวนการ</a:t>
-            </a:r>
-          </a:p>
-          <a:p>
-            <a:pPr/>
-            <a:r>
-              <a:rPr lang="th-TH" dirty="0"/>
-              <a:t>แผนดำเนินงานและผู้รับผิดชอบ</a:t>
-            </a:r>
-          </a:p>
-          <a:p>
-            <a:pPr/>
-            <a:r>
-              <a:rPr lang="th-TH" dirty="0"/>
-              <a:t>งบประมาณและเงื่อนไข</a:t>
-            </a:r>
-          </a:p>
-        </p:txBody>
-      </p:sp>
-    </p:spTree>
-  </p:cSld>
-  <p:clrMapOvr>
-    <a:masterClrMapping/>
-  </p:clrMapOvr>
-</p:sld>
-</file>
-
-<file path=ppt/slides/slide15.xml><?xml version="1.0" encoding="utf-8"?>
 <p:sld xmlns:a="http://schemas.openxmlformats.org/drawingml/2006/main" xmlns:r="http://schemas.openxmlformats.org/officeDocument/2006/relationships" xmlns:p="http://schemas.openxmlformats.org/presentationml/2006/main">
   <p:cSld name="">
     <p:spTree>
@@ -14846,7 +13412,7 @@
                       <a:r>
                         <a:rPr lang="th-TH" sz="1000" b="1" dirty="0">
                           <a:solidFill>
-                            <a:srgbClr val="FFFFFF"/>
+                            <a:srgbClr val="333333"/>
                           </a:solidFill>
                           <a:latin typeface="+mn-lt"/>
                           <a:cs typeface="+mn-cs"/>
@@ -14856,9 +13422,12 @@
                     </a:p>
                   </a:txBody>
                   <a:tcPr marL="73152" marR="73152" marT="73152" marB="73152" anchor="ctr">
-                    <a:solidFill>
-                      <a:srgbClr val="23436D"/>
-                    </a:solidFill>
+                    <a:lnB w="34925" cap="flat">
+                      <a:solidFill>
+                        <a:srgbClr val="23436D"/>
+                      </a:solidFill>
+                      <a:prstDash val="solid"/>
+                    </a:lnB>
                   </a:tcPr>
                 </a:tc>
                 <a:tc>
@@ -14988,7 +13557,7 @@
                       <a:r>
                         <a:rPr lang="th-TH" sz="1000" b="1" dirty="0">
                           <a:solidFill>
-                            <a:srgbClr val="FFFFFF"/>
+                            <a:srgbClr val="333333"/>
                           </a:solidFill>
                           <a:latin typeface="+mn-lt"/>
                           <a:cs typeface="+mn-cs"/>
@@ -14998,9 +13567,12 @@
                     </a:p>
                   </a:txBody>
                   <a:tcPr marL="73152" marR="73152" marT="73152" marB="73152" anchor="ctr">
-                    <a:solidFill>
-                      <a:srgbClr val="23436D"/>
-                    </a:solidFill>
+                    <a:lnB w="34925" cap="flat">
+                      <a:solidFill>
+                        <a:srgbClr val="23436D"/>
+                      </a:solidFill>
+                      <a:prstDash val="solid"/>
+                    </a:lnB>
                   </a:tcPr>
                 </a:tc>
                 <a:tc>
@@ -15130,7 +13702,7 @@
                       <a:r>
                         <a:rPr lang="th-TH" sz="1000" b="1" dirty="0">
                           <a:solidFill>
-                            <a:srgbClr val="FFFFFF"/>
+                            <a:srgbClr val="333333"/>
                           </a:solidFill>
                           <a:latin typeface="+mn-lt"/>
                           <a:cs typeface="+mn-cs"/>
@@ -15140,9 +13712,12 @@
                     </a:p>
                   </a:txBody>
                   <a:tcPr marL="73152" marR="73152" marT="73152" marB="73152" anchor="ctr">
-                    <a:solidFill>
-                      <a:srgbClr val="216B7F"/>
-                    </a:solidFill>
+                    <a:lnB w="34925" cap="flat">
+                      <a:solidFill>
+                        <a:srgbClr val="216B7F"/>
+                      </a:solidFill>
+                      <a:prstDash val="solid"/>
+                    </a:lnB>
                   </a:tcPr>
                 </a:tc>
                 <a:tc>
@@ -15272,7 +13847,7 @@
                       <a:r>
                         <a:rPr lang="th-TH" sz="1000" b="1" dirty="0">
                           <a:solidFill>
-                            <a:srgbClr val="FFFFFF"/>
+                            <a:srgbClr val="333333"/>
                           </a:solidFill>
                           <a:latin typeface="+mn-lt"/>
                           <a:cs typeface="+mn-cs"/>
@@ -15282,9 +13857,12 @@
                     </a:p>
                   </a:txBody>
                   <a:tcPr marL="73152" marR="73152" marT="73152" marB="73152" anchor="ctr">
-                    <a:solidFill>
-                      <a:srgbClr val="216B7F"/>
-                    </a:solidFill>
+                    <a:lnB w="34925" cap="flat">
+                      <a:solidFill>
+                        <a:srgbClr val="216B7F"/>
+                      </a:solidFill>
+                      <a:prstDash val="solid"/>
+                    </a:lnB>
                   </a:tcPr>
                 </a:tc>
                 <a:tc>
@@ -15414,7 +13992,7 @@
                       <a:r>
                         <a:rPr lang="th-TH" sz="1000" b="1" dirty="0">
                           <a:solidFill>
-                            <a:srgbClr val="FFFFFF"/>
+                            <a:srgbClr val="333333"/>
                           </a:solidFill>
                           <a:latin typeface="+mn-lt"/>
                           <a:cs typeface="+mn-cs"/>
@@ -15424,9 +14002,12 @@
                     </a:p>
                   </a:txBody>
                   <a:tcPr marL="73152" marR="73152" marT="73152" marB="73152" anchor="ctr">
-                    <a:solidFill>
-                      <a:srgbClr val="23436D"/>
-                    </a:solidFill>
+                    <a:lnB w="34925" cap="flat">
+                      <a:solidFill>
+                        <a:srgbClr val="23436D"/>
+                      </a:solidFill>
+                      <a:prstDash val="solid"/>
+                    </a:lnB>
                   </a:tcPr>
                 </a:tc>
                 <a:tc>
@@ -15556,7 +14137,7 @@
                       <a:r>
                         <a:rPr lang="th-TH" sz="1000" b="1" dirty="0">
                           <a:solidFill>
-                            <a:srgbClr val="FFFFFF"/>
+                            <a:srgbClr val="333333"/>
                           </a:solidFill>
                           <a:latin typeface="+mn-lt"/>
                           <a:cs typeface="+mn-cs"/>
@@ -15566,9 +14147,12 @@
                     </a:p>
                   </a:txBody>
                   <a:tcPr marL="73152" marR="73152" marT="73152" marB="73152" anchor="ctr">
-                    <a:solidFill>
-                      <a:srgbClr val="16324F"/>
-                    </a:solidFill>
+                    <a:lnB w="34925" cap="flat">
+                      <a:solidFill>
+                        <a:srgbClr val="16324F"/>
+                      </a:solidFill>
+                      <a:prstDash val="solid"/>
+                    </a:lnB>
                   </a:tcPr>
                 </a:tc>
                 <a:tc>
@@ -15698,7 +14282,7 @@
                       <a:r>
                         <a:rPr lang="th-TH" sz="1000" b="1" dirty="0">
                           <a:solidFill>
-                            <a:srgbClr val="FFFFFF"/>
+                            <a:srgbClr val="333333"/>
                           </a:solidFill>
                           <a:latin typeface="+mn-lt"/>
                           <a:cs typeface="+mn-cs"/>
@@ -15708,9 +14292,12 @@
                     </a:p>
                   </a:txBody>
                   <a:tcPr marL="73152" marR="73152" marT="73152" marB="73152" anchor="ctr">
-                    <a:solidFill>
-                      <a:srgbClr val="16324F"/>
-                    </a:solidFill>
+                    <a:lnB w="34925" cap="flat">
+                      <a:solidFill>
+                        <a:srgbClr val="16324F"/>
+                      </a:solidFill>
+                      <a:prstDash val="solid"/>
+                    </a:lnB>
                   </a:tcPr>
                 </a:tc>
                 <a:tc>
@@ -15840,7 +14427,7 @@
                       <a:r>
                         <a:rPr lang="th-TH" sz="1000" b="1" dirty="0">
                           <a:solidFill>
-                            <a:srgbClr val="FFFFFF"/>
+                            <a:srgbClr val="333333"/>
                           </a:solidFill>
                           <a:latin typeface="+mn-lt"/>
                           <a:cs typeface="+mn-cs"/>
@@ -15850,9 +14437,12 @@
                     </a:p>
                   </a:txBody>
                   <a:tcPr marL="73152" marR="73152" marT="73152" marB="73152" anchor="ctr">
-                    <a:solidFill>
-                      <a:srgbClr val="16324F"/>
-                    </a:solidFill>
+                    <a:lnB w="34925" cap="flat">
+                      <a:solidFill>
+                        <a:srgbClr val="16324F"/>
+                      </a:solidFill>
+                      <a:prstDash val="solid"/>
+                    </a:lnB>
                   </a:tcPr>
                 </a:tc>
                 <a:tc>
@@ -15976,7 +14566,7 @@
       </p:graphicFrame>
       <p:sp>
         <p:nvSpPr>
-          <p:cNvPr id="5" name="Foot"/>
+          <p:cNvPr id="5" name="Key"/>
           <p:cNvSpPr>
             <a:spLocks noGrp="1"/>
           </p:cNvSpPr>
@@ -15992,19 +14582,42 @@
             <a:pPr/>
             <a:r>
               <a:rPr lang="th-TH" dirty="0"/>
-              <a:t>ปริมาณเป็นค่าเฉลี่ยจากข้อมูล 3 เดือนล่าสุด · รายการติดข้อจำกัดรอผลการตรวจสิทธิ์เข้าระบบ</a:t>
-            </a:r>
-          </a:p>
-        </p:txBody>
-      </p:sp>
-      <p:sp>
-        <p:nvSpPr>
-          <p:cNvPr id="6" name="TL"/>
+              <a:t>■ AP · เจ้าหนี้   ■ AR · ลูกหนี้   ■ GL · บัญชีแยกประเภท</a:t>
+            </a:r>
+          </a:p>
+        </p:txBody>
+      </p:sp>
+      <p:sp>
+        <p:nvSpPr>
+          <p:cNvPr id="6" name="Foot"/>
           <p:cNvSpPr>
             <a:spLocks noGrp="1"/>
           </p:cNvSpPr>
           <p:nvPr>
             <p:ph type="body" idx="4"/>
+          </p:nvPr>
+        </p:nvSpPr>
+        <p:spPr/>
+        <p:txBody>
+          <a:bodyPr/>
+          <a:lstStyle/>
+          <a:p>
+            <a:pPr/>
+            <a:r>
+              <a:rPr lang="th-TH" dirty="0"/>
+              <a:t>ปริมาณเป็นค่าเฉลี่ยจากข้อมูล 3 เดือนล่าสุด</a:t>
+            </a:r>
+          </a:p>
+        </p:txBody>
+      </p:sp>
+      <p:sp>
+        <p:nvSpPr>
+          <p:cNvPr id="7" name="TL"/>
+          <p:cNvSpPr>
+            <a:spLocks noGrp="1"/>
+          </p:cNvSpPr>
+          <p:nvPr>
+            <p:ph type="body" idx="5"/>
           </p:nvPr>
         </p:nvSpPr>
         <p:spPr/>
@@ -16022,12 +14635,12 @@
       </p:sp>
       <p:sp>
         <p:nvSpPr>
-          <p:cNvPr id="7" name="TC"/>
-          <p:cNvSpPr>
-            <a:spLocks noGrp="1"/>
-          </p:cNvSpPr>
-          <p:nvPr>
-            <p:ph type="body" idx="5"/>
+          <p:cNvPr id="8" name="TC"/>
+          <p:cNvSpPr>
+            <a:spLocks noGrp="1"/>
+          </p:cNvSpPr>
+          <p:nvPr>
+            <p:ph type="body" idx="6"/>
           </p:nvPr>
         </p:nvSpPr>
         <p:spPr/>
@@ -16051,7 +14664,7 @@
 </p:sld>
 </file>
 
-<file path=ppt/slides/slide16.xml><?xml version="1.0" encoding="utf-8"?>
+<file path=ppt/slides/slide11.xml><?xml version="1.0" encoding="utf-8"?>
 <p:sld xmlns:a="http://schemas.openxmlformats.org/drawingml/2006/main" xmlns:r="http://schemas.openxmlformats.org/officeDocument/2006/relationships" xmlns:p="http://schemas.openxmlformats.org/presentationml/2006/main">
   <p:cSld name="">
     <p:spTree>
@@ -16086,14 +14699,14 @@
             <a:pPr/>
             <a:r>
               <a:rPr lang="th-TH" dirty="0"/>
-              <a:t>ขอบคุณครับ</a:t>
-            </a:r>
-          </a:p>
-        </p:txBody>
-      </p:sp>
-      <p:sp>
-        <p:nvSpPr>
-          <p:cNvPr id="3" name="Contact"/>
+              <a:t>ขอบเขตบริการของ NCT</a:t>
+            </a:r>
+          </a:p>
+        </p:txBody>
+      </p:sp>
+      <p:sp>
+        <p:nvSpPr>
+          <p:cNvPr id="3" name="Body"/>
           <p:cNvSpPr>
             <a:spLocks noGrp="1"/>
           </p:cNvSpPr>
@@ -16109,21 +14722,35 @@
             <a:pPr/>
             <a:r>
               <a:rPr lang="th-TH" dirty="0"/>
-              <a:t>โทร · 02-XXX-XXXX</a:t>
+              <a:t>วางระบบโครงสร้างพื้นฐานไอทีสำหรับองค์กร</a:t>
+            </a:r>
+          </a:p>
+          <a:p>
+            <a:pPr lvl="1"/>
+            <a:r>
+              <a:rPr lang="th-TH" dirty="0"/>
+              <a:t>ออกแบบเครือข่าย ระบบสำรองข้อมูล และความปลอดภัย</a:t>
             </a:r>
           </a:p>
           <a:p>
             <a:pPr/>
             <a:r>
               <a:rPr lang="th-TH" dirty="0"/>
-              <a:t>อีเมล · contact@nctthai.com</a:t>
+              <a:t>ดูแลระบบต่อเนื่องแบบ Managed Service</a:t>
+            </a:r>
+          </a:p>
+          <a:p>
+            <a:pPr lvl="1"/>
+            <a:r>
+              <a:rPr lang="th-TH" dirty="0"/>
+              <a:t>มีทีมซัพพอร์ตตอบกลับภายใน SLA ที่ตกลงกัน</a:t>
             </a:r>
           </a:p>
           <a:p>
             <a:pPr/>
             <a:r>
               <a:rPr lang="th-TH" dirty="0"/>
-              <a:t>เว็บไซต์ · nctthai.com</a:t>
+              <a:t>ให้คำปรึกษาการย้ายระบบขึ้นคลาวด์</a:t>
             </a:r>
           </a:p>
         </p:txBody>
@@ -16136,7 +14763,7 @@
 </p:sld>
 </file>
 
-<file path=ppt/slides/slide2.xml><?xml version="1.0" encoding="utf-8"?>
+<file path=ppt/slides/slide12.xml><?xml version="1.0" encoding="utf-8"?>
 <p:sld xmlns:a="http://schemas.openxmlformats.org/drawingml/2006/main" xmlns:r="http://schemas.openxmlformats.org/officeDocument/2006/relationships" xmlns:p="http://schemas.openxmlformats.org/presentationml/2006/main">
   <p:cSld name="">
     <p:spTree>
@@ -16155,7 +14782,30 @@
       </p:grpSpPr>
       <p:sp>
         <p:nvSpPr>
-          <p:cNvPr id="2" name="Number"/>
+          <p:cNvPr id="2" name="Title"/>
+          <p:cNvSpPr>
+            <a:spLocks noGrp="1"/>
+          </p:cNvSpPr>
+          <p:nvPr>
+            <p:ph type="title"/>
+          </p:nvPr>
+        </p:nvSpPr>
+        <p:spPr/>
+        <p:txBody>
+          <a:bodyPr/>
+          <a:lstStyle/>
+          <a:p>
+            <a:pPr/>
+            <a:r>
+              <a:rPr lang="th-TH" dirty="0"/>
+              <a:t>สามเสาหลักของบริการ</a:t>
+            </a:r>
+          </a:p>
+        </p:txBody>
+      </p:sp>
+      <p:sp>
+        <p:nvSpPr>
+          <p:cNvPr id="3" name="C1H"/>
           <p:cNvSpPr>
             <a:spLocks noGrp="1"/>
           </p:cNvSpPr>
@@ -16171,19 +14821,19 @@
             <a:pPr/>
             <a:r>
               <a:rPr lang="th-TH" dirty="0"/>
-              <a:t>01</a:t>
-            </a:r>
-          </a:p>
-        </p:txBody>
-      </p:sp>
-      <p:sp>
-        <p:nvSpPr>
-          <p:cNvPr id="3" name="Title"/>
-          <p:cNvSpPr>
-            <a:spLocks noGrp="1"/>
-          </p:cNvSpPr>
-          <p:nvPr>
-            <p:ph type="title"/>
+              <a:t>Infrastructure</a:t>
+            </a:r>
+          </a:p>
+        </p:txBody>
+      </p:sp>
+      <p:sp>
+        <p:nvSpPr>
+          <p:cNvPr id="4" name="C1B"/>
+          <p:cNvSpPr>
+            <a:spLocks noGrp="1"/>
+          </p:cNvSpPr>
+          <p:nvPr>
+            <p:ph type="body" idx="2"/>
           </p:nvPr>
         </p:nvSpPr>
         <p:spPr/>
@@ -16194,19 +14844,19 @@
             <a:pPr/>
             <a:r>
               <a:rPr lang="th-TH" dirty="0"/>
-              <a:t>ภาพรวมบริษัท</a:t>
-            </a:r>
-          </a:p>
-        </p:txBody>
-      </p:sp>
-      <p:sp>
-        <p:nvSpPr>
-          <p:cNvPr id="4" name="Desc"/>
-          <p:cNvSpPr>
-            <a:spLocks noGrp="1"/>
-          </p:cNvSpPr>
-          <p:nvPr>
-            <p:ph type="body" idx="2"/>
+              <a:t>ออกแบบและติดตั้งเครือข่าย เซิร์ฟเวอร์ และระบบสำรองข้อมูล</a:t>
+            </a:r>
+          </a:p>
+        </p:txBody>
+      </p:sp>
+      <p:sp>
+        <p:nvSpPr>
+          <p:cNvPr id="5" name="C2H"/>
+          <p:cNvSpPr>
+            <a:spLocks noGrp="1"/>
+          </p:cNvSpPr>
+          <p:nvPr>
+            <p:ph type="body" idx="3"/>
           </p:nvPr>
         </p:nvSpPr>
         <p:spPr/>
@@ -16217,7 +14867,76 @@
             <a:pPr/>
             <a:r>
               <a:rPr lang="th-TH" dirty="0"/>
-              <a:t>ใครคือ NCT และเราทำอะไรให้ลูกค้าองค์กร</a:t>
+              <a:t>Managed Service</a:t>
+            </a:r>
+          </a:p>
+        </p:txBody>
+      </p:sp>
+      <p:sp>
+        <p:nvSpPr>
+          <p:cNvPr id="6" name="C2B"/>
+          <p:cNvSpPr>
+            <a:spLocks noGrp="1"/>
+          </p:cNvSpPr>
+          <p:nvPr>
+            <p:ph type="body" idx="4"/>
+          </p:nvPr>
+        </p:nvSpPr>
+        <p:spPr/>
+        <p:txBody>
+          <a:bodyPr/>
+          <a:lstStyle/>
+          <a:p>
+            <a:pPr/>
+            <a:r>
+              <a:rPr lang="th-TH" dirty="0"/>
+              <a:t>ดูแลระบบรายเดือน พร้อมทีมซัพพอร์ตและรายงานสุขภาพระบบ</a:t>
+            </a:r>
+          </a:p>
+        </p:txBody>
+      </p:sp>
+      <p:sp>
+        <p:nvSpPr>
+          <p:cNvPr id="7" name="C3H"/>
+          <p:cNvSpPr>
+            <a:spLocks noGrp="1"/>
+          </p:cNvSpPr>
+          <p:nvPr>
+            <p:ph type="body" idx="5"/>
+          </p:nvPr>
+        </p:nvSpPr>
+        <p:spPr/>
+        <p:txBody>
+          <a:bodyPr/>
+          <a:lstStyle/>
+          <a:p>
+            <a:pPr/>
+            <a:r>
+              <a:rPr lang="th-TH" dirty="0"/>
+              <a:t>Cloud &amp; Security</a:t>
+            </a:r>
+          </a:p>
+        </p:txBody>
+      </p:sp>
+      <p:sp>
+        <p:nvSpPr>
+          <p:cNvPr id="8" name="C3B"/>
+          <p:cNvSpPr>
+            <a:spLocks noGrp="1"/>
+          </p:cNvSpPr>
+          <p:nvPr>
+            <p:ph type="body" idx="6"/>
+          </p:nvPr>
+        </p:nvSpPr>
+        <p:spPr/>
+        <p:txBody>
+          <a:bodyPr/>
+          <a:lstStyle/>
+          <a:p>
+            <a:pPr/>
+            <a:r>
+              <a:rPr lang="th-TH" dirty="0"/>
+              <a:t>ย้ายระบบขึ้นคลาวด์ และวางมาตรการความปลอดภัยตามมาตรฐาน</a:t>
             </a:r>
           </a:p>
         </p:txBody>
@@ -16230,7 +14949,7 @@
 </p:sld>
 </file>
 
-<file path=ppt/slides/slide3.xml><?xml version="1.0" encoding="utf-8"?>
+<file path=ppt/slides/slide13.xml><?xml version="1.0" encoding="utf-8"?>
 <p:sld xmlns:a="http://schemas.openxmlformats.org/drawingml/2006/main" xmlns:r="http://schemas.openxmlformats.org/officeDocument/2006/relationships" xmlns:p="http://schemas.openxmlformats.org/presentationml/2006/main">
   <p:cSld name="">
     <p:spTree>
@@ -16265,14 +14984,14 @@
             <a:pPr/>
             <a:r>
               <a:rPr lang="th-TH" dirty="0"/>
-              <a:t>ขอบเขตบริการ</a:t>
-            </a:r>
-          </a:p>
-        </p:txBody>
-      </p:sp>
-      <p:sp>
-        <p:nvSpPr>
-          <p:cNvPr id="3" name="Body"/>
+              <a:t>ตัวเลขที่บอกเรื่องเรา</a:t>
+            </a:r>
+          </a:p>
+        </p:txBody>
+      </p:sp>
+      <p:sp>
+        <p:nvSpPr>
+          <p:cNvPr id="3" name="F1"/>
           <p:cNvSpPr>
             <a:spLocks noGrp="1"/>
           </p:cNvSpPr>
@@ -16288,35 +15007,145 @@
             <a:pPr/>
             <a:r>
               <a:rPr lang="th-TH" dirty="0"/>
-              <a:t>วางระบบโครงสร้างพื้นฐานไอทีสำหรับองค์กร</a:t>
-            </a:r>
-          </a:p>
-          <a:p>
-            <a:pPr lvl="1"/>
+              <a:t>12</a:t>
+            </a:r>
+          </a:p>
+        </p:txBody>
+      </p:sp>
+      <p:sp>
+        <p:nvSpPr>
+          <p:cNvPr id="4" name="F1L"/>
+          <p:cNvSpPr>
+            <a:spLocks noGrp="1"/>
+          </p:cNvSpPr>
+          <p:nvPr>
+            <p:ph type="body" idx="2"/>
+          </p:nvPr>
+        </p:nvSpPr>
+        <p:spPr/>
+        <p:txBody>
+          <a:bodyPr/>
+          <a:lstStyle/>
+          <a:p>
+            <a:pPr/>
             <a:r>
               <a:rPr lang="th-TH" dirty="0"/>
-              <a:t>ออกแบบเครือข่าย ระบบสำรองข้อมูล และความปลอดภัย</a:t>
-            </a:r>
-          </a:p>
+              <a:t>ปีที่ให้บริการองค์กรไทย</a:t>
+            </a:r>
+          </a:p>
+        </p:txBody>
+      </p:sp>
+      <p:sp>
+        <p:nvSpPr>
+          <p:cNvPr id="5" name="F2"/>
+          <p:cNvSpPr>
+            <a:spLocks noGrp="1"/>
+          </p:cNvSpPr>
+          <p:nvPr>
+            <p:ph type="body" idx="3"/>
+          </p:nvPr>
+        </p:nvSpPr>
+        <p:spPr/>
+        <p:txBody>
+          <a:bodyPr/>
+          <a:lstStyle/>
           <a:p>
             <a:pPr/>
             <a:r>
               <a:rPr lang="th-TH" dirty="0"/>
-              <a:t>ดูแลระบบต่อเนื่องแบบ Managed Service</a:t>
-            </a:r>
-          </a:p>
-          <a:p>
-            <a:pPr lvl="1"/>
+              <a:t>99.9%</a:t>
+            </a:r>
+          </a:p>
+        </p:txBody>
+      </p:sp>
+      <p:sp>
+        <p:nvSpPr>
+          <p:cNvPr id="6" name="F2L"/>
+          <p:cNvSpPr>
+            <a:spLocks noGrp="1"/>
+          </p:cNvSpPr>
+          <p:nvPr>
+            <p:ph type="body" idx="4"/>
+          </p:nvPr>
+        </p:nvSpPr>
+        <p:spPr/>
+        <p:txBody>
+          <a:bodyPr/>
+          <a:lstStyle/>
+          <a:p>
+            <a:pPr/>
             <a:r>
               <a:rPr lang="th-TH" dirty="0"/>
-              <a:t>มีทีมซัพพอร์ตตอบกลับภายใน SLA ที่ตกลงกัน</a:t>
-            </a:r>
-          </a:p>
+              <a:t>Uptime เฉลี่ยของระบบที่ดูแล</a:t>
+            </a:r>
+          </a:p>
+        </p:txBody>
+      </p:sp>
+      <p:sp>
+        <p:nvSpPr>
+          <p:cNvPr id="7" name="F3"/>
+          <p:cNvSpPr>
+            <a:spLocks noGrp="1"/>
+          </p:cNvSpPr>
+          <p:nvPr>
+            <p:ph type="body" idx="5"/>
+          </p:nvPr>
+        </p:nvSpPr>
+        <p:spPr/>
+        <p:txBody>
+          <a:bodyPr/>
+          <a:lstStyle/>
           <a:p>
             <a:pPr/>
             <a:r>
               <a:rPr lang="th-TH" dirty="0"/>
-              <a:t>ให้คำปรึกษาการย้ายระบบขึ้นคลาวด์</a:t>
+              <a:t>24/7</a:t>
+            </a:r>
+          </a:p>
+        </p:txBody>
+      </p:sp>
+      <p:sp>
+        <p:nvSpPr>
+          <p:cNvPr id="8" name="F3L"/>
+          <p:cNvSpPr>
+            <a:spLocks noGrp="1"/>
+          </p:cNvSpPr>
+          <p:nvPr>
+            <p:ph type="body" idx="6"/>
+          </p:nvPr>
+        </p:nvSpPr>
+        <p:spPr/>
+        <p:txBody>
+          <a:bodyPr/>
+          <a:lstStyle/>
+          <a:p>
+            <a:pPr/>
+            <a:r>
+              <a:rPr lang="th-TH" dirty="0"/>
+              <a:t>ทีมเฝ้าระวังและตอบกลับ</a:t>
+            </a:r>
+          </a:p>
+        </p:txBody>
+      </p:sp>
+      <p:sp>
+        <p:nvSpPr>
+          <p:cNvPr id="9" name="FN"/>
+          <p:cNvSpPr>
+            <a:spLocks noGrp="1"/>
+          </p:cNvSpPr>
+          <p:nvPr>
+            <p:ph type="body" idx="7"/>
+          </p:nvPr>
+        </p:nvSpPr>
+        <p:spPr/>
+        <p:txBody>
+          <a:bodyPr/>
+          <a:lstStyle/>
+          <a:p>
+            <a:pPr/>
+            <a:r>
+              <a:rPr lang="th-TH" dirty="0"/>
+              <a:t>ข้อมูล ณ ไตรมาส 1 ปี 2569</a:t>
             </a:r>
           </a:p>
         </p:txBody>
@@ -16329,7 +15158,7 @@
 </p:sld>
 </file>
 
-<file path=ppt/slides/slide4.xml><?xml version="1.0" encoding="utf-8"?>
+<file path=ppt/slides/slide14.xml><?xml version="1.0" encoding="utf-8"?>
 <p:sld xmlns:a="http://schemas.openxmlformats.org/drawingml/2006/main" xmlns:r="http://schemas.openxmlformats.org/officeDocument/2006/relationships" xmlns:p="http://schemas.openxmlformats.org/presentationml/2006/main">
   <p:cSld name="">
     <p:spTree>
@@ -16348,12 +15177,12 @@
       </p:grpSpPr>
       <p:sp>
         <p:nvSpPr>
-          <p:cNvPr id="2" name="Title"/>
-          <p:cNvSpPr>
-            <a:spLocks noGrp="1"/>
-          </p:cNvSpPr>
-          <p:nvPr>
-            <p:ph type="title"/>
+          <p:cNvPr id="2" name="Q"/>
+          <p:cNvSpPr>
+            <a:spLocks noGrp="1"/>
+          </p:cNvSpPr>
+          <p:nvPr>
+            <p:ph type="body" idx="1"/>
           </p:nvPr>
         </p:nvSpPr>
         <p:spPr/>
@@ -16364,19 +15193,19 @@
             <a:pPr/>
             <a:r>
               <a:rPr lang="th-TH" dirty="0"/>
-              <a:t>ก่อนและหลังใช้บริการ</a:t>
-            </a:r>
-          </a:p>
-        </p:txBody>
-      </p:sp>
-      <p:sp>
-        <p:nvSpPr>
-          <p:cNvPr id="3" name="L"/>
-          <p:cNvSpPr>
-            <a:spLocks noGrp="1"/>
-          </p:cNvSpPr>
-          <p:nvPr>
-            <p:ph type="body" idx="1"/>
+              <a:t>ระบบไม่ล่มอีกเลยตั้งแต่เปลี่ยนมาใช้ทีมนี้ดูแล และเราวางแผนงบประมาณได้ล่วงหน้าจริง ๆ</a:t>
+            </a:r>
+          </a:p>
+        </p:txBody>
+      </p:sp>
+      <p:sp>
+        <p:nvSpPr>
+          <p:cNvPr id="3" name="A"/>
+          <p:cNvSpPr>
+            <a:spLocks noGrp="1"/>
+          </p:cNvSpPr>
+          <p:nvPr>
+            <p:ph type="body" idx="2"/>
           </p:nvPr>
         </p:nvSpPr>
         <p:spPr/>
@@ -16387,58 +15216,7 @@
             <a:pPr/>
             <a:r>
               <a:rPr lang="th-TH" dirty="0"/>
-              <a:t>ก่อน</a:t>
-            </a:r>
-          </a:p>
-          <a:p>
-            <a:pPr lvl="1"/>
-            <a:r>
-              <a:rPr lang="th-TH" dirty="0"/>
-              <a:t>ระบบล่มบ่อย ไม่มีคนดูแลประจำ</a:t>
-            </a:r>
-          </a:p>
-          <a:p>
-            <a:pPr lvl="1"/>
-            <a:r>
-              <a:rPr lang="th-TH" dirty="0"/>
-              <a:t>ค่าใช้จ่ายไม่แน่นอน</a:t>
-            </a:r>
-          </a:p>
-        </p:txBody>
-      </p:sp>
-      <p:sp>
-        <p:nvSpPr>
-          <p:cNvPr id="4" name="R"/>
-          <p:cNvSpPr>
-            <a:spLocks noGrp="1"/>
-          </p:cNvSpPr>
-          <p:nvPr>
-            <p:ph type="body" idx="2"/>
-          </p:nvPr>
-        </p:nvSpPr>
-        <p:spPr/>
-        <p:txBody>
-          <a:bodyPr/>
-          <a:lstStyle/>
-          <a:p>
-            <a:pPr/>
-            <a:r>
-              <a:rPr lang="th-TH" dirty="0"/>
-              <a:t>หลัง</a:t>
-            </a:r>
-          </a:p>
-          <a:p>
-            <a:pPr lvl="1"/>
-            <a:r>
-              <a:rPr lang="th-TH" dirty="0"/>
-              <a:t>มอนิเตอร์ 24 ชั่วโมง แจ้งเตือนอัตโนมัติ</a:t>
-            </a:r>
-          </a:p>
-          <a:p>
-            <a:pPr lvl="1"/>
-            <a:r>
-              <a:rPr lang="th-TH" dirty="0"/>
-              <a:t>ค่าใช้จ่ายคงที่ต่อเดือน</a:t>
+              <a:t>คุณสมชาย ป. — ผู้จัดการฝ่ายไอที, บริษัทตัวอย่าง จำกัด</a:t>
             </a:r>
           </a:p>
         </p:txBody>
@@ -16451,7 +15229,7 @@
 </p:sld>
 </file>
 
-<file path=ppt/slides/slide5.xml><?xml version="1.0" encoding="utf-8"?>
+<file path=ppt/slides/slide15.xml><?xml version="1.0" encoding="utf-8"?>
 <p:sld xmlns:a="http://schemas.openxmlformats.org/drawingml/2006/main" xmlns:r="http://schemas.openxmlformats.org/officeDocument/2006/relationships" xmlns:p="http://schemas.openxmlformats.org/presentationml/2006/main">
   <p:cSld name="">
     <p:spTree>
@@ -16486,19 +15264,19 @@
             <a:pPr/>
             <a:r>
               <a:rPr lang="th-TH" dirty="0"/>
-              <a:t>สามเสาหลักของบริการ</a:t>
-            </a:r>
-          </a:p>
-        </p:txBody>
-      </p:sp>
-      <p:sp>
-        <p:nvSpPr>
-          <p:cNvPr id="3" name="C1H"/>
-          <p:cNvSpPr>
-            <a:spLocks noGrp="1"/>
-          </p:cNvSpPr>
-          <p:nvPr>
-            <p:ph type="body" idx="1"/>
+              <a:t>แพ็กเกจและงบประมาณ</a:t>
+            </a:r>
+          </a:p>
+        </p:txBody>
+      </p:sp>
+      <p:sp>
+        <p:nvSpPr>
+          <p:cNvPr id="3" name="Intro"/>
+          <p:cNvSpPr>
+            <a:spLocks noGrp="1"/>
+          </p:cNvSpPr>
+          <p:nvPr>
+            <p:ph type="body" idx="2"/>
           </p:nvPr>
         </p:nvSpPr>
         <p:spPr/>
@@ -16509,544 +15287,7 @@
             <a:pPr/>
             <a:r>
               <a:rPr lang="th-TH" dirty="0"/>
-              <a:t>Infrastructure</a:t>
-            </a:r>
-          </a:p>
-        </p:txBody>
-      </p:sp>
-      <p:sp>
-        <p:nvSpPr>
-          <p:cNvPr id="4" name="C1B"/>
-          <p:cNvSpPr>
-            <a:spLocks noGrp="1"/>
-          </p:cNvSpPr>
-          <p:nvPr>
-            <p:ph type="body" idx="2"/>
-          </p:nvPr>
-        </p:nvSpPr>
-        <p:spPr/>
-        <p:txBody>
-          <a:bodyPr/>
-          <a:lstStyle/>
-          <a:p>
-            <a:pPr/>
-            <a:r>
-              <a:rPr lang="th-TH" dirty="0"/>
-              <a:t>ออกแบบและติดตั้งเครือข่าย เซิร์ฟเวอร์ และระบบสำรองข้อมูล</a:t>
-            </a:r>
-          </a:p>
-        </p:txBody>
-      </p:sp>
-      <p:sp>
-        <p:nvSpPr>
-          <p:cNvPr id="5" name="C2H"/>
-          <p:cNvSpPr>
-            <a:spLocks noGrp="1"/>
-          </p:cNvSpPr>
-          <p:nvPr>
-            <p:ph type="body" idx="3"/>
-          </p:nvPr>
-        </p:nvSpPr>
-        <p:spPr/>
-        <p:txBody>
-          <a:bodyPr/>
-          <a:lstStyle/>
-          <a:p>
-            <a:pPr/>
-            <a:r>
-              <a:rPr lang="th-TH" dirty="0"/>
-              <a:t>Managed Service</a:t>
-            </a:r>
-          </a:p>
-        </p:txBody>
-      </p:sp>
-      <p:sp>
-        <p:nvSpPr>
-          <p:cNvPr id="6" name="C2B"/>
-          <p:cNvSpPr>
-            <a:spLocks noGrp="1"/>
-          </p:cNvSpPr>
-          <p:nvPr>
-            <p:ph type="body" idx="4"/>
-          </p:nvPr>
-        </p:nvSpPr>
-        <p:spPr/>
-        <p:txBody>
-          <a:bodyPr/>
-          <a:lstStyle/>
-          <a:p>
-            <a:pPr/>
-            <a:r>
-              <a:rPr lang="th-TH" dirty="0"/>
-              <a:t>ดูแลระบบรายเดือน พร้อมทีมซัพพอร์ตและรายงานสุขภาพระบบ</a:t>
-            </a:r>
-          </a:p>
-        </p:txBody>
-      </p:sp>
-      <p:sp>
-        <p:nvSpPr>
-          <p:cNvPr id="7" name="C3H"/>
-          <p:cNvSpPr>
-            <a:spLocks noGrp="1"/>
-          </p:cNvSpPr>
-          <p:nvPr>
-            <p:ph type="body" idx="5"/>
-          </p:nvPr>
-        </p:nvSpPr>
-        <p:spPr/>
-        <p:txBody>
-          <a:bodyPr/>
-          <a:lstStyle/>
-          <a:p>
-            <a:pPr/>
-            <a:r>
-              <a:rPr lang="th-TH" dirty="0"/>
-              <a:t>Cloud &amp; Security</a:t>
-            </a:r>
-          </a:p>
-        </p:txBody>
-      </p:sp>
-      <p:sp>
-        <p:nvSpPr>
-          <p:cNvPr id="8" name="C3B"/>
-          <p:cNvSpPr>
-            <a:spLocks noGrp="1"/>
-          </p:cNvSpPr>
-          <p:nvPr>
-            <p:ph type="body" idx="6"/>
-          </p:nvPr>
-        </p:nvSpPr>
-        <p:spPr/>
-        <p:txBody>
-          <a:bodyPr/>
-          <a:lstStyle/>
-          <a:p>
-            <a:pPr/>
-            <a:r>
-              <a:rPr lang="th-TH" dirty="0"/>
-              <a:t>ย้ายระบบขึ้นคลาวด์ และวางมาตรการความปลอดภัยตามมาตรฐาน</a:t>
-            </a:r>
-          </a:p>
-        </p:txBody>
-      </p:sp>
-    </p:spTree>
-  </p:cSld>
-  <p:clrMapOvr>
-    <a:masterClrMapping/>
-  </p:clrMapOvr>
-</p:sld>
-</file>
-
-<file path=ppt/slides/slide6.xml><?xml version="1.0" encoding="utf-8"?>
-<p:sld xmlns:a="http://schemas.openxmlformats.org/drawingml/2006/main" xmlns:r="http://schemas.openxmlformats.org/officeDocument/2006/relationships" xmlns:p="http://schemas.openxmlformats.org/presentationml/2006/main">
-  <p:cSld name="">
-    <p:spTree>
-      <p:nvGrpSpPr>
-        <p:cNvPr id="1" name=""/>
-        <p:cNvGrpSpPr/>
-        <p:nvPr/>
-      </p:nvGrpSpPr>
-      <p:grpSpPr>
-        <a:xfrm>
-          <a:off x="0" y="0"/>
-          <a:ext cx="0" cy="0"/>
-          <a:chOff x="0" y="0"/>
-          <a:chExt cx="0" cy="0"/>
-        </a:xfrm>
-      </p:grpSpPr>
-      <p:sp>
-        <p:nvSpPr>
-          <p:cNvPr id="2" name="Title"/>
-          <p:cNvSpPr>
-            <a:spLocks noGrp="1"/>
-          </p:cNvSpPr>
-          <p:nvPr>
-            <p:ph type="title"/>
-          </p:nvPr>
-        </p:nvSpPr>
-        <p:spPr/>
-        <p:txBody>
-          <a:bodyPr/>
-          <a:lstStyle/>
-          <a:p>
-            <a:pPr/>
-            <a:r>
-              <a:rPr lang="th-TH" dirty="0"/>
-              <a:t>ตัวเลขที่บอกเรื่องเรา</a:t>
-            </a:r>
-          </a:p>
-        </p:txBody>
-      </p:sp>
-      <p:sp>
-        <p:nvSpPr>
-          <p:cNvPr id="3" name="F1"/>
-          <p:cNvSpPr>
-            <a:spLocks noGrp="1"/>
-          </p:cNvSpPr>
-          <p:nvPr>
-            <p:ph type="body" idx="1"/>
-          </p:nvPr>
-        </p:nvSpPr>
-        <p:spPr/>
-        <p:txBody>
-          <a:bodyPr/>
-          <a:lstStyle/>
-          <a:p>
-            <a:pPr/>
-            <a:r>
-              <a:rPr lang="th-TH" dirty="0"/>
-              <a:t>12</a:t>
-            </a:r>
-          </a:p>
-        </p:txBody>
-      </p:sp>
-      <p:sp>
-        <p:nvSpPr>
-          <p:cNvPr id="4" name="F1L"/>
-          <p:cNvSpPr>
-            <a:spLocks noGrp="1"/>
-          </p:cNvSpPr>
-          <p:nvPr>
-            <p:ph type="body" idx="2"/>
-          </p:nvPr>
-        </p:nvSpPr>
-        <p:spPr/>
-        <p:txBody>
-          <a:bodyPr/>
-          <a:lstStyle/>
-          <a:p>
-            <a:pPr/>
-            <a:r>
-              <a:rPr lang="th-TH" dirty="0"/>
-              <a:t>ปีที่ให้บริการองค์กรไทย</a:t>
-            </a:r>
-          </a:p>
-        </p:txBody>
-      </p:sp>
-      <p:sp>
-        <p:nvSpPr>
-          <p:cNvPr id="5" name="F2"/>
-          <p:cNvSpPr>
-            <a:spLocks noGrp="1"/>
-          </p:cNvSpPr>
-          <p:nvPr>
-            <p:ph type="body" idx="3"/>
-          </p:nvPr>
-        </p:nvSpPr>
-        <p:spPr/>
-        <p:txBody>
-          <a:bodyPr/>
-          <a:lstStyle/>
-          <a:p>
-            <a:pPr/>
-            <a:r>
-              <a:rPr lang="th-TH" dirty="0"/>
-              <a:t>99.9%</a:t>
-            </a:r>
-          </a:p>
-        </p:txBody>
-      </p:sp>
-      <p:sp>
-        <p:nvSpPr>
-          <p:cNvPr id="6" name="F2L"/>
-          <p:cNvSpPr>
-            <a:spLocks noGrp="1"/>
-          </p:cNvSpPr>
-          <p:nvPr>
-            <p:ph type="body" idx="4"/>
-          </p:nvPr>
-        </p:nvSpPr>
-        <p:spPr/>
-        <p:txBody>
-          <a:bodyPr/>
-          <a:lstStyle/>
-          <a:p>
-            <a:pPr/>
-            <a:r>
-              <a:rPr lang="th-TH" dirty="0"/>
-              <a:t>Uptime เฉลี่ยของระบบที่ดูแล</a:t>
-            </a:r>
-          </a:p>
-        </p:txBody>
-      </p:sp>
-      <p:sp>
-        <p:nvSpPr>
-          <p:cNvPr id="7" name="F3"/>
-          <p:cNvSpPr>
-            <a:spLocks noGrp="1"/>
-          </p:cNvSpPr>
-          <p:nvPr>
-            <p:ph type="body" idx="5"/>
-          </p:nvPr>
-        </p:nvSpPr>
-        <p:spPr/>
-        <p:txBody>
-          <a:bodyPr/>
-          <a:lstStyle/>
-          <a:p>
-            <a:pPr/>
-            <a:r>
-              <a:rPr lang="th-TH" dirty="0"/>
-              <a:t>24/7</a:t>
-            </a:r>
-          </a:p>
-        </p:txBody>
-      </p:sp>
-      <p:sp>
-        <p:nvSpPr>
-          <p:cNvPr id="8" name="F3L"/>
-          <p:cNvSpPr>
-            <a:spLocks noGrp="1"/>
-          </p:cNvSpPr>
-          <p:nvPr>
-            <p:ph type="body" idx="6"/>
-          </p:nvPr>
-        </p:nvSpPr>
-        <p:spPr/>
-        <p:txBody>
-          <a:bodyPr/>
-          <a:lstStyle/>
-          <a:p>
-            <a:pPr/>
-            <a:r>
-              <a:rPr lang="th-TH" dirty="0"/>
-              <a:t>ทีมเฝ้าระวังและตอบกลับ</a:t>
-            </a:r>
-          </a:p>
-        </p:txBody>
-      </p:sp>
-      <p:sp>
-        <p:nvSpPr>
-          <p:cNvPr id="9" name="FN"/>
-          <p:cNvSpPr>
-            <a:spLocks noGrp="1"/>
-          </p:cNvSpPr>
-          <p:nvPr>
-            <p:ph type="body" idx="7"/>
-          </p:nvPr>
-        </p:nvSpPr>
-        <p:spPr/>
-        <p:txBody>
-          <a:bodyPr/>
-          <a:lstStyle/>
-          <a:p>
-            <a:pPr/>
-            <a:r>
-              <a:rPr lang="th-TH" dirty="0"/>
-              <a:t>ข้อมูล ณ ไตรมาส 1 ปี 2569</a:t>
-            </a:r>
-          </a:p>
-        </p:txBody>
-      </p:sp>
-    </p:spTree>
-  </p:cSld>
-  <p:clrMapOvr>
-    <a:masterClrMapping/>
-  </p:clrMapOvr>
-</p:sld>
-</file>
-
-<file path=ppt/slides/slide7.xml><?xml version="1.0" encoding="utf-8"?>
-<p:sld xmlns:a="http://schemas.openxmlformats.org/drawingml/2006/main" xmlns:r="http://schemas.openxmlformats.org/officeDocument/2006/relationships" xmlns:p="http://schemas.openxmlformats.org/presentationml/2006/main">
-  <p:cSld name="">
-    <p:spTree>
-      <p:nvGrpSpPr>
-        <p:cNvPr id="1" name=""/>
-        <p:cNvGrpSpPr/>
-        <p:nvPr/>
-      </p:nvGrpSpPr>
-      <p:grpSpPr>
-        <a:xfrm>
-          <a:off x="0" y="0"/>
-          <a:ext cx="0" cy="0"/>
-          <a:chOff x="0" y="0"/>
-          <a:chExt cx="0" cy="0"/>
-        </a:xfrm>
-      </p:grpSpPr>
-      <p:sp>
-        <p:nvSpPr>
-          <p:cNvPr id="2" name="Q"/>
-          <p:cNvSpPr>
-            <a:spLocks noGrp="1"/>
-          </p:cNvSpPr>
-          <p:nvPr>
-            <p:ph type="body" idx="1"/>
-          </p:nvPr>
-        </p:nvSpPr>
-        <p:spPr/>
-        <p:txBody>
-          <a:bodyPr/>
-          <a:lstStyle/>
-          <a:p>
-            <a:pPr/>
-            <a:r>
-              <a:rPr lang="th-TH" dirty="0"/>
-              <a:t>ระบบไม่ล่มอีกเลยตั้งแต่เปลี่ยนมาใช้ทีมนี้ดูแล และเราวางแผนงบประมาณได้ล่วงหน้าจริง ๆ</a:t>
-            </a:r>
-          </a:p>
-        </p:txBody>
-      </p:sp>
-      <p:sp>
-        <p:nvSpPr>
-          <p:cNvPr id="3" name="A"/>
-          <p:cNvSpPr>
-            <a:spLocks noGrp="1"/>
-          </p:cNvSpPr>
-          <p:nvPr>
-            <p:ph type="body" idx="2"/>
-          </p:nvPr>
-        </p:nvSpPr>
-        <p:spPr/>
-        <p:txBody>
-          <a:bodyPr/>
-          <a:lstStyle/>
-          <a:p>
-            <a:pPr/>
-            <a:r>
-              <a:rPr lang="th-TH" dirty="0"/>
-              <a:t>คุณสมชาย ป. — ผู้จัดการฝ่ายไอที, บริษัทตัวอย่าง จำกัด</a:t>
-            </a:r>
-          </a:p>
-        </p:txBody>
-      </p:sp>
-    </p:spTree>
-  </p:cSld>
-  <p:clrMapOvr>
-    <a:masterClrMapping/>
-  </p:clrMapOvr>
-</p:sld>
-</file>
-
-<file path=ppt/slides/slide8.xml><?xml version="1.0" encoding="utf-8"?>
-<p:sld xmlns:a="http://schemas.openxmlformats.org/drawingml/2006/main" xmlns:r="http://schemas.openxmlformats.org/officeDocument/2006/relationships" xmlns:p="http://schemas.openxmlformats.org/presentationml/2006/main">
-  <p:cSld name="">
-    <p:spTree>
-      <p:nvGrpSpPr>
-        <p:cNvPr id="1" name=""/>
-        <p:cNvGrpSpPr/>
-        <p:nvPr/>
-      </p:nvGrpSpPr>
-      <p:grpSpPr>
-        <a:xfrm>
-          <a:off x="0" y="0"/>
-          <a:ext cx="0" cy="0"/>
-          <a:chOff x="0" y="0"/>
-          <a:chExt cx="0" cy="0"/>
-        </a:xfrm>
-      </p:grpSpPr>
-      <p:sp>
-        <p:nvSpPr>
-          <p:cNvPr id="2" name="Title"/>
-          <p:cNvSpPr>
-            <a:spLocks noGrp="1"/>
-          </p:cNvSpPr>
-          <p:nvPr>
-            <p:ph type="title"/>
-          </p:nvPr>
-        </p:nvSpPr>
-        <p:spPr/>
-        <p:txBody>
-          <a:bodyPr/>
-          <a:lstStyle/>
-          <a:p>
-            <a:pPr/>
-            <a:r>
-              <a:rPr lang="th-TH" dirty="0"/>
-              <a:t>ศูนย์ปฏิบัติการเครือข่าย</a:t>
-            </a:r>
-          </a:p>
-        </p:txBody>
-      </p:sp>
-      <p:sp>
-        <p:nvSpPr>
-          <p:cNvPr id="3" name="Cap"/>
-          <p:cNvSpPr>
-            <a:spLocks noGrp="1"/>
-          </p:cNvSpPr>
-          <p:nvPr>
-            <p:ph type="body" idx="2"/>
-          </p:nvPr>
-        </p:nvSpPr>
-        <p:spPr/>
-        <p:txBody>
-          <a:bodyPr/>
-          <a:lstStyle/>
-          <a:p>
-            <a:pPr/>
-            <a:r>
-              <a:rPr lang="th-TH" dirty="0"/>
-              <a:t>คลิกไอคอนกลางสไลด์เพื่อใส่ภาพเต็มจอ</a:t>
-            </a:r>
-          </a:p>
-        </p:txBody>
-      </p:sp>
-    </p:spTree>
-  </p:cSld>
-  <p:clrMapOvr>
-    <a:masterClrMapping/>
-  </p:clrMapOvr>
-</p:sld>
-</file>
-
-<file path=ppt/slides/slide9.xml><?xml version="1.0" encoding="utf-8"?>
-<p:sld xmlns:a="http://schemas.openxmlformats.org/drawingml/2006/main" xmlns:r="http://schemas.openxmlformats.org/officeDocument/2006/relationships" xmlns:p="http://schemas.openxmlformats.org/presentationml/2006/main">
-  <p:cSld name="">
-    <p:spTree>
-      <p:nvGrpSpPr>
-        <p:cNvPr id="1" name=""/>
-        <p:cNvGrpSpPr/>
-        <p:nvPr/>
-      </p:nvGrpSpPr>
-      <p:grpSpPr>
-        <a:xfrm>
-          <a:off x="0" y="0"/>
-          <a:ext cx="0" cy="0"/>
-          <a:chOff x="0" y="0"/>
-          <a:chExt cx="0" cy="0"/>
-        </a:xfrm>
-      </p:grpSpPr>
-      <p:sp>
-        <p:nvSpPr>
-          <p:cNvPr id="2" name="Title"/>
-          <p:cNvSpPr>
-            <a:spLocks noGrp="1"/>
-          </p:cNvSpPr>
-          <p:nvPr>
-            <p:ph type="title"/>
-          </p:nvPr>
-        </p:nvSpPr>
-        <p:spPr/>
-        <p:txBody>
-          <a:bodyPr/>
-          <a:lstStyle/>
-          <a:p>
-            <a:pPr/>
-            <a:r>
-              <a:rPr lang="th-TH" dirty="0"/>
-              <a:t>เปรียบเทียบแพ็กเกจ</a:t>
-            </a:r>
-          </a:p>
-        </p:txBody>
-      </p:sp>
-      <p:sp>
-        <p:nvSpPr>
-          <p:cNvPr id="3" name="Intro"/>
-          <p:cNvSpPr>
-            <a:spLocks noGrp="1"/>
-          </p:cNvSpPr>
-          <p:nvPr>
-            <p:ph type="body" idx="2"/>
-          </p:nvPr>
-        </p:nvSpPr>
-        <p:spPr/>
-        <p:txBody>
-          <a:bodyPr/>
-          <a:lstStyle/>
-          <a:p>
-            <a:pPr/>
-            <a:r>
-              <a:rPr lang="th-TH" dirty="0"/>
-              <a:t>เลือกระดับบริการให้ตรงกับขนาดองค์กร</a:t>
+              <a:t>เลือกระดับบริการให้ตรงกับขนาดองค์กร ราคาไม่รวมภาษีมูลค่าเพิ่ม</a:t>
             </a:r>
           </a:p>
         </p:txBody>
@@ -17063,7 +15304,7 @@
         </p:nvGraphicFramePr>
         <p:xfrm>
           <a:off x="914400" y="2286000"/>
-          <a:ext cx="10363200" cy="1755648"/>
+          <a:ext cx="10363200" cy="2107692"/>
         </p:xfrm>
         <a:graphic>
           <a:graphicData uri="http://schemas.openxmlformats.org/drawingml/2006/table">
@@ -17133,7 +15374,11 @@
                       </a:r>
                     </a:p>
                   </a:txBody>
-                  <a:tcPr marL="73152" marR="73152" marT="73152" marB="73152" anchor="ctr"/>
+                  <a:tcPr marL="73152" marR="73152" marT="73152" marB="73152" anchor="ctr">
+                    <a:solidFill>
+                      <a:srgbClr val="216B7F"/>
+                    </a:solidFill>
+                  </a:tcPr>
                 </a:tc>
                 <a:tc>
                   <a:txBody>
@@ -17518,12 +15763,131 @@
                   <a:tcPr marL="73152" marR="73152" marT="73152" marB="73152" anchor="ctr"/>
                 </a:tc>
               </a:tr>
+              <a:tr h="352044">
+                <a:tc>
+                  <a:txBody>
+                    <a:bodyPr/>
+                    <a:lstStyle/>
+                    <a:p>
+                      <a:pPr algn="l" marL="0" indent="0">
+                        <a:buNone/>
+                      </a:pPr>
+                      <a:r>
+                        <a:rPr lang="th-TH" sz="1000" b="1" dirty="0">
+                          <a:solidFill>
+                            <a:srgbClr val="333333"/>
+                          </a:solidFill>
+                          <a:latin typeface="+mn-lt"/>
+                          <a:cs typeface="+mn-cs"/>
+                        </a:rPr>
+                        <a:t>ค่าบริการต่อเดือน</a:t>
+                      </a:r>
+                    </a:p>
+                  </a:txBody>
+                  <a:tcPr marL="73152" marR="73152" marT="73152" marB="73152" anchor="ctr"/>
+                </a:tc>
+                <a:tc>
+                  <a:txBody>
+                    <a:bodyPr/>
+                    <a:lstStyle/>
+                    <a:p>
+                      <a:pPr algn="ctr" marL="0" indent="0">
+                        <a:buNone/>
+                      </a:pPr>
+                      <a:r>
+                        <a:rPr lang="th-TH" sz="1000" b="1" dirty="0">
+                          <a:solidFill>
+                            <a:srgbClr val="333333"/>
+                          </a:solidFill>
+                          <a:latin typeface="+mn-lt"/>
+                          <a:cs typeface="+mn-cs"/>
+                        </a:rPr>
+                        <a:t>18,000 บาท</a:t>
+                      </a:r>
+                    </a:p>
+                  </a:txBody>
+                  <a:tcPr marL="73152" marR="73152" marT="73152" marB="73152" anchor="ctr"/>
+                </a:tc>
+                <a:tc>
+                  <a:txBody>
+                    <a:bodyPr/>
+                    <a:lstStyle/>
+                    <a:p>
+                      <a:pPr algn="ctr" marL="0" indent="0">
+                        <a:buNone/>
+                      </a:pPr>
+                      <a:r>
+                        <a:rPr lang="th-TH" sz="1000" b="1" dirty="0">
+                          <a:solidFill>
+                            <a:srgbClr val="333333"/>
+                          </a:solidFill>
+                          <a:latin typeface="+mn-lt"/>
+                          <a:cs typeface="+mn-cs"/>
+                        </a:rPr>
+                        <a:t>32,000 บาท</a:t>
+                      </a:r>
+                    </a:p>
+                  </a:txBody>
+                  <a:tcPr marL="73152" marR="73152" marT="73152" marB="73152" anchor="ctr"/>
+                </a:tc>
+                <a:tc>
+                  <a:txBody>
+                    <a:bodyPr/>
+                    <a:lstStyle/>
+                    <a:p>
+                      <a:pPr algn="ctr" marL="0" indent="0">
+                        <a:buNone/>
+                      </a:pPr>
+                      <a:r>
+                        <a:rPr lang="th-TH" sz="1000" b="1" dirty="0">
+                          <a:solidFill>
+                            <a:srgbClr val="333333"/>
+                          </a:solidFill>
+                          <a:latin typeface="+mn-lt"/>
+                          <a:cs typeface="+mn-cs"/>
+                        </a:rPr>
+                        <a:t>65,000 บาท</a:t>
+                      </a:r>
+                    </a:p>
+                  </a:txBody>
+                  <a:tcPr marL="73152" marR="73152" marT="73152" marB="73152" anchor="ctr"/>
+                </a:tc>
+              </a:tr>
             </a:tbl>
           </a:graphicData>
         </a:graphic>
       </p:graphicFrame>
       <p:sp>
         <p:nvSpPr>
+          <p:cNvPr id="9" name="Recommended Cap"/>
+          <p:cNvSpPr/>
+          <p:nvPr/>
+        </p:nvSpPr>
+        <p:spPr>
+          <a:xfrm>
+            <a:off x="6489520" y="2240280"/>
+            <a:ext cx="2394040" cy="45720"/>
+          </a:xfrm>
+          <a:prstGeom prst="rect">
+            <a:avLst/>
+          </a:prstGeom>
+          <a:solidFill>
+            <a:srgbClr val="216B7F"/>
+          </a:solidFill>
+          <a:ln>
+            <a:noFill/>
+          </a:ln>
+        </p:spPr>
+        <p:txBody>
+          <a:bodyPr/>
+          <a:lstStyle/>
+          <a:p>
+            <a:endParaRPr lang="th-TH"/>
+          </a:p>
+        </p:txBody>
+      </p:sp>
+      <p:sp>
+        <p:nvSpPr>
           <p:cNvPr id="5" name="TL"/>
           <p:cNvSpPr>
             <a:spLocks noGrp="1"/>
@@ -17564,6 +15928,2240 @@
             <a:r>
               <a:rPr lang="th-TH" dirty="0"/>
               <a:t>องค์กร 50-200 ที่นั่งเลือก Business เป็นค่าเริ่มต้น ตอบกลับ 4 ชั่วโมงครอบคลุมงานปิดงบรายเดือน</a:t>
+            </a:r>
+          </a:p>
+        </p:txBody>
+      </p:sp>
+    </p:spTree>
+  </p:cSld>
+  <p:clrMapOvr>
+    <a:masterClrMapping/>
+  </p:clrMapOvr>
+</p:sld>
+</file>
+
+<file path=ppt/slides/slide16.xml><?xml version="1.0" encoding="utf-8"?>
+<p:sld xmlns:a="http://schemas.openxmlformats.org/drawingml/2006/main" xmlns:r="http://schemas.openxmlformats.org/officeDocument/2006/relationships" xmlns:p="http://schemas.openxmlformats.org/presentationml/2006/main">
+  <p:cSld name="">
+    <p:spTree>
+      <p:nvGrpSpPr>
+        <p:cNvPr id="1" name=""/>
+        <p:cNvGrpSpPr/>
+        <p:nvPr/>
+      </p:nvGrpSpPr>
+      <p:grpSpPr>
+        <a:xfrm>
+          <a:off x="0" y="0"/>
+          <a:ext cx="0" cy="0"/>
+          <a:chOff x="0" y="0"/>
+          <a:chExt cx="0" cy="0"/>
+        </a:xfrm>
+      </p:grpSpPr>
+      <p:sp>
+        <p:nvSpPr>
+          <p:cNvPr id="2" name="Title"/>
+          <p:cNvSpPr>
+            <a:spLocks noGrp="1"/>
+          </p:cNvSpPr>
+          <p:nvPr>
+            <p:ph type="title"/>
+          </p:nvPr>
+        </p:nvSpPr>
+        <p:spPr/>
+        <p:txBody>
+          <a:bodyPr/>
+          <a:lstStyle/>
+          <a:p>
+            <a:pPr/>
+            <a:r>
+              <a:rPr lang="th-TH" dirty="0"/>
+              <a:t>ขอบคุณครับ</a:t>
+            </a:r>
+          </a:p>
+        </p:txBody>
+      </p:sp>
+      <p:sp>
+        <p:nvSpPr>
+          <p:cNvPr id="3" name="NSL"/>
+          <p:cNvSpPr>
+            <a:spLocks noGrp="1"/>
+          </p:cNvSpPr>
+          <p:nvPr>
+            <p:ph type="body" idx="1"/>
+          </p:nvPr>
+        </p:nvSpPr>
+        <p:spPr/>
+        <p:txBody>
+          <a:bodyPr/>
+          <a:lstStyle/>
+          <a:p>
+            <a:pPr/>
+            <a:r>
+              <a:rPr lang="th-TH" dirty="0"/>
+              <a:t>ขั้นตอนถัดไป</a:t>
+            </a:r>
+          </a:p>
+        </p:txBody>
+      </p:sp>
+      <p:sp>
+        <p:nvSpPr>
+          <p:cNvPr id="4" name="NS"/>
+          <p:cNvSpPr>
+            <a:spLocks noGrp="1"/>
+          </p:cNvSpPr>
+          <p:nvPr>
+            <p:ph type="body" idx="2"/>
+          </p:nvPr>
+        </p:nvSpPr>
+        <p:spPr/>
+        <p:txBody>
+          <a:bodyPr/>
+          <a:lstStyle/>
+          <a:p>
+            <a:pPr/>
+            <a:r>
+              <a:rPr lang="th-TH" dirty="0"/>
+              <a:t>ยืนยันแพ็กเกจและขอบเขตงานรายกระบวนการ</a:t>
+            </a:r>
+          </a:p>
+          <a:p>
+            <a:pPr/>
+            <a:r>
+              <a:rPr lang="th-TH" dirty="0"/>
+              <a:t>เปิดสิทธิ์เข้าระบบให้ทีมสำรวจ 2 รายการที่ยังติดข้อจำกัด</a:t>
+            </a:r>
+          </a:p>
+          <a:p>
+            <a:pPr/>
+            <a:r>
+              <a:rPr lang="th-TH" dirty="0"/>
+              <a:t>ลงนามสัญญาและเริ่มรอบที่ 1 ภายใน 30 วัน</a:t>
+            </a:r>
+          </a:p>
+        </p:txBody>
+      </p:sp>
+      <p:sp>
+        <p:nvSpPr>
+          <p:cNvPr id="5" name="DB"/>
+          <p:cNvSpPr>
+            <a:spLocks noGrp="1"/>
+          </p:cNvSpPr>
+          <p:nvPr>
+            <p:ph type="body" idx="3"/>
+          </p:nvPr>
+        </p:nvSpPr>
+        <p:spPr/>
+        <p:txBody>
+          <a:bodyPr/>
+          <a:lstStyle/>
+          <a:p>
+            <a:pPr/>
+            <a:r>
+              <a:rPr lang="th-TH" dirty="0"/>
+              <a:t>ต้องการคำตอบภายใน 30 กันยายน 2569 เพื่อเริ่มรอบแรกในไตรมาสนี้</a:t>
+            </a:r>
+          </a:p>
+        </p:txBody>
+      </p:sp>
+      <p:sp>
+        <p:nvSpPr>
+          <p:cNvPr id="6" name="Contact"/>
+          <p:cNvSpPr>
+            <a:spLocks noGrp="1"/>
+          </p:cNvSpPr>
+          <p:nvPr>
+            <p:ph type="body" idx="4"/>
+          </p:nvPr>
+        </p:nvSpPr>
+        <p:spPr/>
+        <p:txBody>
+          <a:bodyPr/>
+          <a:lstStyle/>
+          <a:p>
+            <a:pPr/>
+            <a:r>
+              <a:rPr lang="th-TH" dirty="0"/>
+              <a:t>โทร · 02-XXX-XXXX</a:t>
+            </a:r>
+          </a:p>
+          <a:p>
+            <a:pPr/>
+            <a:r>
+              <a:rPr lang="th-TH" dirty="0"/>
+              <a:t>อีเมล · contact@nctthai.com</a:t>
+            </a:r>
+          </a:p>
+          <a:p>
+            <a:pPr/>
+            <a:r>
+              <a:rPr lang="th-TH" dirty="0"/>
+              <a:t>เว็บไซต์ · nctthai.com</a:t>
+            </a:r>
+          </a:p>
+        </p:txBody>
+      </p:sp>
+    </p:spTree>
+  </p:cSld>
+  <p:clrMapOvr>
+    <a:masterClrMapping/>
+  </p:clrMapOvr>
+</p:sld>
+</file>
+
+<file path=ppt/slides/slide2.xml><?xml version="1.0" encoding="utf-8"?>
+<p:sld xmlns:a="http://schemas.openxmlformats.org/drawingml/2006/main" xmlns:r="http://schemas.openxmlformats.org/officeDocument/2006/relationships" xmlns:p="http://schemas.openxmlformats.org/presentationml/2006/main">
+  <p:cSld name="">
+    <p:spTree>
+      <p:nvGrpSpPr>
+        <p:cNvPr id="1" name=""/>
+        <p:cNvGrpSpPr/>
+        <p:nvPr/>
+      </p:nvGrpSpPr>
+      <p:grpSpPr>
+        <a:xfrm>
+          <a:off x="0" y="0"/>
+          <a:ext cx="0" cy="0"/>
+          <a:chOff x="0" y="0"/>
+          <a:chExt cx="0" cy="0"/>
+        </a:xfrm>
+      </p:grpSpPr>
+      <p:sp>
+        <p:nvSpPr>
+          <p:cNvPr id="2" name="Num"/>
+          <p:cNvSpPr>
+            <a:spLocks noGrp="1"/>
+          </p:cNvSpPr>
+          <p:nvPr>
+            <p:ph type="body" idx="1"/>
+          </p:nvPr>
+        </p:nvSpPr>
+        <p:spPr/>
+        <p:txBody>
+          <a:bodyPr/>
+          <a:lstStyle/>
+          <a:p>
+            <a:pPr/>
+            <a:r>
+              <a:rPr lang="th-TH" dirty="0"/>
+              <a:t>00</a:t>
+            </a:r>
+          </a:p>
+        </p:txBody>
+      </p:sp>
+      <p:sp>
+        <p:nvSpPr>
+          <p:cNvPr id="3" name="Title"/>
+          <p:cNvSpPr>
+            <a:spLocks noGrp="1"/>
+          </p:cNvSpPr>
+          <p:nvPr>
+            <p:ph type="title"/>
+          </p:nvPr>
+        </p:nvSpPr>
+        <p:spPr/>
+        <p:txBody>
+          <a:bodyPr/>
+          <a:lstStyle/>
+          <a:p>
+            <a:pPr/>
+            <a:r>
+              <a:rPr lang="th-TH" dirty="0"/>
+              <a:t>หัวข้อนำเสนอ</a:t>
+            </a:r>
+          </a:p>
+        </p:txBody>
+      </p:sp>
+      <p:sp>
+        <p:nvSpPr>
+          <p:cNvPr id="4" name="List"/>
+          <p:cNvSpPr>
+            <a:spLocks noGrp="1"/>
+          </p:cNvSpPr>
+          <p:nvPr>
+            <p:ph type="body" idx="2"/>
+          </p:nvPr>
+        </p:nvSpPr>
+        <p:spPr/>
+        <p:txBody>
+          <a:bodyPr/>
+          <a:lstStyle/>
+          <a:p>
+            <a:pPr/>
+            <a:r>
+              <a:rPr lang="th-TH" dirty="0"/>
+              <a:t>บริบทและปัญหาที่พบ</a:t>
+            </a:r>
+          </a:p>
+          <a:p>
+            <a:pPr/>
+            <a:r>
+              <a:rPr lang="th-TH" dirty="0"/>
+              <a:t>ผลลัพธ์ที่ข้อเสนอนี้ให้</a:t>
+            </a:r>
+          </a:p>
+          <a:p>
+            <a:pPr/>
+            <a:r>
+              <a:rPr lang="th-TH" dirty="0"/>
+              <a:t>วิธีการทำงานและสถาปัตยกรรม</a:t>
+            </a:r>
+          </a:p>
+          <a:p>
+            <a:pPr/>
+            <a:r>
+              <a:rPr lang="th-TH" dirty="0"/>
+              <a:t>ขอบเขตงานรายกระบวนการ</a:t>
+            </a:r>
+          </a:p>
+          <a:p>
+            <a:pPr/>
+            <a:r>
+              <a:rPr lang="th-TH" dirty="0"/>
+              <a:t>ทีมงานและประสบการณ์</a:t>
+            </a:r>
+          </a:p>
+          <a:p>
+            <a:pPr/>
+            <a:r>
+              <a:rPr lang="th-TH" dirty="0"/>
+              <a:t>แพ็กเกจและงบประมาณ</a:t>
+            </a:r>
+          </a:p>
+        </p:txBody>
+      </p:sp>
+    </p:spTree>
+  </p:cSld>
+  <p:clrMapOvr>
+    <a:masterClrMapping/>
+  </p:clrMapOvr>
+</p:sld>
+</file>
+
+<file path=ppt/slides/slide3.xml><?xml version="1.0" encoding="utf-8"?>
+<p:sld xmlns:a="http://schemas.openxmlformats.org/drawingml/2006/main" xmlns:r="http://schemas.openxmlformats.org/officeDocument/2006/relationships" xmlns:p="http://schemas.openxmlformats.org/presentationml/2006/main">
+  <p:cSld name="">
+    <p:spTree>
+      <p:nvGrpSpPr>
+        <p:cNvPr id="1" name=""/>
+        <p:cNvGrpSpPr/>
+        <p:nvPr/>
+      </p:nvGrpSpPr>
+      <p:grpSpPr>
+        <a:xfrm>
+          <a:off x="0" y="0"/>
+          <a:ext cx="0" cy="0"/>
+          <a:chOff x="0" y="0"/>
+          <a:chExt cx="0" cy="0"/>
+        </a:xfrm>
+      </p:grpSpPr>
+      <p:sp>
+        <p:nvSpPr>
+          <p:cNvPr id="2" name="Number"/>
+          <p:cNvSpPr>
+            <a:spLocks noGrp="1"/>
+          </p:cNvSpPr>
+          <p:nvPr>
+            <p:ph type="body" idx="1"/>
+          </p:nvPr>
+        </p:nvSpPr>
+        <p:spPr/>
+        <p:txBody>
+          <a:bodyPr/>
+          <a:lstStyle/>
+          <a:p>
+            <a:pPr/>
+            <a:r>
+              <a:rPr lang="th-TH" dirty="0"/>
+              <a:t>01</a:t>
+            </a:r>
+          </a:p>
+        </p:txBody>
+      </p:sp>
+      <p:sp>
+        <p:nvSpPr>
+          <p:cNvPr id="3" name="Title"/>
+          <p:cNvSpPr>
+            <a:spLocks noGrp="1"/>
+          </p:cNvSpPr>
+          <p:nvPr>
+            <p:ph type="title"/>
+          </p:nvPr>
+        </p:nvSpPr>
+        <p:spPr/>
+        <p:txBody>
+          <a:bodyPr/>
+          <a:lstStyle/>
+          <a:p>
+            <a:pPr/>
+            <a:r>
+              <a:rPr lang="th-TH" dirty="0"/>
+              <a:t>บริบทและปัญหา</a:t>
+            </a:r>
+          </a:p>
+        </p:txBody>
+      </p:sp>
+      <p:sp>
+        <p:nvSpPr>
+          <p:cNvPr id="4" name="Desc"/>
+          <p:cNvSpPr>
+            <a:spLocks noGrp="1"/>
+          </p:cNvSpPr>
+          <p:nvPr>
+            <p:ph type="body" idx="2"/>
+          </p:nvPr>
+        </p:nvSpPr>
+        <p:spPr/>
+        <p:txBody>
+          <a:bodyPr/>
+          <a:lstStyle/>
+          <a:p>
+            <a:pPr/>
+            <a:r>
+              <a:rPr lang="th-TH" dirty="0"/>
+              <a:t>สิ่งที่เราพบจากการสำรวจงานบัญชีของท่านสองสัปดาห์</a:t>
+            </a:r>
+          </a:p>
+        </p:txBody>
+      </p:sp>
+    </p:spTree>
+  </p:cSld>
+  <p:clrMapOvr>
+    <a:masterClrMapping/>
+  </p:clrMapOvr>
+</p:sld>
+</file>
+
+<file path=ppt/slides/slide4.xml><?xml version="1.0" encoding="utf-8"?>
+<p:sld xmlns:a="http://schemas.openxmlformats.org/drawingml/2006/main" xmlns:r="http://schemas.openxmlformats.org/officeDocument/2006/relationships" xmlns:p="http://schemas.openxmlformats.org/presentationml/2006/main">
+  <p:cSld name="">
+    <p:spTree>
+      <p:nvGrpSpPr>
+        <p:cNvPr id="1" name=""/>
+        <p:cNvGrpSpPr/>
+        <p:nvPr/>
+      </p:nvGrpSpPr>
+      <p:grpSpPr>
+        <a:xfrm>
+          <a:off x="0" y="0"/>
+          <a:ext cx="0" cy="0"/>
+          <a:chOff x="0" y="0"/>
+          <a:chExt cx="0" cy="0"/>
+        </a:xfrm>
+      </p:grpSpPr>
+      <p:sp>
+        <p:nvSpPr>
+          <p:cNvPr id="2" name="Title"/>
+          <p:cNvSpPr>
+            <a:spLocks noGrp="1"/>
+          </p:cNvSpPr>
+          <p:nvPr>
+            <p:ph type="title"/>
+          </p:nvPr>
+        </p:nvSpPr>
+        <p:spPr/>
+        <p:txBody>
+          <a:bodyPr/>
+          <a:lstStyle/>
+          <a:p>
+            <a:pPr/>
+            <a:r>
+              <a:rPr lang="th-TH" dirty="0"/>
+              <a:t>สภาพระบบบัญชีปัจจุบัน</a:t>
+            </a:r>
+          </a:p>
+        </p:txBody>
+      </p:sp>
+      <p:sp>
+        <p:nvSpPr>
+          <p:cNvPr id="3" name="CtxK"/>
+          <p:cNvSpPr>
+            <a:spLocks noGrp="1"/>
+          </p:cNvSpPr>
+          <p:nvPr>
+            <p:ph type="body" idx="1"/>
+          </p:nvPr>
+        </p:nvSpPr>
+        <p:spPr/>
+        <p:txBody>
+          <a:bodyPr/>
+          <a:lstStyle/>
+          <a:p>
+            <a:pPr/>
+            <a:r>
+              <a:rPr lang="th-TH" dirty="0"/>
+              <a:t>สภาพปัจจุบัน</a:t>
+            </a:r>
+          </a:p>
+        </p:txBody>
+      </p:sp>
+      <p:sp>
+        <p:nvSpPr>
+          <p:cNvPr id="4" name="CtxB"/>
+          <p:cNvSpPr>
+            <a:spLocks noGrp="1"/>
+          </p:cNvSpPr>
+          <p:nvPr>
+            <p:ph type="body" idx="2"/>
+          </p:nvPr>
+        </p:nvSpPr>
+        <p:spPr/>
+        <p:txBody>
+          <a:bodyPr/>
+          <a:lstStyle/>
+          <a:p>
+            <a:pPr/>
+            <a:r>
+              <a:rPr lang="th-TH" dirty="0"/>
+              <a:t>คีย์เอกสารซ้ำสามระบบ ไม่มีจุดตรวจกลาง</a:t>
+            </a:r>
+          </a:p>
+          <a:p>
+            <a:pPr lvl="1"/>
+            <a:r>
+              <a:rPr lang="th-TH" dirty="0"/>
+              <a:t>เอกสารเข้าเฉลี่ย 1,200 ใบต่อเดือน</a:t>
+            </a:r>
+          </a:p>
+          <a:p>
+            <a:pPr/>
+            <a:r>
+              <a:rPr lang="th-TH" dirty="0"/>
+              <a:t>ปิดงบล่าช้าเฉลี่ย 6 วันทำการ</a:t>
+            </a:r>
+          </a:p>
+          <a:p>
+            <a:pPr/>
+            <a:r>
+              <a:rPr lang="th-TH" dirty="0"/>
+              <a:t>ไม่มี audit trail ของการแก้ไขรายการ</a:t>
+            </a:r>
+          </a:p>
+        </p:txBody>
+      </p:sp>
+      <p:sp>
+        <p:nvSpPr>
+          <p:cNvPr id="5" name="OutK"/>
+          <p:cNvSpPr>
+            <a:spLocks noGrp="1"/>
+          </p:cNvSpPr>
+          <p:nvPr>
+            <p:ph type="body" idx="3"/>
+          </p:nvPr>
+        </p:nvSpPr>
+        <p:spPr/>
+        <p:txBody>
+          <a:bodyPr/>
+          <a:lstStyle/>
+          <a:p>
+            <a:pPr/>
+            <a:r>
+              <a:rPr lang="th-TH" dirty="0"/>
+              <a:t>สิ่งที่จะเกิดขึ้น</a:t>
+            </a:r>
+          </a:p>
+        </p:txBody>
+      </p:sp>
+      <p:sp>
+        <p:nvSpPr>
+          <p:cNvPr id="6" name="OutB"/>
+          <p:cNvSpPr>
+            <a:spLocks noGrp="1"/>
+          </p:cNvSpPr>
+          <p:nvPr>
+            <p:ph type="body" idx="4"/>
+          </p:nvPr>
+        </p:nvSpPr>
+        <p:spPr/>
+        <p:txBody>
+          <a:bodyPr/>
+          <a:lstStyle/>
+          <a:p>
+            <a:pPr/>
+            <a:r>
+              <a:rPr lang="th-TH" dirty="0"/>
+              <a:t>คีย์จุดเดียว ระบบกระจายต่อให้อัตโนมัติ</a:t>
+            </a:r>
+          </a:p>
+          <a:p>
+            <a:pPr lvl="1"/>
+            <a:r>
+              <a:rPr lang="th-TH" dirty="0"/>
+              <a:t>ลดเวลาคีย์ต่อใบจาก 4 นาที เหลือ 40 วินาที</a:t>
+            </a:r>
+          </a:p>
+          <a:p>
+            <a:pPr/>
+            <a:r>
+              <a:rPr lang="th-TH" dirty="0"/>
+              <a:t>ปิดงบภายใน 2 วันทำการ</a:t>
+            </a:r>
+          </a:p>
+          <a:p>
+            <a:pPr/>
+            <a:r>
+              <a:rPr lang="th-TH" dirty="0"/>
+              <a:t>บันทึกทุกการแก้ไขพร้อมผู้ทำและเวลา</a:t>
+            </a:r>
+          </a:p>
+        </p:txBody>
+      </p:sp>
+      <p:sp>
+        <p:nvSpPr>
+          <p:cNvPr id="7" name="TkL"/>
+          <p:cNvSpPr>
+            <a:spLocks noGrp="1"/>
+          </p:cNvSpPr>
+          <p:nvPr>
+            <p:ph type="body" idx="5"/>
+          </p:nvPr>
+        </p:nvSpPr>
+        <p:spPr/>
+        <p:txBody>
+          <a:bodyPr/>
+          <a:lstStyle/>
+          <a:p>
+            <a:pPr/>
+            <a:r>
+              <a:rPr lang="th-TH" dirty="0"/>
+              <a:t>สรุป</a:t>
+            </a:r>
+          </a:p>
+        </p:txBody>
+      </p:sp>
+      <p:sp>
+        <p:nvSpPr>
+          <p:cNvPr id="8" name="TkC"/>
+          <p:cNvSpPr>
+            <a:spLocks noGrp="1"/>
+          </p:cNvSpPr>
+          <p:nvPr>
+            <p:ph type="body" idx="6"/>
+          </p:nvPr>
+        </p:nvSpPr>
+        <p:spPr/>
+        <p:txBody>
+          <a:bodyPr/>
+          <a:lstStyle/>
+          <a:p>
+            <a:pPr/>
+            <a:r>
+              <a:rPr lang="th-TH" dirty="0"/>
+              <a:t>ปัญหาหลักคือการคีย์ซ้ำ ไม่ใช่จำนวนเอกสาร</a:t>
+            </a:r>
+          </a:p>
+        </p:txBody>
+      </p:sp>
+    </p:spTree>
+  </p:cSld>
+  <p:clrMapOvr>
+    <a:masterClrMapping/>
+  </p:clrMapOvr>
+</p:sld>
+</file>
+
+<file path=ppt/slides/slide5.xml><?xml version="1.0" encoding="utf-8"?>
+<p:sld xmlns:a="http://schemas.openxmlformats.org/drawingml/2006/main" xmlns:r="http://schemas.openxmlformats.org/officeDocument/2006/relationships" xmlns:p="http://schemas.openxmlformats.org/presentationml/2006/main">
+  <p:cSld name="">
+    <p:spTree>
+      <p:nvGrpSpPr>
+        <p:cNvPr id="1" name=""/>
+        <p:cNvGrpSpPr/>
+        <p:nvPr/>
+      </p:nvGrpSpPr>
+      <p:grpSpPr>
+        <a:xfrm>
+          <a:off x="0" y="0"/>
+          <a:ext cx="0" cy="0"/>
+          <a:chOff x="0" y="0"/>
+          <a:chExt cx="0" cy="0"/>
+        </a:xfrm>
+      </p:grpSpPr>
+      <p:sp>
+        <p:nvSpPr>
+          <p:cNvPr id="2" name="Title"/>
+          <p:cNvSpPr>
+            <a:spLocks noGrp="1"/>
+          </p:cNvSpPr>
+          <p:nvPr>
+            <p:ph type="title"/>
+          </p:nvPr>
+        </p:nvSpPr>
+        <p:spPr/>
+        <p:txBody>
+          <a:bodyPr/>
+          <a:lstStyle/>
+          <a:p>
+            <a:pPr/>
+            <a:r>
+              <a:rPr lang="th-TH" dirty="0"/>
+              <a:t>ก่อนและหลังใช้บริการ</a:t>
+            </a:r>
+          </a:p>
+        </p:txBody>
+      </p:sp>
+      <p:sp>
+        <p:nvSpPr>
+          <p:cNvPr id="3" name="L"/>
+          <p:cNvSpPr>
+            <a:spLocks noGrp="1"/>
+          </p:cNvSpPr>
+          <p:nvPr>
+            <p:ph type="body" idx="1"/>
+          </p:nvPr>
+        </p:nvSpPr>
+        <p:spPr/>
+        <p:txBody>
+          <a:bodyPr/>
+          <a:lstStyle/>
+          <a:p>
+            <a:pPr/>
+            <a:r>
+              <a:rPr lang="th-TH" dirty="0"/>
+              <a:t>ก่อน</a:t>
+            </a:r>
+          </a:p>
+          <a:p>
+            <a:pPr lvl="1"/>
+            <a:r>
+              <a:rPr lang="th-TH" dirty="0"/>
+              <a:t>ระบบล่มบ่อย ไม่มีคนดูแลประจำ</a:t>
+            </a:r>
+          </a:p>
+          <a:p>
+            <a:pPr lvl="1"/>
+            <a:r>
+              <a:rPr lang="th-TH" dirty="0"/>
+              <a:t>ค่าใช้จ่ายไม่แน่นอน</a:t>
+            </a:r>
+          </a:p>
+        </p:txBody>
+      </p:sp>
+      <p:sp>
+        <p:nvSpPr>
+          <p:cNvPr id="4" name="R"/>
+          <p:cNvSpPr>
+            <a:spLocks noGrp="1"/>
+          </p:cNvSpPr>
+          <p:nvPr>
+            <p:ph type="body" idx="2"/>
+          </p:nvPr>
+        </p:nvSpPr>
+        <p:spPr/>
+        <p:txBody>
+          <a:bodyPr/>
+          <a:lstStyle/>
+          <a:p>
+            <a:pPr/>
+            <a:r>
+              <a:rPr lang="th-TH" dirty="0"/>
+              <a:t>หลัง</a:t>
+            </a:r>
+          </a:p>
+          <a:p>
+            <a:pPr lvl="1"/>
+            <a:r>
+              <a:rPr lang="th-TH" dirty="0"/>
+              <a:t>มอนิเตอร์ 24 ชั่วโมง แจ้งเตือนอัตโนมัติ</a:t>
+            </a:r>
+          </a:p>
+          <a:p>
+            <a:pPr lvl="1"/>
+            <a:r>
+              <a:rPr lang="th-TH" dirty="0"/>
+              <a:t>ค่าใช้จ่ายคงที่ต่อเดือน</a:t>
+            </a:r>
+          </a:p>
+        </p:txBody>
+      </p:sp>
+    </p:spTree>
+  </p:cSld>
+  <p:clrMapOvr>
+    <a:masterClrMapping/>
+  </p:clrMapOvr>
+</p:sld>
+</file>
+
+<file path=ppt/slides/slide6.xml><?xml version="1.0" encoding="utf-8"?>
+<p:sld xmlns:a="http://schemas.openxmlformats.org/drawingml/2006/main" xmlns:r="http://schemas.openxmlformats.org/officeDocument/2006/relationships" xmlns:p="http://schemas.openxmlformats.org/presentationml/2006/main">
+  <p:cSld name="">
+    <p:spTree>
+      <p:nvGrpSpPr>
+        <p:cNvPr id="1" name=""/>
+        <p:cNvGrpSpPr/>
+        <p:nvPr/>
+      </p:nvGrpSpPr>
+      <p:grpSpPr>
+        <a:xfrm>
+          <a:off x="0" y="0"/>
+          <a:ext cx="0" cy="0"/>
+          <a:chOff x="0" y="0"/>
+          <a:chExt cx="0" cy="0"/>
+        </a:xfrm>
+      </p:grpSpPr>
+      <p:sp>
+        <p:nvSpPr>
+          <p:cNvPr id="2" name="Title"/>
+          <p:cNvSpPr>
+            <a:spLocks noGrp="1"/>
+          </p:cNvSpPr>
+          <p:nvPr>
+            <p:ph type="title"/>
+          </p:nvPr>
+        </p:nvSpPr>
+        <p:spPr/>
+        <p:txBody>
+          <a:bodyPr/>
+          <a:lstStyle/>
+          <a:p>
+            <a:pPr/>
+            <a:r>
+              <a:rPr lang="th-TH" dirty="0"/>
+              <a:t>สี่ผลลัพธ์ที่ข้อเสนอนี้ให้</a:t>
+            </a:r>
+          </a:p>
+        </p:txBody>
+      </p:sp>
+      <p:sp>
+        <p:nvSpPr>
+          <p:cNvPr id="3" name="N0"/>
+          <p:cNvSpPr>
+            <a:spLocks noGrp="1"/>
+          </p:cNvSpPr>
+          <p:nvPr>
+            <p:ph type="body" idx="1"/>
+          </p:nvPr>
+        </p:nvSpPr>
+        <p:spPr/>
+        <p:txBody>
+          <a:bodyPr/>
+          <a:lstStyle/>
+          <a:p>
+            <a:pPr/>
+            <a:r>
+              <a:rPr lang="th-TH" dirty="0"/>
+              <a:t>01</a:t>
+            </a:r>
+          </a:p>
+        </p:txBody>
+      </p:sp>
+      <p:sp>
+        <p:nvSpPr>
+          <p:cNvPr id="4" name="H0"/>
+          <p:cNvSpPr>
+            <a:spLocks noGrp="1"/>
+          </p:cNvSpPr>
+          <p:nvPr>
+            <p:ph type="body" idx="2"/>
+          </p:nvPr>
+        </p:nvSpPr>
+        <p:spPr/>
+        <p:txBody>
+          <a:bodyPr/>
+          <a:lstStyle/>
+          <a:p>
+            <a:pPr/>
+            <a:r>
+              <a:rPr lang="th-TH" dirty="0"/>
+              <a:t>ลดงานคีย์ซ้ำ</a:t>
+            </a:r>
+          </a:p>
+        </p:txBody>
+      </p:sp>
+      <p:sp>
+        <p:nvSpPr>
+          <p:cNvPr id="5" name="B0"/>
+          <p:cNvSpPr>
+            <a:spLocks noGrp="1"/>
+          </p:cNvSpPr>
+          <p:nvPr>
+            <p:ph type="body" idx="3"/>
+          </p:nvPr>
+        </p:nvSpPr>
+        <p:spPr/>
+        <p:txBody>
+          <a:bodyPr/>
+          <a:lstStyle/>
+          <a:p>
+            <a:pPr/>
+            <a:r>
+              <a:rPr lang="th-TH" dirty="0"/>
+              <a:t>รับเอกสารเข้าระบบเดียว แล้วกระจายต่อให้ทุกปลายทางอัตโนมัติ</a:t>
+            </a:r>
+          </a:p>
+        </p:txBody>
+      </p:sp>
+      <p:sp>
+        <p:nvSpPr>
+          <p:cNvPr id="6" name="N1"/>
+          <p:cNvSpPr>
+            <a:spLocks noGrp="1"/>
+          </p:cNvSpPr>
+          <p:nvPr>
+            <p:ph type="body" idx="4"/>
+          </p:nvPr>
+        </p:nvSpPr>
+        <p:spPr/>
+        <p:txBody>
+          <a:bodyPr/>
+          <a:lstStyle/>
+          <a:p>
+            <a:pPr/>
+            <a:r>
+              <a:rPr lang="th-TH" dirty="0"/>
+              <a:t>02</a:t>
+            </a:r>
+          </a:p>
+        </p:txBody>
+      </p:sp>
+      <p:sp>
+        <p:nvSpPr>
+          <p:cNvPr id="7" name="H1"/>
+          <p:cNvSpPr>
+            <a:spLocks noGrp="1"/>
+          </p:cNvSpPr>
+          <p:nvPr>
+            <p:ph type="body" idx="5"/>
+          </p:nvPr>
+        </p:nvSpPr>
+        <p:spPr/>
+        <p:txBody>
+          <a:bodyPr/>
+          <a:lstStyle/>
+          <a:p>
+            <a:pPr/>
+            <a:r>
+              <a:rPr lang="th-TH" dirty="0"/>
+              <a:t>ตรวจสอบได้</a:t>
+            </a:r>
+          </a:p>
+        </p:txBody>
+      </p:sp>
+      <p:sp>
+        <p:nvSpPr>
+          <p:cNvPr id="8" name="B1"/>
+          <p:cNvSpPr>
+            <a:spLocks noGrp="1"/>
+          </p:cNvSpPr>
+          <p:nvPr>
+            <p:ph type="body" idx="6"/>
+          </p:nvPr>
+        </p:nvSpPr>
+        <p:spPr/>
+        <p:txBody>
+          <a:bodyPr/>
+          <a:lstStyle/>
+          <a:p>
+            <a:pPr/>
+            <a:r>
+              <a:rPr lang="th-TH" dirty="0"/>
+              <a:t>ทุกรายการมี audit trail ผู้ทำ เวลา และค่าก่อนหลัง</a:t>
+            </a:r>
+          </a:p>
+        </p:txBody>
+      </p:sp>
+      <p:sp>
+        <p:nvSpPr>
+          <p:cNvPr id="9" name="N2"/>
+          <p:cNvSpPr>
+            <a:spLocks noGrp="1"/>
+          </p:cNvSpPr>
+          <p:nvPr>
+            <p:ph type="body" idx="7"/>
+          </p:nvPr>
+        </p:nvSpPr>
+        <p:spPr/>
+        <p:txBody>
+          <a:bodyPr/>
+          <a:lstStyle/>
+          <a:p>
+            <a:pPr/>
+            <a:r>
+              <a:rPr lang="th-TH" dirty="0"/>
+              <a:t>03</a:t>
+            </a:r>
+          </a:p>
+        </p:txBody>
+      </p:sp>
+      <p:sp>
+        <p:nvSpPr>
+          <p:cNvPr id="10" name="H2"/>
+          <p:cNvSpPr>
+            <a:spLocks noGrp="1"/>
+          </p:cNvSpPr>
+          <p:nvPr>
+            <p:ph type="body" idx="8"/>
+          </p:nvPr>
+        </p:nvSpPr>
+        <p:spPr/>
+        <p:txBody>
+          <a:bodyPr/>
+          <a:lstStyle/>
+          <a:p>
+            <a:pPr/>
+            <a:r>
+              <a:rPr lang="th-TH" dirty="0"/>
+              <a:t>ปิดงบเร็วขึ้น</a:t>
+            </a:r>
+          </a:p>
+        </p:txBody>
+      </p:sp>
+      <p:sp>
+        <p:nvSpPr>
+          <p:cNvPr id="11" name="B2"/>
+          <p:cNvSpPr>
+            <a:spLocks noGrp="1"/>
+          </p:cNvSpPr>
+          <p:nvPr>
+            <p:ph type="body" idx="9"/>
+          </p:nvPr>
+        </p:nvSpPr>
+        <p:spPr/>
+        <p:txBody>
+          <a:bodyPr/>
+          <a:lstStyle/>
+          <a:p>
+            <a:pPr/>
+            <a:r>
+              <a:rPr lang="th-TH" dirty="0"/>
+              <a:t>กระทบยอดอัตโนมัติรายวัน ไม่ต้องรอสิ้นเดือน</a:t>
+            </a:r>
+          </a:p>
+        </p:txBody>
+      </p:sp>
+      <p:sp>
+        <p:nvSpPr>
+          <p:cNvPr id="12" name="N3"/>
+          <p:cNvSpPr>
+            <a:spLocks noGrp="1"/>
+          </p:cNvSpPr>
+          <p:nvPr>
+            <p:ph type="body" idx="10"/>
+          </p:nvPr>
+        </p:nvSpPr>
+        <p:spPr/>
+        <p:txBody>
+          <a:bodyPr/>
+          <a:lstStyle/>
+          <a:p>
+            <a:pPr/>
+            <a:r>
+              <a:rPr lang="th-TH" dirty="0"/>
+              <a:t>04</a:t>
+            </a:r>
+          </a:p>
+        </p:txBody>
+      </p:sp>
+      <p:sp>
+        <p:nvSpPr>
+          <p:cNvPr id="13" name="H3"/>
+          <p:cNvSpPr>
+            <a:spLocks noGrp="1"/>
+          </p:cNvSpPr>
+          <p:nvPr>
+            <p:ph type="body" idx="11"/>
+          </p:nvPr>
+        </p:nvSpPr>
+        <p:spPr/>
+        <p:txBody>
+          <a:bodyPr/>
+          <a:lstStyle/>
+          <a:p>
+            <a:pPr/>
+            <a:r>
+              <a:rPr lang="th-TH" dirty="0"/>
+              <a:t>ขยายต่อได้</a:t>
+            </a:r>
+          </a:p>
+        </p:txBody>
+      </p:sp>
+      <p:sp>
+        <p:nvSpPr>
+          <p:cNvPr id="14" name="B3"/>
+          <p:cNvSpPr>
+            <a:spLocks noGrp="1"/>
+          </p:cNvSpPr>
+          <p:nvPr>
+            <p:ph type="body" idx="12"/>
+          </p:nvPr>
+        </p:nvSpPr>
+        <p:spPr/>
+        <p:txBody>
+          <a:bodyPr/>
+          <a:lstStyle/>
+          <a:p>
+            <a:pPr/>
+            <a:r>
+              <a:rPr lang="th-TH" dirty="0"/>
+              <a:t>เพิ่มกระบวนการใหม่โดยไม่แก้ของเดิม</a:t>
+            </a:r>
+          </a:p>
+        </p:txBody>
+      </p:sp>
+      <p:sp>
+        <p:nvSpPr>
+          <p:cNvPr id="15" name="BL"/>
+          <p:cNvSpPr>
+            <a:spLocks noGrp="1"/>
+          </p:cNvSpPr>
+          <p:nvPr>
+            <p:ph type="body" idx="13"/>
+          </p:nvPr>
+        </p:nvSpPr>
+        <p:spPr/>
+        <p:txBody>
+          <a:bodyPr/>
+          <a:lstStyle/>
+          <a:p>
+            <a:pPr/>
+            <a:r>
+              <a:rPr lang="th-TH" dirty="0"/>
+              <a:t>สรุป</a:t>
+            </a:r>
+          </a:p>
+        </p:txBody>
+      </p:sp>
+      <p:sp>
+        <p:nvSpPr>
+          <p:cNvPr id="16" name="BC"/>
+          <p:cNvSpPr>
+            <a:spLocks noGrp="1"/>
+          </p:cNvSpPr>
+          <p:nvPr>
+            <p:ph type="body" idx="14"/>
+          </p:nvPr>
+        </p:nvSpPr>
+        <p:spPr/>
+        <p:txBody>
+          <a:bodyPr/>
+          <a:lstStyle/>
+          <a:p>
+            <a:pPr/>
+            <a:r>
+              <a:rPr lang="th-TH" dirty="0"/>
+              <a:t>ทั้งสี่ข้อมาจากการแก้จุดเดียวกัน คือรวมจุดรับเอกสาร</a:t>
+            </a:r>
+          </a:p>
+        </p:txBody>
+      </p:sp>
+    </p:spTree>
+  </p:cSld>
+  <p:clrMapOvr>
+    <a:masterClrMapping/>
+  </p:clrMapOvr>
+</p:sld>
+</file>
+
+<file path=ppt/slides/slide7.xml><?xml version="1.0" encoding="utf-8"?>
+<p:sld xmlns:a="http://schemas.openxmlformats.org/drawingml/2006/main" xmlns:r="http://schemas.openxmlformats.org/officeDocument/2006/relationships" xmlns:p="http://schemas.openxmlformats.org/presentationml/2006/main">
+  <p:cSld name="">
+    <p:spTree>
+      <p:nvGrpSpPr>
+        <p:cNvPr id="1" name=""/>
+        <p:cNvGrpSpPr/>
+        <p:nvPr/>
+      </p:nvGrpSpPr>
+      <p:grpSpPr>
+        <a:xfrm>
+          <a:off x="0" y="0"/>
+          <a:ext cx="0" cy="0"/>
+          <a:chOff x="0" y="0"/>
+          <a:chExt cx="0" cy="0"/>
+        </a:xfrm>
+      </p:grpSpPr>
+      <p:sp>
+        <p:nvSpPr>
+          <p:cNvPr id="2" name="Title"/>
+          <p:cNvSpPr>
+            <a:spLocks noGrp="1"/>
+          </p:cNvSpPr>
+          <p:nvPr>
+            <p:ph type="title"/>
+          </p:nvPr>
+        </p:nvSpPr>
+        <p:spPr/>
+        <p:txBody>
+          <a:bodyPr/>
+          <a:lstStyle/>
+          <a:p>
+            <a:pPr/>
+            <a:r>
+              <a:rPr lang="th-TH" dirty="0"/>
+              <a:t>วิธีการทำงาน</a:t>
+            </a:r>
+          </a:p>
+        </p:txBody>
+      </p:sp>
+      <p:sp>
+        <p:nvSpPr>
+          <p:cNvPr id="3" name="Cap"/>
+          <p:cNvSpPr>
+            <a:spLocks noGrp="1"/>
+          </p:cNvSpPr>
+          <p:nvPr>
+            <p:ph type="body" idx="2"/>
+          </p:nvPr>
+        </p:nvSpPr>
+        <p:spPr/>
+        <p:txBody>
+          <a:bodyPr/>
+          <a:lstStyle/>
+          <a:p>
+            <a:pPr/>
+            <a:r>
+              <a:rPr lang="th-TH" dirty="0"/>
+              <a:t>กระบวนการ สถาปัตยกรรม และขอบเขตที่ตกลงกัน</a:t>
+            </a:r>
+          </a:p>
+        </p:txBody>
+      </p:sp>
+    </p:spTree>
+  </p:cSld>
+  <p:clrMapOvr>
+    <a:masterClrMapping/>
+  </p:clrMapOvr>
+</p:sld>
+</file>
+
+<file path=ppt/slides/slide8.xml><?xml version="1.0" encoding="utf-8"?>
+<p:sld xmlns:a="http://schemas.openxmlformats.org/drawingml/2006/main" xmlns:r="http://schemas.openxmlformats.org/officeDocument/2006/relationships" xmlns:p="http://schemas.openxmlformats.org/presentationml/2006/main">
+  <p:cSld name="">
+    <p:spTree>
+      <p:nvGrpSpPr>
+        <p:cNvPr id="1" name=""/>
+        <p:cNvGrpSpPr/>
+        <p:nvPr/>
+      </p:nvGrpSpPr>
+      <p:grpSpPr>
+        <a:xfrm>
+          <a:off x="0" y="0"/>
+          <a:ext cx="0" cy="0"/>
+          <a:chOff x="0" y="0"/>
+          <a:chExt cx="0" cy="0"/>
+        </a:xfrm>
+      </p:grpSpPr>
+      <p:sp>
+        <p:nvSpPr>
+          <p:cNvPr id="2" name="Title"/>
+          <p:cNvSpPr>
+            <a:spLocks noGrp="1"/>
+          </p:cNvSpPr>
+          <p:nvPr>
+            <p:ph type="title"/>
+          </p:nvPr>
+        </p:nvSpPr>
+        <p:spPr/>
+        <p:txBody>
+          <a:bodyPr/>
+          <a:lstStyle/>
+          <a:p>
+            <a:pPr/>
+            <a:r>
+              <a:rPr lang="th-TH" dirty="0"/>
+              <a:t>กระบวนการที่เสนอ</a:t>
+            </a:r>
+          </a:p>
+        </p:txBody>
+      </p:sp>
+      <p:sp>
+        <p:nvSpPr>
+          <p:cNvPr id="3" name="Sub"/>
+          <p:cNvSpPr>
+            <a:spLocks noGrp="1"/>
+          </p:cNvSpPr>
+          <p:nvPr>
+            <p:ph type="body" idx="1"/>
+          </p:nvPr>
+        </p:nvSpPr>
+        <p:spPr/>
+        <p:txBody>
+          <a:bodyPr/>
+          <a:lstStyle/>
+          <a:p>
+            <a:pPr/>
+            <a:r>
+              <a:rPr lang="th-TH" dirty="0"/>
+              <a:t>ห้าขั้นตอน ทำงานต่อเนื่องโดยไม่ต้องคีย์ซ้ำ</a:t>
+            </a:r>
+          </a:p>
+        </p:txBody>
+      </p:sp>
+      <p:sp>
+        <p:nvSpPr>
+          <p:cNvPr id="4" name="C0"/>
+          <p:cNvSpPr>
+            <a:spLocks noGrp="1"/>
+          </p:cNvSpPr>
+          <p:nvPr>
+            <p:ph type="body" idx="2"/>
+          </p:nvPr>
+        </p:nvSpPr>
+        <p:spPr/>
+        <p:txBody>
+          <a:bodyPr/>
+          <a:lstStyle/>
+          <a:p>
+            <a:pPr/>
+            <a:r>
+              <a:rPr lang="th-TH" dirty="0"/>
+              <a:t>1</a:t>
+            </a:r>
+          </a:p>
+        </p:txBody>
+      </p:sp>
+      <p:sp>
+        <p:nvSpPr>
+          <p:cNvPr id="5" name="H0"/>
+          <p:cNvSpPr>
+            <a:spLocks noGrp="1"/>
+          </p:cNvSpPr>
+          <p:nvPr>
+            <p:ph type="body" idx="3"/>
+          </p:nvPr>
+        </p:nvSpPr>
+        <p:spPr/>
+        <p:txBody>
+          <a:bodyPr/>
+          <a:lstStyle/>
+          <a:p>
+            <a:pPr/>
+            <a:r>
+              <a:rPr lang="th-TH" dirty="0"/>
+              <a:t>รับเอกสาร</a:t>
+            </a:r>
+          </a:p>
+        </p:txBody>
+      </p:sp>
+      <p:sp>
+        <p:nvSpPr>
+          <p:cNvPr id="6" name="B0"/>
+          <p:cNvSpPr>
+            <a:spLocks noGrp="1"/>
+          </p:cNvSpPr>
+          <p:nvPr>
+            <p:ph type="body" idx="4"/>
+          </p:nvPr>
+        </p:nvSpPr>
+        <p:spPr/>
+        <p:txBody>
+          <a:bodyPr/>
+          <a:lstStyle/>
+          <a:p>
+            <a:pPr/>
+            <a:r>
+              <a:rPr lang="th-TH" dirty="0"/>
+              <a:t>สแกนหรือรับไฟล์เข้าคิวกลาง</a:t>
+            </a:r>
+          </a:p>
+        </p:txBody>
+      </p:sp>
+      <p:sp>
+        <p:nvSpPr>
+          <p:cNvPr id="7" name="C1"/>
+          <p:cNvSpPr>
+            <a:spLocks noGrp="1"/>
+          </p:cNvSpPr>
+          <p:nvPr>
+            <p:ph type="body" idx="5"/>
+          </p:nvPr>
+        </p:nvSpPr>
+        <p:spPr/>
+        <p:txBody>
+          <a:bodyPr/>
+          <a:lstStyle/>
+          <a:p>
+            <a:pPr/>
+            <a:r>
+              <a:rPr lang="th-TH" dirty="0"/>
+              <a:t>2</a:t>
+            </a:r>
+          </a:p>
+        </p:txBody>
+      </p:sp>
+      <p:sp>
+        <p:nvSpPr>
+          <p:cNvPr id="8" name="H1"/>
+          <p:cNvSpPr>
+            <a:spLocks noGrp="1"/>
+          </p:cNvSpPr>
+          <p:nvPr>
+            <p:ph type="body" idx="6"/>
+          </p:nvPr>
+        </p:nvSpPr>
+        <p:spPr/>
+        <p:txBody>
+          <a:bodyPr/>
+          <a:lstStyle/>
+          <a:p>
+            <a:pPr/>
+            <a:r>
+              <a:rPr lang="th-TH" dirty="0"/>
+              <a:t>อ่านข้อมูล</a:t>
+            </a:r>
+          </a:p>
+        </p:txBody>
+      </p:sp>
+      <p:sp>
+        <p:nvSpPr>
+          <p:cNvPr id="9" name="B1"/>
+          <p:cNvSpPr>
+            <a:spLocks noGrp="1"/>
+          </p:cNvSpPr>
+          <p:nvPr>
+            <p:ph type="body" idx="7"/>
+          </p:nvPr>
+        </p:nvSpPr>
+        <p:spPr/>
+        <p:txBody>
+          <a:bodyPr/>
+          <a:lstStyle/>
+          <a:p>
+            <a:pPr/>
+            <a:r>
+              <a:rPr lang="th-TH" dirty="0"/>
+              <a:t>ดึงฟิลด์สำคัญ ตรวจกับต้นทาง</a:t>
+            </a:r>
+          </a:p>
+        </p:txBody>
+      </p:sp>
+      <p:sp>
+        <p:nvSpPr>
+          <p:cNvPr id="10" name="C2"/>
+          <p:cNvSpPr>
+            <a:spLocks noGrp="1"/>
+          </p:cNvSpPr>
+          <p:nvPr>
+            <p:ph type="body" idx="8"/>
+          </p:nvPr>
+        </p:nvSpPr>
+        <p:spPr/>
+        <p:txBody>
+          <a:bodyPr/>
+          <a:lstStyle/>
+          <a:p>
+            <a:pPr/>
+            <a:r>
+              <a:rPr lang="th-TH" dirty="0"/>
+              <a:t>3</a:t>
+            </a:r>
+          </a:p>
+        </p:txBody>
+      </p:sp>
+      <p:sp>
+        <p:nvSpPr>
+          <p:cNvPr id="11" name="H2"/>
+          <p:cNvSpPr>
+            <a:spLocks noGrp="1"/>
+          </p:cNvSpPr>
+          <p:nvPr>
+            <p:ph type="body" idx="9"/>
+          </p:nvPr>
+        </p:nvSpPr>
+        <p:spPr/>
+        <p:txBody>
+          <a:bodyPr/>
+          <a:lstStyle/>
+          <a:p>
+            <a:pPr/>
+            <a:r>
+              <a:rPr lang="th-TH" dirty="0"/>
+              <a:t>ตรวจสอบ</a:t>
+            </a:r>
+          </a:p>
+        </p:txBody>
+      </p:sp>
+      <p:sp>
+        <p:nvSpPr>
+          <p:cNvPr id="12" name="B2"/>
+          <p:cNvSpPr>
+            <a:spLocks noGrp="1"/>
+          </p:cNvSpPr>
+          <p:nvPr>
+            <p:ph type="body" idx="10"/>
+          </p:nvPr>
+        </p:nvSpPr>
+        <p:spPr/>
+        <p:txBody>
+          <a:bodyPr/>
+          <a:lstStyle/>
+          <a:p>
+            <a:pPr/>
+            <a:r>
+              <a:rPr lang="th-TH" dirty="0"/>
+              <a:t>กฎธุรกิจและวงเงินอนุมัติ</a:t>
+            </a:r>
+          </a:p>
+        </p:txBody>
+      </p:sp>
+      <p:sp>
+        <p:nvSpPr>
+          <p:cNvPr id="13" name="C3"/>
+          <p:cNvSpPr>
+            <a:spLocks noGrp="1"/>
+          </p:cNvSpPr>
+          <p:nvPr>
+            <p:ph type="body" idx="11"/>
+          </p:nvPr>
+        </p:nvSpPr>
+        <p:spPr/>
+        <p:txBody>
+          <a:bodyPr/>
+          <a:lstStyle/>
+          <a:p>
+            <a:pPr/>
+            <a:r>
+              <a:rPr lang="th-TH" dirty="0"/>
+              <a:t>4</a:t>
+            </a:r>
+          </a:p>
+        </p:txBody>
+      </p:sp>
+      <p:sp>
+        <p:nvSpPr>
+          <p:cNvPr id="14" name="H3"/>
+          <p:cNvSpPr>
+            <a:spLocks noGrp="1"/>
+          </p:cNvSpPr>
+          <p:nvPr>
+            <p:ph type="body" idx="12"/>
+          </p:nvPr>
+        </p:nvSpPr>
+        <p:spPr/>
+        <p:txBody>
+          <a:bodyPr/>
+          <a:lstStyle/>
+          <a:p>
+            <a:pPr/>
+            <a:r>
+              <a:rPr lang="th-TH" dirty="0"/>
+              <a:t>บันทึก</a:t>
+            </a:r>
+          </a:p>
+        </p:txBody>
+      </p:sp>
+      <p:sp>
+        <p:nvSpPr>
+          <p:cNvPr id="15" name="B3"/>
+          <p:cNvSpPr>
+            <a:spLocks noGrp="1"/>
+          </p:cNvSpPr>
+          <p:nvPr>
+            <p:ph type="body" idx="13"/>
+          </p:nvPr>
+        </p:nvSpPr>
+        <p:spPr/>
+        <p:txBody>
+          <a:bodyPr/>
+          <a:lstStyle/>
+          <a:p>
+            <a:pPr/>
+            <a:r>
+              <a:rPr lang="th-TH" dirty="0"/>
+              <a:t>ลงระบบบัญชีพร้อม audit trail</a:t>
+            </a:r>
+          </a:p>
+        </p:txBody>
+      </p:sp>
+      <p:sp>
+        <p:nvSpPr>
+          <p:cNvPr id="16" name="C4"/>
+          <p:cNvSpPr>
+            <a:spLocks noGrp="1"/>
+          </p:cNvSpPr>
+          <p:nvPr>
+            <p:ph type="body" idx="14"/>
+          </p:nvPr>
+        </p:nvSpPr>
+        <p:spPr/>
+        <p:txBody>
+          <a:bodyPr/>
+          <a:lstStyle/>
+          <a:p>
+            <a:pPr/>
+            <a:r>
+              <a:rPr lang="th-TH" dirty="0"/>
+              <a:t>5</a:t>
+            </a:r>
+          </a:p>
+        </p:txBody>
+      </p:sp>
+      <p:sp>
+        <p:nvSpPr>
+          <p:cNvPr id="17" name="H4"/>
+          <p:cNvSpPr>
+            <a:spLocks noGrp="1"/>
+          </p:cNvSpPr>
+          <p:nvPr>
+            <p:ph type="body" idx="15"/>
+          </p:nvPr>
+        </p:nvSpPr>
+        <p:spPr/>
+        <p:txBody>
+          <a:bodyPr/>
+          <a:lstStyle/>
+          <a:p>
+            <a:pPr/>
+            <a:r>
+              <a:rPr lang="th-TH" dirty="0"/>
+              <a:t>กระทบยอด</a:t>
+            </a:r>
+          </a:p>
+        </p:txBody>
+      </p:sp>
+      <p:sp>
+        <p:nvSpPr>
+          <p:cNvPr id="18" name="B4"/>
+          <p:cNvSpPr>
+            <a:spLocks noGrp="1"/>
+          </p:cNvSpPr>
+          <p:nvPr>
+            <p:ph type="body" idx="16"/>
+          </p:nvPr>
+        </p:nvSpPr>
+        <p:spPr/>
+        <p:txBody>
+          <a:bodyPr/>
+          <a:lstStyle/>
+          <a:p>
+            <a:pPr/>
+            <a:r>
+              <a:rPr lang="th-TH" dirty="0"/>
+              <a:t>จับคู่อัตโนมัติ ส่งรายงาน</a:t>
+            </a:r>
+          </a:p>
+        </p:txBody>
+      </p:sp>
+      <p:sp>
+        <p:nvSpPr>
+          <p:cNvPr id="19" name="RL"/>
+          <p:cNvSpPr>
+            <a:spLocks noGrp="1"/>
+          </p:cNvSpPr>
+          <p:nvPr>
+            <p:ph type="body" idx="17"/>
+          </p:nvPr>
+        </p:nvSpPr>
+        <p:spPr/>
+        <p:txBody>
+          <a:bodyPr/>
+          <a:lstStyle/>
+          <a:p>
+            <a:pPr/>
+            <a:r>
+              <a:rPr lang="th-TH" dirty="0"/>
+              <a:t>ผลลัพธ์</a:t>
+            </a:r>
+          </a:p>
+        </p:txBody>
+      </p:sp>
+      <p:sp>
+        <p:nvSpPr>
+          <p:cNvPr id="20" name="RC"/>
+          <p:cNvSpPr>
+            <a:spLocks noGrp="1"/>
+          </p:cNvSpPr>
+          <p:nvPr>
+            <p:ph type="body" idx="18"/>
+          </p:nvPr>
+        </p:nvSpPr>
+        <p:spPr/>
+        <p:txBody>
+          <a:bodyPr/>
+          <a:lstStyle/>
+          <a:p>
+            <a:pPr/>
+            <a:r>
+              <a:rPr lang="th-TH" dirty="0"/>
+              <a:t>เอกสารหนึ่งใบผ่านครบห้าขั้นโดยไม่มีการคีย์ซ้ำเลย</a:t>
+            </a:r>
+          </a:p>
+        </p:txBody>
+      </p:sp>
+    </p:spTree>
+  </p:cSld>
+  <p:clrMapOvr>
+    <a:masterClrMapping/>
+  </p:clrMapOvr>
+</p:sld>
+</file>
+
+<file path=ppt/slides/slide9.xml><?xml version="1.0" encoding="utf-8"?>
+<p:sld xmlns:a="http://schemas.openxmlformats.org/drawingml/2006/main" xmlns:r="http://schemas.openxmlformats.org/officeDocument/2006/relationships" xmlns:p="http://schemas.openxmlformats.org/presentationml/2006/main">
+  <p:cSld name="">
+    <p:spTree>
+      <p:nvGrpSpPr>
+        <p:cNvPr id="1" name=""/>
+        <p:cNvGrpSpPr/>
+        <p:nvPr/>
+      </p:nvGrpSpPr>
+      <p:grpSpPr>
+        <a:xfrm>
+          <a:off x="0" y="0"/>
+          <a:ext cx="0" cy="0"/>
+          <a:chOff x="0" y="0"/>
+          <a:chExt cx="0" cy="0"/>
+        </a:xfrm>
+      </p:grpSpPr>
+      <p:sp>
+        <p:nvSpPr>
+          <p:cNvPr id="2" name="Title"/>
+          <p:cNvSpPr>
+            <a:spLocks noGrp="1"/>
+          </p:cNvSpPr>
+          <p:nvPr>
+            <p:ph type="title"/>
+          </p:nvPr>
+        </p:nvSpPr>
+        <p:spPr/>
+        <p:txBody>
+          <a:bodyPr/>
+          <a:lstStyle/>
+          <a:p>
+            <a:pPr/>
+            <a:r>
+              <a:rPr lang="th-TH" dirty="0"/>
+              <a:t>ภาพรวมสถาปัตยกรรมระบบ</a:t>
+            </a:r>
+          </a:p>
+        </p:txBody>
+      </p:sp>
+      <p:sp>
+        <p:nvSpPr>
+          <p:cNvPr id="3" name="Sub"/>
+          <p:cNvSpPr>
+            <a:spLocks noGrp="1"/>
+          </p:cNvSpPr>
+          <p:nvPr>
+            <p:ph type="body" idx="1"/>
+          </p:nvPr>
+        </p:nvSpPr>
+        <p:spPr/>
+        <p:txBody>
+          <a:bodyPr/>
+          <a:lstStyle/>
+          <a:p>
+            <a:pPr/>
+            <a:r>
+              <a:rPr lang="th-TH" dirty="0"/>
+              <a:t>ใช้ชุดชิ้นส่วนมาตรฐาน — กล่องมุมตรง เส้นหักมุมฉาก ไม่มีเงา</a:t>
+            </a:r>
+          </a:p>
+        </p:txBody>
+      </p:sp>
+      <p:sp>
+        <p:nvSpPr>
+          <p:cNvPr id="4" name="Leg"/>
+          <p:cNvSpPr>
+            <a:spLocks noGrp="1"/>
+          </p:cNvSpPr>
+          <p:nvPr>
+            <p:ph type="body" idx="2"/>
+          </p:nvPr>
+        </p:nvSpPr>
+        <p:spPr/>
+        <p:txBody>
+          <a:bodyPr/>
+          <a:lstStyle/>
+          <a:p>
+            <a:pPr/>
+            <a:r>
+              <a:rPr lang="th-TH" dirty="0"/>
+              <a:t>กล่องทึบ = ระบบที่มีอยู่  ·  กล่องมีสีหมวด = ส่วนที่เพิ่ม  ·  เส้นทึบ = ข้อมูลไหลอัตโนมัติ</a:t>
+            </a:r>
+          </a:p>
+        </p:txBody>
+      </p:sp>
+      <p:sp>
+        <p:nvSpPr>
+          <p:cNvPr id="5" name="TL"/>
+          <p:cNvSpPr>
+            <a:spLocks noGrp="1"/>
+          </p:cNvSpPr>
+          <p:nvPr>
+            <p:ph type="body" idx="3"/>
+          </p:nvPr>
+        </p:nvSpPr>
+        <p:spPr/>
+        <p:txBody>
+          <a:bodyPr/>
+          <a:lstStyle/>
+          <a:p>
+            <a:pPr/>
+            <a:r>
+              <a:rPr lang="th-TH" dirty="0"/>
+              <a:t>สรุป</a:t>
+            </a:r>
+          </a:p>
+        </p:txBody>
+      </p:sp>
+      <p:sp>
+        <p:nvSpPr>
+          <p:cNvPr id="6" name="TC"/>
+          <p:cNvSpPr>
+            <a:spLocks noGrp="1"/>
+          </p:cNvSpPr>
+          <p:nvPr>
+            <p:ph type="body" idx="4"/>
+          </p:nvPr>
+        </p:nvSpPr>
+        <p:spPr/>
+        <p:txBody>
+          <a:bodyPr/>
+          <a:lstStyle/>
+          <a:p>
+            <a:pPr/>
+            <a:r>
+              <a:rPr lang="th-TH" dirty="0"/>
+              <a:t>ระบบเดิมไม่ถูกแก้ ของใหม่แทรกเป็นคิวและตัวตรวจกฎคั่นกลางเท่านั้น</a:t>
+            </a:r>
+          </a:p>
+        </p:txBody>
+      </p:sp>
+      <p:sp>
+        <p:nvSpPr>
+          <p:cNvPr id="10" name="Group Zone"/>
+          <p:cNvSpPr/>
+          <p:nvPr/>
+        </p:nvSpPr>
+        <p:spPr>
+          <a:xfrm>
+            <a:off x="3566160" y="2766060"/>
+            <a:ext cx="5257800" cy="1645920"/>
+          </a:xfrm>
+          <a:prstGeom prst="rect">
+            <a:avLst/>
+          </a:prstGeom>
+          <a:solidFill>
+            <a:srgbClr val="E8F6F5"/>
+          </a:solidFill>
+          <a:ln>
+            <a:noFill/>
+          </a:ln>
+        </p:spPr>
+        <p:txBody>
+          <a:bodyPr/>
+          <a:lstStyle/>
+          <a:p>
+            <a:endParaRPr lang="th-TH"/>
+          </a:p>
+        </p:txBody>
+      </p:sp>
+      <p:sp>
+        <p:nvSpPr>
+          <p:cNvPr id="11" name="Group Label"/>
+          <p:cNvSpPr/>
+          <p:nvPr/>
+        </p:nvSpPr>
+        <p:spPr>
+          <a:xfrm>
+            <a:off x="3840480" y="2926080"/>
+            <a:ext cx="3200400" cy="228600"/>
+          </a:xfrm>
+          <a:prstGeom prst="rect">
+            <a:avLst/>
+          </a:prstGeom>
+          <a:noFill/>
+          <a:ln>
+            <a:noFill/>
+          </a:ln>
+        </p:spPr>
+        <p:txBody>
+          <a:bodyPr wrap="square" anchor="ctr" lIns="0" tIns="0" rIns="0" bIns="0" rtlCol="0"/>
+          <a:lstStyle/>
+          <a:p>
+            <a:pPr algn="l" marL="0" indent="0">
+              <a:lnSpc>
+                <a:spcPct val="100000"/>
+              </a:lnSpc>
+              <a:buNone/>
+            </a:pPr>
+            <a:r>
+              <a:rPr lang="th-TH" sz="1200" b="1" spc="120" dirty="0">
+                <a:solidFill>
+                  <a:srgbClr val="216B7F"/>
+                </a:solidFill>
+                <a:latin typeface="+mn-lt"/>
+                <a:ea typeface="+mn-ea"/>
+                <a:cs typeface="+mn-cs"/>
+              </a:rPr>
+              <a:t>ส่วนที่เพิ่มใหม่</a:t>
+            </a:r>
+          </a:p>
+        </p:txBody>
+      </p:sp>
+      <p:sp>
+        <p:nvSpPr>
+          <p:cNvPr id="12" name="Box 1"/>
+          <p:cNvSpPr/>
+          <p:nvPr/>
+        </p:nvSpPr>
+        <p:spPr>
+          <a:xfrm>
+            <a:off x="1143000" y="3223260"/>
+            <a:ext cx="2011680" cy="731520"/>
+          </a:xfrm>
+          <a:prstGeom prst="rect">
+            <a:avLst/>
+          </a:prstGeom>
+          <a:solidFill>
+            <a:srgbClr val="23436D"/>
+          </a:solidFill>
+          <a:ln>
+            <a:noFill/>
+          </a:ln>
+        </p:spPr>
+        <p:txBody>
+          <a:bodyPr wrap="square" anchor="ctr" lIns="0" tIns="0" rIns="0" bIns="0" rtlCol="0"/>
+          <a:lstStyle/>
+          <a:p>
+            <a:pPr algn="ctr" marL="0" indent="0">
+              <a:lnSpc>
+                <a:spcPct val="110000"/>
+              </a:lnSpc>
+              <a:buNone/>
+            </a:pPr>
+            <a:r>
+              <a:rPr lang="th-TH" sz="1200" dirty="0">
+                <a:solidFill>
+                  <a:srgbClr val="FFFFFF"/>
+                </a:solidFill>
+                <a:latin typeface="+mn-lt"/>
+                <a:ea typeface="+mn-ea"/>
+                <a:cs typeface="+mn-cs"/>
+              </a:rPr>
+              <a:t>ระบบ ERP ปัจจุบัน</a:t>
+            </a:r>
+          </a:p>
+        </p:txBody>
+      </p:sp>
+      <p:sp>
+        <p:nvSpPr>
+          <p:cNvPr id="13" name="Box 2"/>
+          <p:cNvSpPr/>
+          <p:nvPr/>
+        </p:nvSpPr>
+        <p:spPr>
+          <a:xfrm>
+            <a:off x="3840480" y="3223260"/>
+            <a:ext cx="2011680" cy="731520"/>
+          </a:xfrm>
+          <a:prstGeom prst="rect">
+            <a:avLst/>
+          </a:prstGeom>
+          <a:solidFill>
+            <a:srgbClr val="FFFFFF"/>
+          </a:solidFill>
+          <a:ln w="12700">
+            <a:solidFill>
+              <a:srgbClr val="23436D"/>
+            </a:solidFill>
+          </a:ln>
+        </p:spPr>
+        <p:txBody>
+          <a:bodyPr wrap="square" anchor="ctr" lIns="0" tIns="0" rIns="0" bIns="0" rtlCol="0"/>
+          <a:lstStyle/>
+          <a:p>
+            <a:pPr algn="ctr" marL="0" indent="0">
+              <a:lnSpc>
+                <a:spcPct val="110000"/>
+              </a:lnSpc>
+              <a:buNone/>
+            </a:pPr>
+            <a:r>
+              <a:rPr lang="th-TH" sz="1200" dirty="0">
+                <a:solidFill>
+                  <a:srgbClr val="333333"/>
+                </a:solidFill>
+                <a:latin typeface="+mn-lt"/>
+                <a:ea typeface="+mn-ea"/>
+                <a:cs typeface="+mn-cs"/>
+              </a:rPr>
+              <a:t>คิวเอกสารกลาง</a:t>
+            </a:r>
+          </a:p>
+        </p:txBody>
+      </p:sp>
+      <p:sp>
+        <p:nvSpPr>
+          <p:cNvPr id="113" name="Box 2 Tab"/>
+          <p:cNvSpPr/>
+          <p:nvPr/>
+        </p:nvSpPr>
+        <p:spPr>
+          <a:xfrm>
+            <a:off x="3954780" y="3337560"/>
+            <a:ext cx="205740" cy="45720"/>
+          </a:xfrm>
+          <a:prstGeom prst="rect">
+            <a:avLst/>
+          </a:prstGeom>
+          <a:solidFill>
+            <a:srgbClr val="23436D"/>
+          </a:solidFill>
+          <a:ln>
+            <a:noFill/>
+          </a:ln>
+        </p:spPr>
+        <p:txBody>
+          <a:bodyPr/>
+          <a:lstStyle/>
+          <a:p>
+            <a:endParaRPr lang="th-TH"/>
+          </a:p>
+        </p:txBody>
+      </p:sp>
+      <p:sp>
+        <p:nvSpPr>
+          <p:cNvPr id="14" name="Box 3"/>
+          <p:cNvSpPr/>
+          <p:nvPr/>
+        </p:nvSpPr>
+        <p:spPr>
+          <a:xfrm>
+            <a:off x="6537960" y="3223260"/>
+            <a:ext cx="2011680" cy="731520"/>
+          </a:xfrm>
+          <a:prstGeom prst="rect">
+            <a:avLst/>
+          </a:prstGeom>
+          <a:solidFill>
+            <a:srgbClr val="FFFFFF"/>
+          </a:solidFill>
+          <a:ln w="12700">
+            <a:solidFill>
+              <a:srgbClr val="216B7F"/>
+            </a:solidFill>
+          </a:ln>
+        </p:spPr>
+        <p:txBody>
+          <a:bodyPr wrap="square" anchor="ctr" lIns="0" tIns="0" rIns="0" bIns="0" rtlCol="0"/>
+          <a:lstStyle/>
+          <a:p>
+            <a:pPr algn="ctr" marL="0" indent="0">
+              <a:lnSpc>
+                <a:spcPct val="110000"/>
+              </a:lnSpc>
+              <a:buNone/>
+            </a:pPr>
+            <a:r>
+              <a:rPr lang="th-TH" sz="1200" dirty="0">
+                <a:solidFill>
+                  <a:srgbClr val="333333"/>
+                </a:solidFill>
+                <a:latin typeface="+mn-lt"/>
+                <a:ea typeface="+mn-ea"/>
+                <a:cs typeface="+mn-cs"/>
+              </a:rPr>
+              <a:t>ตัวตรวจกฎธุรกิจ</a:t>
+            </a:r>
+          </a:p>
+        </p:txBody>
+      </p:sp>
+      <p:sp>
+        <p:nvSpPr>
+          <p:cNvPr id="114" name="Box 3 Tab"/>
+          <p:cNvSpPr/>
+          <p:nvPr/>
+        </p:nvSpPr>
+        <p:spPr>
+          <a:xfrm>
+            <a:off x="6652260" y="3337560"/>
+            <a:ext cx="205740" cy="45720"/>
+          </a:xfrm>
+          <a:prstGeom prst="rect">
+            <a:avLst/>
+          </a:prstGeom>
+          <a:solidFill>
+            <a:srgbClr val="216B7F"/>
+          </a:solidFill>
+          <a:ln>
+            <a:noFill/>
+          </a:ln>
+        </p:spPr>
+        <p:txBody>
+          <a:bodyPr/>
+          <a:lstStyle/>
+          <a:p>
+            <a:endParaRPr lang="th-TH"/>
+          </a:p>
+        </p:txBody>
+      </p:sp>
+      <p:sp>
+        <p:nvSpPr>
+          <p:cNvPr id="15" name="Box 4"/>
+          <p:cNvSpPr/>
+          <p:nvPr/>
+        </p:nvSpPr>
+        <p:spPr>
+          <a:xfrm>
+            <a:off x="9235440" y="3223260"/>
+            <a:ext cx="2011680" cy="731520"/>
+          </a:xfrm>
+          <a:prstGeom prst="rect">
+            <a:avLst/>
+          </a:prstGeom>
+          <a:solidFill>
+            <a:srgbClr val="23436D"/>
+          </a:solidFill>
+          <a:ln>
+            <a:noFill/>
+          </a:ln>
+        </p:spPr>
+        <p:txBody>
+          <a:bodyPr wrap="square" anchor="ctr" lIns="0" tIns="0" rIns="0" bIns="0" rtlCol="0"/>
+          <a:lstStyle/>
+          <a:p>
+            <a:pPr algn="ctr" marL="0" indent="0">
+              <a:lnSpc>
+                <a:spcPct val="110000"/>
+              </a:lnSpc>
+              <a:buNone/>
+            </a:pPr>
+            <a:r>
+              <a:rPr lang="th-TH" sz="1200" dirty="0">
+                <a:solidFill>
+                  <a:srgbClr val="FFFFFF"/>
+                </a:solidFill>
+                <a:latin typeface="+mn-lt"/>
+                <a:ea typeface="+mn-ea"/>
+                <a:cs typeface="+mn-cs"/>
+              </a:rPr>
+              <a:t>ระบบบัญชี</a:t>
+            </a:r>
+          </a:p>
+        </p:txBody>
+      </p:sp>
+      <p:sp>
+        <p:nvSpPr>
+          <p:cNvPr id="16" name="Link 1"/>
+          <p:cNvSpPr/>
+          <p:nvPr/>
+        </p:nvSpPr>
+        <p:spPr>
+          <a:xfrm>
+            <a:off x="3268980" y="3589020"/>
+            <a:ext cx="457200" cy="0"/>
+          </a:xfrm>
+          <a:prstGeom prst="line">
+            <a:avLst/>
+          </a:prstGeom>
+          <a:noFill/>
+          <a:ln w="15875" cap="flat">
+            <a:solidFill>
+              <a:srgbClr val="216B7F"/>
+            </a:solidFill>
+            <a:prstDash val="solid"/>
+            <a:tailEnd type="triangle" w="med" len="med"/>
+          </a:ln>
+        </p:spPr>
+        <p:txBody>
+          <a:bodyPr/>
+          <a:lstStyle/>
+          <a:p>
+            <a:endParaRPr lang="th-TH"/>
+          </a:p>
+        </p:txBody>
+      </p:sp>
+      <p:sp>
+        <p:nvSpPr>
+          <p:cNvPr id="17" name="Link 2"/>
+          <p:cNvSpPr/>
+          <p:nvPr/>
+        </p:nvSpPr>
+        <p:spPr>
+          <a:xfrm>
+            <a:off x="5966460" y="3589020"/>
+            <a:ext cx="457200" cy="0"/>
+          </a:xfrm>
+          <a:prstGeom prst="line">
+            <a:avLst/>
+          </a:prstGeom>
+          <a:noFill/>
+          <a:ln w="15875" cap="flat">
+            <a:solidFill>
+              <a:srgbClr val="216B7F"/>
+            </a:solidFill>
+            <a:prstDash val="solid"/>
+            <a:tailEnd type="triangle" w="med" len="med"/>
+          </a:ln>
+        </p:spPr>
+        <p:txBody>
+          <a:bodyPr/>
+          <a:lstStyle/>
+          <a:p>
+            <a:endParaRPr lang="th-TH"/>
+          </a:p>
+        </p:txBody>
+      </p:sp>
+      <p:sp>
+        <p:nvSpPr>
+          <p:cNvPr id="18" name="Link 3"/>
+          <p:cNvSpPr/>
+          <p:nvPr/>
+        </p:nvSpPr>
+        <p:spPr>
+          <a:xfrm>
+            <a:off x="8663940" y="3589020"/>
+            <a:ext cx="457200" cy="0"/>
+          </a:xfrm>
+          <a:prstGeom prst="line">
+            <a:avLst/>
+          </a:prstGeom>
+          <a:noFill/>
+          <a:ln w="15875" cap="flat">
+            <a:solidFill>
+              <a:srgbClr val="216B7F"/>
+            </a:solidFill>
+            <a:prstDash val="solid"/>
+            <a:tailEnd type="triangle" w="med" len="med"/>
+          </a:ln>
+        </p:spPr>
+        <p:txBody>
+          <a:bodyPr/>
+          <a:lstStyle/>
+          <a:p>
+            <a:endParaRPr lang="th-TH"/>
+          </a:p>
+        </p:txBody>
+      </p:sp>
+      <p:sp>
+        <p:nvSpPr>
+          <p:cNvPr id="19" name="Edge Label"/>
+          <p:cNvSpPr/>
+          <p:nvPr/>
+        </p:nvSpPr>
+        <p:spPr>
+          <a:xfrm>
+            <a:off x="5806440" y="3268980"/>
+            <a:ext cx="822960" cy="228600"/>
+          </a:xfrm>
+          <a:prstGeom prst="rect">
+            <a:avLst/>
+          </a:prstGeom>
+          <a:noFill/>
+          <a:ln>
+            <a:noFill/>
+          </a:ln>
+        </p:spPr>
+        <p:txBody>
+          <a:bodyPr wrap="square" anchor="ctr" lIns="0" tIns="0" rIns="0" bIns="0" rtlCol="0"/>
+          <a:lstStyle/>
+          <a:p>
+            <a:pPr algn="ctr" marL="0" indent="0">
+              <a:lnSpc>
+                <a:spcPct val="100000"/>
+              </a:lnSpc>
+              <a:buNone/>
+            </a:pPr>
+            <a:r>
+              <a:rPr lang="th-TH" sz="1000" dirty="0">
+                <a:solidFill>
+                  <a:srgbClr val="5F5F5F"/>
+                </a:solidFill>
+                <a:latin typeface="+mn-lt"/>
+                <a:ea typeface="+mn-ea"/>
+                <a:cs typeface="+mn-cs"/>
+              </a:rPr>
+              <a:t>ผ่านกฎ</a:t>
             </a:r>
           </a:p>
         </p:txBody>

--- a/NCT-Slide-Template-Demo.pptx
+++ b/NCT-Slide-Template-Demo.pptx
@@ -21,6 +21,8 @@
     <p:sldId id="269" r:id="rId15"/>
     <p:sldId id="270" r:id="rId16"/>
     <p:sldId id="271" r:id="rId17"/>
+    <p:sldId id="272" r:id="rId18"/>
+    <p:sldId id="273" r:id="rId19"/>
   </p:sldIdLst>
   <p:sldSz cx="12192000" cy="6858000"/>
   <p:notesSz cx="6858000" cy="9144000"/>
@@ -2529,7 +2531,7 @@
             <a:spLocks noGrp="1"/>
           </p:cNvSpPr>
           <p:nvPr>
-            <p:ph type="body" idx="1"/>
+            <p:ph type="body" idx="20"/>
           </p:nvPr>
         </p:nvSpPr>
         <p:spPr>
@@ -2587,7 +2589,7 @@
             <a:spLocks noGrp="1"/>
           </p:cNvSpPr>
           <p:nvPr>
-            <p:ph type="body" idx="2"/>
+            <p:ph type="body" idx="21"/>
           </p:nvPr>
         </p:nvSpPr>
         <p:spPr>
@@ -2645,7 +2647,7 @@
             <a:spLocks noGrp="1"/>
           </p:cNvSpPr>
           <p:nvPr>
-            <p:ph type="body" idx="3"/>
+            <p:ph type="body" idx="22"/>
           </p:nvPr>
         </p:nvSpPr>
         <p:spPr>
@@ -2767,7 +2769,7 @@
             <a:spLocks noGrp="1"/>
           </p:cNvSpPr>
           <p:nvPr>
-            <p:ph type="body" idx="4"/>
+            <p:ph type="body" idx="23"/>
           </p:nvPr>
         </p:nvSpPr>
         <p:spPr>
@@ -2825,7 +2827,7 @@
             <a:spLocks noGrp="1"/>
           </p:cNvSpPr>
           <p:nvPr>
-            <p:ph type="body" idx="5"/>
+            <p:ph type="body" idx="24"/>
           </p:nvPr>
         </p:nvSpPr>
         <p:spPr>
@@ -2883,7 +2885,7 @@
             <a:spLocks noGrp="1"/>
           </p:cNvSpPr>
           <p:nvPr>
-            <p:ph type="body" idx="6"/>
+            <p:ph type="body" idx="25"/>
           </p:nvPr>
         </p:nvSpPr>
         <p:spPr>
@@ -3005,7 +3007,7 @@
             <a:spLocks noGrp="1"/>
           </p:cNvSpPr>
           <p:nvPr>
-            <p:ph type="body" idx="7"/>
+            <p:ph type="body" idx="26"/>
           </p:nvPr>
         </p:nvSpPr>
         <p:spPr>
@@ -3063,7 +3065,7 @@
             <a:spLocks noGrp="1"/>
           </p:cNvSpPr>
           <p:nvPr>
-            <p:ph type="body" idx="8"/>
+            <p:ph type="body" idx="27"/>
           </p:nvPr>
         </p:nvSpPr>
         <p:spPr>
@@ -3121,7 +3123,7 @@
             <a:spLocks noGrp="1"/>
           </p:cNvSpPr>
           <p:nvPr>
-            <p:ph type="body" idx="9"/>
+            <p:ph type="body" idx="28"/>
           </p:nvPr>
         </p:nvSpPr>
         <p:spPr>
@@ -3243,7 +3245,7 @@
             <a:spLocks noGrp="1"/>
           </p:cNvSpPr>
           <p:nvPr>
-            <p:ph type="body" idx="10"/>
+            <p:ph type="body" idx="29"/>
           </p:nvPr>
         </p:nvSpPr>
         <p:spPr>
@@ -3301,7 +3303,7 @@
             <a:spLocks noGrp="1"/>
           </p:cNvSpPr>
           <p:nvPr>
-            <p:ph type="body" idx="11"/>
+            <p:ph type="body" idx="30"/>
           </p:nvPr>
         </p:nvSpPr>
         <p:spPr>
@@ -3359,7 +3361,7 @@
             <a:spLocks noGrp="1"/>
           </p:cNvSpPr>
           <p:nvPr>
-            <p:ph type="body" idx="12"/>
+            <p:ph type="body" idx="31"/>
           </p:nvPr>
         </p:nvSpPr>
         <p:spPr>
@@ -3452,7 +3454,7 @@
             <a:spLocks noGrp="1"/>
           </p:cNvSpPr>
           <p:nvPr>
-            <p:ph type="body" idx="13"/>
+            <p:ph type="body" idx="32"/>
           </p:nvPr>
         </p:nvSpPr>
         <p:spPr>
@@ -3510,7 +3512,7 @@
             <a:spLocks noGrp="1"/>
           </p:cNvSpPr>
           <p:nvPr>
-            <p:ph type="body" idx="14"/>
+            <p:ph type="body" idx="33"/>
           </p:nvPr>
         </p:nvSpPr>
         <p:spPr>
@@ -4008,7 +4010,7 @@
             <a:spLocks noGrp="1"/>
           </p:cNvSpPr>
           <p:nvPr>
-            <p:ph type="body" idx="2"/>
+            <p:ph type="body" idx="20"/>
           </p:nvPr>
         </p:nvSpPr>
         <p:spPr>
@@ -4066,7 +4068,7 @@
             <a:spLocks noGrp="1"/>
           </p:cNvSpPr>
           <p:nvPr>
-            <p:ph type="body" idx="3"/>
+            <p:ph type="body" idx="21"/>
           </p:nvPr>
         </p:nvSpPr>
         <p:spPr>
@@ -4124,7 +4126,7 @@
             <a:spLocks noGrp="1"/>
           </p:cNvSpPr>
           <p:nvPr>
-            <p:ph type="body" idx="4"/>
+            <p:ph type="body" idx="22"/>
           </p:nvPr>
         </p:nvSpPr>
         <p:spPr>
@@ -4269,7 +4271,7 @@
             <a:spLocks noGrp="1"/>
           </p:cNvSpPr>
           <p:nvPr>
-            <p:ph type="body" idx="5"/>
+            <p:ph type="body" idx="23"/>
           </p:nvPr>
         </p:nvSpPr>
         <p:spPr>
@@ -4327,7 +4329,7 @@
             <a:spLocks noGrp="1"/>
           </p:cNvSpPr>
           <p:nvPr>
-            <p:ph type="body" idx="6"/>
+            <p:ph type="body" idx="24"/>
           </p:nvPr>
         </p:nvSpPr>
         <p:spPr>
@@ -4385,7 +4387,7 @@
             <a:spLocks noGrp="1"/>
           </p:cNvSpPr>
           <p:nvPr>
-            <p:ph type="body" idx="7"/>
+            <p:ph type="body" idx="25"/>
           </p:nvPr>
         </p:nvSpPr>
         <p:spPr>
@@ -4530,7 +4532,7 @@
             <a:spLocks noGrp="1"/>
           </p:cNvSpPr>
           <p:nvPr>
-            <p:ph type="body" idx="8"/>
+            <p:ph type="body" idx="26"/>
           </p:nvPr>
         </p:nvSpPr>
         <p:spPr>
@@ -4588,7 +4590,7 @@
             <a:spLocks noGrp="1"/>
           </p:cNvSpPr>
           <p:nvPr>
-            <p:ph type="body" idx="9"/>
+            <p:ph type="body" idx="27"/>
           </p:nvPr>
         </p:nvSpPr>
         <p:spPr>
@@ -4646,7 +4648,7 @@
             <a:spLocks noGrp="1"/>
           </p:cNvSpPr>
           <p:nvPr>
-            <p:ph type="body" idx="10"/>
+            <p:ph type="body" idx="28"/>
           </p:nvPr>
         </p:nvSpPr>
         <p:spPr>
@@ -4791,7 +4793,7 @@
             <a:spLocks noGrp="1"/>
           </p:cNvSpPr>
           <p:nvPr>
-            <p:ph type="body" idx="11"/>
+            <p:ph type="body" idx="29"/>
           </p:nvPr>
         </p:nvSpPr>
         <p:spPr>
@@ -4849,7 +4851,7 @@
             <a:spLocks noGrp="1"/>
           </p:cNvSpPr>
           <p:nvPr>
-            <p:ph type="body" idx="12"/>
+            <p:ph type="body" idx="30"/>
           </p:nvPr>
         </p:nvSpPr>
         <p:spPr>
@@ -4907,7 +4909,7 @@
             <a:spLocks noGrp="1"/>
           </p:cNvSpPr>
           <p:nvPr>
-            <p:ph type="body" idx="13"/>
+            <p:ph type="body" idx="31"/>
           </p:nvPr>
         </p:nvSpPr>
         <p:spPr>
@@ -5052,7 +5054,7 @@
             <a:spLocks noGrp="1"/>
           </p:cNvSpPr>
           <p:nvPr>
-            <p:ph type="body" idx="14"/>
+            <p:ph type="body" idx="32"/>
           </p:nvPr>
         </p:nvSpPr>
         <p:spPr>
@@ -5110,7 +5112,7 @@
             <a:spLocks noGrp="1"/>
           </p:cNvSpPr>
           <p:nvPr>
-            <p:ph type="body" idx="15"/>
+            <p:ph type="body" idx="33"/>
           </p:nvPr>
         </p:nvSpPr>
         <p:spPr>
@@ -5168,7 +5170,7 @@
             <a:spLocks noGrp="1"/>
           </p:cNvSpPr>
           <p:nvPr>
-            <p:ph type="body" idx="16"/>
+            <p:ph type="body" idx="34"/>
           </p:nvPr>
         </p:nvSpPr>
         <p:spPr>
@@ -5255,7 +5257,7 @@
             <a:spLocks noGrp="1"/>
           </p:cNvSpPr>
           <p:nvPr>
-            <p:ph type="body" idx="17"/>
+            <p:ph type="body" idx="35"/>
           </p:nvPr>
         </p:nvSpPr>
         <p:spPr>
@@ -5313,7 +5315,7 @@
             <a:spLocks noGrp="1"/>
           </p:cNvSpPr>
           <p:nvPr>
-            <p:ph type="body" idx="18"/>
+            <p:ph type="body" idx="36"/>
           </p:nvPr>
         </p:nvSpPr>
         <p:spPr>
@@ -7549,6 +7551,1961 @@
 </p:sldLayout>
 </file>
 
+<file path=ppt/slideLayouts/slideLayout17.xml><?xml version="1.0" encoding="utf-8"?>
+<p:sldLayout xmlns:a="http://schemas.openxmlformats.org/drawingml/2006/main" xmlns:r="http://schemas.openxmlformats.org/officeDocument/2006/relationships" xmlns:p="http://schemas.openxmlformats.org/presentationml/2006/main" type="obj" showMasterSp="0" preserve="1">
+  <p:cSld name="17 Phase Card">
+    <p:bg>
+      <p:bgPr>
+        <a:solidFill>
+          <a:srgbClr val="FFFFFF"/>
+        </a:solidFill>
+        <a:effectLst/>
+      </p:bgPr>
+    </p:bg>
+    <p:spTree>
+      <p:nvGrpSpPr>
+        <p:cNvPr id="1" name=""/>
+        <p:cNvGrpSpPr/>
+        <p:nvPr/>
+      </p:nvGrpSpPr>
+      <p:grpSpPr>
+        <a:xfrm>
+          <a:off x="0" y="0"/>
+          <a:ext cx="0" cy="0"/>
+          <a:chOff x="0" y="0"/>
+          <a:chExt cx="0" cy="0"/>
+        </a:xfrm>
+      </p:grpSpPr>
+      <p:sp>
+        <p:nvSpPr>
+          <p:cNvPr id="10" name="Title Placeholder"/>
+          <p:cNvSpPr>
+            <a:spLocks noGrp="1"/>
+          </p:cNvSpPr>
+          <p:nvPr>
+            <p:ph type="title"/>
+          </p:nvPr>
+        </p:nvSpPr>
+        <p:spPr>
+          <a:xfrm>
+            <a:off x="914400" y="548640"/>
+            <a:ext cx="10363200" cy="731520"/>
+          </a:xfrm>
+          <a:prstGeom prst="rect">
+            <a:avLst/>
+          </a:prstGeom>
+        </p:spPr>
+        <p:txBody>
+          <a:bodyPr wrap="square" anchor="b" lIns="0" tIns="0" rIns="0" bIns="0" rtlCol="0"/>
+          <a:lstStyle>
+            <a:lvl1pPr algn="l" marL="0" indent="0">
+              <a:lnSpc>
+                <a:spcPct val="108000"/>
+              </a:lnSpc>
+              <a:buNone/>
+              <a:defRPr lang="th-TH" sz="3200" b="1" dirty="0">
+                <a:solidFill>
+                  <a:srgbClr val="23436D"/>
+                </a:solidFill>
+                <a:latin typeface="+mj-lt"/>
+                <a:ea typeface="+mj-ea"/>
+                <a:cs typeface="+mj-cs"/>
+              </a:defRPr>
+            </a:lvl1pPr>
+          </a:lstStyle>
+          <a:p>
+            <a:pPr algn="l" marL="0" indent="0">
+              <a:lnSpc>
+                <a:spcPct val="108000"/>
+              </a:lnSpc>
+              <a:buNone/>
+            </a:pPr>
+            <a:r>
+              <a:rPr lang="th-TH" sz="3200" b="1" dirty="0">
+                <a:solidFill>
+                  <a:srgbClr val="23436D"/>
+                </a:solidFill>
+                <a:latin typeface="+mj-lt"/>
+                <a:ea typeface="+mj-ea"/>
+                <a:cs typeface="+mj-cs"/>
+              </a:rPr>
+              <a:t>ชื่อสไลด์</a:t>
+            </a:r>
+          </a:p>
+        </p:txBody>
+      </p:sp>
+      <p:sp>
+        <p:nvSpPr>
+          <p:cNvPr id="11" name="Accent Rule"/>
+          <p:cNvSpPr/>
+          <p:nvPr/>
+        </p:nvSpPr>
+        <p:spPr>
+          <a:xfrm>
+            <a:off x="914400" y="1371600"/>
+            <a:ext cx="548640" cy="45720"/>
+          </a:xfrm>
+          <a:prstGeom prst="rect">
+            <a:avLst/>
+          </a:prstGeom>
+          <a:solidFill>
+            <a:srgbClr val="216B7F"/>
+          </a:solidFill>
+          <a:ln>
+            <a:noFill/>
+          </a:ln>
+        </p:spPr>
+        <p:txBody>
+          <a:bodyPr/>
+          <a:lstStyle/>
+          <a:p>
+            <a:endParaRPr lang="th-TH"/>
+          </a:p>
+        </p:txBody>
+      </p:sp>
+      <p:sp>
+        <p:nvSpPr>
+          <p:cNvPr id="12" name="Key Activity Label"/>
+          <p:cNvSpPr>
+            <a:spLocks noGrp="1"/>
+          </p:cNvSpPr>
+          <p:nvPr>
+            <p:ph type="body" idx="1"/>
+          </p:nvPr>
+        </p:nvSpPr>
+        <p:spPr>
+          <a:xfrm>
+            <a:off x="914400" y="1691640"/>
+            <a:ext cx="1500000" cy="274320"/>
+          </a:xfrm>
+          <a:prstGeom prst="rect">
+            <a:avLst/>
+          </a:prstGeom>
+        </p:spPr>
+        <p:txBody>
+          <a:bodyPr wrap="square" anchor="ctr" lIns="0" tIns="0" rIns="0" bIns="0" rtlCol="0"/>
+          <a:lstStyle>
+            <a:lvl1pPr algn="l" marL="0" indent="0">
+              <a:lnSpc>
+                <a:spcPct val="130000"/>
+              </a:lnSpc>
+              <a:buNone/>
+              <a:defRPr lang="th-TH" sz="1400" b="1" dirty="0">
+                <a:solidFill>
+                  <a:srgbClr val="333333"/>
+                </a:solidFill>
+                <a:latin typeface="+mj-lt"/>
+                <a:ea typeface="+mj-ea"/>
+                <a:cs typeface="+mj-cs"/>
+              </a:defRPr>
+            </a:lvl1pPr>
+          </a:lstStyle>
+          <a:p>
+            <a:pPr algn="l" marL="0" indent="0">
+              <a:lnSpc>
+                <a:spcPct val="130000"/>
+              </a:lnSpc>
+              <a:buNone/>
+            </a:pPr>
+            <a:r>
+              <a:rPr lang="th-TH" sz="1400" b="1" dirty="0">
+                <a:solidFill>
+                  <a:srgbClr val="333333"/>
+                </a:solidFill>
+                <a:latin typeface="+mj-lt"/>
+                <a:ea typeface="+mj-ea"/>
+                <a:cs typeface="+mj-cs"/>
+              </a:rPr>
+              <a:t>Key Activity :</a:t>
+            </a:r>
+          </a:p>
+        </p:txBody>
+      </p:sp>
+      <p:sp>
+        <p:nvSpPr>
+          <p:cNvPr id="13" name="Key Activity Value"/>
+          <p:cNvSpPr>
+            <a:spLocks noGrp="1"/>
+          </p:cNvSpPr>
+          <p:nvPr>
+            <p:ph type="body" idx="2"/>
+          </p:nvPr>
+        </p:nvSpPr>
+        <p:spPr>
+          <a:xfrm>
+            <a:off x="2414400" y="1691640"/>
+            <a:ext cx="8863200" cy="274320"/>
+          </a:xfrm>
+          <a:prstGeom prst="rect">
+            <a:avLst/>
+          </a:prstGeom>
+        </p:spPr>
+        <p:txBody>
+          <a:bodyPr wrap="square" anchor="ctr" lIns="0" tIns="0" rIns="0" bIns="0" rtlCol="0"/>
+          <a:lstStyle>
+            <a:lvl1pPr algn="l" marL="0" indent="0">
+              <a:lnSpc>
+                <a:spcPct val="130000"/>
+              </a:lnSpc>
+              <a:buNone/>
+              <a:defRPr lang="th-TH" sz="1400" dirty="0">
+                <a:solidFill>
+                  <a:srgbClr val="333333"/>
+                </a:solidFill>
+                <a:latin typeface="+mn-lt"/>
+                <a:ea typeface="+mn-ea"/>
+                <a:cs typeface="+mn-cs"/>
+              </a:defRPr>
+            </a:lvl1pPr>
+          </a:lstStyle>
+          <a:p>
+            <a:pPr algn="l" marL="0" indent="0">
+              <a:lnSpc>
+                <a:spcPct val="130000"/>
+              </a:lnSpc>
+              <a:buNone/>
+            </a:pPr>
+            <a:r>
+              <a:rPr lang="th-TH" sz="1400" dirty="0">
+                <a:solidFill>
+                  <a:srgbClr val="333333"/>
+                </a:solidFill>
+                <a:latin typeface="+mn-lt"/>
+                <a:ea typeface="+mn-ea"/>
+                <a:cs typeface="+mn-cs"/>
+              </a:rPr>
+              <a:t>กิจกรรมหลักของเฟสนี้</a:t>
+            </a:r>
+          </a:p>
+        </p:txBody>
+      </p:sp>
+      <p:sp>
+        <p:nvSpPr>
+          <p:cNvPr id="14" name="Participant Label"/>
+          <p:cNvSpPr>
+            <a:spLocks noGrp="1"/>
+          </p:cNvSpPr>
+          <p:nvPr>
+            <p:ph type="body" idx="3"/>
+          </p:nvPr>
+        </p:nvSpPr>
+        <p:spPr>
+          <a:xfrm>
+            <a:off x="914400" y="1965960"/>
+            <a:ext cx="1500000" cy="274320"/>
+          </a:xfrm>
+          <a:prstGeom prst="rect">
+            <a:avLst/>
+          </a:prstGeom>
+        </p:spPr>
+        <p:txBody>
+          <a:bodyPr wrap="square" anchor="ctr" lIns="0" tIns="0" rIns="0" bIns="0" rtlCol="0"/>
+          <a:lstStyle>
+            <a:lvl1pPr algn="l" marL="0" indent="0">
+              <a:lnSpc>
+                <a:spcPct val="130000"/>
+              </a:lnSpc>
+              <a:buNone/>
+              <a:defRPr lang="th-TH" sz="1400" b="1" dirty="0">
+                <a:solidFill>
+                  <a:srgbClr val="333333"/>
+                </a:solidFill>
+                <a:latin typeface="+mj-lt"/>
+                <a:ea typeface="+mj-ea"/>
+                <a:cs typeface="+mj-cs"/>
+              </a:defRPr>
+            </a:lvl1pPr>
+          </a:lstStyle>
+          <a:p>
+            <a:pPr algn="l" marL="0" indent="0">
+              <a:lnSpc>
+                <a:spcPct val="130000"/>
+              </a:lnSpc>
+              <a:buNone/>
+            </a:pPr>
+            <a:r>
+              <a:rPr lang="th-TH" sz="1400" b="1" dirty="0">
+                <a:solidFill>
+                  <a:srgbClr val="333333"/>
+                </a:solidFill>
+                <a:latin typeface="+mj-lt"/>
+                <a:ea typeface="+mj-ea"/>
+                <a:cs typeface="+mj-cs"/>
+              </a:rPr>
+              <a:t>Participant :</a:t>
+            </a:r>
+          </a:p>
+        </p:txBody>
+      </p:sp>
+      <p:sp>
+        <p:nvSpPr>
+          <p:cNvPr id="15" name="Participant Value"/>
+          <p:cNvSpPr>
+            <a:spLocks noGrp="1"/>
+          </p:cNvSpPr>
+          <p:nvPr>
+            <p:ph type="body" idx="4"/>
+          </p:nvPr>
+        </p:nvSpPr>
+        <p:spPr>
+          <a:xfrm>
+            <a:off x="2414400" y="1965960"/>
+            <a:ext cx="8863200" cy="274320"/>
+          </a:xfrm>
+          <a:prstGeom prst="rect">
+            <a:avLst/>
+          </a:prstGeom>
+        </p:spPr>
+        <p:txBody>
+          <a:bodyPr wrap="square" anchor="ctr" lIns="0" tIns="0" rIns="0" bIns="0" rtlCol="0"/>
+          <a:lstStyle>
+            <a:lvl1pPr algn="l" marL="0" indent="0">
+              <a:lnSpc>
+                <a:spcPct val="130000"/>
+              </a:lnSpc>
+              <a:buNone/>
+              <a:defRPr lang="th-TH" sz="1400" dirty="0">
+                <a:solidFill>
+                  <a:srgbClr val="333333"/>
+                </a:solidFill>
+                <a:latin typeface="+mn-lt"/>
+                <a:ea typeface="+mn-ea"/>
+                <a:cs typeface="+mn-cs"/>
+              </a:defRPr>
+            </a:lvl1pPr>
+          </a:lstStyle>
+          <a:p>
+            <a:pPr algn="l" marL="0" indent="0">
+              <a:lnSpc>
+                <a:spcPct val="130000"/>
+              </a:lnSpc>
+              <a:buNone/>
+            </a:pPr>
+            <a:r>
+              <a:rPr lang="th-TH" sz="1400" dirty="0">
+                <a:solidFill>
+                  <a:srgbClr val="333333"/>
+                </a:solidFill>
+                <a:latin typeface="+mn-lt"/>
+                <a:ea typeface="+mn-ea"/>
+                <a:cs typeface="+mn-cs"/>
+              </a:rPr>
+              <a:t>ผู้เกี่ยวข้องในเฟสนี้</a:t>
+            </a:r>
+          </a:p>
+        </p:txBody>
+      </p:sp>
+      <p:sp>
+        <p:nvSpPr>
+          <p:cNvPr id="16" name="Phase Card"/>
+          <p:cNvSpPr/>
+          <p:nvPr/>
+        </p:nvSpPr>
+        <p:spPr>
+          <a:xfrm>
+            <a:off x="914400" y="2628900"/>
+            <a:ext cx="10363200" cy="3406140"/>
+          </a:xfrm>
+          <a:prstGeom prst="rect">
+            <a:avLst/>
+          </a:prstGeom>
+          <a:noFill/>
+          <a:ln w="12700">
+            <a:solidFill>
+              <a:srgbClr val="216B7F"/>
+            </a:solidFill>
+          </a:ln>
+        </p:spPr>
+        <p:txBody>
+          <a:bodyPr/>
+          <a:lstStyle/>
+          <a:p>
+            <a:endParaRPr lang="th-TH"/>
+          </a:p>
+        </p:txBody>
+      </p:sp>
+      <p:sp>
+        <p:nvSpPr>
+          <p:cNvPr id="17" name="Phase Tab"/>
+          <p:cNvSpPr/>
+          <p:nvPr/>
+        </p:nvSpPr>
+        <p:spPr>
+          <a:xfrm>
+            <a:off x="914400" y="2423160"/>
+            <a:ext cx="3429000" cy="411480"/>
+          </a:xfrm>
+          <a:prstGeom prst="roundRect">
+            <a:avLst>
+              <a:gd name="adj" fmla="val 50000"/>
+            </a:avLst>
+          </a:prstGeom>
+          <a:solidFill>
+            <a:srgbClr val="216B7F"/>
+          </a:solidFill>
+          <a:ln>
+            <a:noFill/>
+          </a:ln>
+        </p:spPr>
+        <p:txBody>
+          <a:bodyPr/>
+          <a:lstStyle/>
+          <a:p>
+            <a:endParaRPr lang="th-TH"/>
+          </a:p>
+        </p:txBody>
+      </p:sp>
+      <p:sp>
+        <p:nvSpPr>
+          <p:cNvPr id="18" name="Phase Number"/>
+          <p:cNvSpPr>
+            <a:spLocks noGrp="1"/>
+          </p:cNvSpPr>
+          <p:nvPr>
+            <p:ph type="body" idx="5"/>
+          </p:nvPr>
+        </p:nvSpPr>
+        <p:spPr>
+          <a:xfrm>
+            <a:off x="1005840" y="2423160"/>
+            <a:ext cx="502920" cy="411480"/>
+          </a:xfrm>
+          <a:prstGeom prst="rect">
+            <a:avLst/>
+          </a:prstGeom>
+        </p:spPr>
+        <p:txBody>
+          <a:bodyPr wrap="square" anchor="ctr" lIns="0" tIns="0" rIns="0" bIns="0" rtlCol="0"/>
+          <a:lstStyle>
+            <a:lvl1pPr algn="ctr" marL="0" indent="0">
+              <a:lnSpc>
+                <a:spcPct val="100000"/>
+              </a:lnSpc>
+              <a:buNone/>
+              <a:defRPr lang="th-TH" sz="1600" b="1" dirty="0">
+                <a:solidFill>
+                  <a:srgbClr val="FFFFFF"/>
+                </a:solidFill>
+                <a:latin typeface="+mj-lt"/>
+                <a:ea typeface="+mj-ea"/>
+                <a:cs typeface="+mj-cs"/>
+              </a:defRPr>
+            </a:lvl1pPr>
+          </a:lstStyle>
+          <a:p>
+            <a:pPr algn="ctr" marL="0" indent="0">
+              <a:lnSpc>
+                <a:spcPct val="100000"/>
+              </a:lnSpc>
+              <a:buNone/>
+            </a:pPr>
+            <a:r>
+              <a:rPr lang="th-TH" sz="1600" b="1" dirty="0">
+                <a:solidFill>
+                  <a:srgbClr val="FFFFFF"/>
+                </a:solidFill>
+                <a:latin typeface="+mj-lt"/>
+                <a:ea typeface="+mj-ea"/>
+                <a:cs typeface="+mj-cs"/>
+              </a:rPr>
+              <a:t>01</a:t>
+            </a:r>
+          </a:p>
+        </p:txBody>
+      </p:sp>
+      <p:sp>
+        <p:nvSpPr>
+          <p:cNvPr id="19" name="Phase Tab Divider"/>
+          <p:cNvSpPr/>
+          <p:nvPr/>
+        </p:nvSpPr>
+        <p:spPr>
+          <a:xfrm>
+            <a:off x="1508760" y="2491740"/>
+            <a:ext cx="12700" cy="274320"/>
+          </a:xfrm>
+          <a:prstGeom prst="rect">
+            <a:avLst/>
+          </a:prstGeom>
+          <a:solidFill>
+            <a:srgbClr val="FFFFFF">
+              <a:alpha val="32000"/>
+            </a:srgbClr>
+          </a:solidFill>
+          <a:ln>
+            <a:noFill/>
+          </a:ln>
+        </p:spPr>
+        <p:txBody>
+          <a:bodyPr/>
+          <a:lstStyle/>
+          <a:p>
+            <a:endParaRPr lang="th-TH"/>
+          </a:p>
+        </p:txBody>
+      </p:sp>
+      <p:sp>
+        <p:nvSpPr>
+          <p:cNvPr id="20" name="Phase Label"/>
+          <p:cNvSpPr>
+            <a:spLocks noGrp="1"/>
+          </p:cNvSpPr>
+          <p:nvPr>
+            <p:ph type="body" idx="6"/>
+          </p:nvPr>
+        </p:nvSpPr>
+        <p:spPr>
+          <a:xfrm>
+            <a:off x="1645920" y="2423160"/>
+            <a:ext cx="2560320" cy="411480"/>
+          </a:xfrm>
+          <a:prstGeom prst="rect">
+            <a:avLst/>
+          </a:prstGeom>
+        </p:spPr>
+        <p:txBody>
+          <a:bodyPr wrap="square" anchor="ctr" lIns="0" tIns="0" rIns="0" bIns="0" rtlCol="0"/>
+          <a:lstStyle>
+            <a:lvl1pPr algn="l" marL="0" indent="0">
+              <a:lnSpc>
+                <a:spcPct val="100000"/>
+              </a:lnSpc>
+              <a:buNone/>
+              <a:defRPr lang="th-TH" sz="1400" b="1" dirty="0">
+                <a:solidFill>
+                  <a:srgbClr val="FFFFFF"/>
+                </a:solidFill>
+                <a:latin typeface="+mj-lt"/>
+                <a:ea typeface="+mj-ea"/>
+                <a:cs typeface="+mj-cs"/>
+              </a:defRPr>
+            </a:lvl1pPr>
+          </a:lstStyle>
+          <a:p>
+            <a:pPr algn="l" marL="0" indent="0">
+              <a:lnSpc>
+                <a:spcPct val="100000"/>
+              </a:lnSpc>
+              <a:buNone/>
+            </a:pPr>
+            <a:r>
+              <a:rPr lang="th-TH" sz="1400" b="1" dirty="0">
+                <a:solidFill>
+                  <a:srgbClr val="FFFFFF"/>
+                </a:solidFill>
+                <a:latin typeface="+mj-lt"/>
+                <a:ea typeface="+mj-ea"/>
+                <a:cs typeface="+mj-cs"/>
+              </a:rPr>
+              <a:t>ชื่อเฟส</a:t>
+            </a:r>
+          </a:p>
+        </p:txBody>
+      </p:sp>
+      <p:sp>
+        <p:nvSpPr>
+          <p:cNvPr id="21" name="Phase Intro"/>
+          <p:cNvSpPr>
+            <a:spLocks noGrp="1"/>
+          </p:cNvSpPr>
+          <p:nvPr>
+            <p:ph type="body" idx="7"/>
+          </p:nvPr>
+        </p:nvSpPr>
+        <p:spPr>
+          <a:xfrm>
+            <a:off x="1143000" y="2926080"/>
+            <a:ext cx="9906000" cy="274320"/>
+          </a:xfrm>
+          <a:prstGeom prst="rect">
+            <a:avLst/>
+          </a:prstGeom>
+        </p:spPr>
+        <p:txBody>
+          <a:bodyPr wrap="square" anchor="t" lIns="0" tIns="0" rIns="0" bIns="0" rtlCol="0"/>
+          <a:lstStyle>
+            <a:lvl1pPr algn="l" marL="0" indent="0">
+              <a:lnSpc>
+                <a:spcPct val="132000"/>
+              </a:lnSpc>
+              <a:buNone/>
+              <a:defRPr lang="th-TH" sz="1200" dirty="0">
+                <a:solidFill>
+                  <a:srgbClr val="5F5F5F"/>
+                </a:solidFill>
+                <a:latin typeface="+mn-lt"/>
+                <a:ea typeface="+mn-ea"/>
+                <a:cs typeface="+mn-cs"/>
+              </a:defRPr>
+            </a:lvl1pPr>
+          </a:lstStyle>
+          <a:p>
+            <a:pPr algn="l" marL="0" indent="0">
+              <a:lnSpc>
+                <a:spcPct val="132000"/>
+              </a:lnSpc>
+              <a:buNone/>
+            </a:pPr>
+            <a:r>
+              <a:rPr lang="th-TH" sz="1200" dirty="0">
+                <a:solidFill>
+                  <a:srgbClr val="5F5F5F"/>
+                </a:solidFill>
+                <a:latin typeface="+mn-lt"/>
+                <a:ea typeface="+mn-ea"/>
+                <a:cs typeface="+mn-cs"/>
+              </a:rPr>
+              <a:t>ประโยคนำหนึ่งบรรทัด</a:t>
+            </a:r>
+          </a:p>
+        </p:txBody>
+      </p:sp>
+      <p:sp>
+        <p:nvSpPr>
+          <p:cNvPr id="22" name="Phase Body"/>
+          <p:cNvSpPr>
+            <a:spLocks noGrp="1"/>
+          </p:cNvSpPr>
+          <p:nvPr>
+            <p:ph type="body" idx="8"/>
+          </p:nvPr>
+        </p:nvSpPr>
+        <p:spPr>
+          <a:xfrm>
+            <a:off x="1143000" y="3291840"/>
+            <a:ext cx="9906000" cy="2514600"/>
+          </a:xfrm>
+          <a:prstGeom prst="rect">
+            <a:avLst/>
+          </a:prstGeom>
+        </p:spPr>
+        <p:txBody>
+          <a:bodyPr wrap="square" anchor="t" lIns="0" tIns="0" rIns="0" bIns="0" rtlCol="0"/>
+          <a:lstStyle>
+            <a:lvl1pPr algn="l" marL="182880" indent="-182880">
+              <a:lnSpc>
+                <a:spcPct val="132000"/>
+              </a:lnSpc>
+              <a:spcBef>
+                <a:spcPts val="500"/>
+              </a:spcBef>
+              <a:buClr>
+                <a:srgbClr val="216B7F"/>
+              </a:buClr>
+              <a:buSzPct val="90000"/>
+              <a:buFont typeface="Arial"/>
+              <a:buChar char="•"/>
+              <a:defRPr lang="th-TH" sz="1200" dirty="0">
+                <a:solidFill>
+                  <a:srgbClr val="333333"/>
+                </a:solidFill>
+                <a:latin typeface="+mn-lt"/>
+                <a:ea typeface="+mn-ea"/>
+                <a:cs typeface="+mn-cs"/>
+              </a:defRPr>
+            </a:lvl1pPr>
+            <a:lvl2pPr algn="l" marL="548640" indent="-182880">
+              <a:lnSpc>
+                <a:spcPct val="132000"/>
+              </a:lnSpc>
+              <a:spcBef>
+                <a:spcPts val="350"/>
+              </a:spcBef>
+              <a:buClr>
+                <a:srgbClr val="216B7F"/>
+              </a:buClr>
+              <a:buSzPct val="90000"/>
+              <a:buFont typeface="Arial"/>
+              <a:buChar char="–"/>
+              <a:defRPr lang="th-TH" sz="1200" dirty="0">
+                <a:solidFill>
+                  <a:srgbClr val="333333"/>
+                </a:solidFill>
+                <a:latin typeface="+mn-lt"/>
+                <a:ea typeface="+mn-ea"/>
+                <a:cs typeface="+mn-cs"/>
+              </a:defRPr>
+            </a:lvl2pPr>
+          </a:lstStyle>
+          <a:p>
+            <a:pPr algn="l" marL="182880" indent="-182880">
+              <a:lnSpc>
+                <a:spcPct val="132000"/>
+              </a:lnSpc>
+              <a:spcBef>
+                <a:spcPts val="500"/>
+              </a:spcBef>
+              <a:buClr>
+                <a:srgbClr val="216B7F"/>
+              </a:buClr>
+              <a:buSzPct val="90000"/>
+              <a:buFont typeface="Arial"/>
+              <a:buChar char="•"/>
+            </a:pPr>
+            <a:r>
+              <a:rPr lang="th-TH" sz="1200" dirty="0">
+                <a:solidFill>
+                  <a:srgbClr val="333333"/>
+                </a:solidFill>
+                <a:latin typeface="+mn-lt"/>
+                <a:ea typeface="+mn-ea"/>
+                <a:cs typeface="+mn-cs"/>
+              </a:rPr>
+              <a:t>เนื้อหาของเฟส</a:t>
+            </a:r>
+          </a:p>
+          <a:p>
+            <a:pPr algn="l" marL="548640" indent="-182880">
+              <a:lnSpc>
+                <a:spcPct val="132000"/>
+              </a:lnSpc>
+              <a:spcBef>
+                <a:spcPts val="350"/>
+              </a:spcBef>
+              <a:buClr>
+                <a:srgbClr val="216B7F"/>
+              </a:buClr>
+              <a:buSzPct val="90000"/>
+              <a:buFont typeface="Arial"/>
+              <a:buChar char="–"/>
+            </a:pPr>
+            <a:r>
+              <a:rPr lang="th-TH" sz="1200" dirty="0">
+                <a:solidFill>
+                  <a:srgbClr val="333333"/>
+                </a:solidFill>
+                <a:latin typeface="+mn-lt"/>
+                <a:ea typeface="+mn-ea"/>
+                <a:cs typeface="+mn-cs"/>
+              </a:rPr>
+              <a:t>ระดับที่สอง</a:t>
+            </a:r>
+          </a:p>
+        </p:txBody>
+      </p:sp>
+      <p:sp>
+        <p:nvSpPr>
+          <p:cNvPr id="90" name="Footer Rule"/>
+          <p:cNvSpPr/>
+          <p:nvPr/>
+        </p:nvSpPr>
+        <p:spPr>
+          <a:xfrm>
+            <a:off x="914400" y="6172200"/>
+            <a:ext cx="10363200" cy="12700"/>
+          </a:xfrm>
+          <a:prstGeom prst="rect">
+            <a:avLst/>
+          </a:prstGeom>
+          <a:solidFill>
+            <a:srgbClr val="E5E5E5"/>
+          </a:solidFill>
+          <a:ln>
+            <a:noFill/>
+          </a:ln>
+        </p:spPr>
+        <p:txBody>
+          <a:bodyPr/>
+          <a:lstStyle/>
+          <a:p>
+            <a:endParaRPr lang="th-TH"/>
+          </a:p>
+        </p:txBody>
+      </p:sp>
+      <p:sp>
+        <p:nvSpPr>
+          <p:cNvPr id="91" name="Date Placeholder"/>
+          <p:cNvSpPr>
+            <a:spLocks noGrp="1"/>
+          </p:cNvSpPr>
+          <p:nvPr>
+            <p:ph type="dt" idx="10"/>
+          </p:nvPr>
+        </p:nvSpPr>
+        <p:spPr>
+          <a:xfrm>
+            <a:off x="914400" y="6309360"/>
+            <a:ext cx="2743200" cy="274320"/>
+          </a:xfrm>
+          <a:prstGeom prst="rect">
+            <a:avLst/>
+          </a:prstGeom>
+        </p:spPr>
+        <p:txBody>
+          <a:bodyPr wrap="square" anchor="ctr" lIns="0" tIns="0" rIns="0" bIns="0" rtlCol="0"/>
+          <a:lstStyle>
+            <a:lvl1pPr algn="l" marL="0" indent="0">
+              <a:lnSpc>
+                <a:spcPct val="100000"/>
+              </a:lnSpc>
+              <a:buNone/>
+              <a:defRPr lang="th-TH" sz="1000" dirty="0">
+                <a:solidFill>
+                  <a:srgbClr val="5F5F5F"/>
+                </a:solidFill>
+                <a:latin typeface="+mn-lt"/>
+                <a:ea typeface="+mn-ea"/>
+                <a:cs typeface="+mn-cs"/>
+              </a:defRPr>
+            </a:lvl1pPr>
+          </a:lstStyle>
+          <a:p>
+            <a:pPr algn="l" marL="0" indent="0">
+              <a:lnSpc>
+                <a:spcPct val="100000"/>
+              </a:lnSpc>
+              <a:buNone/>
+            </a:pPr>
+            <a:endParaRPr lang="th-TH" sz="1000"/>
+          </a:p>
+        </p:txBody>
+      </p:sp>
+      <p:sp>
+        <p:nvSpPr>
+          <p:cNvPr id="92" name="Footer Placeholder"/>
+          <p:cNvSpPr>
+            <a:spLocks noGrp="1"/>
+          </p:cNvSpPr>
+          <p:nvPr>
+            <p:ph type="ftr" idx="11"/>
+          </p:nvPr>
+        </p:nvSpPr>
+        <p:spPr>
+          <a:xfrm>
+            <a:off x="4572000" y="6309360"/>
+            <a:ext cx="3657600" cy="274320"/>
+          </a:xfrm>
+          <a:prstGeom prst="rect">
+            <a:avLst/>
+          </a:prstGeom>
+        </p:spPr>
+        <p:txBody>
+          <a:bodyPr wrap="square" anchor="ctr" lIns="0" tIns="0" rIns="0" bIns="0" rtlCol="0"/>
+          <a:lstStyle>
+            <a:lvl1pPr algn="ctr" marL="0" indent="0">
+              <a:lnSpc>
+                <a:spcPct val="100000"/>
+              </a:lnSpc>
+              <a:buNone/>
+              <a:defRPr lang="th-TH" sz="1000" dirty="0">
+                <a:solidFill>
+                  <a:srgbClr val="5F5F5F"/>
+                </a:solidFill>
+                <a:latin typeface="+mn-lt"/>
+                <a:ea typeface="+mn-ea"/>
+                <a:cs typeface="+mn-cs"/>
+              </a:defRPr>
+            </a:lvl1pPr>
+          </a:lstStyle>
+          <a:p>
+            <a:pPr algn="ctr" marL="0" indent="0">
+              <a:lnSpc>
+                <a:spcPct val="100000"/>
+              </a:lnSpc>
+              <a:buNone/>
+            </a:pPr>
+            <a:endParaRPr lang="th-TH" sz="1000"/>
+          </a:p>
+        </p:txBody>
+      </p:sp>
+      <p:sp>
+        <p:nvSpPr>
+          <p:cNvPr id="93" name="Slide Number Placeholder"/>
+          <p:cNvSpPr>
+            <a:spLocks noGrp="1"/>
+          </p:cNvSpPr>
+          <p:nvPr>
+            <p:ph type="sldNum" sz="quarter" idx="12"/>
+          </p:nvPr>
+        </p:nvSpPr>
+        <p:spPr>
+          <a:xfrm>
+            <a:off x="9906000" y="6309360"/>
+            <a:ext cx="1371600" cy="274320"/>
+          </a:xfrm>
+          <a:prstGeom prst="rect">
+            <a:avLst/>
+          </a:prstGeom>
+        </p:spPr>
+        <p:txBody>
+          <a:bodyPr anchor="ctr"/>
+          <a:lstStyle>
+            <a:lvl1pPr algn="r" marL="0" indent="0">
+              <a:lnSpc>
+                <a:spcPct val="100000"/>
+              </a:lnSpc>
+              <a:buNone/>
+              <a:defRPr lang="th-TH" sz="1000" dirty="0">
+                <a:solidFill>
+                  <a:srgbClr val="5F5F5F"/>
+                </a:solidFill>
+                <a:latin typeface="+mn-lt"/>
+                <a:ea typeface="+mn-ea"/>
+                <a:cs typeface="+mn-cs"/>
+              </a:defRPr>
+            </a:lvl1pPr>
+          </a:lstStyle>
+          <a:p>
+            <a:pPr algn="r" marL="0" indent="0">
+              <a:buNone/>
+            </a:pPr>
+            <a:fld id="{B7E3A1C2-4F5D-4A88-9C1E-6D2F0A93B451}" type="slidenum">
+              <a:rPr lang="th-TH" sz="1000">
+                <a:solidFill>
+                  <a:srgbClr val="5F5F5F"/>
+                </a:solidFill>
+                <a:latin typeface="+mn-lt"/>
+                <a:cs typeface="+mn-cs"/>
+              </a:rPr>
+              <a:t>2</a:t>
+            </a:fld>
+            <a:endParaRPr lang="th-TH" sz="1000"/>
+          </a:p>
+        </p:txBody>
+      </p:sp>
+      <p:pic>
+        <p:nvPicPr>
+          <p:cNvPr id="94" name="NCT Mark"/>
+          <p:cNvPicPr>
+            <a:picLocks noChangeAspect="1"/>
+          </p:cNvPicPr>
+          <p:nvPr/>
+        </p:nvPicPr>
+        <p:blipFill>
+          <a:blip r:embed="rId2"/>
+          <a:stretch>
+            <a:fillRect/>
+          </a:stretch>
+        </p:blipFill>
+        <p:spPr>
+          <a:xfrm>
+            <a:off x="9494520" y="6289360"/>
+            <a:ext cx="274320" cy="174498"/>
+          </a:xfrm>
+          <a:prstGeom prst="rect">
+            <a:avLst/>
+          </a:prstGeom>
+        </p:spPr>
+      </p:pic>
+    </p:spTree>
+  </p:cSld>
+  <p:clrMapOvr>
+    <a:masterClrMapping/>
+  </p:clrMapOvr>
+</p:sldLayout>
+</file>
+
+<file path=ppt/slideLayouts/slideLayout18.xml><?xml version="1.0" encoding="utf-8"?>
+<p:sldLayout xmlns:a="http://schemas.openxmlformats.org/drawingml/2006/main" xmlns:r="http://schemas.openxmlformats.org/officeDocument/2006/relationships" xmlns:p="http://schemas.openxmlformats.org/presentationml/2006/main" type="picTx" showMasterSp="0" preserve="1">
+  <p:cSld name="18 Evidence Strip">
+    <p:bg>
+      <p:bgPr>
+        <a:solidFill>
+          <a:srgbClr val="FFFFFF"/>
+        </a:solidFill>
+        <a:effectLst/>
+      </p:bgPr>
+    </p:bg>
+    <p:spTree>
+      <p:nvGrpSpPr>
+        <p:cNvPr id="1" name=""/>
+        <p:cNvGrpSpPr/>
+        <p:nvPr/>
+      </p:nvGrpSpPr>
+      <p:grpSpPr>
+        <a:xfrm>
+          <a:off x="0" y="0"/>
+          <a:ext cx="0" cy="0"/>
+          <a:chOff x="0" y="0"/>
+          <a:chExt cx="0" cy="0"/>
+        </a:xfrm>
+      </p:grpSpPr>
+      <p:sp>
+        <p:nvSpPr>
+          <p:cNvPr id="10" name="Title Placeholder"/>
+          <p:cNvSpPr>
+            <a:spLocks noGrp="1"/>
+          </p:cNvSpPr>
+          <p:nvPr>
+            <p:ph type="title"/>
+          </p:nvPr>
+        </p:nvSpPr>
+        <p:spPr>
+          <a:xfrm>
+            <a:off x="914400" y="548640"/>
+            <a:ext cx="10363200" cy="731520"/>
+          </a:xfrm>
+          <a:prstGeom prst="rect">
+            <a:avLst/>
+          </a:prstGeom>
+        </p:spPr>
+        <p:txBody>
+          <a:bodyPr wrap="square" anchor="b" lIns="0" tIns="0" rIns="0" bIns="0" rtlCol="0"/>
+          <a:lstStyle>
+            <a:lvl1pPr algn="l" marL="0" indent="0">
+              <a:lnSpc>
+                <a:spcPct val="108000"/>
+              </a:lnSpc>
+              <a:buNone/>
+              <a:defRPr lang="th-TH" sz="3200" b="1" dirty="0">
+                <a:solidFill>
+                  <a:srgbClr val="23436D"/>
+                </a:solidFill>
+                <a:latin typeface="+mj-lt"/>
+                <a:ea typeface="+mj-ea"/>
+                <a:cs typeface="+mj-cs"/>
+              </a:defRPr>
+            </a:lvl1pPr>
+          </a:lstStyle>
+          <a:p>
+            <a:pPr algn="l" marL="0" indent="0">
+              <a:lnSpc>
+                <a:spcPct val="108000"/>
+              </a:lnSpc>
+              <a:buNone/>
+            </a:pPr>
+            <a:r>
+              <a:rPr lang="th-TH" sz="3200" b="1" dirty="0">
+                <a:solidFill>
+                  <a:srgbClr val="23436D"/>
+                </a:solidFill>
+                <a:latin typeface="+mj-lt"/>
+                <a:ea typeface="+mj-ea"/>
+                <a:cs typeface="+mj-cs"/>
+              </a:rPr>
+              <a:t>ชื่อสไลด์</a:t>
+            </a:r>
+          </a:p>
+        </p:txBody>
+      </p:sp>
+      <p:sp>
+        <p:nvSpPr>
+          <p:cNvPr id="11" name="Accent Rule"/>
+          <p:cNvSpPr/>
+          <p:nvPr/>
+        </p:nvSpPr>
+        <p:spPr>
+          <a:xfrm>
+            <a:off x="914400" y="1371600"/>
+            <a:ext cx="548640" cy="45720"/>
+          </a:xfrm>
+          <a:prstGeom prst="rect">
+            <a:avLst/>
+          </a:prstGeom>
+          <a:solidFill>
+            <a:srgbClr val="216B7F"/>
+          </a:solidFill>
+          <a:ln>
+            <a:noFill/>
+          </a:ln>
+        </p:spPr>
+        <p:txBody>
+          <a:bodyPr/>
+          <a:lstStyle/>
+          <a:p>
+            <a:endParaRPr lang="th-TH"/>
+          </a:p>
+        </p:txBody>
+      </p:sp>
+      <p:sp>
+        <p:nvSpPr>
+          <p:cNvPr id="12" name="Kicker Pill"/>
+          <p:cNvSpPr/>
+          <p:nvPr/>
+        </p:nvSpPr>
+        <p:spPr>
+          <a:xfrm>
+            <a:off x="914400" y="1691640"/>
+            <a:ext cx="3200400" cy="411480"/>
+          </a:xfrm>
+          <a:prstGeom prst="roundRect">
+            <a:avLst>
+              <a:gd name="adj" fmla="val 50000"/>
+            </a:avLst>
+          </a:prstGeom>
+          <a:solidFill>
+            <a:srgbClr val="216B7F"/>
+          </a:solidFill>
+          <a:ln>
+            <a:noFill/>
+          </a:ln>
+        </p:spPr>
+        <p:txBody>
+          <a:bodyPr/>
+          <a:lstStyle/>
+          <a:p>
+            <a:endParaRPr lang="th-TH"/>
+          </a:p>
+        </p:txBody>
+      </p:sp>
+      <p:sp>
+        <p:nvSpPr>
+          <p:cNvPr id="13" name="Kicker"/>
+          <p:cNvSpPr>
+            <a:spLocks noGrp="1"/>
+          </p:cNvSpPr>
+          <p:nvPr>
+            <p:ph type="body" idx="1"/>
+          </p:nvPr>
+        </p:nvSpPr>
+        <p:spPr>
+          <a:xfrm>
+            <a:off x="1097280" y="1691640"/>
+            <a:ext cx="2834640" cy="411480"/>
+          </a:xfrm>
+          <a:prstGeom prst="rect">
+            <a:avLst/>
+          </a:prstGeom>
+        </p:spPr>
+        <p:txBody>
+          <a:bodyPr wrap="square" anchor="ctr" lIns="0" tIns="0" rIns="0" bIns="0" rtlCol="0"/>
+          <a:lstStyle>
+            <a:lvl1pPr algn="ctr" marL="0" indent="0">
+              <a:lnSpc>
+                <a:spcPct val="100000"/>
+              </a:lnSpc>
+              <a:buNone/>
+              <a:defRPr lang="th-TH" sz="1400" b="1" dirty="0">
+                <a:solidFill>
+                  <a:srgbClr val="FFFFFF"/>
+                </a:solidFill>
+                <a:latin typeface="+mj-lt"/>
+                <a:ea typeface="+mj-ea"/>
+                <a:cs typeface="+mj-cs"/>
+              </a:defRPr>
+            </a:lvl1pPr>
+          </a:lstStyle>
+          <a:p>
+            <a:pPr algn="ctr" marL="0" indent="0">
+              <a:lnSpc>
+                <a:spcPct val="100000"/>
+              </a:lnSpc>
+              <a:buNone/>
+            </a:pPr>
+            <a:r>
+              <a:rPr lang="th-TH" sz="1400" b="1" dirty="0">
+                <a:solidFill>
+                  <a:srgbClr val="FFFFFF"/>
+                </a:solidFill>
+                <a:latin typeface="+mj-lt"/>
+                <a:ea typeface="+mj-ea"/>
+                <a:cs typeface="+mj-cs"/>
+              </a:rPr>
+              <a:t>หัวข้อของหลักฐาน</a:t>
+            </a:r>
+          </a:p>
+        </p:txBody>
+      </p:sp>
+      <p:sp>
+        <p:nvSpPr>
+          <p:cNvPr id="14" name="Claim Placeholder"/>
+          <p:cNvSpPr>
+            <a:spLocks noGrp="1"/>
+          </p:cNvSpPr>
+          <p:nvPr>
+            <p:ph type="tbl" idx="2"/>
+          </p:nvPr>
+        </p:nvSpPr>
+        <p:spPr>
+          <a:xfrm>
+            <a:off x="914400" y="2240280"/>
+            <a:ext cx="10363200" cy="1463040"/>
+          </a:xfrm>
+          <a:prstGeom prst="rect">
+            <a:avLst/>
+          </a:prstGeom>
+        </p:spPr>
+        <p:txBody>
+          <a:bodyPr wrap="square" anchor="ctr" lIns="0" tIns="0" rIns="0" bIns="0" rtlCol="0"/>
+          <a:lstStyle>
+            <a:lvl1pPr algn="l" marL="0" indent="0">
+              <a:lnSpc>
+                <a:spcPct val="100000"/>
+              </a:lnSpc>
+              <a:buNone/>
+              <a:defRPr lang="th-TH" sz="1800" dirty="0">
+                <a:solidFill>
+                  <a:srgbClr val="333333"/>
+                </a:solidFill>
+                <a:latin typeface="+mn-lt"/>
+                <a:ea typeface="+mn-ea"/>
+                <a:cs typeface="+mn-cs"/>
+              </a:defRPr>
+            </a:lvl1pPr>
+          </a:lstStyle>
+          <a:p>
+            <a:pPr algn="l" marL="0" indent="0">
+              <a:lnSpc>
+                <a:spcPct val="100000"/>
+              </a:lnSpc>
+              <a:buNone/>
+            </a:pPr>
+            <a:endParaRPr lang="th-TH" sz="1800"/>
+          </a:p>
+        </p:txBody>
+      </p:sp>
+      <p:sp>
+        <p:nvSpPr>
+          <p:cNvPr id="15" name="Takeaway Band"/>
+          <p:cNvSpPr/>
+          <p:nvPr/>
+        </p:nvSpPr>
+        <p:spPr>
+          <a:xfrm>
+            <a:off x="914400" y="3840480"/>
+            <a:ext cx="10363200" cy="411480"/>
+          </a:xfrm>
+          <a:prstGeom prst="rect">
+            <a:avLst/>
+          </a:prstGeom>
+          <a:solidFill>
+            <a:srgbClr val="23436D"/>
+          </a:solidFill>
+          <a:ln>
+            <a:noFill/>
+          </a:ln>
+        </p:spPr>
+        <p:txBody>
+          <a:bodyPr/>
+          <a:lstStyle/>
+          <a:p>
+            <a:endParaRPr lang="th-TH"/>
+          </a:p>
+        </p:txBody>
+      </p:sp>
+      <p:sp>
+        <p:nvSpPr>
+          <p:cNvPr id="16" name="Takeaway Label"/>
+          <p:cNvSpPr>
+            <a:spLocks noGrp="1"/>
+          </p:cNvSpPr>
+          <p:nvPr>
+            <p:ph type="body" idx="3"/>
+          </p:nvPr>
+        </p:nvSpPr>
+        <p:spPr>
+          <a:xfrm>
+            <a:off x="1097280" y="3901440"/>
+            <a:ext cx="1828800" cy="289560"/>
+          </a:xfrm>
+          <a:prstGeom prst="rect">
+            <a:avLst/>
+          </a:prstGeom>
+        </p:spPr>
+        <p:txBody>
+          <a:bodyPr wrap="square" anchor="ctr" lIns="0" tIns="0" rIns="0" bIns="0" rtlCol="0"/>
+          <a:lstStyle>
+            <a:lvl1pPr algn="l" marL="0" indent="0">
+              <a:lnSpc>
+                <a:spcPct val="100000"/>
+              </a:lnSpc>
+              <a:buNone/>
+              <a:defRPr lang="th-TH" sz="1200" b="1" spc="120" dirty="0">
+                <a:solidFill>
+                  <a:srgbClr val="8FBACE"/>
+                </a:solidFill>
+                <a:latin typeface="+mn-lt"/>
+                <a:ea typeface="+mn-ea"/>
+                <a:cs typeface="+mn-cs"/>
+              </a:defRPr>
+            </a:lvl1pPr>
+          </a:lstStyle>
+          <a:p>
+            <a:pPr algn="l" marL="0" indent="0">
+              <a:lnSpc>
+                <a:spcPct val="100000"/>
+              </a:lnSpc>
+              <a:buNone/>
+            </a:pPr>
+            <a:r>
+              <a:rPr lang="th-TH" sz="1200" b="1" spc="120" dirty="0">
+                <a:solidFill>
+                  <a:srgbClr val="8FBACE"/>
+                </a:solidFill>
+                <a:latin typeface="+mn-lt"/>
+                <a:ea typeface="+mn-ea"/>
+                <a:cs typeface="+mn-cs"/>
+              </a:rPr>
+              <a:t>สรุป</a:t>
+            </a:r>
+          </a:p>
+        </p:txBody>
+      </p:sp>
+      <p:sp>
+        <p:nvSpPr>
+          <p:cNvPr id="17" name="Takeaway Copy"/>
+          <p:cNvSpPr>
+            <a:spLocks noGrp="1"/>
+          </p:cNvSpPr>
+          <p:nvPr>
+            <p:ph type="body" idx="4"/>
+          </p:nvPr>
+        </p:nvSpPr>
+        <p:spPr>
+          <a:xfrm>
+            <a:off x="2926080" y="3901440"/>
+            <a:ext cx="8168640" cy="289560"/>
+          </a:xfrm>
+          <a:prstGeom prst="rect">
+            <a:avLst/>
+          </a:prstGeom>
+        </p:spPr>
+        <p:txBody>
+          <a:bodyPr wrap="square" anchor="ctr" lIns="0" tIns="0" rIns="0" bIns="0" rtlCol="0"/>
+          <a:lstStyle>
+            <a:lvl1pPr algn="l" marL="0" indent="0">
+              <a:lnSpc>
+                <a:spcPct val="100000"/>
+              </a:lnSpc>
+              <a:buNone/>
+              <a:defRPr lang="th-TH" sz="1400" dirty="0">
+                <a:solidFill>
+                  <a:srgbClr val="FFFFFF"/>
+                </a:solidFill>
+                <a:latin typeface="+mn-lt"/>
+                <a:ea typeface="+mn-ea"/>
+                <a:cs typeface="+mn-cs"/>
+              </a:defRPr>
+            </a:lvl1pPr>
+          </a:lstStyle>
+          <a:p>
+            <a:pPr algn="l" marL="0" indent="0">
+              <a:lnSpc>
+                <a:spcPct val="100000"/>
+              </a:lnSpc>
+              <a:buNone/>
+            </a:pPr>
+            <a:r>
+              <a:rPr lang="th-TH" sz="1400" dirty="0">
+                <a:solidFill>
+                  <a:srgbClr val="FFFFFF"/>
+                </a:solidFill>
+                <a:latin typeface="+mn-lt"/>
+                <a:ea typeface="+mn-ea"/>
+                <a:cs typeface="+mn-cs"/>
+              </a:rPr>
+              <a:t>ข้อสรุปหนึ่งบรรทัด</a:t>
+            </a:r>
+          </a:p>
+        </p:txBody>
+      </p:sp>
+      <p:sp>
+        <p:nvSpPr>
+          <p:cNvPr id="18" name="Caption 1"/>
+          <p:cNvSpPr>
+            <a:spLocks noGrp="1"/>
+          </p:cNvSpPr>
+          <p:nvPr>
+            <p:ph type="body" idx="20"/>
+          </p:nvPr>
+        </p:nvSpPr>
+        <p:spPr>
+          <a:xfrm>
+            <a:off x="914400" y="4389120"/>
+            <a:ext cx="3332480" cy="228600"/>
+          </a:xfrm>
+          <a:prstGeom prst="rect">
+            <a:avLst/>
+          </a:prstGeom>
+        </p:spPr>
+        <p:txBody>
+          <a:bodyPr wrap="square" anchor="ctr" lIns="0" tIns="0" rIns="0" bIns="0" rtlCol="0"/>
+          <a:lstStyle>
+            <a:lvl1pPr algn="l" marL="0" indent="0">
+              <a:lnSpc>
+                <a:spcPct val="130000"/>
+              </a:lnSpc>
+              <a:buNone/>
+              <a:defRPr lang="th-TH" sz="1200" dirty="0">
+                <a:solidFill>
+                  <a:srgbClr val="5F5F5F"/>
+                </a:solidFill>
+                <a:latin typeface="+mn-lt"/>
+                <a:ea typeface="+mn-ea"/>
+                <a:cs typeface="+mn-cs"/>
+              </a:defRPr>
+            </a:lvl1pPr>
+          </a:lstStyle>
+          <a:p>
+            <a:pPr algn="l" marL="0" indent="0">
+              <a:lnSpc>
+                <a:spcPct val="130000"/>
+              </a:lnSpc>
+              <a:buNone/>
+            </a:pPr>
+            <a:r>
+              <a:rPr lang="th-TH" sz="1200" dirty="0">
+                <a:solidFill>
+                  <a:srgbClr val="5F5F5F"/>
+                </a:solidFill>
+                <a:latin typeface="+mn-lt"/>
+                <a:ea typeface="+mn-ea"/>
+                <a:cs typeface="+mn-cs"/>
+              </a:rPr>
+              <a:t>สิ่งที่เห็นในภาพ</a:t>
+            </a:r>
+          </a:p>
+        </p:txBody>
+      </p:sp>
+      <p:sp>
+        <p:nvSpPr>
+          <p:cNvPr id="19" name="Evidence 1 Frame"/>
+          <p:cNvSpPr/>
+          <p:nvPr/>
+        </p:nvSpPr>
+        <p:spPr>
+          <a:xfrm>
+            <a:off x="914400" y="4674870"/>
+            <a:ext cx="3332480" cy="1360170"/>
+          </a:xfrm>
+          <a:prstGeom prst="rect">
+            <a:avLst/>
+          </a:prstGeom>
+          <a:noFill/>
+          <a:ln w="12700">
+            <a:solidFill>
+              <a:srgbClr val="E5E5E5"/>
+            </a:solidFill>
+          </a:ln>
+        </p:spPr>
+        <p:txBody>
+          <a:bodyPr/>
+          <a:lstStyle/>
+          <a:p>
+            <a:endParaRPr lang="th-TH"/>
+          </a:p>
+        </p:txBody>
+      </p:sp>
+      <p:sp>
+        <p:nvSpPr>
+          <p:cNvPr id="20" name="Evidence 1"/>
+          <p:cNvSpPr>
+            <a:spLocks noGrp="1"/>
+          </p:cNvSpPr>
+          <p:nvPr>
+            <p:ph type="pic" idx="21"/>
+          </p:nvPr>
+        </p:nvSpPr>
+        <p:spPr>
+          <a:xfrm>
+            <a:off x="914400" y="4674870"/>
+            <a:ext cx="3332480" cy="1360170"/>
+          </a:xfrm>
+          <a:prstGeom prst="rect">
+            <a:avLst/>
+          </a:prstGeom>
+        </p:spPr>
+        <p:txBody>
+          <a:bodyPr wrap="square" anchor="ctr" lIns="0" tIns="0" rIns="0" bIns="0" rtlCol="0"/>
+          <a:lstStyle>
+            <a:lvl1pPr algn="ctr" marL="0" indent="0">
+              <a:lnSpc>
+                <a:spcPct val="100000"/>
+              </a:lnSpc>
+              <a:buNone/>
+              <a:defRPr lang="th-TH" sz="1400" dirty="0">
+                <a:solidFill>
+                  <a:srgbClr val="5F5F5F"/>
+                </a:solidFill>
+                <a:latin typeface="+mn-lt"/>
+                <a:ea typeface="+mn-ea"/>
+                <a:cs typeface="+mn-cs"/>
+              </a:defRPr>
+            </a:lvl1pPr>
+          </a:lstStyle>
+          <a:p>
+            <a:pPr algn="ctr" marL="0" indent="0">
+              <a:lnSpc>
+                <a:spcPct val="100000"/>
+              </a:lnSpc>
+              <a:buNone/>
+            </a:pPr>
+            <a:endParaRPr lang="th-TH" sz="1400"/>
+          </a:p>
+        </p:txBody>
+      </p:sp>
+      <p:sp>
+        <p:nvSpPr>
+          <p:cNvPr id="21" name="Caption 2"/>
+          <p:cNvSpPr>
+            <a:spLocks noGrp="1"/>
+          </p:cNvSpPr>
+          <p:nvPr>
+            <p:ph type="body" idx="22"/>
+          </p:nvPr>
+        </p:nvSpPr>
+        <p:spPr>
+          <a:xfrm>
+            <a:off x="4429760" y="4389120"/>
+            <a:ext cx="3332480" cy="228600"/>
+          </a:xfrm>
+          <a:prstGeom prst="rect">
+            <a:avLst/>
+          </a:prstGeom>
+        </p:spPr>
+        <p:txBody>
+          <a:bodyPr wrap="square" anchor="ctr" lIns="0" tIns="0" rIns="0" bIns="0" rtlCol="0"/>
+          <a:lstStyle>
+            <a:lvl1pPr algn="l" marL="0" indent="0">
+              <a:lnSpc>
+                <a:spcPct val="130000"/>
+              </a:lnSpc>
+              <a:buNone/>
+              <a:defRPr lang="th-TH" sz="1200" dirty="0">
+                <a:solidFill>
+                  <a:srgbClr val="5F5F5F"/>
+                </a:solidFill>
+                <a:latin typeface="+mn-lt"/>
+                <a:ea typeface="+mn-ea"/>
+                <a:cs typeface="+mn-cs"/>
+              </a:defRPr>
+            </a:lvl1pPr>
+          </a:lstStyle>
+          <a:p>
+            <a:pPr algn="l" marL="0" indent="0">
+              <a:lnSpc>
+                <a:spcPct val="130000"/>
+              </a:lnSpc>
+              <a:buNone/>
+            </a:pPr>
+            <a:r>
+              <a:rPr lang="th-TH" sz="1200" dirty="0">
+                <a:solidFill>
+                  <a:srgbClr val="5F5F5F"/>
+                </a:solidFill>
+                <a:latin typeface="+mn-lt"/>
+                <a:ea typeface="+mn-ea"/>
+                <a:cs typeface="+mn-cs"/>
+              </a:rPr>
+              <a:t>สิ่งที่เห็นในภาพ</a:t>
+            </a:r>
+          </a:p>
+        </p:txBody>
+      </p:sp>
+      <p:sp>
+        <p:nvSpPr>
+          <p:cNvPr id="22" name="Evidence 2 Frame"/>
+          <p:cNvSpPr/>
+          <p:nvPr/>
+        </p:nvSpPr>
+        <p:spPr>
+          <a:xfrm>
+            <a:off x="4429760" y="4674870"/>
+            <a:ext cx="3332480" cy="1360170"/>
+          </a:xfrm>
+          <a:prstGeom prst="rect">
+            <a:avLst/>
+          </a:prstGeom>
+          <a:noFill/>
+          <a:ln w="12700">
+            <a:solidFill>
+              <a:srgbClr val="E5E5E5"/>
+            </a:solidFill>
+          </a:ln>
+        </p:spPr>
+        <p:txBody>
+          <a:bodyPr/>
+          <a:lstStyle/>
+          <a:p>
+            <a:endParaRPr lang="th-TH"/>
+          </a:p>
+        </p:txBody>
+      </p:sp>
+      <p:sp>
+        <p:nvSpPr>
+          <p:cNvPr id="23" name="Evidence 2"/>
+          <p:cNvSpPr>
+            <a:spLocks noGrp="1"/>
+          </p:cNvSpPr>
+          <p:nvPr>
+            <p:ph type="pic" idx="23"/>
+          </p:nvPr>
+        </p:nvSpPr>
+        <p:spPr>
+          <a:xfrm>
+            <a:off x="4429760" y="4674870"/>
+            <a:ext cx="3332480" cy="1360170"/>
+          </a:xfrm>
+          <a:prstGeom prst="rect">
+            <a:avLst/>
+          </a:prstGeom>
+        </p:spPr>
+        <p:txBody>
+          <a:bodyPr wrap="square" anchor="ctr" lIns="0" tIns="0" rIns="0" bIns="0" rtlCol="0"/>
+          <a:lstStyle>
+            <a:lvl1pPr algn="ctr" marL="0" indent="0">
+              <a:lnSpc>
+                <a:spcPct val="100000"/>
+              </a:lnSpc>
+              <a:buNone/>
+              <a:defRPr lang="th-TH" sz="1400" dirty="0">
+                <a:solidFill>
+                  <a:srgbClr val="5F5F5F"/>
+                </a:solidFill>
+                <a:latin typeface="+mn-lt"/>
+                <a:ea typeface="+mn-ea"/>
+                <a:cs typeface="+mn-cs"/>
+              </a:defRPr>
+            </a:lvl1pPr>
+          </a:lstStyle>
+          <a:p>
+            <a:pPr algn="ctr" marL="0" indent="0">
+              <a:lnSpc>
+                <a:spcPct val="100000"/>
+              </a:lnSpc>
+              <a:buNone/>
+            </a:pPr>
+            <a:endParaRPr lang="th-TH" sz="1400"/>
+          </a:p>
+        </p:txBody>
+      </p:sp>
+      <p:sp>
+        <p:nvSpPr>
+          <p:cNvPr id="24" name="Caption 3"/>
+          <p:cNvSpPr>
+            <a:spLocks noGrp="1"/>
+          </p:cNvSpPr>
+          <p:nvPr>
+            <p:ph type="body" idx="24"/>
+          </p:nvPr>
+        </p:nvSpPr>
+        <p:spPr>
+          <a:xfrm>
+            <a:off x="7945120" y="4389120"/>
+            <a:ext cx="3332480" cy="228600"/>
+          </a:xfrm>
+          <a:prstGeom prst="rect">
+            <a:avLst/>
+          </a:prstGeom>
+        </p:spPr>
+        <p:txBody>
+          <a:bodyPr wrap="square" anchor="ctr" lIns="0" tIns="0" rIns="0" bIns="0" rtlCol="0"/>
+          <a:lstStyle>
+            <a:lvl1pPr algn="l" marL="0" indent="0">
+              <a:lnSpc>
+                <a:spcPct val="130000"/>
+              </a:lnSpc>
+              <a:buNone/>
+              <a:defRPr lang="th-TH" sz="1200" dirty="0">
+                <a:solidFill>
+                  <a:srgbClr val="5F5F5F"/>
+                </a:solidFill>
+                <a:latin typeface="+mn-lt"/>
+                <a:ea typeface="+mn-ea"/>
+                <a:cs typeface="+mn-cs"/>
+              </a:defRPr>
+            </a:lvl1pPr>
+          </a:lstStyle>
+          <a:p>
+            <a:pPr algn="l" marL="0" indent="0">
+              <a:lnSpc>
+                <a:spcPct val="130000"/>
+              </a:lnSpc>
+              <a:buNone/>
+            </a:pPr>
+            <a:r>
+              <a:rPr lang="th-TH" sz="1200" dirty="0">
+                <a:solidFill>
+                  <a:srgbClr val="5F5F5F"/>
+                </a:solidFill>
+                <a:latin typeface="+mn-lt"/>
+                <a:ea typeface="+mn-ea"/>
+                <a:cs typeface="+mn-cs"/>
+              </a:rPr>
+              <a:t>สิ่งที่เห็นในภาพ</a:t>
+            </a:r>
+          </a:p>
+        </p:txBody>
+      </p:sp>
+      <p:sp>
+        <p:nvSpPr>
+          <p:cNvPr id="25" name="Evidence 3 Frame"/>
+          <p:cNvSpPr/>
+          <p:nvPr/>
+        </p:nvSpPr>
+        <p:spPr>
+          <a:xfrm>
+            <a:off x="7945120" y="4674870"/>
+            <a:ext cx="3332480" cy="1360170"/>
+          </a:xfrm>
+          <a:prstGeom prst="rect">
+            <a:avLst/>
+          </a:prstGeom>
+          <a:noFill/>
+          <a:ln w="12700">
+            <a:solidFill>
+              <a:srgbClr val="E5E5E5"/>
+            </a:solidFill>
+          </a:ln>
+        </p:spPr>
+        <p:txBody>
+          <a:bodyPr/>
+          <a:lstStyle/>
+          <a:p>
+            <a:endParaRPr lang="th-TH"/>
+          </a:p>
+        </p:txBody>
+      </p:sp>
+      <p:sp>
+        <p:nvSpPr>
+          <p:cNvPr id="26" name="Evidence 3"/>
+          <p:cNvSpPr>
+            <a:spLocks noGrp="1"/>
+          </p:cNvSpPr>
+          <p:nvPr>
+            <p:ph type="pic" idx="25"/>
+          </p:nvPr>
+        </p:nvSpPr>
+        <p:spPr>
+          <a:xfrm>
+            <a:off x="7945120" y="4674870"/>
+            <a:ext cx="3332480" cy="1360170"/>
+          </a:xfrm>
+          <a:prstGeom prst="rect">
+            <a:avLst/>
+          </a:prstGeom>
+        </p:spPr>
+        <p:txBody>
+          <a:bodyPr wrap="square" anchor="ctr" lIns="0" tIns="0" rIns="0" bIns="0" rtlCol="0"/>
+          <a:lstStyle>
+            <a:lvl1pPr algn="ctr" marL="0" indent="0">
+              <a:lnSpc>
+                <a:spcPct val="100000"/>
+              </a:lnSpc>
+              <a:buNone/>
+              <a:defRPr lang="th-TH" sz="1400" dirty="0">
+                <a:solidFill>
+                  <a:srgbClr val="5F5F5F"/>
+                </a:solidFill>
+                <a:latin typeface="+mn-lt"/>
+                <a:ea typeface="+mn-ea"/>
+                <a:cs typeface="+mn-cs"/>
+              </a:defRPr>
+            </a:lvl1pPr>
+          </a:lstStyle>
+          <a:p>
+            <a:pPr algn="ctr" marL="0" indent="0">
+              <a:lnSpc>
+                <a:spcPct val="100000"/>
+              </a:lnSpc>
+              <a:buNone/>
+            </a:pPr>
+            <a:endParaRPr lang="th-TH" sz="1400"/>
+          </a:p>
+        </p:txBody>
+      </p:sp>
+      <p:sp>
+        <p:nvSpPr>
+          <p:cNvPr id="90" name="Footer Rule"/>
+          <p:cNvSpPr/>
+          <p:nvPr/>
+        </p:nvSpPr>
+        <p:spPr>
+          <a:xfrm>
+            <a:off x="914400" y="6172200"/>
+            <a:ext cx="10363200" cy="12700"/>
+          </a:xfrm>
+          <a:prstGeom prst="rect">
+            <a:avLst/>
+          </a:prstGeom>
+          <a:solidFill>
+            <a:srgbClr val="E5E5E5"/>
+          </a:solidFill>
+          <a:ln>
+            <a:noFill/>
+          </a:ln>
+        </p:spPr>
+        <p:txBody>
+          <a:bodyPr/>
+          <a:lstStyle/>
+          <a:p>
+            <a:endParaRPr lang="th-TH"/>
+          </a:p>
+        </p:txBody>
+      </p:sp>
+      <p:sp>
+        <p:nvSpPr>
+          <p:cNvPr id="91" name="Date Placeholder"/>
+          <p:cNvSpPr>
+            <a:spLocks noGrp="1"/>
+          </p:cNvSpPr>
+          <p:nvPr>
+            <p:ph type="dt" idx="10"/>
+          </p:nvPr>
+        </p:nvSpPr>
+        <p:spPr>
+          <a:xfrm>
+            <a:off x="914400" y="6309360"/>
+            <a:ext cx="2743200" cy="274320"/>
+          </a:xfrm>
+          <a:prstGeom prst="rect">
+            <a:avLst/>
+          </a:prstGeom>
+        </p:spPr>
+        <p:txBody>
+          <a:bodyPr wrap="square" anchor="ctr" lIns="0" tIns="0" rIns="0" bIns="0" rtlCol="0"/>
+          <a:lstStyle>
+            <a:lvl1pPr algn="l" marL="0" indent="0">
+              <a:lnSpc>
+                <a:spcPct val="100000"/>
+              </a:lnSpc>
+              <a:buNone/>
+              <a:defRPr lang="th-TH" sz="1000" dirty="0">
+                <a:solidFill>
+                  <a:srgbClr val="5F5F5F"/>
+                </a:solidFill>
+                <a:latin typeface="+mn-lt"/>
+                <a:ea typeface="+mn-ea"/>
+                <a:cs typeface="+mn-cs"/>
+              </a:defRPr>
+            </a:lvl1pPr>
+          </a:lstStyle>
+          <a:p>
+            <a:pPr algn="l" marL="0" indent="0">
+              <a:lnSpc>
+                <a:spcPct val="100000"/>
+              </a:lnSpc>
+              <a:buNone/>
+            </a:pPr>
+            <a:endParaRPr lang="th-TH" sz="1000"/>
+          </a:p>
+        </p:txBody>
+      </p:sp>
+      <p:sp>
+        <p:nvSpPr>
+          <p:cNvPr id="92" name="Footer Placeholder"/>
+          <p:cNvSpPr>
+            <a:spLocks noGrp="1"/>
+          </p:cNvSpPr>
+          <p:nvPr>
+            <p:ph type="ftr" idx="11"/>
+          </p:nvPr>
+        </p:nvSpPr>
+        <p:spPr>
+          <a:xfrm>
+            <a:off x="4572000" y="6309360"/>
+            <a:ext cx="3657600" cy="274320"/>
+          </a:xfrm>
+          <a:prstGeom prst="rect">
+            <a:avLst/>
+          </a:prstGeom>
+        </p:spPr>
+        <p:txBody>
+          <a:bodyPr wrap="square" anchor="ctr" lIns="0" tIns="0" rIns="0" bIns="0" rtlCol="0"/>
+          <a:lstStyle>
+            <a:lvl1pPr algn="ctr" marL="0" indent="0">
+              <a:lnSpc>
+                <a:spcPct val="100000"/>
+              </a:lnSpc>
+              <a:buNone/>
+              <a:defRPr lang="th-TH" sz="1000" dirty="0">
+                <a:solidFill>
+                  <a:srgbClr val="5F5F5F"/>
+                </a:solidFill>
+                <a:latin typeface="+mn-lt"/>
+                <a:ea typeface="+mn-ea"/>
+                <a:cs typeface="+mn-cs"/>
+              </a:defRPr>
+            </a:lvl1pPr>
+          </a:lstStyle>
+          <a:p>
+            <a:pPr algn="ctr" marL="0" indent="0">
+              <a:lnSpc>
+                <a:spcPct val="100000"/>
+              </a:lnSpc>
+              <a:buNone/>
+            </a:pPr>
+            <a:endParaRPr lang="th-TH" sz="1000"/>
+          </a:p>
+        </p:txBody>
+      </p:sp>
+      <p:sp>
+        <p:nvSpPr>
+          <p:cNvPr id="93" name="Slide Number Placeholder"/>
+          <p:cNvSpPr>
+            <a:spLocks noGrp="1"/>
+          </p:cNvSpPr>
+          <p:nvPr>
+            <p:ph type="sldNum" sz="quarter" idx="12"/>
+          </p:nvPr>
+        </p:nvSpPr>
+        <p:spPr>
+          <a:xfrm>
+            <a:off x="9906000" y="6309360"/>
+            <a:ext cx="1371600" cy="274320"/>
+          </a:xfrm>
+          <a:prstGeom prst="rect">
+            <a:avLst/>
+          </a:prstGeom>
+        </p:spPr>
+        <p:txBody>
+          <a:bodyPr anchor="ctr"/>
+          <a:lstStyle>
+            <a:lvl1pPr algn="r" marL="0" indent="0">
+              <a:lnSpc>
+                <a:spcPct val="100000"/>
+              </a:lnSpc>
+              <a:buNone/>
+              <a:defRPr lang="th-TH" sz="1000" dirty="0">
+                <a:solidFill>
+                  <a:srgbClr val="5F5F5F"/>
+                </a:solidFill>
+                <a:latin typeface="+mn-lt"/>
+                <a:ea typeface="+mn-ea"/>
+                <a:cs typeface="+mn-cs"/>
+              </a:defRPr>
+            </a:lvl1pPr>
+          </a:lstStyle>
+          <a:p>
+            <a:pPr algn="r" marL="0" indent="0">
+              <a:buNone/>
+            </a:pPr>
+            <a:fld id="{B7E3A1C2-4F5D-4A88-9C1E-6D2F0A93B451}" type="slidenum">
+              <a:rPr lang="th-TH" sz="1000">
+                <a:solidFill>
+                  <a:srgbClr val="5F5F5F"/>
+                </a:solidFill>
+                <a:latin typeface="+mn-lt"/>
+                <a:cs typeface="+mn-cs"/>
+              </a:rPr>
+              <a:t>2</a:t>
+            </a:fld>
+            <a:endParaRPr lang="th-TH" sz="1000"/>
+          </a:p>
+        </p:txBody>
+      </p:sp>
+      <p:pic>
+        <p:nvPicPr>
+          <p:cNvPr id="94" name="NCT Mark"/>
+          <p:cNvPicPr>
+            <a:picLocks noChangeAspect="1"/>
+          </p:cNvPicPr>
+          <p:nvPr/>
+        </p:nvPicPr>
+        <p:blipFill>
+          <a:blip r:embed="rId2"/>
+          <a:stretch>
+            <a:fillRect/>
+          </a:stretch>
+        </p:blipFill>
+        <p:spPr>
+          <a:xfrm>
+            <a:off x="9494520" y="6289360"/>
+            <a:ext cx="274320" cy="174498"/>
+          </a:xfrm>
+          <a:prstGeom prst="rect">
+            <a:avLst/>
+          </a:prstGeom>
+        </p:spPr>
+      </p:pic>
+    </p:spTree>
+  </p:cSld>
+  <p:clrMapOvr>
+    <a:masterClrMapping/>
+  </p:clrMapOvr>
+</p:sldLayout>
+</file>
+
 <file path=ppt/slideLayouts/slideLayout2.xml><?xml version="1.0" encoding="utf-8"?>
 <p:sldLayout xmlns:a="http://schemas.openxmlformats.org/drawingml/2006/main" xmlns:r="http://schemas.openxmlformats.org/officeDocument/2006/relationships" xmlns:p="http://schemas.openxmlformats.org/presentationml/2006/main" type="secHead" showMasterSp="0" preserve="1">
   <p:cSld name="02 Section Divider">
@@ -12919,7 +14876,7 @@
           <p:nvPr/>
         </p:nvPicPr>
         <p:blipFill>
-          <a:blip r:embed="rId18"/>
+          <a:blip r:embed="rId20"/>
           <a:stretch>
             <a:fillRect/>
           </a:stretch>
@@ -12954,6 +14911,8 @@
     <p:sldLayoutId id="2147483662" r:id="rId14"/>
     <p:sldLayoutId id="2147483663" r:id="rId15"/>
     <p:sldLayoutId id="2147483664" r:id="rId16"/>
+    <p:sldLayoutId id="2147483665" r:id="rId17"/>
+    <p:sldLayoutId id="2147483666" r:id="rId18"/>
   </p:sldLayoutIdLst>
   <p:txStyles>
     <p:titleStyle>
@@ -15975,6 +17934,745 @@
             <a:pPr/>
             <a:r>
               <a:rPr lang="th-TH" dirty="0"/>
+              <a:t>5. Implementation Stage</a:t>
+            </a:r>
+          </a:p>
+        </p:txBody>
+      </p:sp>
+      <p:sp>
+        <p:nvSpPr>
+          <p:cNvPr id="3" name="KAL"/>
+          <p:cNvSpPr>
+            <a:spLocks noGrp="1"/>
+          </p:cNvSpPr>
+          <p:nvPr>
+            <p:ph type="body" idx="1"/>
+          </p:nvPr>
+        </p:nvSpPr>
+        <p:spPr/>
+        <p:txBody>
+          <a:bodyPr/>
+          <a:lstStyle/>
+          <a:p>
+            <a:pPr/>
+            <a:r>
+              <a:rPr lang="th-TH" dirty="0"/>
+              <a:t>Key Activity :</a:t>
+            </a:r>
+          </a:p>
+        </p:txBody>
+      </p:sp>
+      <p:sp>
+        <p:nvSpPr>
+          <p:cNvPr id="4" name="KAV"/>
+          <p:cNvSpPr>
+            <a:spLocks noGrp="1"/>
+          </p:cNvSpPr>
+          <p:nvPr>
+            <p:ph type="body" idx="2"/>
+          </p:nvPr>
+        </p:nvSpPr>
+        <p:spPr/>
+        <p:txBody>
+          <a:bodyPr/>
+          <a:lstStyle/>
+          <a:p>
+            <a:pPr/>
+            <a:r>
+              <a:rPr lang="th-TH" dirty="0"/>
+              <a:t>ตั้งค่าสภาพแวดล้อม ติดตั้งฮาร์ดแวร์และซอฟต์แวร์</a:t>
+            </a:r>
+          </a:p>
+        </p:txBody>
+      </p:sp>
+      <p:sp>
+        <p:nvSpPr>
+          <p:cNvPr id="5" name="PL"/>
+          <p:cNvSpPr>
+            <a:spLocks noGrp="1"/>
+          </p:cNvSpPr>
+          <p:nvPr>
+            <p:ph type="body" idx="3"/>
+          </p:nvPr>
+        </p:nvSpPr>
+        <p:spPr/>
+        <p:txBody>
+          <a:bodyPr/>
+          <a:lstStyle/>
+          <a:p>
+            <a:pPr/>
+            <a:r>
+              <a:rPr lang="th-TH" dirty="0"/>
+              <a:t>Participant :</a:t>
+            </a:r>
+          </a:p>
+        </p:txBody>
+      </p:sp>
+      <p:sp>
+        <p:nvSpPr>
+          <p:cNvPr id="6" name="PV"/>
+          <p:cNvSpPr>
+            <a:spLocks noGrp="1"/>
+          </p:cNvSpPr>
+          <p:nvPr>
+            <p:ph type="body" idx="4"/>
+          </p:nvPr>
+        </p:nvSpPr>
+        <p:spPr/>
+        <p:txBody>
+          <a:bodyPr/>
+          <a:lstStyle/>
+          <a:p>
+            <a:pPr/>
+            <a:r>
+              <a:rPr lang="th-TH" dirty="0"/>
+              <a:t>NCT Infra Engineer, ทีมไอทีลูกค้า, Business Analyst</a:t>
+            </a:r>
+          </a:p>
+        </p:txBody>
+      </p:sp>
+      <p:sp>
+        <p:nvSpPr>
+          <p:cNvPr id="7" name="PN"/>
+          <p:cNvSpPr>
+            <a:spLocks noGrp="1"/>
+          </p:cNvSpPr>
+          <p:nvPr>
+            <p:ph type="body" idx="5"/>
+          </p:nvPr>
+        </p:nvSpPr>
+        <p:spPr/>
+        <p:txBody>
+          <a:bodyPr/>
+          <a:lstStyle/>
+          <a:p>
+            <a:pPr/>
+            <a:r>
+              <a:rPr lang="th-TH" dirty="0"/>
+              <a:t>01</a:t>
+            </a:r>
+          </a:p>
+        </p:txBody>
+      </p:sp>
+      <p:sp>
+        <p:nvSpPr>
+          <p:cNvPr id="8" name="PP"/>
+          <p:cNvSpPr>
+            <a:spLocks noGrp="1"/>
+          </p:cNvSpPr>
+          <p:nvPr>
+            <p:ph type="body" idx="6"/>
+          </p:nvPr>
+        </p:nvSpPr>
+        <p:spPr/>
+        <p:txBody>
+          <a:bodyPr/>
+          <a:lstStyle/>
+          <a:p>
+            <a:pPr/>
+            <a:r>
+              <a:rPr lang="th-TH" dirty="0"/>
+              <a:t>Preparation Phase</a:t>
+            </a:r>
+          </a:p>
+        </p:txBody>
+      </p:sp>
+      <p:sp>
+        <p:nvSpPr>
+          <p:cNvPr id="9" name="PI"/>
+          <p:cNvSpPr>
+            <a:spLocks noGrp="1"/>
+          </p:cNvSpPr>
+          <p:nvPr>
+            <p:ph type="body" idx="7"/>
+          </p:nvPr>
+        </p:nvSpPr>
+        <p:spPr/>
+        <p:txBody>
+          <a:bodyPr/>
+          <a:lstStyle/>
+          <a:p>
+            <a:pPr/>
+            <a:r>
+              <a:rPr lang="th-TH" dirty="0"/>
+              <a:t>สรุปสเปกเครื่องและบริการคลาวด์ที่ต้องเตรียมให้พร้อมก่อนเริ่มงานพัฒนา</a:t>
+            </a:r>
+          </a:p>
+        </p:txBody>
+      </p:sp>
+      <p:sp>
+        <p:nvSpPr>
+          <p:cNvPr id="10" name="PB"/>
+          <p:cNvSpPr>
+            <a:spLocks noGrp="1"/>
+          </p:cNvSpPr>
+          <p:nvPr>
+            <p:ph type="body" idx="8"/>
+          </p:nvPr>
+        </p:nvSpPr>
+        <p:spPr/>
+        <p:txBody>
+          <a:bodyPr/>
+          <a:lstStyle/>
+          <a:p>
+            <a:pPr/>
+            <a:r>
+              <a:rPr lang="th-TH" dirty="0"/>
+              <a:t>PRD · 4 คอร์ / 16GB / SSD 300GB</a:t>
+            </a:r>
+          </a:p>
+          <a:p>
+            <a:pPr/>
+            <a:r>
+              <a:rPr lang="th-TH" dirty="0"/>
+              <a:t>QA · 4 คอร์ / 16GB / SSD 150GB</a:t>
+            </a:r>
+          </a:p>
+          <a:p>
+            <a:pPr/>
+            <a:r>
+              <a:rPr lang="th-TH" dirty="0"/>
+              <a:t>Windows Server 2022 ทั้งสองเครื่อง</a:t>
+            </a:r>
+          </a:p>
+          <a:p>
+            <a:pPr/>
+            <a:r>
+              <a:rPr lang="th-TH" dirty="0"/>
+              <a:t>Lambda, EC2 และ Cognito เปิดทั้งสองสภาพแวดล้อม</a:t>
+            </a:r>
+          </a:p>
+        </p:txBody>
+      </p:sp>
+    </p:spTree>
+  </p:cSld>
+  <p:clrMapOvr>
+    <a:masterClrMapping/>
+  </p:clrMapOvr>
+</p:sld>
+</file>
+
+<file path=ppt/slides/slide17.xml><?xml version="1.0" encoding="utf-8"?>
+<p:sld xmlns:a="http://schemas.openxmlformats.org/drawingml/2006/main" xmlns:r="http://schemas.openxmlformats.org/officeDocument/2006/relationships" xmlns:p="http://schemas.openxmlformats.org/presentationml/2006/main">
+  <p:cSld name="">
+    <p:spTree>
+      <p:nvGrpSpPr>
+        <p:cNvPr id="1" name=""/>
+        <p:cNvGrpSpPr/>
+        <p:nvPr/>
+      </p:nvGrpSpPr>
+      <p:grpSpPr>
+        <a:xfrm>
+          <a:off x="0" y="0"/>
+          <a:ext cx="0" cy="0"/>
+          <a:chOff x="0" y="0"/>
+          <a:chExt cx="0" cy="0"/>
+        </a:xfrm>
+      </p:grpSpPr>
+      <p:sp>
+        <p:nvSpPr>
+          <p:cNvPr id="2" name="Title"/>
+          <p:cNvSpPr>
+            <a:spLocks noGrp="1"/>
+          </p:cNvSpPr>
+          <p:nvPr>
+            <p:ph type="title"/>
+          </p:nvPr>
+        </p:nvSpPr>
+        <p:spPr/>
+        <p:txBody>
+          <a:bodyPr/>
+          <a:lstStyle/>
+          <a:p>
+            <a:pPr/>
+            <a:r>
+              <a:rPr lang="th-TH" dirty="0"/>
+              <a:t>8. Project Training</a:t>
+            </a:r>
+          </a:p>
+        </p:txBody>
+      </p:sp>
+      <p:sp>
+        <p:nvSpPr>
+          <p:cNvPr id="3" name="K"/>
+          <p:cNvSpPr>
+            <a:spLocks noGrp="1"/>
+          </p:cNvSpPr>
+          <p:nvPr>
+            <p:ph type="body" idx="1"/>
+          </p:nvPr>
+        </p:nvSpPr>
+        <p:spPr/>
+        <p:txBody>
+          <a:bodyPr/>
+          <a:lstStyle/>
+          <a:p>
+            <a:pPr/>
+            <a:r>
+              <a:rPr lang="th-TH" dirty="0"/>
+              <a:t>วัตถุประสงค์ของการอบรม</a:t>
+            </a:r>
+          </a:p>
+        </p:txBody>
+      </p:sp>
+      <p:graphicFrame>
+        <p:nvGraphicFramePr>
+          <p:cNvPr id="4" name="Training Table"/>
+          <p:cNvGraphicFramePr>
+            <a:graphicFrameLocks noGrp="1"/>
+          </p:cNvGraphicFramePr>
+          <p:nvPr>
+            <p:ph type="tbl" idx="2"/>
+          </p:nvPr>
+        </p:nvGraphicFramePr>
+        <p:xfrm>
+          <a:off x="914400" y="2240280"/>
+          <a:ext cx="8092440" cy="1051560"/>
+        </p:xfrm>
+        <a:graphic>
+          <a:graphicData uri="http://schemas.openxmlformats.org/drawingml/2006/table">
+            <a:tbl>
+              <a:tblPr firstRow="1" bandRow="1">
+                <a:tableStyleId>{9C1E7B34-52D8-4A61-B0F7-3E5A2C81D046}</a:tableStyleId>
+              </a:tblPr>
+              <a:tblGrid>
+                <a:gridCol w="1600200"/>
+                <a:gridCol w="3200400"/>
+                <a:gridCol w="1188720"/>
+                <a:gridCol w="2103120"/>
+              </a:tblGrid>
+              <a:tr h="347472">
+                <a:tc>
+                  <a:txBody>
+                    <a:bodyPr/>
+                    <a:lstStyle/>
+                    <a:p>
+                      <a:pPr algn="l" marL="0" indent="0">
+                        <a:buNone/>
+                      </a:pPr>
+                      <a:r>
+                        <a:rPr lang="th-TH" sz="1100" b="1" spc="60" dirty="0">
+                          <a:solidFill>
+                            <a:srgbClr val="FFFFFF"/>
+                          </a:solidFill>
+                          <a:latin typeface="+mn-lt"/>
+                          <a:cs typeface="+mn-cs"/>
+                        </a:rPr>
+                        <a:t>หลักสูตร</a:t>
+                      </a:r>
+                    </a:p>
+                  </a:txBody>
+                  <a:tcPr marL="73152" marR="73152" marT="73152" marB="73152" anchor="ctr"/>
+                </a:tc>
+                <a:tc>
+                  <a:txBody>
+                    <a:bodyPr/>
+                    <a:lstStyle/>
+                    <a:p>
+                      <a:pPr algn="l" marL="0" indent="0">
+                        <a:buNone/>
+                      </a:pPr>
+                      <a:r>
+                        <a:rPr lang="th-TH" sz="1100" b="1" spc="60" dirty="0">
+                          <a:solidFill>
+                            <a:srgbClr val="FFFFFF"/>
+                          </a:solidFill>
+                          <a:latin typeface="+mn-lt"/>
+                          <a:cs typeface="+mn-cs"/>
+                        </a:rPr>
+                        <a:t>วัตถุประสงค์</a:t>
+                      </a:r>
+                    </a:p>
+                  </a:txBody>
+                  <a:tcPr marL="73152" marR="73152" marT="73152" marB="73152" anchor="ctr"/>
+                </a:tc>
+                <a:tc>
+                  <a:txBody>
+                    <a:bodyPr/>
+                    <a:lstStyle/>
+                    <a:p>
+                      <a:pPr algn="ctr" marL="0" indent="0">
+                        <a:buNone/>
+                      </a:pPr>
+                      <a:r>
+                        <a:rPr lang="th-TH" sz="1100" b="1" spc="60" dirty="0">
+                          <a:solidFill>
+                            <a:srgbClr val="FFFFFF"/>
+                          </a:solidFill>
+                          <a:latin typeface="+mn-lt"/>
+                          <a:cs typeface="+mn-cs"/>
+                        </a:rPr>
+                        <a:t>ระยะเวลา</a:t>
+                      </a:r>
+                    </a:p>
+                  </a:txBody>
+                  <a:tcPr marL="73152" marR="73152" marT="73152" marB="73152" anchor="ctr"/>
+                </a:tc>
+                <a:tc>
+                  <a:txBody>
+                    <a:bodyPr/>
+                    <a:lstStyle/>
+                    <a:p>
+                      <a:pPr algn="l" marL="0" indent="0">
+                        <a:buNone/>
+                      </a:pPr>
+                      <a:r>
+                        <a:rPr lang="th-TH" sz="1100" b="1" spc="60" dirty="0">
+                          <a:solidFill>
+                            <a:srgbClr val="FFFFFF"/>
+                          </a:solidFill>
+                          <a:latin typeface="+mn-lt"/>
+                          <a:cs typeface="+mn-cs"/>
+                        </a:rPr>
+                        <a:t>เงื่อนไขการจัด</a:t>
+                      </a:r>
+                    </a:p>
+                  </a:txBody>
+                  <a:tcPr marL="73152" marR="73152" marT="73152" marB="73152" anchor="ctr"/>
+                </a:tc>
+              </a:tr>
+              <a:tr h="352044">
+                <a:tc>
+                  <a:txBody>
+                    <a:bodyPr/>
+                    <a:lstStyle/>
+                    <a:p>
+                      <a:pPr algn="l" marL="0" indent="0">
+                        <a:buNone/>
+                      </a:pPr>
+                      <a:r>
+                        <a:rPr lang="th-TH" sz="1000" b="1" dirty="0">
+                          <a:solidFill>
+                            <a:srgbClr val="333333"/>
+                          </a:solidFill>
+                          <a:latin typeface="+mn-lt"/>
+                          <a:cs typeface="+mn-cs"/>
+                        </a:rPr>
+                        <a:t>1. การใช้งานสำหรับผู้ใช้</a:t>
+                      </a:r>
+                    </a:p>
+                  </a:txBody>
+                  <a:tcPr marL="73152" marR="73152" marT="73152" marB="73152" anchor="ctr"/>
+                </a:tc>
+                <a:tc>
+                  <a:txBody>
+                    <a:bodyPr/>
+                    <a:lstStyle/>
+                    <a:p>
+                      <a:pPr algn="l" marL="0" indent="0">
+                        <a:buNone/>
+                      </a:pPr>
+                      <a:r>
+                        <a:rPr lang="th-TH" sz="1000" dirty="0">
+                          <a:solidFill>
+                            <a:srgbClr val="333333"/>
+                          </a:solidFill>
+                          <a:latin typeface="+mn-lt"/>
+                          <a:cs typeface="+mn-cs"/>
+                        </a:rPr>
+                        <a:t>เข้าใจการใช้งานระบบในงานประจำวัน</a:t>
+                      </a:r>
+                    </a:p>
+                  </a:txBody>
+                  <a:tcPr marL="73152" marR="73152" marT="73152" marB="73152" anchor="ctr"/>
+                </a:tc>
+                <a:tc>
+                  <a:txBody>
+                    <a:bodyPr/>
+                    <a:lstStyle/>
+                    <a:p>
+                      <a:pPr algn="ctr" marL="0" indent="0">
+                        <a:buNone/>
+                      </a:pPr>
+                      <a:r>
+                        <a:rPr lang="th-TH" sz="1000" dirty="0">
+                          <a:solidFill>
+                            <a:srgbClr val="333333"/>
+                          </a:solidFill>
+                          <a:latin typeface="+mn-lt"/>
+                          <a:cs typeface="+mn-cs"/>
+                        </a:rPr>
+                        <a:t>4 ชั่วโมง</a:t>
+                      </a:r>
+                    </a:p>
+                  </a:txBody>
+                  <a:tcPr marL="73152" marR="73152" marT="73152" marB="73152" anchor="ctr"/>
+                </a:tc>
+                <a:tc>
+                  <a:txBody>
+                    <a:bodyPr/>
+                    <a:lstStyle/>
+                    <a:p>
+                      <a:pPr algn="l" marL="0" indent="0">
+                        <a:buNone/>
+                      </a:pPr>
+                      <a:r>
+                        <a:rPr lang="th-TH" sz="1000" dirty="0">
+                          <a:solidFill>
+                            <a:srgbClr val="333333"/>
+                          </a:solidFill>
+                          <a:latin typeface="+mn-lt"/>
+                          <a:cs typeface="+mn-cs"/>
+                        </a:rPr>
+                        <a:t>จัดครั้งเดียว ที่สำนักงานหรือออนไลน์</a:t>
+                      </a:r>
+                    </a:p>
+                  </a:txBody>
+                  <a:tcPr marL="73152" marR="73152" marT="73152" marB="73152" anchor="ctr"/>
+                </a:tc>
+              </a:tr>
+              <a:tr h="352044">
+                <a:tc>
+                  <a:txBody>
+                    <a:bodyPr/>
+                    <a:lstStyle/>
+                    <a:p>
+                      <a:pPr algn="l" marL="0" indent="0">
+                        <a:buNone/>
+                      </a:pPr>
+                      <a:r>
+                        <a:rPr lang="th-TH" sz="1000" b="1" dirty="0">
+                          <a:solidFill>
+                            <a:srgbClr val="333333"/>
+                          </a:solidFill>
+                          <a:latin typeface="+mn-lt"/>
+                          <a:cs typeface="+mn-cs"/>
+                        </a:rPr>
+                        <a:t>2. การดูแลสำหรับผู้ดูแลระบบ</a:t>
+                      </a:r>
+                    </a:p>
+                  </a:txBody>
+                  <a:tcPr marL="73152" marR="73152" marT="73152" marB="73152" anchor="ctr"/>
+                </a:tc>
+                <a:tc>
+                  <a:txBody>
+                    <a:bodyPr/>
+                    <a:lstStyle/>
+                    <a:p>
+                      <a:pPr algn="l" marL="0" indent="0">
+                        <a:buNone/>
+                      </a:pPr>
+                      <a:r>
+                        <a:rPr lang="th-TH" sz="1000" dirty="0">
+                          <a:solidFill>
+                            <a:srgbClr val="333333"/>
+                          </a:solidFill>
+                          <a:latin typeface="+mn-lt"/>
+                          <a:cs typeface="+mn-cs"/>
+                        </a:rPr>
+                        <a:t>เข้าใจการบำรุงรักษาและแก้ปัญหาเบื้องต้น</a:t>
+                      </a:r>
+                    </a:p>
+                  </a:txBody>
+                  <a:tcPr marL="73152" marR="73152" marT="73152" marB="73152" anchor="ctr"/>
+                </a:tc>
+                <a:tc>
+                  <a:txBody>
+                    <a:bodyPr/>
+                    <a:lstStyle/>
+                    <a:p>
+                      <a:pPr algn="ctr" marL="0" indent="0">
+                        <a:buNone/>
+                      </a:pPr>
+                      <a:r>
+                        <a:rPr lang="th-TH" sz="1000" dirty="0">
+                          <a:solidFill>
+                            <a:srgbClr val="333333"/>
+                          </a:solidFill>
+                          <a:latin typeface="+mn-lt"/>
+                          <a:cs typeface="+mn-cs"/>
+                        </a:rPr>
+                        <a:t>4 ชั่วโมง</a:t>
+                      </a:r>
+                    </a:p>
+                  </a:txBody>
+                  <a:tcPr marL="73152" marR="73152" marT="73152" marB="73152" anchor="ctr"/>
+                </a:tc>
+                <a:tc>
+                  <a:txBody>
+                    <a:bodyPr/>
+                    <a:lstStyle/>
+                    <a:p>
+                      <a:pPr algn="l" marL="0" indent="0">
+                        <a:buNone/>
+                      </a:pPr>
+                      <a:r>
+                        <a:rPr lang="th-TH" sz="1000" dirty="0">
+                          <a:solidFill>
+                            <a:srgbClr val="333333"/>
+                          </a:solidFill>
+                          <a:latin typeface="+mn-lt"/>
+                          <a:cs typeface="+mn-cs"/>
+                        </a:rPr>
+                        <a:t>จัดครั้งเดียว ที่สำนักงานหรือออนไลน์</a:t>
+                      </a:r>
+                    </a:p>
+                  </a:txBody>
+                  <a:tcPr marL="73152" marR="73152" marT="73152" marB="73152" anchor="ctr"/>
+                </a:tc>
+              </a:tr>
+            </a:tbl>
+          </a:graphicData>
+        </a:graphic>
+      </p:graphicFrame>
+      <p:sp>
+        <p:nvSpPr>
+          <p:cNvPr id="5" name="TL"/>
+          <p:cNvSpPr>
+            <a:spLocks noGrp="1"/>
+          </p:cNvSpPr>
+          <p:nvPr>
+            <p:ph type="body" idx="3"/>
+          </p:nvPr>
+        </p:nvSpPr>
+        <p:spPr/>
+        <p:txBody>
+          <a:bodyPr/>
+          <a:lstStyle/>
+          <a:p>
+            <a:pPr/>
+            <a:r>
+              <a:rPr lang="th-TH" dirty="0"/>
+              <a:t>สรุป</a:t>
+            </a:r>
+          </a:p>
+        </p:txBody>
+      </p:sp>
+      <p:sp>
+        <p:nvSpPr>
+          <p:cNvPr id="6" name="TC"/>
+          <p:cNvSpPr>
+            <a:spLocks noGrp="1"/>
+          </p:cNvSpPr>
+          <p:nvPr>
+            <p:ph type="body" idx="4"/>
+          </p:nvPr>
+        </p:nvSpPr>
+        <p:spPr/>
+        <p:txBody>
+          <a:bodyPr/>
+          <a:lstStyle/>
+          <a:p>
+            <a:pPr/>
+            <a:r>
+              <a:rPr lang="th-TH" dirty="0"/>
+              <a:t>อบรมสองหลักสูตร รวม 8 ชั่วโมง จบภายในสัปดาห์เดียวก่อนวันขึ้นระบบ</a:t>
+            </a:r>
+          </a:p>
+        </p:txBody>
+      </p:sp>
+      <p:sp>
+        <p:nvSpPr>
+          <p:cNvPr id="7" name="C1"/>
+          <p:cNvSpPr>
+            <a:spLocks noGrp="1"/>
+          </p:cNvSpPr>
+          <p:nvPr>
+            <p:ph type="body" idx="20"/>
+          </p:nvPr>
+        </p:nvSpPr>
+        <p:spPr/>
+        <p:txBody>
+          <a:bodyPr/>
+          <a:lstStyle/>
+          <a:p>
+            <a:pPr/>
+            <a:r>
+              <a:rPr lang="th-TH" dirty="0"/>
+              <a:t>อบรมที่สำนักงานลูกค้า 20-50 คน</a:t>
+            </a:r>
+          </a:p>
+        </p:txBody>
+      </p:sp>
+      <p:sp>
+        <p:nvSpPr>
+          <p:cNvPr id="8" name="C2"/>
+          <p:cNvSpPr>
+            <a:spLocks noGrp="1"/>
+          </p:cNvSpPr>
+          <p:nvPr>
+            <p:ph type="body" idx="22"/>
+          </p:nvPr>
+        </p:nvSpPr>
+        <p:spPr/>
+        <p:txBody>
+          <a:bodyPr/>
+          <a:lstStyle/>
+          <a:p>
+            <a:pPr/>
+            <a:r>
+              <a:rPr lang="th-TH" dirty="0"/>
+              <a:t>อบรมกลุ่มย่อยในห้องประชุม 2-20 คน</a:t>
+            </a:r>
+          </a:p>
+        </p:txBody>
+      </p:sp>
+      <p:sp>
+        <p:nvSpPr>
+          <p:cNvPr id="9" name="C3"/>
+          <p:cNvSpPr>
+            <a:spLocks noGrp="1"/>
+          </p:cNvSpPr>
+          <p:nvPr>
+            <p:ph type="body" idx="24"/>
+          </p:nvPr>
+        </p:nvSpPr>
+        <p:spPr/>
+        <p:txBody>
+          <a:bodyPr/>
+          <a:lstStyle/>
+          <a:p>
+            <a:pPr/>
+            <a:r>
+              <a:rPr lang="th-TH" dirty="0"/>
+              <a:t>อบรมออนไลน์ผ่าน MS Teams</a:t>
+            </a:r>
+          </a:p>
+        </p:txBody>
+      </p:sp>
+    </p:spTree>
+  </p:cSld>
+  <p:clrMapOvr>
+    <a:masterClrMapping/>
+  </p:clrMapOvr>
+</p:sld>
+</file>
+
+<file path=ppt/slides/slide18.xml><?xml version="1.0" encoding="utf-8"?>
+<p:sld xmlns:a="http://schemas.openxmlformats.org/drawingml/2006/main" xmlns:r="http://schemas.openxmlformats.org/officeDocument/2006/relationships" xmlns:p="http://schemas.openxmlformats.org/presentationml/2006/main">
+  <p:cSld name="">
+    <p:spTree>
+      <p:nvGrpSpPr>
+        <p:cNvPr id="1" name=""/>
+        <p:cNvGrpSpPr/>
+        <p:nvPr/>
+      </p:nvGrpSpPr>
+      <p:grpSpPr>
+        <a:xfrm>
+          <a:off x="0" y="0"/>
+          <a:ext cx="0" cy="0"/>
+          <a:chOff x="0" y="0"/>
+          <a:chExt cx="0" cy="0"/>
+        </a:xfrm>
+      </p:grpSpPr>
+      <p:sp>
+        <p:nvSpPr>
+          <p:cNvPr id="2" name="Title"/>
+          <p:cNvSpPr>
+            <a:spLocks noGrp="1"/>
+          </p:cNvSpPr>
+          <p:nvPr>
+            <p:ph type="title"/>
+          </p:nvPr>
+        </p:nvSpPr>
+        <p:spPr/>
+        <p:txBody>
+          <a:bodyPr/>
+          <a:lstStyle/>
+          <a:p>
+            <a:pPr/>
+            <a:r>
+              <a:rPr lang="th-TH" dirty="0"/>
               <a:t>ขอบคุณครับ</a:t>
             </a:r>
           </a:p>
@@ -16728,7 +19426,7 @@
             <a:spLocks noGrp="1"/>
           </p:cNvSpPr>
           <p:nvPr>
-            <p:ph type="body" idx="1"/>
+            <p:ph type="body" idx="20"/>
           </p:nvPr>
         </p:nvSpPr>
         <p:spPr/>
@@ -16751,7 +19449,7 @@
             <a:spLocks noGrp="1"/>
           </p:cNvSpPr>
           <p:nvPr>
-            <p:ph type="body" idx="2"/>
+            <p:ph type="body" idx="21"/>
           </p:nvPr>
         </p:nvSpPr>
         <p:spPr/>
@@ -16774,7 +19472,7 @@
             <a:spLocks noGrp="1"/>
           </p:cNvSpPr>
           <p:nvPr>
-            <p:ph type="body" idx="3"/>
+            <p:ph type="body" idx="22"/>
           </p:nvPr>
         </p:nvSpPr>
         <p:spPr/>
@@ -16797,7 +19495,7 @@
             <a:spLocks noGrp="1"/>
           </p:cNvSpPr>
           <p:nvPr>
-            <p:ph type="body" idx="4"/>
+            <p:ph type="body" idx="23"/>
           </p:nvPr>
         </p:nvSpPr>
         <p:spPr/>
@@ -16820,7 +19518,7 @@
             <a:spLocks noGrp="1"/>
           </p:cNvSpPr>
           <p:nvPr>
-            <p:ph type="body" idx="5"/>
+            <p:ph type="body" idx="24"/>
           </p:nvPr>
         </p:nvSpPr>
         <p:spPr/>
@@ -16843,7 +19541,7 @@
             <a:spLocks noGrp="1"/>
           </p:cNvSpPr>
           <p:nvPr>
-            <p:ph type="body" idx="6"/>
+            <p:ph type="body" idx="25"/>
           </p:nvPr>
         </p:nvSpPr>
         <p:spPr/>
@@ -16866,7 +19564,7 @@
             <a:spLocks noGrp="1"/>
           </p:cNvSpPr>
           <p:nvPr>
-            <p:ph type="body" idx="7"/>
+            <p:ph type="body" idx="26"/>
           </p:nvPr>
         </p:nvSpPr>
         <p:spPr/>
@@ -16889,7 +19587,7 @@
             <a:spLocks noGrp="1"/>
           </p:cNvSpPr>
           <p:nvPr>
-            <p:ph type="body" idx="8"/>
+            <p:ph type="body" idx="27"/>
           </p:nvPr>
         </p:nvSpPr>
         <p:spPr/>
@@ -16912,7 +19610,7 @@
             <a:spLocks noGrp="1"/>
           </p:cNvSpPr>
           <p:nvPr>
-            <p:ph type="body" idx="9"/>
+            <p:ph type="body" idx="28"/>
           </p:nvPr>
         </p:nvSpPr>
         <p:spPr/>
@@ -16935,7 +19633,7 @@
             <a:spLocks noGrp="1"/>
           </p:cNvSpPr>
           <p:nvPr>
-            <p:ph type="body" idx="10"/>
+            <p:ph type="body" idx="29"/>
           </p:nvPr>
         </p:nvSpPr>
         <p:spPr/>
@@ -16958,7 +19656,7 @@
             <a:spLocks noGrp="1"/>
           </p:cNvSpPr>
           <p:nvPr>
-            <p:ph type="body" idx="11"/>
+            <p:ph type="body" idx="30"/>
           </p:nvPr>
         </p:nvSpPr>
         <p:spPr/>
@@ -16981,7 +19679,7 @@
             <a:spLocks noGrp="1"/>
           </p:cNvSpPr>
           <p:nvPr>
-            <p:ph type="body" idx="12"/>
+            <p:ph type="body" idx="31"/>
           </p:nvPr>
         </p:nvSpPr>
         <p:spPr/>
@@ -17004,7 +19702,7 @@
             <a:spLocks noGrp="1"/>
           </p:cNvSpPr>
           <p:nvPr>
-            <p:ph type="body" idx="13"/>
+            <p:ph type="body" idx="32"/>
           </p:nvPr>
         </p:nvSpPr>
         <p:spPr/>
@@ -17027,7 +19725,7 @@
             <a:spLocks noGrp="1"/>
           </p:cNvSpPr>
           <p:nvPr>
-            <p:ph type="body" idx="14"/>
+            <p:ph type="body" idx="33"/>
           </p:nvPr>
         </p:nvSpPr>
         <p:spPr/>
@@ -17192,7 +19890,7 @@
             <a:spLocks noGrp="1"/>
           </p:cNvSpPr>
           <p:nvPr>
-            <p:ph type="body" idx="2"/>
+            <p:ph type="body" idx="20"/>
           </p:nvPr>
         </p:nvSpPr>
         <p:spPr/>
@@ -17215,7 +19913,7 @@
             <a:spLocks noGrp="1"/>
           </p:cNvSpPr>
           <p:nvPr>
-            <p:ph type="body" idx="3"/>
+            <p:ph type="body" idx="21"/>
           </p:nvPr>
         </p:nvSpPr>
         <p:spPr/>
@@ -17238,7 +19936,7 @@
             <a:spLocks noGrp="1"/>
           </p:cNvSpPr>
           <p:nvPr>
-            <p:ph type="body" idx="4"/>
+            <p:ph type="body" idx="22"/>
           </p:nvPr>
         </p:nvSpPr>
         <p:spPr/>
@@ -17261,7 +19959,7 @@
             <a:spLocks noGrp="1"/>
           </p:cNvSpPr>
           <p:nvPr>
-            <p:ph type="body" idx="5"/>
+            <p:ph type="body" idx="23"/>
           </p:nvPr>
         </p:nvSpPr>
         <p:spPr/>
@@ -17284,7 +19982,7 @@
             <a:spLocks noGrp="1"/>
           </p:cNvSpPr>
           <p:nvPr>
-            <p:ph type="body" idx="6"/>
+            <p:ph type="body" idx="24"/>
           </p:nvPr>
         </p:nvSpPr>
         <p:spPr/>
@@ -17307,7 +20005,7 @@
             <a:spLocks noGrp="1"/>
           </p:cNvSpPr>
           <p:nvPr>
-            <p:ph type="body" idx="7"/>
+            <p:ph type="body" idx="25"/>
           </p:nvPr>
         </p:nvSpPr>
         <p:spPr/>
@@ -17330,7 +20028,7 @@
             <a:spLocks noGrp="1"/>
           </p:cNvSpPr>
           <p:nvPr>
-            <p:ph type="body" idx="8"/>
+            <p:ph type="body" idx="26"/>
           </p:nvPr>
         </p:nvSpPr>
         <p:spPr/>
@@ -17353,7 +20051,7 @@
             <a:spLocks noGrp="1"/>
           </p:cNvSpPr>
           <p:nvPr>
-            <p:ph type="body" idx="9"/>
+            <p:ph type="body" idx="27"/>
           </p:nvPr>
         </p:nvSpPr>
         <p:spPr/>
@@ -17376,7 +20074,7 @@
             <a:spLocks noGrp="1"/>
           </p:cNvSpPr>
           <p:nvPr>
-            <p:ph type="body" idx="10"/>
+            <p:ph type="body" idx="28"/>
           </p:nvPr>
         </p:nvSpPr>
         <p:spPr/>
@@ -17399,7 +20097,7 @@
             <a:spLocks noGrp="1"/>
           </p:cNvSpPr>
           <p:nvPr>
-            <p:ph type="body" idx="11"/>
+            <p:ph type="body" idx="29"/>
           </p:nvPr>
         </p:nvSpPr>
         <p:spPr/>
@@ -17422,7 +20120,7 @@
             <a:spLocks noGrp="1"/>
           </p:cNvSpPr>
           <p:nvPr>
-            <p:ph type="body" idx="12"/>
+            <p:ph type="body" idx="30"/>
           </p:nvPr>
         </p:nvSpPr>
         <p:spPr/>
@@ -17445,7 +20143,7 @@
             <a:spLocks noGrp="1"/>
           </p:cNvSpPr>
           <p:nvPr>
-            <p:ph type="body" idx="13"/>
+            <p:ph type="body" idx="31"/>
           </p:nvPr>
         </p:nvSpPr>
         <p:spPr/>
@@ -17468,7 +20166,7 @@
             <a:spLocks noGrp="1"/>
           </p:cNvSpPr>
           <p:nvPr>
-            <p:ph type="body" idx="14"/>
+            <p:ph type="body" idx="32"/>
           </p:nvPr>
         </p:nvSpPr>
         <p:spPr/>
@@ -17491,7 +20189,7 @@
             <a:spLocks noGrp="1"/>
           </p:cNvSpPr>
           <p:nvPr>
-            <p:ph type="body" idx="15"/>
+            <p:ph type="body" idx="33"/>
           </p:nvPr>
         </p:nvSpPr>
         <p:spPr/>
@@ -17514,7 +20212,7 @@
             <a:spLocks noGrp="1"/>
           </p:cNvSpPr>
           <p:nvPr>
-            <p:ph type="body" idx="16"/>
+            <p:ph type="body" idx="34"/>
           </p:nvPr>
         </p:nvSpPr>
         <p:spPr/>
@@ -17537,7 +20235,7 @@
             <a:spLocks noGrp="1"/>
           </p:cNvSpPr>
           <p:nvPr>
-            <p:ph type="body" idx="17"/>
+            <p:ph type="body" idx="35"/>
           </p:nvPr>
         </p:nvSpPr>
         <p:spPr/>
@@ -17560,7 +20258,7 @@
             <a:spLocks noGrp="1"/>
           </p:cNvSpPr>
           <p:nvPr>
-            <p:ph type="body" idx="18"/>
+            <p:ph type="body" idx="36"/>
           </p:nvPr>
         </p:nvSpPr>
         <p:spPr/>

--- a/NCT-Slide-Template-Demo.pptx
+++ b/NCT-Slide-Template-Demo.pptx
@@ -846,6 +846,37 @@
       </p:sp>
       <p:sp>
         <p:nvSpPr>
+          <p:cNvPr id="20" name="Ask Veil"/>
+          <p:cNvSpPr/>
+          <p:nvPr/>
+        </p:nvSpPr>
+        <p:spPr>
+          <a:xfrm>
+            <a:off x="0" y="0"/>
+            <a:ext cx="7315200" cy="6858000"/>
+          </a:xfrm>
+          <a:prstGeom prst="rect">
+            <a:avLst/>
+          </a:prstGeom>
+          <a:solidFill>
+            <a:srgbClr val="16324F">
+              <a:alpha val="55000"/>
+            </a:srgbClr>
+          </a:solidFill>
+          <a:ln>
+            <a:noFill/>
+          </a:ln>
+        </p:spPr>
+        <p:txBody>
+          <a:bodyPr/>
+          <a:lstStyle/>
+          <a:p>
+            <a:endParaRPr lang="th-TH"/>
+          </a:p>
+        </p:txBody>
+      </p:sp>
+      <p:sp>
+        <p:nvSpPr>
           <p:cNvPr id="12" name="Title Placeholder"/>
           <p:cNvSpPr>
             <a:spLocks noGrp="1"/>
@@ -962,7 +993,9 @@
               <a:buNone/>
               <a:defRPr lang="th-TH" sz="1200" b="1" spc="120" dirty="0">
                 <a:solidFill>
-                  <a:srgbClr val="8FBACE"/>
+                  <a:srgbClr val="FFFFFF">
+                    <a:alpha val="75000"/>
+                  </a:srgbClr>
                 </a:solidFill>
                 <a:latin typeface="+mn-lt"/>
                 <a:ea typeface="+mn-ea"/>
@@ -980,7 +1013,9 @@
             <a:r>
               <a:rPr lang="th-TH" sz="1200" b="1" spc="120" dirty="0">
                 <a:solidFill>
-                  <a:srgbClr val="8FBACE"/>
+                  <a:srgbClr val="FFFFFF">
+                    <a:alpha val="75000"/>
+                  </a:srgbClr>
                 </a:solidFill>
                 <a:latin typeface="+mn-lt"/>
                 <a:ea typeface="+mn-ea"/>
@@ -1015,13 +1050,13 @@
           <a:lstStyle>
             <a:lvl1pPr algn="l" marL="320040" indent="-320040">
               <a:lnSpc>
-                <a:spcPct val="140000"/>
+                <a:spcPct val="93000"/>
               </a:lnSpc>
               <a:spcBef>
                 <a:spcPts val="400"/>
               </a:spcBef>
               <a:buClr>
-                <a:srgbClr val="8FBACE"/>
+                <a:srgbClr val="FFFFFF"/>
               </a:buClr>
               <a:buSzPct val="90000"/>
               <a:buFont typeface="Arial"/>
@@ -1041,13 +1076,13 @@
           <a:p>
             <a:pPr algn="l" marL="320040" indent="-320040">
               <a:lnSpc>
-                <a:spcPct val="140000"/>
+                <a:spcPct val="93000"/>
               </a:lnSpc>
               <a:spcBef>
                 <a:spcPts val="400"/>
               </a:spcBef>
               <a:buClr>
-                <a:srgbClr val="8FBACE"/>
+                <a:srgbClr val="FFFFFF"/>
               </a:buClr>
               <a:buSzPct val="90000"/>
               <a:buFont typeface="Arial"/>
@@ -1082,7 +1117,7 @@
         <p:spPr>
           <a:xfrm>
             <a:off x="914400" y="4709160"/>
-            <a:ext cx="5486400" cy="228600"/>
+            <a:ext cx="5486400" cy="457200"/>
           </a:xfrm>
           <a:prstGeom prst="rect">
             <a:avLst/>
@@ -1093,34 +1128,34 @@
           <a:lstStyle>
             <a:lvl1pPr algn="l" marL="0" indent="0">
               <a:lnSpc>
-                <a:spcPct val="100000"/>
-              </a:lnSpc>
-              <a:buNone/>
-              <a:defRPr lang="th-TH" sz="1400" b="1" dirty="0">
-                <a:solidFill>
-                  <a:srgbClr val="8FBACE"/>
-                </a:solidFill>
-                <a:latin typeface="+mn-lt"/>
-                <a:ea typeface="+mn-ea"/>
-                <a:cs typeface="+mn-cs"/>
+                <a:spcPct val="115000"/>
+              </a:lnSpc>
+              <a:buNone/>
+              <a:defRPr lang="th-TH" sz="2000" b="1" dirty="0">
+                <a:solidFill>
+                  <a:srgbClr val="FFFFFF"/>
+                </a:solidFill>
+                <a:latin typeface="+mj-lt"/>
+                <a:ea typeface="+mj-ea"/>
+                <a:cs typeface="+mj-cs"/>
               </a:defRPr>
             </a:lvl1pPr>
           </a:lstStyle>
           <a:p>
             <a:pPr algn="l" marL="0" indent="0">
               <a:lnSpc>
-                <a:spcPct val="100000"/>
+                <a:spcPct val="115000"/>
               </a:lnSpc>
               <a:buNone/>
             </a:pPr>
             <a:r>
-              <a:rPr lang="th-TH" sz="1400" b="1" dirty="0">
-                <a:solidFill>
-                  <a:srgbClr val="8FBACE"/>
-                </a:solidFill>
-                <a:latin typeface="+mn-lt"/>
-                <a:ea typeface="+mn-ea"/>
-                <a:cs typeface="+mn-cs"/>
+              <a:rPr lang="th-TH" sz="2000" b="1" dirty="0">
+                <a:solidFill>
+                  <a:srgbClr val="FFFFFF"/>
+                </a:solidFill>
+                <a:latin typeface="+mj-lt"/>
+                <a:ea typeface="+mj-ea"/>
+                <a:cs typeface="+mj-cs"/>
               </a:rPr>
               <a:t>ต้องการคำตอบภายในวันที่ ...</a:t>
             </a:r>
@@ -1151,7 +1186,7 @@
           <a:lstStyle>
             <a:lvl1pPr algn="l" marL="0" indent="0">
               <a:lnSpc>
-                <a:spcPct val="135000"/>
+                <a:spcPct val="89000"/>
               </a:lnSpc>
               <a:buNone/>
               <a:defRPr lang="th-TH" sz="1400" dirty="0">
@@ -1169,7 +1204,7 @@
           <a:p>
             <a:pPr algn="l" marL="0" indent="0">
               <a:lnSpc>
-                <a:spcPct val="135000"/>
+                <a:spcPct val="89000"/>
               </a:lnSpc>
               <a:buNone/>
             </a:pPr>
@@ -1191,7 +1226,7 @@
       </p:sp>
       <p:sp>
         <p:nvSpPr>
-          <p:cNvPr id="20" name="Footer Scrim"/>
+          <p:cNvPr id="21" name="Footer Scrim"/>
           <p:cNvSpPr/>
           <p:nvPr/>
         </p:nvSpPr>
@@ -6478,7 +6513,7 @@
           <a:lstStyle>
             <a:lvl1pPr algn="l" marL="274320" indent="-274320">
               <a:lnSpc>
-                <a:spcPct val="145000"/>
+                <a:spcPct val="96000"/>
               </a:lnSpc>
               <a:spcBef>
                 <a:spcPts val="300"/>
@@ -6502,7 +6537,7 @@
             </a:lvl1pPr>
             <a:lvl2pPr algn="l" marL="274320" indent="-274320">
               <a:lnSpc>
-                <a:spcPct val="145000"/>
+                <a:spcPct val="96000"/>
               </a:lnSpc>
               <a:spcBef>
                 <a:spcPts val="300"/>
@@ -6526,7 +6561,7 @@
             </a:lvl2pPr>
             <a:lvl3pPr algn="l" marL="274320" indent="-274320">
               <a:lnSpc>
-                <a:spcPct val="145000"/>
+                <a:spcPct val="96000"/>
               </a:lnSpc>
               <a:spcBef>
                 <a:spcPts val="300"/>
@@ -6552,7 +6587,7 @@
           <a:p>
             <a:pPr algn="l" marL="274320" indent="-274320">
               <a:lnSpc>
-                <a:spcPct val="145000"/>
+                <a:spcPct val="96000"/>
               </a:lnSpc>
               <a:spcBef>
                 <a:spcPts val="300"/>
@@ -6581,7 +6616,7 @@
           <a:p>
             <a:pPr algn="l" marL="274320" indent="-274320">
               <a:lnSpc>
-                <a:spcPct val="145000"/>
+                <a:spcPct val="96000"/>
               </a:lnSpc>
               <a:spcBef>
                 <a:spcPts val="300"/>
@@ -6610,7 +6645,7 @@
           <a:p>
             <a:pPr algn="l" marL="274320" indent="-274320">
               <a:lnSpc>
-                <a:spcPct val="145000"/>
+                <a:spcPct val="96000"/>
               </a:lnSpc>
               <a:spcBef>
                 <a:spcPts val="300"/>
@@ -7123,6 +7158,17 @@
               <a:buNone/>
             </a:pPr>
             <a:r>
+              <a:rPr lang="th-TH" sz="1000" b="1" dirty="0">
+                <a:solidFill>
+                  <a:srgbClr val="23436D"/>
+                </a:solidFill>
+                <a:latin typeface="+mn-lt"/>
+                <a:ea typeface="+mn-ea"/>
+                <a:cs typeface="+mn-cs"/>
+              </a:rPr>
+              <a:t>■ </a:t>
+            </a:r>
+            <a:r>
               <a:rPr lang="th-TH" sz="1000" dirty="0">
                 <a:solidFill>
                   <a:srgbClr val="5F5F5F"/>
@@ -7131,7 +7177,51 @@
                 <a:ea typeface="+mn-ea"/>
                 <a:cs typeface="+mn-cs"/>
               </a:rPr>
-              <a:t>■ หมวด 1  ■ หมวด 2  ■ หมวด 3</a:t>
+              <a:t>หมวด 1   </a:t>
+            </a:r>
+            <a:r>
+              <a:rPr lang="th-TH" sz="1000" b="1" dirty="0">
+                <a:solidFill>
+                  <a:srgbClr val="216B7F"/>
+                </a:solidFill>
+                <a:latin typeface="+mn-lt"/>
+                <a:ea typeface="+mn-ea"/>
+                <a:cs typeface="+mn-cs"/>
+              </a:rPr>
+              <a:t>■ </a:t>
+            </a:r>
+            <a:r>
+              <a:rPr lang="th-TH" sz="1000" dirty="0">
+                <a:solidFill>
+                  <a:srgbClr val="5F5F5F"/>
+                </a:solidFill>
+                <a:latin typeface="+mn-lt"/>
+                <a:ea typeface="+mn-ea"/>
+                <a:cs typeface="+mn-cs"/>
+              </a:rPr>
+              <a:t>หมวด 2   </a:t>
+            </a:r>
+            <a:r>
+              <a:rPr lang="th-TH" sz="1000" b="1" dirty="0">
+                <a:solidFill>
+                  <a:srgbClr val="16324F"/>
+                </a:solidFill>
+                <a:latin typeface="+mn-lt"/>
+                <a:ea typeface="+mn-ea"/>
+                <a:cs typeface="+mn-cs"/>
+              </a:rPr>
+              <a:t>■ </a:t>
+            </a:r>
+            <a:r>
+              <a:rPr lang="th-TH" sz="1000" dirty="0">
+                <a:solidFill>
+                  <a:srgbClr val="5F5F5F"/>
+                </a:solidFill>
+                <a:latin typeface="+mn-lt"/>
+                <a:ea typeface="+mn-ea"/>
+                <a:cs typeface="+mn-cs"/>
+              </a:rPr>
+              <a:t>หมวด 3</a:t>
             </a:r>
           </a:p>
         </p:txBody>
@@ -15476,6 +15566,12 @@
                     </a:p>
                   </a:txBody>
                   <a:tcPr marL="73152" marR="73152" marT="73152" marB="73152" anchor="ctr">
+                    <a:lnB w="12700" cap="flat">
+                      <a:solidFill>
+                        <a:srgbClr val="FFFFFF"/>
+                      </a:solidFill>
+                      <a:prstDash val="solid"/>
+                    </a:lnB>
                     <a:solidFill>
                       <a:srgbClr val="BFE3CA"/>
                     </a:solidFill>
@@ -15621,6 +15717,12 @@
                     </a:p>
                   </a:txBody>
                   <a:tcPr marL="73152" marR="73152" marT="73152" marB="73152" anchor="ctr">
+                    <a:lnB w="12700" cap="flat">
+                      <a:solidFill>
+                        <a:srgbClr val="FFFFFF"/>
+                      </a:solidFill>
+                      <a:prstDash val="solid"/>
+                    </a:lnB>
                     <a:solidFill>
                       <a:srgbClr val="BFE3CA"/>
                     </a:solidFill>
@@ -15766,6 +15868,12 @@
                     </a:p>
                   </a:txBody>
                   <a:tcPr marL="73152" marR="73152" marT="73152" marB="73152" anchor="ctr">
+                    <a:lnB w="12700" cap="flat">
+                      <a:solidFill>
+                        <a:srgbClr val="FFFFFF"/>
+                      </a:solidFill>
+                      <a:prstDash val="solid"/>
+                    </a:lnB>
                     <a:solidFill>
                       <a:srgbClr val="BFE3CA"/>
                     </a:solidFill>
@@ -15911,6 +16019,12 @@
                     </a:p>
                   </a:txBody>
                   <a:tcPr marL="73152" marR="73152" marT="73152" marB="73152" anchor="ctr">
+                    <a:lnB w="12700" cap="flat">
+                      <a:solidFill>
+                        <a:srgbClr val="FFFFFF"/>
+                      </a:solidFill>
+                      <a:prstDash val="solid"/>
+                    </a:lnB>
                     <a:solidFill>
                       <a:srgbClr val="F2D9AC"/>
                     </a:solidFill>
@@ -16056,6 +16170,12 @@
                     </a:p>
                   </a:txBody>
                   <a:tcPr marL="73152" marR="73152" marT="73152" marB="73152" anchor="ctr">
+                    <a:lnB w="12700" cap="flat">
+                      <a:solidFill>
+                        <a:srgbClr val="FFFFFF"/>
+                      </a:solidFill>
+                      <a:prstDash val="solid"/>
+                    </a:lnB>
                     <a:solidFill>
                       <a:srgbClr val="F2D9AC"/>
                     </a:solidFill>
@@ -16201,6 +16321,12 @@
                     </a:p>
                   </a:txBody>
                   <a:tcPr marL="73152" marR="73152" marT="73152" marB="73152" anchor="ctr">
+                    <a:lnB w="12700" cap="flat">
+                      <a:solidFill>
+                        <a:srgbClr val="FFFFFF"/>
+                      </a:solidFill>
+                      <a:prstDash val="solid"/>
+                    </a:lnB>
                     <a:solidFill>
                       <a:srgbClr val="F6D0CC"/>
                     </a:solidFill>
@@ -16346,6 +16472,12 @@
                     </a:p>
                   </a:txBody>
                   <a:tcPr marL="73152" marR="73152" marT="73152" marB="73152" anchor="ctr">
+                    <a:lnB w="12700" cap="flat">
+                      <a:solidFill>
+                        <a:srgbClr val="FFFFFF"/>
+                      </a:solidFill>
+                      <a:prstDash val="solid"/>
+                    </a:lnB>
                     <a:solidFill>
                       <a:srgbClr val="BFE3CA"/>
                     </a:solidFill>
@@ -16491,6 +16623,12 @@
                     </a:p>
                   </a:txBody>
                   <a:tcPr marL="73152" marR="73152" marT="73152" marB="73152" anchor="ctr">
+                    <a:lnB w="12700" cap="flat">
+                      <a:solidFill>
+                        <a:srgbClr val="FFFFFF"/>
+                      </a:solidFill>
+                      <a:prstDash val="solid"/>
+                    </a:lnB>
                     <a:solidFill>
                       <a:srgbClr val="F6D0CC"/>
                     </a:solidFill>
@@ -17427,7 +17565,11 @@
                       </a:r>
                     </a:p>
                   </a:txBody>
-                  <a:tcPr marL="73152" marR="73152" marT="73152" marB="73152" anchor="ctr"/>
+                  <a:tcPr marL="73152" marR="73152" marT="73152" marB="73152" anchor="ctr">
+                    <a:solidFill>
+                      <a:srgbClr val="EDF3F5"/>
+                    </a:solidFill>
+                  </a:tcPr>
                 </a:tc>
                 <a:tc>
                   <a:txBody>
@@ -17517,7 +17659,11 @@
                       </a:r>
                     </a:p>
                   </a:txBody>
-                  <a:tcPr marL="73152" marR="73152" marT="73152" marB="73152" anchor="ctr"/>
+                  <a:tcPr marL="73152" marR="73152" marT="73152" marB="73152" anchor="ctr">
+                    <a:solidFill>
+                      <a:srgbClr val="D8EBEC"/>
+                    </a:solidFill>
+                  </a:tcPr>
                 </a:tc>
                 <a:tc>
                   <a:txBody>
@@ -17607,7 +17753,11 @@
                       </a:r>
                     </a:p>
                   </a:txBody>
-                  <a:tcPr marL="73152" marR="73152" marT="73152" marB="73152" anchor="ctr"/>
+                  <a:tcPr marL="73152" marR="73152" marT="73152" marB="73152" anchor="ctr">
+                    <a:solidFill>
+                      <a:srgbClr val="EDF3F5"/>
+                    </a:solidFill>
+                  </a:tcPr>
                 </a:tc>
                 <a:tc>
                   <a:txBody>
@@ -17697,7 +17847,11 @@
                       </a:r>
                     </a:p>
                   </a:txBody>
-                  <a:tcPr marL="73152" marR="73152" marT="73152" marB="73152" anchor="ctr"/>
+                  <a:tcPr marL="73152" marR="73152" marT="73152" marB="73152" anchor="ctr">
+                    <a:solidFill>
+                      <a:srgbClr val="D8EBEC"/>
+                    </a:solidFill>
+                  </a:tcPr>
                 </a:tc>
                 <a:tc>
                   <a:txBody>
@@ -17787,7 +17941,11 @@
                       </a:r>
                     </a:p>
                   </a:txBody>
-                  <a:tcPr marL="73152" marR="73152" marT="73152" marB="73152" anchor="ctr"/>
+                  <a:tcPr marL="73152" marR="73152" marT="73152" marB="73152" anchor="ctr">
+                    <a:solidFill>
+                      <a:srgbClr val="EDF3F5"/>
+                    </a:solidFill>
+                  </a:tcPr>
                 </a:tc>
                 <a:tc>
                   <a:txBody>

--- a/NCT-Slide-Template-Demo.pptx
+++ b/NCT-Slide-Template-Demo.pptx
@@ -23,6 +23,7 @@
     <p:sldId id="271" r:id="rId17"/>
     <p:sldId id="272" r:id="rId18"/>
     <p:sldId id="273" r:id="rId19"/>
+    <p:sldId id="274" r:id="rId20"/>
   </p:sldIdLst>
   <p:sldSz cx="12192000" cy="6858000"/>
   <p:notesSz cx="6858000" cy="9144000"/>
@@ -115,6 +116,259 @@
 </p:presentation>
 </file>
 
+<file path=ppt/charts/chart1.xml><?xml version="1.0" encoding="utf-8"?>
+<c:chartSpace xmlns:c="http://schemas.openxmlformats.org/drawingml/2006/chart" xmlns:a="http://schemas.openxmlformats.org/drawingml/2006/main" xmlns:r="http://schemas.openxmlformats.org/officeDocument/2006/relationships">
+  <c:roundedCorners val="0"/>
+  <c:chart>
+    <c:autoTitleDeleted val="1"/>
+    <c:plotArea>
+      <c:layout/>
+      <c:barChart>
+        <c:barDir val="col"/>
+        <c:grouping val="clustered"/>
+        <c:varyColors val="0"/>
+        <c:ser>
+          <c:idx val="0"/>
+          <c:order val="0"/>
+          <c:tx>
+            <c:v>เวลาปิดงบ</c:v>
+          </c:tx>
+          <c:spPr>
+            <a:solidFill>
+              <a:srgbClr val="A4A4A4"/>
+            </a:solidFill>
+          </c:spPr>
+          <c:invertIfNegative val="0"/>
+          <c:dPt>
+            <c:idx val="4"/>
+            <c:invertIfNegative val="0"/>
+            <c:bubble3D val="0"/>
+            <c:spPr>
+              <a:solidFill>
+                <a:srgbClr val="2A5EA0"/>
+              </a:solidFill>
+            </c:spPr>
+          </c:dPt>
+          <c:dLbls>
+            <c:dLbl>
+              <c:idx val="4"/>
+              <c:spPr>
+                <a:noFill/>
+                <a:ln>
+                  <a:noFill/>
+                </a:ln>
+              </c:spPr>
+              <c:txPr>
+                <a:bodyPr/>
+                <a:lstStyle/>
+                <a:p>
+                  <a:pPr>
+                    <a:defRPr sz="1400" b="1">
+                      <a:solidFill>
+                        <a:srgbClr val="333333"/>
+                      </a:solidFill>
+                      <a:latin typeface="+mn-lt"/>
+                      <a:ea typeface="+mn-ea"/>
+                      <a:cs typeface="+mn-cs"/>
+                    </a:defRPr>
+                  </a:pPr>
+                  <a:endParaRPr lang="th-TH"/>
+                </a:p>
+              </c:txPr>
+              <c:dLblPos val="outEnd"/>
+              <c:showLegendKey val="0"/>
+              <c:showVal val="1"/>
+              <c:showCatName val="0"/>
+              <c:showSerName val="0"/>
+              <c:showPercent val="0"/>
+              <c:showBubbleSize val="0"/>
+            </c:dLbl>
+            <c:showLegendKey val="0"/>
+            <c:showVal val="0"/>
+            <c:showCatName val="0"/>
+            <c:showSerName val="0"/>
+            <c:showPercent val="0"/>
+            <c:showBubbleSize val="0"/>
+          </c:dLbls>
+          <c:cat>
+            <c:strLit>
+              <c:ptCount val="6"/>
+              <c:pt idx="0">
+                <c:v>ม.ค.</c:v>
+              </c:pt>
+              <c:pt idx="1">
+                <c:v>ก.พ.</c:v>
+              </c:pt>
+              <c:pt idx="2">
+                <c:v>มี.ค.</c:v>
+              </c:pt>
+              <c:pt idx="3">
+                <c:v>เม.ย.</c:v>
+              </c:pt>
+              <c:pt idx="4">
+                <c:v>พ.ค.</c:v>
+              </c:pt>
+              <c:pt idx="5">
+                <c:v>มิ.ย.</c:v>
+              </c:pt>
+            </c:strLit>
+          </c:cat>
+          <c:val>
+            <c:numLit>
+              <c:formatCode>General</c:formatCode>
+              <c:ptCount val="6"/>
+              <c:pt idx="0">
+                <c:v>6</c:v>
+              </c:pt>
+              <c:pt idx="1">
+                <c:v>7</c:v>
+              </c:pt>
+              <c:pt idx="2">
+                <c:v>6</c:v>
+              </c:pt>
+              <c:pt idx="3">
+                <c:v>8</c:v>
+              </c:pt>
+              <c:pt idx="4">
+                <c:v>9</c:v>
+              </c:pt>
+              <c:pt idx="5">
+                <c:v>7</c:v>
+              </c:pt>
+            </c:numLit>
+          </c:val>
+        </c:ser>
+        <c:gapWidth val="360"/>
+        <c:overlap val="0"/>
+        <c:axId val="19001"/>
+        <c:axId val="19002"/>
+      </c:barChart>
+      <c:catAx>
+        <c:axId val="19001"/>
+        <c:scaling>
+          <c:orientation val="minMax"/>
+        </c:scaling>
+        <c:delete val="0"/>
+        <c:axPos val="b"/>
+        <c:numFmt formatCode="General" sourceLinked="0"/>
+        <c:majorTickMark val="none"/>
+        <c:minorTickMark val="none"/>
+        <c:tickLblPos val="nextTo"/>
+        <c:spPr>
+          <a:ln w="9525">
+            <a:solidFill>
+              <a:srgbClr val="A4A4A4"/>
+            </a:solidFill>
+          </a:ln>
+        </c:spPr>
+        <c:txPr>
+          <a:bodyPr/>
+          <a:lstStyle/>
+          <a:p>
+            <a:pPr>
+              <a:defRPr sz="1200">
+                <a:solidFill>
+                  <a:srgbClr val="5F5F5F"/>
+                </a:solidFill>
+                <a:latin typeface="+mn-lt"/>
+                <a:ea typeface="+mn-ea"/>
+                <a:cs typeface="+mn-cs"/>
+              </a:defRPr>
+            </a:pPr>
+            <a:endParaRPr lang="th-TH"/>
+          </a:p>
+        </c:txPr>
+        <c:crossAx val="19002"/>
+        <c:crosses val="autoZero"/>
+        <c:auto val="1"/>
+        <c:lblAlgn val="ctr"/>
+        <c:lblOffset val="100"/>
+        <c:noMultiLvlLbl val="0"/>
+      </c:catAx>
+      <c:valAx>
+        <c:axId val="19002"/>
+        <c:scaling>
+          <c:orientation val="minMax"/>
+          <c:min val="0"/>
+        </c:scaling>
+        <c:delete val="0"/>
+        <c:axPos val="l"/>
+        <c:majorGridlines>
+          <c:spPr>
+            <a:ln w="9525">
+              <a:solidFill>
+                <a:srgbClr val="E5E5E5"/>
+              </a:solidFill>
+            </a:ln>
+          </c:spPr>
+        </c:majorGridlines>
+        <c:numFmt formatCode="#,##0" sourceLinked="0"/>
+        <c:majorTickMark val="none"/>
+        <c:minorTickMark val="none"/>
+        <c:tickLblPos val="nextTo"/>
+        <c:spPr>
+          <a:ln>
+            <a:noFill/>
+          </a:ln>
+        </c:spPr>
+        <c:txPr>
+          <a:bodyPr/>
+          <a:lstStyle/>
+          <a:p>
+            <a:pPr>
+              <a:defRPr sz="1200">
+                <a:solidFill>
+                  <a:srgbClr val="5F5F5F"/>
+                </a:solidFill>
+                <a:latin typeface="+mn-lt"/>
+                <a:ea typeface="+mn-ea"/>
+                <a:cs typeface="+mn-cs"/>
+              </a:defRPr>
+            </a:pPr>
+            <a:endParaRPr lang="th-TH"/>
+          </a:p>
+        </c:txPr>
+        <c:crossAx val="19001"/>
+        <c:crosses val="autoZero"/>
+        <c:crossBetween val="between"/>
+        <c:majorUnit val="2"/>
+      </c:valAx>
+      <c:spPr>
+        <a:noFill/>
+        <a:ln>
+          <a:noFill/>
+        </a:ln>
+      </c:spPr>
+    </c:plotArea>
+    <c:plotVisOnly val="1"/>
+    <c:dispBlanksAs val="gap"/>
+  </c:chart>
+  <c:spPr>
+    <a:noFill/>
+    <a:ln>
+      <a:noFill/>
+    </a:ln>
+  </c:spPr>
+  <c:txPr>
+    <a:bodyPr/>
+    <a:lstStyle/>
+    <a:p>
+      <a:pPr>
+        <a:defRPr sz="1200">
+          <a:solidFill>
+            <a:srgbClr val="5F5F5F"/>
+          </a:solidFill>
+          <a:latin typeface="+mn-lt"/>
+          <a:ea typeface="+mn-ea"/>
+          <a:cs typeface="+mn-cs"/>
+        </a:defRPr>
+      </a:pPr>
+      <a:endParaRPr lang="th-TH"/>
+    </a:p>
+  </c:txPr>
+</c:chartSpace>
+</file>
+
 <file path=ppt/slideLayouts/slideLayout1.xml><?xml version="1.0" encoding="utf-8"?>
 <p:sldLayout xmlns:a="http://schemas.openxmlformats.org/drawingml/2006/main" xmlns:r="http://schemas.openxmlformats.org/officeDocument/2006/relationships" xmlns:p="http://schemas.openxmlformats.org/presentationml/2006/main" type="title" showMasterSp="0" preserve="1">
   <p:cSld name="01 Title Slide">
@@ -2545,7 +2799,7 @@
             <a:avLst/>
           </a:prstGeom>
           <a:solidFill>
-            <a:srgbClr val="23436D"/>
+            <a:srgbClr val="2A5EA0"/>
           </a:solidFill>
           <a:ln>
             <a:noFill/>
@@ -2588,7 +2842,7 @@
               <a:buNone/>
               <a:defRPr lang="th-TH" sz="2400" b="1" dirty="0">
                 <a:solidFill>
-                  <a:srgbClr val="23436D"/>
+                  <a:srgbClr val="2A5EA0"/>
                 </a:solidFill>
                 <a:latin typeface="+mj-lt"/>
                 <a:ea typeface="+mj-ea"/>
@@ -2606,7 +2860,7 @@
             <a:r>
               <a:rPr lang="th-TH" sz="2400" b="1" dirty="0">
                 <a:solidFill>
-                  <a:srgbClr val="23436D"/>
+                  <a:srgbClr val="2A5EA0"/>
                 </a:solidFill>
                 <a:latin typeface="+mj-lt"/>
                 <a:ea typeface="+mj-ea"/>
@@ -2783,7 +3037,7 @@
             <a:avLst/>
           </a:prstGeom>
           <a:solidFill>
-            <a:srgbClr val="216B7F"/>
+            <a:srgbClr val="BB731B"/>
           </a:solidFill>
           <a:ln>
             <a:noFill/>
@@ -2826,7 +3080,7 @@
               <a:buNone/>
               <a:defRPr lang="th-TH" sz="2400" b="1" dirty="0">
                 <a:solidFill>
-                  <a:srgbClr val="216B7F"/>
+                  <a:srgbClr val="BB731B"/>
                 </a:solidFill>
                 <a:latin typeface="+mj-lt"/>
                 <a:ea typeface="+mj-ea"/>
@@ -2844,7 +3098,7 @@
             <a:r>
               <a:rPr lang="th-TH" sz="2400" b="1" dirty="0">
                 <a:solidFill>
-                  <a:srgbClr val="216B7F"/>
+                  <a:srgbClr val="BB731B"/>
                 </a:solidFill>
                 <a:latin typeface="+mj-lt"/>
                 <a:ea typeface="+mj-ea"/>
@@ -3021,7 +3275,7 @@
             <a:avLst/>
           </a:prstGeom>
           <a:solidFill>
-            <a:srgbClr val="4E8FA8"/>
+            <a:srgbClr val="0D9298"/>
           </a:solidFill>
           <a:ln>
             <a:noFill/>
@@ -3064,7 +3318,7 @@
               <a:buNone/>
               <a:defRPr lang="th-TH" sz="2400" b="1" dirty="0">
                 <a:solidFill>
-                  <a:srgbClr val="4E8FA8"/>
+                  <a:srgbClr val="0D9298"/>
                 </a:solidFill>
                 <a:latin typeface="+mj-lt"/>
                 <a:ea typeface="+mj-ea"/>
@@ -3082,7 +3336,7 @@
             <a:r>
               <a:rPr lang="th-TH" sz="2400" b="1" dirty="0">
                 <a:solidFill>
-                  <a:srgbClr val="4E8FA8"/>
+                  <a:srgbClr val="0D9298"/>
                 </a:solidFill>
                 <a:latin typeface="+mj-lt"/>
                 <a:ea typeface="+mj-ea"/>
@@ -3259,7 +3513,7 @@
             <a:avLst/>
           </a:prstGeom>
           <a:solidFill>
-            <a:srgbClr val="16324F"/>
+            <a:srgbClr val="6C4289"/>
           </a:solidFill>
           <a:ln>
             <a:noFill/>
@@ -3302,7 +3556,7 @@
               <a:buNone/>
               <a:defRPr lang="th-TH" sz="2400" b="1" dirty="0">
                 <a:solidFill>
-                  <a:srgbClr val="16324F"/>
+                  <a:srgbClr val="6C4289"/>
                 </a:solidFill>
                 <a:latin typeface="+mj-lt"/>
                 <a:ea typeface="+mj-ea"/>
@@ -3320,7 +3574,7 @@
             <a:r>
               <a:rPr lang="th-TH" sz="2400" b="1" dirty="0">
                 <a:solidFill>
-                  <a:srgbClr val="16324F"/>
+                  <a:srgbClr val="6C4289"/>
                 </a:solidFill>
                 <a:latin typeface="+mj-lt"/>
                 <a:ea typeface="+mj-ea"/>
@@ -7160,7 +7414,7 @@
             <a:r>
               <a:rPr lang="th-TH" sz="1000" b="1" dirty="0">
                 <a:solidFill>
-                  <a:srgbClr val="23436D"/>
+                  <a:srgbClr val="2A5EA0"/>
                 </a:solidFill>
                 <a:latin typeface="+mn-lt"/>
                 <a:ea typeface="+mn-ea"/>
@@ -7182,7 +7436,7 @@
             <a:r>
               <a:rPr lang="th-TH" sz="1000" b="1" dirty="0">
                 <a:solidFill>
-                  <a:srgbClr val="216B7F"/>
+                  <a:srgbClr val="BB731B"/>
                 </a:solidFill>
                 <a:latin typeface="+mn-lt"/>
                 <a:ea typeface="+mn-ea"/>
@@ -7204,7 +7458,7 @@
             <a:r>
               <a:rPr lang="th-TH" sz="1000" b="1" dirty="0">
                 <a:solidFill>
-                  <a:srgbClr val="16324F"/>
+                  <a:srgbClr val="0D9298"/>
                 </a:solidFill>
                 <a:latin typeface="+mn-lt"/>
                 <a:ea typeface="+mn-ea"/>
@@ -9381,6 +9635,771 @@
               <a:buNone/>
             </a:pPr>
             <a:endParaRPr lang="th-TH" sz="1400"/>
+          </a:p>
+        </p:txBody>
+      </p:sp>
+      <p:sp>
+        <p:nvSpPr>
+          <p:cNvPr id="90" name="Footer Rule"/>
+          <p:cNvSpPr/>
+          <p:nvPr/>
+        </p:nvSpPr>
+        <p:spPr>
+          <a:xfrm>
+            <a:off x="914400" y="6172200"/>
+            <a:ext cx="10363200" cy="12700"/>
+          </a:xfrm>
+          <a:prstGeom prst="rect">
+            <a:avLst/>
+          </a:prstGeom>
+          <a:solidFill>
+            <a:srgbClr val="E5E5E5"/>
+          </a:solidFill>
+          <a:ln>
+            <a:noFill/>
+          </a:ln>
+        </p:spPr>
+        <p:txBody>
+          <a:bodyPr/>
+          <a:lstStyle/>
+          <a:p>
+            <a:endParaRPr lang="th-TH"/>
+          </a:p>
+        </p:txBody>
+      </p:sp>
+      <p:sp>
+        <p:nvSpPr>
+          <p:cNvPr id="91" name="Date Placeholder"/>
+          <p:cNvSpPr>
+            <a:spLocks noGrp="1"/>
+          </p:cNvSpPr>
+          <p:nvPr>
+            <p:ph type="dt" idx="10"/>
+          </p:nvPr>
+        </p:nvSpPr>
+        <p:spPr>
+          <a:xfrm>
+            <a:off x="914400" y="6309360"/>
+            <a:ext cx="2743200" cy="274320"/>
+          </a:xfrm>
+          <a:prstGeom prst="rect">
+            <a:avLst/>
+          </a:prstGeom>
+        </p:spPr>
+        <p:txBody>
+          <a:bodyPr wrap="square" anchor="ctr" lIns="0" tIns="0" rIns="0" bIns="0" rtlCol="0"/>
+          <a:lstStyle>
+            <a:lvl1pPr algn="l" marL="0" indent="0">
+              <a:lnSpc>
+                <a:spcPct val="100000"/>
+              </a:lnSpc>
+              <a:buNone/>
+              <a:defRPr lang="th-TH" sz="1000" dirty="0">
+                <a:solidFill>
+                  <a:srgbClr val="5F5F5F"/>
+                </a:solidFill>
+                <a:latin typeface="+mn-lt"/>
+                <a:ea typeface="+mn-ea"/>
+                <a:cs typeface="+mn-cs"/>
+              </a:defRPr>
+            </a:lvl1pPr>
+          </a:lstStyle>
+          <a:p>
+            <a:pPr algn="l" marL="0" indent="0">
+              <a:lnSpc>
+                <a:spcPct val="100000"/>
+              </a:lnSpc>
+              <a:buNone/>
+            </a:pPr>
+            <a:endParaRPr lang="th-TH" sz="1000"/>
+          </a:p>
+        </p:txBody>
+      </p:sp>
+      <p:sp>
+        <p:nvSpPr>
+          <p:cNvPr id="92" name="Footer Placeholder"/>
+          <p:cNvSpPr>
+            <a:spLocks noGrp="1"/>
+          </p:cNvSpPr>
+          <p:nvPr>
+            <p:ph type="ftr" idx="11"/>
+          </p:nvPr>
+        </p:nvSpPr>
+        <p:spPr>
+          <a:xfrm>
+            <a:off x="4572000" y="6309360"/>
+            <a:ext cx="3657600" cy="274320"/>
+          </a:xfrm>
+          <a:prstGeom prst="rect">
+            <a:avLst/>
+          </a:prstGeom>
+        </p:spPr>
+        <p:txBody>
+          <a:bodyPr wrap="square" anchor="ctr" lIns="0" tIns="0" rIns="0" bIns="0" rtlCol="0"/>
+          <a:lstStyle>
+            <a:lvl1pPr algn="ctr" marL="0" indent="0">
+              <a:lnSpc>
+                <a:spcPct val="100000"/>
+              </a:lnSpc>
+              <a:buNone/>
+              <a:defRPr lang="th-TH" sz="1000" dirty="0">
+                <a:solidFill>
+                  <a:srgbClr val="5F5F5F"/>
+                </a:solidFill>
+                <a:latin typeface="+mn-lt"/>
+                <a:ea typeface="+mn-ea"/>
+                <a:cs typeface="+mn-cs"/>
+              </a:defRPr>
+            </a:lvl1pPr>
+          </a:lstStyle>
+          <a:p>
+            <a:pPr algn="ctr" marL="0" indent="0">
+              <a:lnSpc>
+                <a:spcPct val="100000"/>
+              </a:lnSpc>
+              <a:buNone/>
+            </a:pPr>
+            <a:endParaRPr lang="th-TH" sz="1000"/>
+          </a:p>
+        </p:txBody>
+      </p:sp>
+      <p:sp>
+        <p:nvSpPr>
+          <p:cNvPr id="93" name="Slide Number Placeholder"/>
+          <p:cNvSpPr>
+            <a:spLocks noGrp="1"/>
+          </p:cNvSpPr>
+          <p:nvPr>
+            <p:ph type="sldNum" sz="quarter" idx="12"/>
+          </p:nvPr>
+        </p:nvSpPr>
+        <p:spPr>
+          <a:xfrm>
+            <a:off x="9906000" y="6309360"/>
+            <a:ext cx="1371600" cy="274320"/>
+          </a:xfrm>
+          <a:prstGeom prst="rect">
+            <a:avLst/>
+          </a:prstGeom>
+        </p:spPr>
+        <p:txBody>
+          <a:bodyPr anchor="ctr"/>
+          <a:lstStyle>
+            <a:lvl1pPr algn="r" marL="0" indent="0">
+              <a:lnSpc>
+                <a:spcPct val="100000"/>
+              </a:lnSpc>
+              <a:buNone/>
+              <a:defRPr lang="th-TH" sz="1000" dirty="0">
+                <a:solidFill>
+                  <a:srgbClr val="5F5F5F"/>
+                </a:solidFill>
+                <a:latin typeface="+mn-lt"/>
+                <a:ea typeface="+mn-ea"/>
+                <a:cs typeface="+mn-cs"/>
+              </a:defRPr>
+            </a:lvl1pPr>
+          </a:lstStyle>
+          <a:p>
+            <a:pPr algn="r" marL="0" indent="0">
+              <a:buNone/>
+            </a:pPr>
+            <a:fld id="{B7E3A1C2-4F5D-4A88-9C1E-6D2F0A93B451}" type="slidenum">
+              <a:rPr lang="th-TH" sz="1000">
+                <a:solidFill>
+                  <a:srgbClr val="5F5F5F"/>
+                </a:solidFill>
+                <a:latin typeface="+mn-lt"/>
+                <a:cs typeface="+mn-cs"/>
+              </a:rPr>
+              <a:t>2</a:t>
+            </a:fld>
+            <a:endParaRPr lang="th-TH" sz="1000"/>
+          </a:p>
+        </p:txBody>
+      </p:sp>
+      <p:pic>
+        <p:nvPicPr>
+          <p:cNvPr id="94" name="NCT Mark"/>
+          <p:cNvPicPr>
+            <a:picLocks noChangeAspect="1"/>
+          </p:cNvPicPr>
+          <p:nvPr/>
+        </p:nvPicPr>
+        <p:blipFill>
+          <a:blip r:embed="rId2"/>
+          <a:stretch>
+            <a:fillRect/>
+          </a:stretch>
+        </p:blipFill>
+        <p:spPr>
+          <a:xfrm>
+            <a:off x="9494520" y="6289360"/>
+            <a:ext cx="274320" cy="174498"/>
+          </a:xfrm>
+          <a:prstGeom prst="rect">
+            <a:avLst/>
+          </a:prstGeom>
+        </p:spPr>
+      </p:pic>
+    </p:spTree>
+  </p:cSld>
+  <p:clrMapOvr>
+    <a:masterClrMapping/>
+  </p:clrMapOvr>
+</p:sldLayout>
+</file>
+
+<file path=ppt/slideLayouts/slideLayout19.xml><?xml version="1.0" encoding="utf-8"?>
+<p:sldLayout xmlns:a="http://schemas.openxmlformats.org/drawingml/2006/main" xmlns:r="http://schemas.openxmlformats.org/officeDocument/2006/relationships" xmlns:p="http://schemas.openxmlformats.org/presentationml/2006/main" type="chartAndTx" showMasterSp="0" preserve="1">
+  <p:cSld name="19 Chart + Insight">
+    <p:bg>
+      <p:bgPr>
+        <a:solidFill>
+          <a:srgbClr val="FFFFFF"/>
+        </a:solidFill>
+        <a:effectLst/>
+      </p:bgPr>
+    </p:bg>
+    <p:spTree>
+      <p:nvGrpSpPr>
+        <p:cNvPr id="1" name=""/>
+        <p:cNvGrpSpPr/>
+        <p:nvPr/>
+      </p:nvGrpSpPr>
+      <p:grpSpPr>
+        <a:xfrm>
+          <a:off x="0" y="0"/>
+          <a:ext cx="0" cy="0"/>
+          <a:chOff x="0" y="0"/>
+          <a:chExt cx="0" cy="0"/>
+        </a:xfrm>
+      </p:grpSpPr>
+      <p:sp>
+        <p:nvSpPr>
+          <p:cNvPr id="10" name="Title Placeholder"/>
+          <p:cNvSpPr>
+            <a:spLocks noGrp="1"/>
+          </p:cNvSpPr>
+          <p:nvPr>
+            <p:ph type="title"/>
+          </p:nvPr>
+        </p:nvSpPr>
+        <p:spPr>
+          <a:xfrm>
+            <a:off x="914400" y="548640"/>
+            <a:ext cx="10363200" cy="731520"/>
+          </a:xfrm>
+          <a:prstGeom prst="rect">
+            <a:avLst/>
+          </a:prstGeom>
+        </p:spPr>
+        <p:txBody>
+          <a:bodyPr wrap="square" anchor="b" lIns="0" tIns="0" rIns="0" bIns="0" rtlCol="0"/>
+          <a:lstStyle>
+            <a:lvl1pPr algn="l" marL="0" indent="0">
+              <a:lnSpc>
+                <a:spcPct val="108000"/>
+              </a:lnSpc>
+              <a:buNone/>
+              <a:defRPr lang="th-TH" sz="3200" b="1" dirty="0">
+                <a:solidFill>
+                  <a:srgbClr val="23436D"/>
+                </a:solidFill>
+                <a:latin typeface="+mj-lt"/>
+                <a:ea typeface="+mj-ea"/>
+                <a:cs typeface="+mj-cs"/>
+              </a:defRPr>
+            </a:lvl1pPr>
+          </a:lstStyle>
+          <a:p>
+            <a:pPr algn="l" marL="0" indent="0">
+              <a:lnSpc>
+                <a:spcPct val="108000"/>
+              </a:lnSpc>
+              <a:buNone/>
+            </a:pPr>
+            <a:r>
+              <a:rPr lang="th-TH" sz="3200" b="1" dirty="0">
+                <a:solidFill>
+                  <a:srgbClr val="23436D"/>
+                </a:solidFill>
+                <a:latin typeface="+mj-lt"/>
+                <a:ea typeface="+mj-ea"/>
+                <a:cs typeface="+mj-cs"/>
+              </a:rPr>
+              <a:t>ชื่อสไลด์</a:t>
+            </a:r>
+          </a:p>
+        </p:txBody>
+      </p:sp>
+      <p:sp>
+        <p:nvSpPr>
+          <p:cNvPr id="11" name="Accent Rule"/>
+          <p:cNvSpPr/>
+          <p:nvPr/>
+        </p:nvSpPr>
+        <p:spPr>
+          <a:xfrm>
+            <a:off x="914400" y="1371600"/>
+            <a:ext cx="548640" cy="45720"/>
+          </a:xfrm>
+          <a:prstGeom prst="rect">
+            <a:avLst/>
+          </a:prstGeom>
+          <a:solidFill>
+            <a:srgbClr val="216B7F"/>
+          </a:solidFill>
+          <a:ln>
+            <a:noFill/>
+          </a:ln>
+        </p:spPr>
+        <p:txBody>
+          <a:bodyPr/>
+          <a:lstStyle/>
+          <a:p>
+            <a:endParaRPr lang="th-TH"/>
+          </a:p>
+        </p:txBody>
+      </p:sp>
+      <p:sp>
+        <p:nvSpPr>
+          <p:cNvPr id="12" name="Chart Placeholder"/>
+          <p:cNvSpPr>
+            <a:spLocks noGrp="1"/>
+          </p:cNvSpPr>
+          <p:nvPr>
+            <p:ph type="chart" idx="1"/>
+          </p:nvPr>
+        </p:nvSpPr>
+        <p:spPr>
+          <a:xfrm>
+            <a:off x="914400" y="1691640"/>
+            <a:ext cx="6847840" cy="3474720"/>
+          </a:xfrm>
+          <a:prstGeom prst="rect">
+            <a:avLst/>
+          </a:prstGeom>
+        </p:spPr>
+        <p:txBody>
+          <a:bodyPr wrap="square" anchor="ctr" lIns="0" tIns="0" rIns="0" bIns="0" rtlCol="0"/>
+          <a:lstStyle>
+            <a:lvl1pPr algn="l" marL="0" indent="0">
+              <a:lnSpc>
+                <a:spcPct val="100000"/>
+              </a:lnSpc>
+              <a:buNone/>
+              <a:defRPr lang="th-TH" sz="1200" dirty="0">
+                <a:solidFill>
+                  <a:srgbClr val="5F5F5F"/>
+                </a:solidFill>
+                <a:latin typeface="+mn-lt"/>
+                <a:ea typeface="+mn-ea"/>
+                <a:cs typeface="+mn-cs"/>
+              </a:defRPr>
+            </a:lvl1pPr>
+          </a:lstStyle>
+          <a:p>
+            <a:pPr algn="l" marL="0" indent="0">
+              <a:lnSpc>
+                <a:spcPct val="100000"/>
+              </a:lnSpc>
+              <a:buNone/>
+            </a:pPr>
+            <a:endParaRPr lang="th-TH" sz="1200"/>
+          </a:p>
+        </p:txBody>
+      </p:sp>
+      <p:sp>
+        <p:nvSpPr>
+          <p:cNvPr id="13" name="Figure"/>
+          <p:cNvSpPr>
+            <a:spLocks noGrp="1"/>
+          </p:cNvSpPr>
+          <p:nvPr>
+            <p:ph type="body" idx="2"/>
+          </p:nvPr>
+        </p:nvSpPr>
+        <p:spPr>
+          <a:xfrm>
+            <a:off x="7945120" y="1691640"/>
+            <a:ext cx="3332480" cy="1005840"/>
+          </a:xfrm>
+          <a:prstGeom prst="rect">
+            <a:avLst/>
+          </a:prstGeom>
+        </p:spPr>
+        <p:txBody>
+          <a:bodyPr wrap="square" anchor="b" lIns="0" tIns="0" rIns="0" bIns="0" rtlCol="0"/>
+          <a:lstStyle>
+            <a:lvl1pPr algn="l" marL="0" indent="0">
+              <a:lnSpc>
+                <a:spcPct val="100000"/>
+              </a:lnSpc>
+              <a:buNone/>
+              <a:defRPr lang="th-TH" sz="7200" b="1" dirty="0">
+                <a:solidFill>
+                  <a:srgbClr val="23436D"/>
+                </a:solidFill>
+                <a:latin typeface="+mj-lt"/>
+                <a:ea typeface="+mj-ea"/>
+                <a:cs typeface="+mj-cs"/>
+              </a:defRPr>
+            </a:lvl1pPr>
+          </a:lstStyle>
+          <a:p>
+            <a:pPr algn="l" marL="0" indent="0">
+              <a:lnSpc>
+                <a:spcPct val="100000"/>
+              </a:lnSpc>
+              <a:buNone/>
+            </a:pPr>
+            <a:r>
+              <a:rPr lang="th-TH" sz="7200" b="1" dirty="0">
+                <a:solidFill>
+                  <a:srgbClr val="23436D"/>
+                </a:solidFill>
+                <a:latin typeface="+mj-lt"/>
+                <a:ea typeface="+mj-ea"/>
+                <a:cs typeface="+mj-cs"/>
+              </a:rPr>
+              <a:t>00%</a:t>
+            </a:r>
+          </a:p>
+        </p:txBody>
+      </p:sp>
+      <p:sp>
+        <p:nvSpPr>
+          <p:cNvPr id="14" name="Figure Label"/>
+          <p:cNvSpPr>
+            <a:spLocks noGrp="1"/>
+          </p:cNvSpPr>
+          <p:nvPr>
+            <p:ph type="body" idx="3"/>
+          </p:nvPr>
+        </p:nvSpPr>
+        <p:spPr>
+          <a:xfrm>
+            <a:off x="7945120" y="2697480"/>
+            <a:ext cx="3332480" cy="457200"/>
+          </a:xfrm>
+          <a:prstGeom prst="rect">
+            <a:avLst/>
+          </a:prstGeom>
+        </p:spPr>
+        <p:txBody>
+          <a:bodyPr wrap="square" anchor="t" lIns="0" tIns="0" rIns="0" bIns="0" rtlCol="0"/>
+          <a:lstStyle>
+            <a:lvl1pPr algn="l" marL="0" indent="0">
+              <a:lnSpc>
+                <a:spcPct val="130000"/>
+              </a:lnSpc>
+              <a:buNone/>
+              <a:defRPr lang="th-TH" sz="1200" b="1" spc="120" dirty="0">
+                <a:solidFill>
+                  <a:srgbClr val="5F5F5F"/>
+                </a:solidFill>
+                <a:latin typeface="+mn-lt"/>
+                <a:ea typeface="+mn-ea"/>
+                <a:cs typeface="+mn-cs"/>
+              </a:defRPr>
+            </a:lvl1pPr>
+          </a:lstStyle>
+          <a:p>
+            <a:pPr algn="l" marL="0" indent="0">
+              <a:lnSpc>
+                <a:spcPct val="130000"/>
+              </a:lnSpc>
+              <a:buNone/>
+            </a:pPr>
+            <a:r>
+              <a:rPr lang="th-TH" sz="1200" b="1" spc="120" dirty="0">
+                <a:solidFill>
+                  <a:srgbClr val="5F5F5F"/>
+                </a:solidFill>
+                <a:latin typeface="+mn-lt"/>
+                <a:ea typeface="+mn-ea"/>
+                <a:cs typeface="+mn-cs"/>
+              </a:rPr>
+              <a:t>ตัวเลขนี้วัดอะไร</a:t>
+            </a:r>
+          </a:p>
+        </p:txBody>
+      </p:sp>
+      <p:sp>
+        <p:nvSpPr>
+          <p:cNvPr id="15" name="Insight"/>
+          <p:cNvSpPr>
+            <a:spLocks noGrp="1"/>
+          </p:cNvSpPr>
+          <p:nvPr>
+            <p:ph type="body" idx="4"/>
+          </p:nvPr>
+        </p:nvSpPr>
+        <p:spPr>
+          <a:xfrm>
+            <a:off x="7945120" y="3291840"/>
+            <a:ext cx="3332480" cy="1874520"/>
+          </a:xfrm>
+          <a:prstGeom prst="rect">
+            <a:avLst/>
+          </a:prstGeom>
+        </p:spPr>
+        <p:txBody>
+          <a:bodyPr wrap="square" anchor="t" lIns="0" tIns="0" rIns="0" bIns="0" rtlCol="0"/>
+          <a:lstStyle>
+            <a:lvl1pPr algn="l" marL="228600" indent="-228600">
+              <a:lnSpc>
+                <a:spcPct val="86000"/>
+              </a:lnSpc>
+              <a:spcBef>
+                <a:spcPts val="600"/>
+              </a:spcBef>
+              <a:buClr>
+                <a:srgbClr val="216B7F"/>
+              </a:buClr>
+              <a:buSzPct val="90000"/>
+              <a:buFont typeface="Arial"/>
+              <a:buChar char="•"/>
+              <a:defRPr lang="th-TH" sz="1600" dirty="0">
+                <a:solidFill>
+                  <a:srgbClr val="333333"/>
+                </a:solidFill>
+                <a:latin typeface="+mn-lt"/>
+                <a:ea typeface="+mn-ea"/>
+                <a:cs typeface="+mn-cs"/>
+              </a:defRPr>
+            </a:lvl1pPr>
+          </a:lstStyle>
+          <a:p>
+            <a:pPr algn="l" marL="228600" indent="-228600">
+              <a:lnSpc>
+                <a:spcPct val="86000"/>
+              </a:lnSpc>
+              <a:spcBef>
+                <a:spcPts val="600"/>
+              </a:spcBef>
+              <a:buClr>
+                <a:srgbClr val="216B7F"/>
+              </a:buClr>
+              <a:buSzPct val="90000"/>
+              <a:buFont typeface="Arial"/>
+              <a:buChar char="•"/>
+            </a:pPr>
+            <a:r>
+              <a:rPr lang="th-TH" sz="1600" dirty="0">
+                <a:solidFill>
+                  <a:srgbClr val="333333"/>
+                </a:solidFill>
+                <a:latin typeface="+mn-lt"/>
+                <a:ea typeface="+mn-ea"/>
+                <a:cs typeface="+mn-cs"/>
+              </a:rPr>
+              <a:t>สิ่งที่กราฟบอก ไม่เกินสามข้อ</a:t>
+            </a:r>
+          </a:p>
+        </p:txBody>
+      </p:sp>
+      <p:sp>
+        <p:nvSpPr>
+          <p:cNvPr id="16" name="Source"/>
+          <p:cNvSpPr>
+            <a:spLocks noGrp="1"/>
+          </p:cNvSpPr>
+          <p:nvPr>
+            <p:ph type="body" idx="5"/>
+          </p:nvPr>
+        </p:nvSpPr>
+        <p:spPr>
+          <a:xfrm>
+            <a:off x="914400" y="5257800"/>
+            <a:ext cx="10363200" cy="274320"/>
+          </a:xfrm>
+          <a:prstGeom prst="rect">
+            <a:avLst/>
+          </a:prstGeom>
+        </p:spPr>
+        <p:txBody>
+          <a:bodyPr wrap="square" anchor="t" lIns="0" tIns="0" rIns="0" bIns="0" rtlCol="0"/>
+          <a:lstStyle>
+            <a:lvl1pPr algn="l" marL="0" indent="0">
+              <a:lnSpc>
+                <a:spcPct val="130000"/>
+              </a:lnSpc>
+              <a:buNone/>
+              <a:defRPr lang="th-TH" sz="1000" dirty="0">
+                <a:solidFill>
+                  <a:srgbClr val="5F5F5F"/>
+                </a:solidFill>
+                <a:latin typeface="+mn-lt"/>
+                <a:ea typeface="+mn-ea"/>
+                <a:cs typeface="+mn-cs"/>
+              </a:defRPr>
+            </a:lvl1pPr>
+          </a:lstStyle>
+          <a:p>
+            <a:pPr algn="l" marL="0" indent="0">
+              <a:lnSpc>
+                <a:spcPct val="130000"/>
+              </a:lnSpc>
+              <a:buNone/>
+            </a:pPr>
+            <a:r>
+              <a:rPr lang="th-TH" sz="1000" dirty="0">
+                <a:solidFill>
+                  <a:srgbClr val="5F5F5F"/>
+                </a:solidFill>
+                <a:latin typeface="+mn-lt"/>
+                <a:ea typeface="+mn-ea"/>
+                <a:cs typeface="+mn-cs"/>
+              </a:rPr>
+              <a:t>ที่มาของข้อมูล</a:t>
+            </a:r>
+          </a:p>
+        </p:txBody>
+      </p:sp>
+      <p:sp>
+        <p:nvSpPr>
+          <p:cNvPr id="17" name="Takeaway Band"/>
+          <p:cNvSpPr/>
+          <p:nvPr/>
+        </p:nvSpPr>
+        <p:spPr>
+          <a:xfrm>
+            <a:off x="914400" y="5623560"/>
+            <a:ext cx="10363200" cy="411480"/>
+          </a:xfrm>
+          <a:prstGeom prst="rect">
+            <a:avLst/>
+          </a:prstGeom>
+          <a:solidFill>
+            <a:srgbClr val="E8F6F5"/>
+          </a:solidFill>
+          <a:ln>
+            <a:noFill/>
+          </a:ln>
+        </p:spPr>
+        <p:txBody>
+          <a:bodyPr/>
+          <a:lstStyle/>
+          <a:p>
+            <a:endParaRPr lang="th-TH"/>
+          </a:p>
+        </p:txBody>
+      </p:sp>
+      <p:sp>
+        <p:nvSpPr>
+          <p:cNvPr id="18" name="Takeaway Label"/>
+          <p:cNvSpPr>
+            <a:spLocks noGrp="1"/>
+          </p:cNvSpPr>
+          <p:nvPr>
+            <p:ph type="body" idx="6"/>
+          </p:nvPr>
+        </p:nvSpPr>
+        <p:spPr>
+          <a:xfrm>
+            <a:off x="1097280" y="5684520"/>
+            <a:ext cx="1828800" cy="289560"/>
+          </a:xfrm>
+          <a:prstGeom prst="rect">
+            <a:avLst/>
+          </a:prstGeom>
+        </p:spPr>
+        <p:txBody>
+          <a:bodyPr wrap="square" anchor="ctr" lIns="0" tIns="0" rIns="0" bIns="0" rtlCol="0"/>
+          <a:lstStyle>
+            <a:lvl1pPr algn="l" marL="0" indent="0">
+              <a:lnSpc>
+                <a:spcPct val="100000"/>
+              </a:lnSpc>
+              <a:buNone/>
+              <a:defRPr lang="th-TH" sz="1200" b="1" spc="120" dirty="0">
+                <a:solidFill>
+                  <a:srgbClr val="216B7F"/>
+                </a:solidFill>
+                <a:latin typeface="+mn-lt"/>
+                <a:ea typeface="+mn-ea"/>
+                <a:cs typeface="+mn-cs"/>
+              </a:defRPr>
+            </a:lvl1pPr>
+          </a:lstStyle>
+          <a:p>
+            <a:pPr algn="l" marL="0" indent="0">
+              <a:lnSpc>
+                <a:spcPct val="100000"/>
+              </a:lnSpc>
+              <a:buNone/>
+            </a:pPr>
+            <a:r>
+              <a:rPr lang="th-TH" sz="1200" b="1" spc="120" dirty="0">
+                <a:solidFill>
+                  <a:srgbClr val="216B7F"/>
+                </a:solidFill>
+                <a:latin typeface="+mn-lt"/>
+                <a:ea typeface="+mn-ea"/>
+                <a:cs typeface="+mn-cs"/>
+              </a:rPr>
+              <a:t>สรุป</a:t>
+            </a:r>
+          </a:p>
+        </p:txBody>
+      </p:sp>
+      <p:sp>
+        <p:nvSpPr>
+          <p:cNvPr id="19" name="Takeaway Copy"/>
+          <p:cNvSpPr>
+            <a:spLocks noGrp="1"/>
+          </p:cNvSpPr>
+          <p:nvPr>
+            <p:ph type="body" idx="7"/>
+          </p:nvPr>
+        </p:nvSpPr>
+        <p:spPr>
+          <a:xfrm>
+            <a:off x="2926080" y="5684520"/>
+            <a:ext cx="8168640" cy="289560"/>
+          </a:xfrm>
+          <a:prstGeom prst="rect">
+            <a:avLst/>
+          </a:prstGeom>
+        </p:spPr>
+        <p:txBody>
+          <a:bodyPr wrap="square" anchor="ctr" lIns="0" tIns="0" rIns="0" bIns="0" rtlCol="0"/>
+          <a:lstStyle>
+            <a:lvl1pPr algn="l" marL="0" indent="0">
+              <a:lnSpc>
+                <a:spcPct val="100000"/>
+              </a:lnSpc>
+              <a:buNone/>
+              <a:defRPr lang="th-TH" sz="1400" dirty="0">
+                <a:solidFill>
+                  <a:srgbClr val="333333"/>
+                </a:solidFill>
+                <a:latin typeface="+mn-lt"/>
+                <a:ea typeface="+mn-ea"/>
+                <a:cs typeface="+mn-cs"/>
+              </a:defRPr>
+            </a:lvl1pPr>
+          </a:lstStyle>
+          <a:p>
+            <a:pPr algn="l" marL="0" indent="0">
+              <a:lnSpc>
+                <a:spcPct val="100000"/>
+              </a:lnSpc>
+              <a:buNone/>
+            </a:pPr>
+            <a:r>
+              <a:rPr lang="th-TH" sz="1400" dirty="0">
+                <a:solidFill>
+                  <a:srgbClr val="333333"/>
+                </a:solidFill>
+                <a:latin typeface="+mn-lt"/>
+                <a:ea typeface="+mn-ea"/>
+                <a:cs typeface="+mn-cs"/>
+              </a:rPr>
+              <a:t>ประเด็นสรุปหนึ่งบรรทัด</a:t>
+            </a:r>
           </a:p>
         </p:txBody>
       </p:sp>
@@ -14966,7 +15985,7 @@
           <p:nvPr/>
         </p:nvPicPr>
         <p:blipFill>
-          <a:blip r:embed="rId20"/>
+          <a:blip r:embed="rId21"/>
           <a:stretch>
             <a:fillRect/>
           </a:stretch>
@@ -15003,6 +16022,7 @@
     <p:sldLayoutId id="2147483664" r:id="rId16"/>
     <p:sldLayoutId id="2147483665" r:id="rId17"/>
     <p:sldLayoutId id="2147483666" r:id="rId18"/>
+    <p:sldLayoutId id="2147483667" r:id="rId19"/>
   </p:sldLayoutIdLst>
   <p:txStyles>
     <p:titleStyle>
@@ -15225,6 +16245,596 @@
 </file>
 
 <file path=ppt/slides/slide10.xml><?xml version="1.0" encoding="utf-8"?>
+<p:sld xmlns:a="http://schemas.openxmlformats.org/drawingml/2006/main" xmlns:r="http://schemas.openxmlformats.org/officeDocument/2006/relationships" xmlns:p="http://schemas.openxmlformats.org/presentationml/2006/main">
+  <p:cSld name="">
+    <p:spTree>
+      <p:nvGrpSpPr>
+        <p:cNvPr id="1" name=""/>
+        <p:cNvGrpSpPr/>
+        <p:nvPr/>
+      </p:nvGrpSpPr>
+      <p:grpSpPr>
+        <a:xfrm>
+          <a:off x="0" y="0"/>
+          <a:ext cx="0" cy="0"/>
+          <a:chOff x="0" y="0"/>
+          <a:chExt cx="0" cy="0"/>
+        </a:xfrm>
+      </p:grpSpPr>
+      <p:sp>
+        <p:nvSpPr>
+          <p:cNvPr id="2" name="Title"/>
+          <p:cNvSpPr>
+            <a:spLocks noGrp="1"/>
+          </p:cNvSpPr>
+          <p:nvPr>
+            <p:ph type="title"/>
+          </p:nvPr>
+        </p:nvSpPr>
+        <p:spPr/>
+        <p:txBody>
+          <a:bodyPr/>
+          <a:lstStyle/>
+          <a:p>
+            <a:pPr/>
+            <a:r>
+              <a:rPr lang="th-TH" dirty="0"/>
+              <a:t>ภาพรวมสถาปัตยกรรมระบบ</a:t>
+            </a:r>
+          </a:p>
+        </p:txBody>
+      </p:sp>
+      <p:sp>
+        <p:nvSpPr>
+          <p:cNvPr id="3" name="Sub"/>
+          <p:cNvSpPr>
+            <a:spLocks noGrp="1"/>
+          </p:cNvSpPr>
+          <p:nvPr>
+            <p:ph type="body" idx="1"/>
+          </p:nvPr>
+        </p:nvSpPr>
+        <p:spPr/>
+        <p:txBody>
+          <a:bodyPr/>
+          <a:lstStyle/>
+          <a:p>
+            <a:pPr/>
+            <a:r>
+              <a:rPr lang="th-TH" dirty="0"/>
+              <a:t>ใช้ชุดชิ้นส่วนมาตรฐาน — กล่องมุมตรง เส้นหักมุมฉาก ไม่มีเงา</a:t>
+            </a:r>
+          </a:p>
+        </p:txBody>
+      </p:sp>
+      <p:sp>
+        <p:nvSpPr>
+          <p:cNvPr id="4" name="Leg"/>
+          <p:cNvSpPr>
+            <a:spLocks noGrp="1"/>
+          </p:cNvSpPr>
+          <p:nvPr>
+            <p:ph type="body" idx="2"/>
+          </p:nvPr>
+        </p:nvSpPr>
+        <p:spPr/>
+        <p:txBody>
+          <a:bodyPr/>
+          <a:lstStyle/>
+          <a:p>
+            <a:pPr/>
+            <a:r>
+              <a:rPr lang="th-TH" dirty="0"/>
+              <a:t>กล่องทึบ = ระบบที่มีอยู่  ·  กล่องมีสีหมวด = ส่วนที่เพิ่ม  ·  เส้นทึบ = ข้อมูลไหลอัตโนมัติ</a:t>
+            </a:r>
+          </a:p>
+        </p:txBody>
+      </p:sp>
+      <p:sp>
+        <p:nvSpPr>
+          <p:cNvPr id="5" name="TL"/>
+          <p:cNvSpPr>
+            <a:spLocks noGrp="1"/>
+          </p:cNvSpPr>
+          <p:nvPr>
+            <p:ph type="body" idx="3"/>
+          </p:nvPr>
+        </p:nvSpPr>
+        <p:spPr/>
+        <p:txBody>
+          <a:bodyPr/>
+          <a:lstStyle/>
+          <a:p>
+            <a:pPr/>
+            <a:r>
+              <a:rPr lang="th-TH" dirty="0"/>
+              <a:t>สรุป</a:t>
+            </a:r>
+          </a:p>
+        </p:txBody>
+      </p:sp>
+      <p:sp>
+        <p:nvSpPr>
+          <p:cNvPr id="6" name="TC"/>
+          <p:cNvSpPr>
+            <a:spLocks noGrp="1"/>
+          </p:cNvSpPr>
+          <p:nvPr>
+            <p:ph type="body" idx="4"/>
+          </p:nvPr>
+        </p:nvSpPr>
+        <p:spPr/>
+        <p:txBody>
+          <a:bodyPr/>
+          <a:lstStyle/>
+          <a:p>
+            <a:pPr/>
+            <a:r>
+              <a:rPr lang="th-TH" dirty="0"/>
+              <a:t>ระบบเดิมไม่ถูกแก้ ของใหม่แทรกเป็นคิวและตัวตรวจกฎคั่นกลางเท่านั้น</a:t>
+            </a:r>
+          </a:p>
+        </p:txBody>
+      </p:sp>
+      <p:sp>
+        <p:nvSpPr>
+          <p:cNvPr id="10" name="Group Zone"/>
+          <p:cNvSpPr/>
+          <p:nvPr/>
+        </p:nvSpPr>
+        <p:spPr>
+          <a:xfrm>
+            <a:off x="3566160" y="2766060"/>
+            <a:ext cx="5257800" cy="1645920"/>
+          </a:xfrm>
+          <a:prstGeom prst="rect">
+            <a:avLst/>
+          </a:prstGeom>
+          <a:solidFill>
+            <a:srgbClr val="E8F6F5"/>
+          </a:solidFill>
+          <a:ln>
+            <a:noFill/>
+          </a:ln>
+        </p:spPr>
+        <p:txBody>
+          <a:bodyPr/>
+          <a:lstStyle/>
+          <a:p>
+            <a:endParaRPr lang="th-TH"/>
+          </a:p>
+        </p:txBody>
+      </p:sp>
+      <p:sp>
+        <p:nvSpPr>
+          <p:cNvPr id="11" name="Group Label"/>
+          <p:cNvSpPr/>
+          <p:nvPr/>
+        </p:nvSpPr>
+        <p:spPr>
+          <a:xfrm>
+            <a:off x="3840480" y="2926080"/>
+            <a:ext cx="3200400" cy="228600"/>
+          </a:xfrm>
+          <a:prstGeom prst="rect">
+            <a:avLst/>
+          </a:prstGeom>
+          <a:noFill/>
+          <a:ln>
+            <a:noFill/>
+          </a:ln>
+        </p:spPr>
+        <p:txBody>
+          <a:bodyPr wrap="square" anchor="ctr" lIns="0" tIns="0" rIns="0" bIns="0" rtlCol="0"/>
+          <a:lstStyle/>
+          <a:p>
+            <a:pPr algn="l" marL="0" indent="0">
+              <a:lnSpc>
+                <a:spcPct val="100000"/>
+              </a:lnSpc>
+              <a:buNone/>
+            </a:pPr>
+            <a:r>
+              <a:rPr lang="th-TH" sz="1200" b="1" spc="120" dirty="0">
+                <a:solidFill>
+                  <a:srgbClr val="216B7F"/>
+                </a:solidFill>
+                <a:latin typeface="+mn-lt"/>
+                <a:ea typeface="+mn-ea"/>
+                <a:cs typeface="+mn-cs"/>
+              </a:rPr>
+              <a:t>ส่วนที่เพิ่มใหม่</a:t>
+            </a:r>
+          </a:p>
+        </p:txBody>
+      </p:sp>
+      <p:sp>
+        <p:nvSpPr>
+          <p:cNvPr id="12" name="Box 1"/>
+          <p:cNvSpPr/>
+          <p:nvPr/>
+        </p:nvSpPr>
+        <p:spPr>
+          <a:xfrm>
+            <a:off x="1143000" y="3223260"/>
+            <a:ext cx="2011680" cy="731520"/>
+          </a:xfrm>
+          <a:prstGeom prst="rect">
+            <a:avLst/>
+          </a:prstGeom>
+          <a:solidFill>
+            <a:srgbClr val="23436D"/>
+          </a:solidFill>
+          <a:ln>
+            <a:noFill/>
+          </a:ln>
+        </p:spPr>
+        <p:txBody>
+          <a:bodyPr wrap="square" anchor="ctr" lIns="0" tIns="0" rIns="0" bIns="0" rtlCol="0"/>
+          <a:lstStyle/>
+          <a:p>
+            <a:pPr algn="ctr" marL="0" indent="0">
+              <a:lnSpc>
+                <a:spcPct val="110000"/>
+              </a:lnSpc>
+              <a:buNone/>
+            </a:pPr>
+            <a:r>
+              <a:rPr lang="th-TH" sz="1200" dirty="0">
+                <a:solidFill>
+                  <a:srgbClr val="FFFFFF"/>
+                </a:solidFill>
+                <a:latin typeface="+mn-lt"/>
+                <a:ea typeface="+mn-ea"/>
+                <a:cs typeface="+mn-cs"/>
+              </a:rPr>
+              <a:t>ระบบ ERP ปัจจุบัน</a:t>
+            </a:r>
+          </a:p>
+        </p:txBody>
+      </p:sp>
+      <p:sp>
+        <p:nvSpPr>
+          <p:cNvPr id="13" name="Box 2"/>
+          <p:cNvSpPr/>
+          <p:nvPr/>
+        </p:nvSpPr>
+        <p:spPr>
+          <a:xfrm>
+            <a:off x="3840480" y="3223260"/>
+            <a:ext cx="2011680" cy="731520"/>
+          </a:xfrm>
+          <a:prstGeom prst="rect">
+            <a:avLst/>
+          </a:prstGeom>
+          <a:solidFill>
+            <a:srgbClr val="FFFFFF"/>
+          </a:solidFill>
+          <a:ln w="12700">
+            <a:solidFill>
+              <a:srgbClr val="2A5EA0"/>
+            </a:solidFill>
+          </a:ln>
+        </p:spPr>
+        <p:txBody>
+          <a:bodyPr wrap="square" anchor="ctr" lIns="0" tIns="0" rIns="0" bIns="0" rtlCol="0"/>
+          <a:lstStyle/>
+          <a:p>
+            <a:pPr algn="ctr" marL="0" indent="0">
+              <a:lnSpc>
+                <a:spcPct val="110000"/>
+              </a:lnSpc>
+              <a:buNone/>
+            </a:pPr>
+            <a:r>
+              <a:rPr lang="th-TH" sz="1200" dirty="0">
+                <a:solidFill>
+                  <a:srgbClr val="333333"/>
+                </a:solidFill>
+                <a:latin typeface="+mn-lt"/>
+                <a:ea typeface="+mn-ea"/>
+                <a:cs typeface="+mn-cs"/>
+              </a:rPr>
+              <a:t>คิวเอกสารกลาง</a:t>
+            </a:r>
+          </a:p>
+        </p:txBody>
+      </p:sp>
+      <p:sp>
+        <p:nvSpPr>
+          <p:cNvPr id="113" name="Box 2 Tab"/>
+          <p:cNvSpPr/>
+          <p:nvPr/>
+        </p:nvSpPr>
+        <p:spPr>
+          <a:xfrm>
+            <a:off x="3954780" y="3337560"/>
+            <a:ext cx="205740" cy="45720"/>
+          </a:xfrm>
+          <a:prstGeom prst="rect">
+            <a:avLst/>
+          </a:prstGeom>
+          <a:solidFill>
+            <a:srgbClr val="2A5EA0"/>
+          </a:solidFill>
+          <a:ln>
+            <a:noFill/>
+          </a:ln>
+        </p:spPr>
+        <p:txBody>
+          <a:bodyPr/>
+          <a:lstStyle/>
+          <a:p>
+            <a:endParaRPr lang="th-TH"/>
+          </a:p>
+        </p:txBody>
+      </p:sp>
+      <p:sp>
+        <p:nvSpPr>
+          <p:cNvPr id="14" name="Box 3"/>
+          <p:cNvSpPr/>
+          <p:nvPr/>
+        </p:nvSpPr>
+        <p:spPr>
+          <a:xfrm>
+            <a:off x="6537960" y="3223260"/>
+            <a:ext cx="2011680" cy="731520"/>
+          </a:xfrm>
+          <a:prstGeom prst="rect">
+            <a:avLst/>
+          </a:prstGeom>
+          <a:solidFill>
+            <a:srgbClr val="FFFFFF"/>
+          </a:solidFill>
+          <a:ln w="12700">
+            <a:solidFill>
+              <a:srgbClr val="BB731B"/>
+            </a:solidFill>
+          </a:ln>
+        </p:spPr>
+        <p:txBody>
+          <a:bodyPr wrap="square" anchor="ctr" lIns="0" tIns="0" rIns="0" bIns="0" rtlCol="0"/>
+          <a:lstStyle/>
+          <a:p>
+            <a:pPr algn="ctr" marL="0" indent="0">
+              <a:lnSpc>
+                <a:spcPct val="110000"/>
+              </a:lnSpc>
+              <a:buNone/>
+            </a:pPr>
+            <a:r>
+              <a:rPr lang="th-TH" sz="1200" dirty="0">
+                <a:solidFill>
+                  <a:srgbClr val="333333"/>
+                </a:solidFill>
+                <a:latin typeface="+mn-lt"/>
+                <a:ea typeface="+mn-ea"/>
+                <a:cs typeface="+mn-cs"/>
+              </a:rPr>
+              <a:t>ตัวตรวจกฎธุรกิจ</a:t>
+            </a:r>
+          </a:p>
+        </p:txBody>
+      </p:sp>
+      <p:sp>
+        <p:nvSpPr>
+          <p:cNvPr id="114" name="Box 3 Tab"/>
+          <p:cNvSpPr/>
+          <p:nvPr/>
+        </p:nvSpPr>
+        <p:spPr>
+          <a:xfrm>
+            <a:off x="6652260" y="3337560"/>
+            <a:ext cx="205740" cy="45720"/>
+          </a:xfrm>
+          <a:prstGeom prst="rect">
+            <a:avLst/>
+          </a:prstGeom>
+          <a:solidFill>
+            <a:srgbClr val="BB731B"/>
+          </a:solidFill>
+          <a:ln>
+            <a:noFill/>
+          </a:ln>
+        </p:spPr>
+        <p:txBody>
+          <a:bodyPr/>
+          <a:lstStyle/>
+          <a:p>
+            <a:endParaRPr lang="th-TH"/>
+          </a:p>
+        </p:txBody>
+      </p:sp>
+      <p:sp>
+        <p:nvSpPr>
+          <p:cNvPr id="15" name="Box 4"/>
+          <p:cNvSpPr/>
+          <p:nvPr/>
+        </p:nvSpPr>
+        <p:spPr>
+          <a:xfrm>
+            <a:off x="9235440" y="3223260"/>
+            <a:ext cx="2011680" cy="731520"/>
+          </a:xfrm>
+          <a:prstGeom prst="rect">
+            <a:avLst/>
+          </a:prstGeom>
+          <a:solidFill>
+            <a:srgbClr val="23436D"/>
+          </a:solidFill>
+          <a:ln>
+            <a:noFill/>
+          </a:ln>
+        </p:spPr>
+        <p:txBody>
+          <a:bodyPr wrap="square" anchor="ctr" lIns="0" tIns="0" rIns="0" bIns="0" rtlCol="0"/>
+          <a:lstStyle/>
+          <a:p>
+            <a:pPr algn="ctr" marL="0" indent="0">
+              <a:lnSpc>
+                <a:spcPct val="110000"/>
+              </a:lnSpc>
+              <a:buNone/>
+            </a:pPr>
+            <a:r>
+              <a:rPr lang="th-TH" sz="1200" dirty="0">
+                <a:solidFill>
+                  <a:srgbClr val="FFFFFF"/>
+                </a:solidFill>
+                <a:latin typeface="+mn-lt"/>
+                <a:ea typeface="+mn-ea"/>
+                <a:cs typeface="+mn-cs"/>
+              </a:rPr>
+              <a:t>ระบบบัญชี</a:t>
+            </a:r>
+          </a:p>
+        </p:txBody>
+      </p:sp>
+      <p:sp>
+        <p:nvSpPr>
+          <p:cNvPr id="16" name="Link 1"/>
+          <p:cNvSpPr/>
+          <p:nvPr/>
+        </p:nvSpPr>
+        <p:spPr>
+          <a:xfrm>
+            <a:off x="3268980" y="3589020"/>
+            <a:ext cx="457200" cy="0"/>
+          </a:xfrm>
+          <a:prstGeom prst="line">
+            <a:avLst/>
+          </a:prstGeom>
+          <a:noFill/>
+          <a:ln w="15875" cap="flat">
+            <a:solidFill>
+              <a:srgbClr val="216B7F"/>
+            </a:solidFill>
+            <a:prstDash val="solid"/>
+            <a:tailEnd type="triangle" w="med" len="med"/>
+          </a:ln>
+        </p:spPr>
+        <p:txBody>
+          <a:bodyPr/>
+          <a:lstStyle/>
+          <a:p>
+            <a:endParaRPr lang="th-TH"/>
+          </a:p>
+        </p:txBody>
+      </p:sp>
+      <p:sp>
+        <p:nvSpPr>
+          <p:cNvPr id="17" name="Link 2"/>
+          <p:cNvSpPr/>
+          <p:nvPr/>
+        </p:nvSpPr>
+        <p:spPr>
+          <a:xfrm>
+            <a:off x="5966460" y="3589020"/>
+            <a:ext cx="457200" cy="0"/>
+          </a:xfrm>
+          <a:prstGeom prst="line">
+            <a:avLst/>
+          </a:prstGeom>
+          <a:noFill/>
+          <a:ln w="15875" cap="flat">
+            <a:solidFill>
+              <a:srgbClr val="216B7F"/>
+            </a:solidFill>
+            <a:prstDash val="solid"/>
+            <a:tailEnd type="triangle" w="med" len="med"/>
+          </a:ln>
+        </p:spPr>
+        <p:txBody>
+          <a:bodyPr/>
+          <a:lstStyle/>
+          <a:p>
+            <a:endParaRPr lang="th-TH"/>
+          </a:p>
+        </p:txBody>
+      </p:sp>
+      <p:sp>
+        <p:nvSpPr>
+          <p:cNvPr id="18" name="Link 3"/>
+          <p:cNvSpPr/>
+          <p:nvPr/>
+        </p:nvSpPr>
+        <p:spPr>
+          <a:xfrm>
+            <a:off x="8663940" y="3589020"/>
+            <a:ext cx="457200" cy="0"/>
+          </a:xfrm>
+          <a:prstGeom prst="line">
+            <a:avLst/>
+          </a:prstGeom>
+          <a:noFill/>
+          <a:ln w="15875" cap="flat">
+            <a:solidFill>
+              <a:srgbClr val="216B7F"/>
+            </a:solidFill>
+            <a:prstDash val="solid"/>
+            <a:tailEnd type="triangle" w="med" len="med"/>
+          </a:ln>
+        </p:spPr>
+        <p:txBody>
+          <a:bodyPr/>
+          <a:lstStyle/>
+          <a:p>
+            <a:endParaRPr lang="th-TH"/>
+          </a:p>
+        </p:txBody>
+      </p:sp>
+      <p:sp>
+        <p:nvSpPr>
+          <p:cNvPr id="19" name="Edge Label"/>
+          <p:cNvSpPr/>
+          <p:nvPr/>
+        </p:nvSpPr>
+        <p:spPr>
+          <a:xfrm>
+            <a:off x="5806440" y="3268980"/>
+            <a:ext cx="822960" cy="228600"/>
+          </a:xfrm>
+          <a:prstGeom prst="rect">
+            <a:avLst/>
+          </a:prstGeom>
+          <a:noFill/>
+          <a:ln>
+            <a:noFill/>
+          </a:ln>
+        </p:spPr>
+        <p:txBody>
+          <a:bodyPr wrap="square" anchor="ctr" lIns="0" tIns="0" rIns="0" bIns="0" rtlCol="0"/>
+          <a:lstStyle/>
+          <a:p>
+            <a:pPr algn="ctr" marL="0" indent="0">
+              <a:lnSpc>
+                <a:spcPct val="100000"/>
+              </a:lnSpc>
+              <a:buNone/>
+            </a:pPr>
+            <a:r>
+              <a:rPr lang="th-TH" sz="1000" dirty="0">
+                <a:solidFill>
+                  <a:srgbClr val="5F5F5F"/>
+                </a:solidFill>
+                <a:latin typeface="+mn-lt"/>
+                <a:ea typeface="+mn-ea"/>
+                <a:cs typeface="+mn-cs"/>
+              </a:rPr>
+              <a:t>ผ่านกฎ</a:t>
+            </a:r>
+          </a:p>
+        </p:txBody>
+      </p:sp>
+    </p:spTree>
+  </p:cSld>
+  <p:clrMapOvr>
+    <a:masterClrMapping/>
+  </p:clrMapOvr>
+</p:sld>
+</file>
+
+<file path=ppt/slides/slide11.xml><?xml version="1.0" encoding="utf-8"?>
 <p:sld xmlns:a="http://schemas.openxmlformats.org/drawingml/2006/main" xmlns:r="http://schemas.openxmlformats.org/officeDocument/2006/relationships" xmlns:p="http://schemas.openxmlformats.org/presentationml/2006/main">
   <p:cSld name="">
     <p:spTree>
@@ -15473,7 +17083,7 @@
                   <a:tcPr marL="73152" marR="73152" marT="73152" marB="73152" anchor="ctr">
                     <a:lnB w="34925" cap="flat">
                       <a:solidFill>
-                        <a:srgbClr val="23436D"/>
+                        <a:srgbClr val="2A5EA0"/>
                       </a:solidFill>
                       <a:prstDash val="solid"/>
                     </a:lnB>
@@ -15512,7 +17122,7 @@
                       <a:r>
                         <a:rPr lang="th-TH" sz="1000" b="1" dirty="0">
                           <a:solidFill>
-                            <a:srgbClr val="23436D"/>
+                            <a:srgbClr val="2A5EA0"/>
                           </a:solidFill>
                           <a:latin typeface="+mn-lt"/>
                           <a:cs typeface="+mn-cs"/>
@@ -15624,7 +17234,7 @@
                   <a:tcPr marL="73152" marR="73152" marT="73152" marB="73152" anchor="ctr">
                     <a:lnB w="34925" cap="flat">
                       <a:solidFill>
-                        <a:srgbClr val="23436D"/>
+                        <a:srgbClr val="2A5EA0"/>
                       </a:solidFill>
                       <a:prstDash val="solid"/>
                     </a:lnB>
@@ -15663,7 +17273,7 @@
                       <a:r>
                         <a:rPr lang="th-TH" sz="1000" b="1" dirty="0">
                           <a:solidFill>
-                            <a:srgbClr val="23436D"/>
+                            <a:srgbClr val="2A5EA0"/>
                           </a:solidFill>
                           <a:latin typeface="+mn-lt"/>
                           <a:cs typeface="+mn-cs"/>
@@ -15775,7 +17385,7 @@
                   <a:tcPr marL="73152" marR="73152" marT="73152" marB="73152" anchor="ctr">
                     <a:lnB w="34925" cap="flat">
                       <a:solidFill>
-                        <a:srgbClr val="216B7F"/>
+                        <a:srgbClr val="BB731B"/>
                       </a:solidFill>
                       <a:prstDash val="solid"/>
                     </a:lnB>
@@ -15814,7 +17424,7 @@
                       <a:r>
                         <a:rPr lang="th-TH" sz="1000" b="1" dirty="0">
                           <a:solidFill>
-                            <a:srgbClr val="216B7F"/>
+                            <a:srgbClr val="BB731B"/>
                           </a:solidFill>
                           <a:latin typeface="+mn-lt"/>
                           <a:cs typeface="+mn-cs"/>
@@ -15926,7 +17536,7 @@
                   <a:tcPr marL="73152" marR="73152" marT="73152" marB="73152" anchor="ctr">
                     <a:lnB w="34925" cap="flat">
                       <a:solidFill>
-                        <a:srgbClr val="216B7F"/>
+                        <a:srgbClr val="BB731B"/>
                       </a:solidFill>
                       <a:prstDash val="solid"/>
                     </a:lnB>
@@ -15965,7 +17575,7 @@
                       <a:r>
                         <a:rPr lang="th-TH" sz="1000" b="1" dirty="0">
                           <a:solidFill>
-                            <a:srgbClr val="216B7F"/>
+                            <a:srgbClr val="BB731B"/>
                           </a:solidFill>
                           <a:latin typeface="+mn-lt"/>
                           <a:cs typeface="+mn-cs"/>
@@ -16077,7 +17687,7 @@
                   <a:tcPr marL="73152" marR="73152" marT="73152" marB="73152" anchor="ctr">
                     <a:lnB w="34925" cap="flat">
                       <a:solidFill>
-                        <a:srgbClr val="23436D"/>
+                        <a:srgbClr val="2A5EA0"/>
                       </a:solidFill>
                       <a:prstDash val="solid"/>
                     </a:lnB>
@@ -16116,7 +17726,7 @@
                       <a:r>
                         <a:rPr lang="th-TH" sz="1000" b="1" dirty="0">
                           <a:solidFill>
-                            <a:srgbClr val="23436D"/>
+                            <a:srgbClr val="2A5EA0"/>
                           </a:solidFill>
                           <a:latin typeface="+mn-lt"/>
                           <a:cs typeface="+mn-cs"/>
@@ -16228,7 +17838,7 @@
                   <a:tcPr marL="73152" marR="73152" marT="73152" marB="73152" anchor="ctr">
                     <a:lnB w="34925" cap="flat">
                       <a:solidFill>
-                        <a:srgbClr val="16324F"/>
+                        <a:srgbClr val="0D9298"/>
                       </a:solidFill>
                       <a:prstDash val="solid"/>
                     </a:lnB>
@@ -16267,7 +17877,7 @@
                       <a:r>
                         <a:rPr lang="th-TH" sz="1000" b="1" dirty="0">
                           <a:solidFill>
-                            <a:srgbClr val="16324F"/>
+                            <a:srgbClr val="0D9298"/>
                           </a:solidFill>
                           <a:latin typeface="+mn-lt"/>
                           <a:cs typeface="+mn-cs"/>
@@ -16379,7 +17989,7 @@
                   <a:tcPr marL="73152" marR="73152" marT="73152" marB="73152" anchor="ctr">
                     <a:lnB w="34925" cap="flat">
                       <a:solidFill>
-                        <a:srgbClr val="16324F"/>
+                        <a:srgbClr val="0D9298"/>
                       </a:solidFill>
                       <a:prstDash val="solid"/>
                     </a:lnB>
@@ -16418,7 +18028,7 @@
                       <a:r>
                         <a:rPr lang="th-TH" sz="1000" b="1" dirty="0">
                           <a:solidFill>
-                            <a:srgbClr val="16324F"/>
+                            <a:srgbClr val="0D9298"/>
                           </a:solidFill>
                           <a:latin typeface="+mn-lt"/>
                           <a:cs typeface="+mn-cs"/>
@@ -16530,7 +18140,7 @@
                   <a:tcPr marL="73152" marR="73152" marT="73152" marB="73152" anchor="ctr">
                     <a:lnB w="34925" cap="flat">
                       <a:solidFill>
-                        <a:srgbClr val="16324F"/>
+                        <a:srgbClr val="0D9298"/>
                       </a:solidFill>
                       <a:prstDash val="solid"/>
                     </a:lnB>
@@ -16569,7 +18179,7 @@
                       <a:r>
                         <a:rPr lang="th-TH" sz="1000" b="1" dirty="0">
                           <a:solidFill>
-                            <a:srgbClr val="16324F"/>
+                            <a:srgbClr val="0D9298"/>
                           </a:solidFill>
                           <a:latin typeface="+mn-lt"/>
                           <a:cs typeface="+mn-cs"/>
@@ -16761,105 +18371,6 @@
 </p:sld>
 </file>
 
-<file path=ppt/slides/slide11.xml><?xml version="1.0" encoding="utf-8"?>
-<p:sld xmlns:a="http://schemas.openxmlformats.org/drawingml/2006/main" xmlns:r="http://schemas.openxmlformats.org/officeDocument/2006/relationships" xmlns:p="http://schemas.openxmlformats.org/presentationml/2006/main">
-  <p:cSld name="">
-    <p:spTree>
-      <p:nvGrpSpPr>
-        <p:cNvPr id="1" name=""/>
-        <p:cNvGrpSpPr/>
-        <p:nvPr/>
-      </p:nvGrpSpPr>
-      <p:grpSpPr>
-        <a:xfrm>
-          <a:off x="0" y="0"/>
-          <a:ext cx="0" cy="0"/>
-          <a:chOff x="0" y="0"/>
-          <a:chExt cx="0" cy="0"/>
-        </a:xfrm>
-      </p:grpSpPr>
-      <p:sp>
-        <p:nvSpPr>
-          <p:cNvPr id="2" name="Title"/>
-          <p:cNvSpPr>
-            <a:spLocks noGrp="1"/>
-          </p:cNvSpPr>
-          <p:nvPr>
-            <p:ph type="title"/>
-          </p:nvPr>
-        </p:nvSpPr>
-        <p:spPr/>
-        <p:txBody>
-          <a:bodyPr/>
-          <a:lstStyle/>
-          <a:p>
-            <a:pPr/>
-            <a:r>
-              <a:rPr lang="th-TH" dirty="0"/>
-              <a:t>ขอบเขตบริการของ NCT</a:t>
-            </a:r>
-          </a:p>
-        </p:txBody>
-      </p:sp>
-      <p:sp>
-        <p:nvSpPr>
-          <p:cNvPr id="3" name="Body"/>
-          <p:cNvSpPr>
-            <a:spLocks noGrp="1"/>
-          </p:cNvSpPr>
-          <p:nvPr>
-            <p:ph type="body" idx="1"/>
-          </p:nvPr>
-        </p:nvSpPr>
-        <p:spPr/>
-        <p:txBody>
-          <a:bodyPr/>
-          <a:lstStyle/>
-          <a:p>
-            <a:pPr/>
-            <a:r>
-              <a:rPr lang="th-TH" dirty="0"/>
-              <a:t>วางระบบโครงสร้างพื้นฐานไอทีสำหรับองค์กร</a:t>
-            </a:r>
-          </a:p>
-          <a:p>
-            <a:pPr lvl="1"/>
-            <a:r>
-              <a:rPr lang="th-TH" dirty="0"/>
-              <a:t>ออกแบบเครือข่าย ระบบสำรองข้อมูล และความปลอดภัย</a:t>
-            </a:r>
-          </a:p>
-          <a:p>
-            <a:pPr/>
-            <a:r>
-              <a:rPr lang="th-TH" dirty="0"/>
-              <a:t>ดูแลระบบต่อเนื่องแบบ Managed Service</a:t>
-            </a:r>
-          </a:p>
-          <a:p>
-            <a:pPr lvl="1"/>
-            <a:r>
-              <a:rPr lang="th-TH" dirty="0"/>
-              <a:t>มีทีมซัพพอร์ตตอบกลับภายใน SLA ที่ตกลงกัน</a:t>
-            </a:r>
-          </a:p>
-          <a:p>
-            <a:pPr/>
-            <a:r>
-              <a:rPr lang="th-TH" dirty="0"/>
-              <a:t>ให้คำปรึกษาการย้ายระบบขึ้นคลาวด์</a:t>
-            </a:r>
-          </a:p>
-        </p:txBody>
-      </p:sp>
-    </p:spTree>
-  </p:cSld>
-  <p:clrMapOvr>
-    <a:masterClrMapping/>
-  </p:clrMapOvr>
-</p:sld>
-</file>
-
 <file path=ppt/slides/slide12.xml><?xml version="1.0" encoding="utf-8"?>
 <p:sld xmlns:a="http://schemas.openxmlformats.org/drawingml/2006/main" xmlns:r="http://schemas.openxmlformats.org/officeDocument/2006/relationships" xmlns:p="http://schemas.openxmlformats.org/presentationml/2006/main">
   <p:cSld name="">
@@ -16895,14 +18406,14 @@
             <a:pPr/>
             <a:r>
               <a:rPr lang="th-TH" dirty="0"/>
-              <a:t>สามเสาหลักของบริการ</a:t>
-            </a:r>
-          </a:p>
-        </p:txBody>
-      </p:sp>
-      <p:sp>
-        <p:nvSpPr>
-          <p:cNvPr id="3" name="C1H"/>
+              <a:t>ขอบเขตบริการของ NCT</a:t>
+            </a:r>
+          </a:p>
+        </p:txBody>
+      </p:sp>
+      <p:sp>
+        <p:nvSpPr>
+          <p:cNvPr id="3" name="Body"/>
           <p:cNvSpPr>
             <a:spLocks noGrp="1"/>
           </p:cNvSpPr>
@@ -16918,122 +18429,35 @@
             <a:pPr/>
             <a:r>
               <a:rPr lang="th-TH" dirty="0"/>
-              <a:t>Infrastructure</a:t>
-            </a:r>
-          </a:p>
-        </p:txBody>
-      </p:sp>
-      <p:sp>
-        <p:nvSpPr>
-          <p:cNvPr id="4" name="C1B"/>
-          <p:cNvSpPr>
-            <a:spLocks noGrp="1"/>
-          </p:cNvSpPr>
-          <p:nvPr>
-            <p:ph type="body" idx="2"/>
-          </p:nvPr>
-        </p:nvSpPr>
-        <p:spPr/>
-        <p:txBody>
-          <a:bodyPr/>
-          <a:lstStyle/>
+              <a:t>วางระบบโครงสร้างพื้นฐานไอทีสำหรับองค์กร</a:t>
+            </a:r>
+          </a:p>
+          <a:p>
+            <a:pPr lvl="1"/>
+            <a:r>
+              <a:rPr lang="th-TH" dirty="0"/>
+              <a:t>ออกแบบเครือข่าย ระบบสำรองข้อมูล และความปลอดภัย</a:t>
+            </a:r>
+          </a:p>
           <a:p>
             <a:pPr/>
             <a:r>
               <a:rPr lang="th-TH" dirty="0"/>
-              <a:t>ออกแบบและติดตั้งเครือข่าย เซิร์ฟเวอร์ และระบบสำรองข้อมูล</a:t>
-            </a:r>
-          </a:p>
-        </p:txBody>
-      </p:sp>
-      <p:sp>
-        <p:nvSpPr>
-          <p:cNvPr id="5" name="C2H"/>
-          <p:cNvSpPr>
-            <a:spLocks noGrp="1"/>
-          </p:cNvSpPr>
-          <p:nvPr>
-            <p:ph type="body" idx="3"/>
-          </p:nvPr>
-        </p:nvSpPr>
-        <p:spPr/>
-        <p:txBody>
-          <a:bodyPr/>
-          <a:lstStyle/>
+              <a:t>ดูแลระบบต่อเนื่องแบบ Managed Service</a:t>
+            </a:r>
+          </a:p>
+          <a:p>
+            <a:pPr lvl="1"/>
+            <a:r>
+              <a:rPr lang="th-TH" dirty="0"/>
+              <a:t>มีทีมซัพพอร์ตตอบกลับภายใน SLA ที่ตกลงกัน</a:t>
+            </a:r>
+          </a:p>
           <a:p>
             <a:pPr/>
             <a:r>
               <a:rPr lang="th-TH" dirty="0"/>
-              <a:t>Managed Service</a:t>
-            </a:r>
-          </a:p>
-        </p:txBody>
-      </p:sp>
-      <p:sp>
-        <p:nvSpPr>
-          <p:cNvPr id="6" name="C2B"/>
-          <p:cNvSpPr>
-            <a:spLocks noGrp="1"/>
-          </p:cNvSpPr>
-          <p:nvPr>
-            <p:ph type="body" idx="4"/>
-          </p:nvPr>
-        </p:nvSpPr>
-        <p:spPr/>
-        <p:txBody>
-          <a:bodyPr/>
-          <a:lstStyle/>
-          <a:p>
-            <a:pPr/>
-            <a:r>
-              <a:rPr lang="th-TH" dirty="0"/>
-              <a:t>ดูแลระบบรายเดือน พร้อมทีมซัพพอร์ตและรายงานสุขภาพระบบ</a:t>
-            </a:r>
-          </a:p>
-        </p:txBody>
-      </p:sp>
-      <p:sp>
-        <p:nvSpPr>
-          <p:cNvPr id="7" name="C3H"/>
-          <p:cNvSpPr>
-            <a:spLocks noGrp="1"/>
-          </p:cNvSpPr>
-          <p:nvPr>
-            <p:ph type="body" idx="5"/>
-          </p:nvPr>
-        </p:nvSpPr>
-        <p:spPr/>
-        <p:txBody>
-          <a:bodyPr/>
-          <a:lstStyle/>
-          <a:p>
-            <a:pPr/>
-            <a:r>
-              <a:rPr lang="th-TH" dirty="0"/>
-              <a:t>Cloud &amp; Security</a:t>
-            </a:r>
-          </a:p>
-        </p:txBody>
-      </p:sp>
-      <p:sp>
-        <p:nvSpPr>
-          <p:cNvPr id="8" name="C3B"/>
-          <p:cNvSpPr>
-            <a:spLocks noGrp="1"/>
-          </p:cNvSpPr>
-          <p:nvPr>
-            <p:ph type="body" idx="6"/>
-          </p:nvPr>
-        </p:nvSpPr>
-        <p:spPr/>
-        <p:txBody>
-          <a:bodyPr/>
-          <a:lstStyle/>
-          <a:p>
-            <a:pPr/>
-            <a:r>
-              <a:rPr lang="th-TH" dirty="0"/>
-              <a:t>ย้ายระบบขึ้นคลาวด์ และวางมาตรการความปลอดภัยตามมาตรฐาน</a:t>
+              <a:t>ให้คำปรึกษาการย้ายระบบขึ้นคลาวด์</a:t>
             </a:r>
           </a:p>
         </p:txBody>
@@ -17081,14 +18505,14 @@
             <a:pPr/>
             <a:r>
               <a:rPr lang="th-TH" dirty="0"/>
-              <a:t>ตัวเลขที่บอกเรื่องเรา</a:t>
-            </a:r>
-          </a:p>
-        </p:txBody>
-      </p:sp>
-      <p:sp>
-        <p:nvSpPr>
-          <p:cNvPr id="3" name="F1"/>
+              <a:t>สามเสาหลักของบริการ</a:t>
+            </a:r>
+          </a:p>
+        </p:txBody>
+      </p:sp>
+      <p:sp>
+        <p:nvSpPr>
+          <p:cNvPr id="3" name="C1H"/>
           <p:cNvSpPr>
             <a:spLocks noGrp="1"/>
           </p:cNvSpPr>
@@ -17104,14 +18528,14 @@
             <a:pPr/>
             <a:r>
               <a:rPr lang="th-TH" dirty="0"/>
-              <a:t>12</a:t>
-            </a:r>
-          </a:p>
-        </p:txBody>
-      </p:sp>
-      <p:sp>
-        <p:nvSpPr>
-          <p:cNvPr id="4" name="F1L"/>
+              <a:t>Infrastructure</a:t>
+            </a:r>
+          </a:p>
+        </p:txBody>
+      </p:sp>
+      <p:sp>
+        <p:nvSpPr>
+          <p:cNvPr id="4" name="C1B"/>
           <p:cNvSpPr>
             <a:spLocks noGrp="1"/>
           </p:cNvSpPr>
@@ -17127,14 +18551,14 @@
             <a:pPr/>
             <a:r>
               <a:rPr lang="th-TH" dirty="0"/>
-              <a:t>ปีที่ให้บริการองค์กรไทย</a:t>
-            </a:r>
-          </a:p>
-        </p:txBody>
-      </p:sp>
-      <p:sp>
-        <p:nvSpPr>
-          <p:cNvPr id="5" name="F2"/>
+              <a:t>ออกแบบและติดตั้งเครือข่าย เซิร์ฟเวอร์ และระบบสำรองข้อมูล</a:t>
+            </a:r>
+          </a:p>
+        </p:txBody>
+      </p:sp>
+      <p:sp>
+        <p:nvSpPr>
+          <p:cNvPr id="5" name="C2H"/>
           <p:cNvSpPr>
             <a:spLocks noGrp="1"/>
           </p:cNvSpPr>
@@ -17150,14 +18574,14 @@
             <a:pPr/>
             <a:r>
               <a:rPr lang="th-TH" dirty="0"/>
-              <a:t>99.9%</a:t>
-            </a:r>
-          </a:p>
-        </p:txBody>
-      </p:sp>
-      <p:sp>
-        <p:nvSpPr>
-          <p:cNvPr id="6" name="F2L"/>
+              <a:t>Managed Service</a:t>
+            </a:r>
+          </a:p>
+        </p:txBody>
+      </p:sp>
+      <p:sp>
+        <p:nvSpPr>
+          <p:cNvPr id="6" name="C2B"/>
           <p:cNvSpPr>
             <a:spLocks noGrp="1"/>
           </p:cNvSpPr>
@@ -17173,14 +18597,14 @@
             <a:pPr/>
             <a:r>
               <a:rPr lang="th-TH" dirty="0"/>
-              <a:t>Uptime เฉลี่ยของระบบที่ดูแล</a:t>
-            </a:r>
-          </a:p>
-        </p:txBody>
-      </p:sp>
-      <p:sp>
-        <p:nvSpPr>
-          <p:cNvPr id="7" name="F3"/>
+              <a:t>ดูแลระบบรายเดือน พร้อมทีมซัพพอร์ตและรายงานสุขภาพระบบ</a:t>
+            </a:r>
+          </a:p>
+        </p:txBody>
+      </p:sp>
+      <p:sp>
+        <p:nvSpPr>
+          <p:cNvPr id="7" name="C3H"/>
           <p:cNvSpPr>
             <a:spLocks noGrp="1"/>
           </p:cNvSpPr>
@@ -17196,14 +18620,14 @@
             <a:pPr/>
             <a:r>
               <a:rPr lang="th-TH" dirty="0"/>
-              <a:t>24/7</a:t>
-            </a:r>
-          </a:p>
-        </p:txBody>
-      </p:sp>
-      <p:sp>
-        <p:nvSpPr>
-          <p:cNvPr id="8" name="F3L"/>
+              <a:t>Cloud &amp; Security</a:t>
+            </a:r>
+          </a:p>
+        </p:txBody>
+      </p:sp>
+      <p:sp>
+        <p:nvSpPr>
+          <p:cNvPr id="8" name="C3B"/>
           <p:cNvSpPr>
             <a:spLocks noGrp="1"/>
           </p:cNvSpPr>
@@ -17219,30 +18643,7 @@
             <a:pPr/>
             <a:r>
               <a:rPr lang="th-TH" dirty="0"/>
-              <a:t>ทีมเฝ้าระวังและตอบกลับ</a:t>
-            </a:r>
-          </a:p>
-        </p:txBody>
-      </p:sp>
-      <p:sp>
-        <p:nvSpPr>
-          <p:cNvPr id="9" name="FN"/>
-          <p:cNvSpPr>
-            <a:spLocks noGrp="1"/>
-          </p:cNvSpPr>
-          <p:nvPr>
-            <p:ph type="body" idx="7"/>
-          </p:nvPr>
-        </p:nvSpPr>
-        <p:spPr/>
-        <p:txBody>
-          <a:bodyPr/>
-          <a:lstStyle/>
-          <a:p>
-            <a:pPr/>
-            <a:r>
-              <a:rPr lang="th-TH" dirty="0"/>
-              <a:t>ข้อมูล ณ ไตรมาส 1 ปี 2569</a:t>
+              <a:t>ย้ายระบบขึ้นคลาวด์ และวางมาตรการความปลอดภัยตามมาตรฐาน</a:t>
             </a:r>
           </a:p>
         </p:txBody>
@@ -17274,7 +18675,30 @@
       </p:grpSpPr>
       <p:sp>
         <p:nvSpPr>
-          <p:cNvPr id="2" name="Q"/>
+          <p:cNvPr id="2" name="Title"/>
+          <p:cNvSpPr>
+            <a:spLocks noGrp="1"/>
+          </p:cNvSpPr>
+          <p:nvPr>
+            <p:ph type="title"/>
+          </p:nvPr>
+        </p:nvSpPr>
+        <p:spPr/>
+        <p:txBody>
+          <a:bodyPr/>
+          <a:lstStyle/>
+          <a:p>
+            <a:pPr/>
+            <a:r>
+              <a:rPr lang="th-TH" dirty="0"/>
+              <a:t>ตัวเลขที่บอกเรื่องเรา</a:t>
+            </a:r>
+          </a:p>
+        </p:txBody>
+      </p:sp>
+      <p:sp>
+        <p:nvSpPr>
+          <p:cNvPr id="3" name="F1"/>
           <p:cNvSpPr>
             <a:spLocks noGrp="1"/>
           </p:cNvSpPr>
@@ -17290,14 +18714,14 @@
             <a:pPr/>
             <a:r>
               <a:rPr lang="th-TH" dirty="0"/>
-              <a:t>ระบบไม่ล่มอีกเลยตั้งแต่เปลี่ยนมาใช้ทีมนี้ดูแล และเราวางแผนงบประมาณได้ล่วงหน้าจริง ๆ</a:t>
-            </a:r>
-          </a:p>
-        </p:txBody>
-      </p:sp>
-      <p:sp>
-        <p:nvSpPr>
-          <p:cNvPr id="3" name="A"/>
+              <a:t>12</a:t>
+            </a:r>
+          </a:p>
+        </p:txBody>
+      </p:sp>
+      <p:sp>
+        <p:nvSpPr>
+          <p:cNvPr id="4" name="F1L"/>
           <p:cNvSpPr>
             <a:spLocks noGrp="1"/>
           </p:cNvSpPr>
@@ -17313,7 +18737,122 @@
             <a:pPr/>
             <a:r>
               <a:rPr lang="th-TH" dirty="0"/>
-              <a:t>คุณสมชาย ป. — ผู้จัดการฝ่ายไอที, บริษัทตัวอย่าง จำกัด</a:t>
+              <a:t>ปีที่ให้บริการองค์กรไทย</a:t>
+            </a:r>
+          </a:p>
+        </p:txBody>
+      </p:sp>
+      <p:sp>
+        <p:nvSpPr>
+          <p:cNvPr id="5" name="F2"/>
+          <p:cNvSpPr>
+            <a:spLocks noGrp="1"/>
+          </p:cNvSpPr>
+          <p:nvPr>
+            <p:ph type="body" idx="3"/>
+          </p:nvPr>
+        </p:nvSpPr>
+        <p:spPr/>
+        <p:txBody>
+          <a:bodyPr/>
+          <a:lstStyle/>
+          <a:p>
+            <a:pPr/>
+            <a:r>
+              <a:rPr lang="th-TH" dirty="0"/>
+              <a:t>99.9%</a:t>
+            </a:r>
+          </a:p>
+        </p:txBody>
+      </p:sp>
+      <p:sp>
+        <p:nvSpPr>
+          <p:cNvPr id="6" name="F2L"/>
+          <p:cNvSpPr>
+            <a:spLocks noGrp="1"/>
+          </p:cNvSpPr>
+          <p:nvPr>
+            <p:ph type="body" idx="4"/>
+          </p:nvPr>
+        </p:nvSpPr>
+        <p:spPr/>
+        <p:txBody>
+          <a:bodyPr/>
+          <a:lstStyle/>
+          <a:p>
+            <a:pPr/>
+            <a:r>
+              <a:rPr lang="th-TH" dirty="0"/>
+              <a:t>Uptime เฉลี่ยของระบบที่ดูแล</a:t>
+            </a:r>
+          </a:p>
+        </p:txBody>
+      </p:sp>
+      <p:sp>
+        <p:nvSpPr>
+          <p:cNvPr id="7" name="F3"/>
+          <p:cNvSpPr>
+            <a:spLocks noGrp="1"/>
+          </p:cNvSpPr>
+          <p:nvPr>
+            <p:ph type="body" idx="5"/>
+          </p:nvPr>
+        </p:nvSpPr>
+        <p:spPr/>
+        <p:txBody>
+          <a:bodyPr/>
+          <a:lstStyle/>
+          <a:p>
+            <a:pPr/>
+            <a:r>
+              <a:rPr lang="th-TH" dirty="0"/>
+              <a:t>24/7</a:t>
+            </a:r>
+          </a:p>
+        </p:txBody>
+      </p:sp>
+      <p:sp>
+        <p:nvSpPr>
+          <p:cNvPr id="8" name="F3L"/>
+          <p:cNvSpPr>
+            <a:spLocks noGrp="1"/>
+          </p:cNvSpPr>
+          <p:nvPr>
+            <p:ph type="body" idx="6"/>
+          </p:nvPr>
+        </p:nvSpPr>
+        <p:spPr/>
+        <p:txBody>
+          <a:bodyPr/>
+          <a:lstStyle/>
+          <a:p>
+            <a:pPr/>
+            <a:r>
+              <a:rPr lang="th-TH" dirty="0"/>
+              <a:t>ทีมเฝ้าระวังและตอบกลับ</a:t>
+            </a:r>
+          </a:p>
+        </p:txBody>
+      </p:sp>
+      <p:sp>
+        <p:nvSpPr>
+          <p:cNvPr id="9" name="FN"/>
+          <p:cNvSpPr>
+            <a:spLocks noGrp="1"/>
+          </p:cNvSpPr>
+          <p:nvPr>
+            <p:ph type="body" idx="7"/>
+          </p:nvPr>
+        </p:nvSpPr>
+        <p:spPr/>
+        <p:txBody>
+          <a:bodyPr/>
+          <a:lstStyle/>
+          <a:p>
+            <a:pPr/>
+            <a:r>
+              <a:rPr lang="th-TH" dirty="0"/>
+              <a:t>ข้อมูล ณ ไตรมาส 1 ปี 2569</a:t>
             </a:r>
           </a:p>
         </p:txBody>
@@ -17327,6 +18866,77 @@
 </file>
 
 <file path=ppt/slides/slide15.xml><?xml version="1.0" encoding="utf-8"?>
+<p:sld xmlns:a="http://schemas.openxmlformats.org/drawingml/2006/main" xmlns:r="http://schemas.openxmlformats.org/officeDocument/2006/relationships" xmlns:p="http://schemas.openxmlformats.org/presentationml/2006/main">
+  <p:cSld name="">
+    <p:spTree>
+      <p:nvGrpSpPr>
+        <p:cNvPr id="1" name=""/>
+        <p:cNvGrpSpPr/>
+        <p:nvPr/>
+      </p:nvGrpSpPr>
+      <p:grpSpPr>
+        <a:xfrm>
+          <a:off x="0" y="0"/>
+          <a:ext cx="0" cy="0"/>
+          <a:chOff x="0" y="0"/>
+          <a:chExt cx="0" cy="0"/>
+        </a:xfrm>
+      </p:grpSpPr>
+      <p:sp>
+        <p:nvSpPr>
+          <p:cNvPr id="2" name="Q"/>
+          <p:cNvSpPr>
+            <a:spLocks noGrp="1"/>
+          </p:cNvSpPr>
+          <p:nvPr>
+            <p:ph type="body" idx="1"/>
+          </p:nvPr>
+        </p:nvSpPr>
+        <p:spPr/>
+        <p:txBody>
+          <a:bodyPr/>
+          <a:lstStyle/>
+          <a:p>
+            <a:pPr/>
+            <a:r>
+              <a:rPr lang="th-TH" dirty="0"/>
+              <a:t>ระบบไม่ล่มอีกเลยตั้งแต่เปลี่ยนมาใช้ทีมนี้ดูแล และเราวางแผนงบประมาณได้ล่วงหน้าจริง ๆ</a:t>
+            </a:r>
+          </a:p>
+        </p:txBody>
+      </p:sp>
+      <p:sp>
+        <p:nvSpPr>
+          <p:cNvPr id="3" name="A"/>
+          <p:cNvSpPr>
+            <a:spLocks noGrp="1"/>
+          </p:cNvSpPr>
+          <p:nvPr>
+            <p:ph type="body" idx="2"/>
+          </p:nvPr>
+        </p:nvSpPr>
+        <p:spPr/>
+        <p:txBody>
+          <a:bodyPr/>
+          <a:lstStyle/>
+          <a:p>
+            <a:pPr/>
+            <a:r>
+              <a:rPr lang="th-TH" dirty="0"/>
+              <a:t>คุณสมชาย ป. — ผู้จัดการฝ่ายไอที, บริษัทตัวอย่าง จำกัด</a:t>
+            </a:r>
+          </a:p>
+        </p:txBody>
+      </p:sp>
+    </p:spTree>
+  </p:cSld>
+  <p:clrMapOvr>
+    <a:masterClrMapping/>
+  </p:clrMapOvr>
+</p:sld>
+</file>
+
+<file path=ppt/slides/slide16.xml><?xml version="1.0" encoding="utf-8"?>
 <p:sld xmlns:a="http://schemas.openxmlformats.org/drawingml/2006/main" xmlns:r="http://schemas.openxmlformats.org/officeDocument/2006/relationships" xmlns:p="http://schemas.openxmlformats.org/presentationml/2006/main">
   <p:cSld name="">
     <p:spTree>
@@ -18057,7 +19667,7 @@
 </p:sld>
 </file>
 
-<file path=ppt/slides/slide16.xml><?xml version="1.0" encoding="utf-8"?>
+<file path=ppt/slides/slide17.xml><?xml version="1.0" encoding="utf-8"?>
 <p:sld xmlns:a="http://schemas.openxmlformats.org/drawingml/2006/main" xmlns:r="http://schemas.openxmlformats.org/officeDocument/2006/relationships" xmlns:p="http://schemas.openxmlformats.org/presentationml/2006/main">
   <p:cSld name="">
     <p:spTree>
@@ -18310,7 +19920,7 @@
 </p:sld>
 </file>
 
-<file path=ppt/slides/slide17.xml><?xml version="1.0" encoding="utf-8"?>
+<file path=ppt/slides/slide18.xml><?xml version="1.0" encoding="utf-8"?>
 <p:sld xmlns:a="http://schemas.openxmlformats.org/drawingml/2006/main" xmlns:r="http://schemas.openxmlformats.org/officeDocument/2006/relationships" xmlns:p="http://schemas.openxmlformats.org/presentationml/2006/main">
   <p:cSld name="">
     <p:spTree>
@@ -18796,7 +20406,7 @@
 </p:sld>
 </file>
 
-<file path=ppt/slides/slide18.xml><?xml version="1.0" encoding="utf-8"?>
+<file path=ppt/slides/slide19.xml><?xml version="1.0" encoding="utf-8"?>
 <p:sld xmlns:a="http://schemas.openxmlformats.org/drawingml/2006/main" xmlns:r="http://schemas.openxmlformats.org/officeDocument/2006/relationships" xmlns:p="http://schemas.openxmlformats.org/presentationml/2006/main">
   <p:cSld name="">
     <p:spTree>
@@ -19450,19 +21060,39 @@
             <a:pPr/>
             <a:r>
               <a:rPr lang="th-TH" dirty="0"/>
-              <a:t>ก่อนและหลังใช้บริการ</a:t>
-            </a:r>
-          </a:p>
-        </p:txBody>
-      </p:sp>
-      <p:sp>
-        <p:nvSpPr>
-          <p:cNvPr id="3" name="L"/>
-          <p:cNvSpPr>
-            <a:spLocks noGrp="1"/>
-          </p:cNvSpPr>
-          <p:nvPr>
-            <p:ph type="body" idx="1"/>
+              <a:t>ปิดงบ พ.ค. ใช้ 9 วัน นานสุดในรอบครึ่งปี</a:t>
+            </a:r>
+          </a:p>
+        </p:txBody>
+      </p:sp>
+      <p:graphicFrame>
+        <p:nvGraphicFramePr>
+          <p:cNvPr id="3" name="Close Days"/>
+          <p:cNvGraphicFramePr>
+            <a:graphicFrameLocks noGrp="1"/>
+          </p:cNvGraphicFramePr>
+          <p:nvPr>
+            <p:ph type="chart" idx="1"/>
+          </p:nvPr>
+        </p:nvGraphicFramePr>
+        <p:xfrm>
+          <a:off x="914400" y="1691640"/>
+          <a:ext cx="6847840" cy="3474720"/>
+        </p:xfrm>
+        <a:graphic>
+          <a:graphicData uri="http://schemas.openxmlformats.org/drawingml/2006/chart">
+            <c:chart xmlns:c="http://schemas.openxmlformats.org/drawingml/2006/chart" r:id="rId2"/>
+          </a:graphicData>
+        </a:graphic>
+      </p:graphicFrame>
+      <p:sp>
+        <p:nvSpPr>
+          <p:cNvPr id="4" name="Fig"/>
+          <p:cNvSpPr>
+            <a:spLocks noGrp="1"/>
+          </p:cNvSpPr>
+          <p:nvPr>
+            <p:ph type="body" idx="2"/>
           </p:nvPr>
         </p:nvSpPr>
         <p:spPr/>
@@ -19473,33 +21103,79 @@
             <a:pPr/>
             <a:r>
               <a:rPr lang="th-TH" dirty="0"/>
-              <a:t>ก่อน</a:t>
-            </a:r>
-          </a:p>
-          <a:p>
-            <a:pPr lvl="1"/>
+              <a:t>9 วัน</a:t>
+            </a:r>
+          </a:p>
+        </p:txBody>
+      </p:sp>
+      <p:sp>
+        <p:nvSpPr>
+          <p:cNvPr id="5" name="FigL"/>
+          <p:cNvSpPr>
+            <a:spLocks noGrp="1"/>
+          </p:cNvSpPr>
+          <p:nvPr>
+            <p:ph type="body" idx="3"/>
+          </p:nvPr>
+        </p:nvSpPr>
+        <p:spPr/>
+        <p:txBody>
+          <a:bodyPr/>
+          <a:lstStyle/>
+          <a:p>
+            <a:pPr/>
             <a:r>
               <a:rPr lang="th-TH" dirty="0"/>
-              <a:t>ระบบล่มบ่อย ไม่มีคนดูแลประจำ</a:t>
-            </a:r>
-          </a:p>
-          <a:p>
-            <a:pPr lvl="1"/>
+              <a:t>เวลาปิดงบ พ.ค. 2569 · เป้าหมาย 2 วัน</a:t>
+            </a:r>
+          </a:p>
+        </p:txBody>
+      </p:sp>
+      <p:sp>
+        <p:nvSpPr>
+          <p:cNvPr id="6" name="Ins"/>
+          <p:cNvSpPr>
+            <a:spLocks noGrp="1"/>
+          </p:cNvSpPr>
+          <p:nvPr>
+            <p:ph type="body" idx="4"/>
+          </p:nvPr>
+        </p:nvSpPr>
+        <p:spPr/>
+        <p:txBody>
+          <a:bodyPr/>
+          <a:lstStyle/>
+          <a:p>
+            <a:pPr/>
             <a:r>
               <a:rPr lang="th-TH" dirty="0"/>
-              <a:t>ค่าใช้จ่ายไม่แน่นอน</a:t>
-            </a:r>
-          </a:p>
-        </p:txBody>
-      </p:sp>
-      <p:sp>
-        <p:nvSpPr>
-          <p:cNvPr id="4" name="R"/>
-          <p:cNvSpPr>
-            <a:spLocks noGrp="1"/>
-          </p:cNvSpPr>
-          <p:nvPr>
-            <p:ph type="body" idx="2"/>
+              <a:t>เดือนที่เอกสารเข้ามากสุด คือเดือนที่ปิดงบนานสุด</a:t>
+            </a:r>
+          </a:p>
+          <a:p>
+            <a:pPr/>
+            <a:r>
+              <a:rPr lang="th-TH" dirty="0"/>
+              <a:t>ทุกเดือนเกินเป้าอย่างน้อยสามเท่า</a:t>
+            </a:r>
+          </a:p>
+          <a:p>
+            <a:pPr/>
+            <a:r>
+              <a:rPr lang="th-TH" dirty="0"/>
+              <a:t>ความล่าช้าเกิดที่ขั้นกระทบยอด ไม่ใช่ขั้นคีย์</a:t>
+            </a:r>
+          </a:p>
+        </p:txBody>
+      </p:sp>
+      <p:sp>
+        <p:nvSpPr>
+          <p:cNvPr id="7" name="Src"/>
+          <p:cNvSpPr>
+            <a:spLocks noGrp="1"/>
+          </p:cNvSpPr>
+          <p:nvPr>
+            <p:ph type="body" idx="5"/>
           </p:nvPr>
         </p:nvSpPr>
         <p:spPr/>
@@ -19510,21 +21186,53 @@
             <a:pPr/>
             <a:r>
               <a:rPr lang="th-TH" dirty="0"/>
-              <a:t>หลัง</a:t>
-            </a:r>
-          </a:p>
-          <a:p>
-            <a:pPr lvl="1"/>
+              <a:t>ระบบบัญชีของลูกค้า · ม.ค.–มิ.ย. 2569 · หน่วย: วันทำการ</a:t>
+            </a:r>
+          </a:p>
+        </p:txBody>
+      </p:sp>
+      <p:sp>
+        <p:nvSpPr>
+          <p:cNvPr id="8" name="TkL"/>
+          <p:cNvSpPr>
+            <a:spLocks noGrp="1"/>
+          </p:cNvSpPr>
+          <p:nvPr>
+            <p:ph type="body" idx="6"/>
+          </p:nvPr>
+        </p:nvSpPr>
+        <p:spPr/>
+        <p:txBody>
+          <a:bodyPr/>
+          <a:lstStyle/>
+          <a:p>
+            <a:pPr/>
             <a:r>
               <a:rPr lang="th-TH" dirty="0"/>
-              <a:t>มอนิเตอร์ 24 ชั่วโมง แจ้งเตือนอัตโนมัติ</a:t>
-            </a:r>
-          </a:p>
-          <a:p>
-            <a:pPr lvl="1"/>
+              <a:t>สรุป</a:t>
+            </a:r>
+          </a:p>
+        </p:txBody>
+      </p:sp>
+      <p:sp>
+        <p:nvSpPr>
+          <p:cNvPr id="9" name="TkC"/>
+          <p:cNvSpPr>
+            <a:spLocks noGrp="1"/>
+          </p:cNvSpPr>
+          <p:nvPr>
+            <p:ph type="body" idx="7"/>
+          </p:nvPr>
+        </p:nvSpPr>
+        <p:spPr/>
+        <p:txBody>
+          <a:bodyPr/>
+          <a:lstStyle/>
+          <a:p>
+            <a:pPr/>
             <a:r>
               <a:rPr lang="th-TH" dirty="0"/>
-              <a:t>ค่าใช้จ่ายคงที่ต่อเดือน</a:t>
+              <a:t>เวลาปิดงบแปรตามปริมาณเอกสาร การลดงานคีย์ซ้ำจึงลดเวลาปิดงบได้จริง</a:t>
             </a:r>
           </a:p>
         </p:txBody>
@@ -19572,19 +21280,19 @@
             <a:pPr/>
             <a:r>
               <a:rPr lang="th-TH" dirty="0"/>
-              <a:t>สี่ผลลัพธ์ที่ข้อเสนอนี้ให้</a:t>
-            </a:r>
-          </a:p>
-        </p:txBody>
-      </p:sp>
-      <p:sp>
-        <p:nvSpPr>
-          <p:cNvPr id="3" name="N0"/>
-          <p:cNvSpPr>
-            <a:spLocks noGrp="1"/>
-          </p:cNvSpPr>
-          <p:nvPr>
-            <p:ph type="body" idx="20"/>
+              <a:t>ก่อนและหลังใช้บริการ</a:t>
+            </a:r>
+          </a:p>
+        </p:txBody>
+      </p:sp>
+      <p:sp>
+        <p:nvSpPr>
+          <p:cNvPr id="3" name="L"/>
+          <p:cNvSpPr>
+            <a:spLocks noGrp="1"/>
+          </p:cNvSpPr>
+          <p:nvPr>
+            <p:ph type="body" idx="1"/>
           </p:nvPr>
         </p:nvSpPr>
         <p:spPr/>
@@ -19595,19 +21303,33 @@
             <a:pPr/>
             <a:r>
               <a:rPr lang="th-TH" dirty="0"/>
-              <a:t>01</a:t>
-            </a:r>
-          </a:p>
-        </p:txBody>
-      </p:sp>
-      <p:sp>
-        <p:nvSpPr>
-          <p:cNvPr id="4" name="H0"/>
-          <p:cNvSpPr>
-            <a:spLocks noGrp="1"/>
-          </p:cNvSpPr>
-          <p:nvPr>
-            <p:ph type="body" idx="21"/>
+              <a:t>ก่อน</a:t>
+            </a:r>
+          </a:p>
+          <a:p>
+            <a:pPr lvl="1"/>
+            <a:r>
+              <a:rPr lang="th-TH" dirty="0"/>
+              <a:t>ระบบล่มบ่อย ไม่มีคนดูแลประจำ</a:t>
+            </a:r>
+          </a:p>
+          <a:p>
+            <a:pPr lvl="1"/>
+            <a:r>
+              <a:rPr lang="th-TH" dirty="0"/>
+              <a:t>ค่าใช้จ่ายไม่แน่นอน</a:t>
+            </a:r>
+          </a:p>
+        </p:txBody>
+      </p:sp>
+      <p:sp>
+        <p:nvSpPr>
+          <p:cNvPr id="4" name="R"/>
+          <p:cNvSpPr>
+            <a:spLocks noGrp="1"/>
+          </p:cNvSpPr>
+          <p:nvPr>
+            <p:ph type="body" idx="2"/>
           </p:nvPr>
         </p:nvSpPr>
         <p:spPr/>
@@ -19618,283 +21340,21 @@
             <a:pPr/>
             <a:r>
               <a:rPr lang="th-TH" dirty="0"/>
-              <a:t>ลดงานคีย์ซ้ำ</a:t>
-            </a:r>
-          </a:p>
-        </p:txBody>
-      </p:sp>
-      <p:sp>
-        <p:nvSpPr>
-          <p:cNvPr id="5" name="B0"/>
-          <p:cNvSpPr>
-            <a:spLocks noGrp="1"/>
-          </p:cNvSpPr>
-          <p:nvPr>
-            <p:ph type="body" idx="22"/>
-          </p:nvPr>
-        </p:nvSpPr>
-        <p:spPr/>
-        <p:txBody>
-          <a:bodyPr/>
-          <a:lstStyle/>
-          <a:p>
-            <a:pPr/>
+              <a:t>หลัง</a:t>
+            </a:r>
+          </a:p>
+          <a:p>
+            <a:pPr lvl="1"/>
             <a:r>
               <a:rPr lang="th-TH" dirty="0"/>
-              <a:t>รับเอกสารเข้าระบบเดียว แล้วกระจายต่อให้ทุกปลายทางอัตโนมัติ</a:t>
-            </a:r>
-          </a:p>
-        </p:txBody>
-      </p:sp>
-      <p:sp>
-        <p:nvSpPr>
-          <p:cNvPr id="6" name="N1"/>
-          <p:cNvSpPr>
-            <a:spLocks noGrp="1"/>
-          </p:cNvSpPr>
-          <p:nvPr>
-            <p:ph type="body" idx="23"/>
-          </p:nvPr>
-        </p:nvSpPr>
-        <p:spPr/>
-        <p:txBody>
-          <a:bodyPr/>
-          <a:lstStyle/>
-          <a:p>
-            <a:pPr/>
+              <a:t>มอนิเตอร์ 24 ชั่วโมง แจ้งเตือนอัตโนมัติ</a:t>
+            </a:r>
+          </a:p>
+          <a:p>
+            <a:pPr lvl="1"/>
             <a:r>
               <a:rPr lang="th-TH" dirty="0"/>
-              <a:t>02</a:t>
-            </a:r>
-          </a:p>
-        </p:txBody>
-      </p:sp>
-      <p:sp>
-        <p:nvSpPr>
-          <p:cNvPr id="7" name="H1"/>
-          <p:cNvSpPr>
-            <a:spLocks noGrp="1"/>
-          </p:cNvSpPr>
-          <p:nvPr>
-            <p:ph type="body" idx="24"/>
-          </p:nvPr>
-        </p:nvSpPr>
-        <p:spPr/>
-        <p:txBody>
-          <a:bodyPr/>
-          <a:lstStyle/>
-          <a:p>
-            <a:pPr/>
-            <a:r>
-              <a:rPr lang="th-TH" dirty="0"/>
-              <a:t>ตรวจสอบได้</a:t>
-            </a:r>
-          </a:p>
-        </p:txBody>
-      </p:sp>
-      <p:sp>
-        <p:nvSpPr>
-          <p:cNvPr id="8" name="B1"/>
-          <p:cNvSpPr>
-            <a:spLocks noGrp="1"/>
-          </p:cNvSpPr>
-          <p:nvPr>
-            <p:ph type="body" idx="25"/>
-          </p:nvPr>
-        </p:nvSpPr>
-        <p:spPr/>
-        <p:txBody>
-          <a:bodyPr/>
-          <a:lstStyle/>
-          <a:p>
-            <a:pPr/>
-            <a:r>
-              <a:rPr lang="th-TH" dirty="0"/>
-              <a:t>ทุกรายการมี audit trail ผู้ทำ เวลา และค่าก่อนหลัง</a:t>
-            </a:r>
-          </a:p>
-        </p:txBody>
-      </p:sp>
-      <p:sp>
-        <p:nvSpPr>
-          <p:cNvPr id="9" name="N2"/>
-          <p:cNvSpPr>
-            <a:spLocks noGrp="1"/>
-          </p:cNvSpPr>
-          <p:nvPr>
-            <p:ph type="body" idx="26"/>
-          </p:nvPr>
-        </p:nvSpPr>
-        <p:spPr/>
-        <p:txBody>
-          <a:bodyPr/>
-          <a:lstStyle/>
-          <a:p>
-            <a:pPr/>
-            <a:r>
-              <a:rPr lang="th-TH" dirty="0"/>
-              <a:t>03</a:t>
-            </a:r>
-          </a:p>
-        </p:txBody>
-      </p:sp>
-      <p:sp>
-        <p:nvSpPr>
-          <p:cNvPr id="10" name="H2"/>
-          <p:cNvSpPr>
-            <a:spLocks noGrp="1"/>
-          </p:cNvSpPr>
-          <p:nvPr>
-            <p:ph type="body" idx="27"/>
-          </p:nvPr>
-        </p:nvSpPr>
-        <p:spPr/>
-        <p:txBody>
-          <a:bodyPr/>
-          <a:lstStyle/>
-          <a:p>
-            <a:pPr/>
-            <a:r>
-              <a:rPr lang="th-TH" dirty="0"/>
-              <a:t>ปิดงบเร็วขึ้น</a:t>
-            </a:r>
-          </a:p>
-        </p:txBody>
-      </p:sp>
-      <p:sp>
-        <p:nvSpPr>
-          <p:cNvPr id="11" name="B2"/>
-          <p:cNvSpPr>
-            <a:spLocks noGrp="1"/>
-          </p:cNvSpPr>
-          <p:nvPr>
-            <p:ph type="body" idx="28"/>
-          </p:nvPr>
-        </p:nvSpPr>
-        <p:spPr/>
-        <p:txBody>
-          <a:bodyPr/>
-          <a:lstStyle/>
-          <a:p>
-            <a:pPr/>
-            <a:r>
-              <a:rPr lang="th-TH" dirty="0"/>
-              <a:t>กระทบยอดอัตโนมัติรายวัน ไม่ต้องรอสิ้นเดือน</a:t>
-            </a:r>
-          </a:p>
-        </p:txBody>
-      </p:sp>
-      <p:sp>
-        <p:nvSpPr>
-          <p:cNvPr id="12" name="N3"/>
-          <p:cNvSpPr>
-            <a:spLocks noGrp="1"/>
-          </p:cNvSpPr>
-          <p:nvPr>
-            <p:ph type="body" idx="29"/>
-          </p:nvPr>
-        </p:nvSpPr>
-        <p:spPr/>
-        <p:txBody>
-          <a:bodyPr/>
-          <a:lstStyle/>
-          <a:p>
-            <a:pPr/>
-            <a:r>
-              <a:rPr lang="th-TH" dirty="0"/>
-              <a:t>04</a:t>
-            </a:r>
-          </a:p>
-        </p:txBody>
-      </p:sp>
-      <p:sp>
-        <p:nvSpPr>
-          <p:cNvPr id="13" name="H3"/>
-          <p:cNvSpPr>
-            <a:spLocks noGrp="1"/>
-          </p:cNvSpPr>
-          <p:nvPr>
-            <p:ph type="body" idx="30"/>
-          </p:nvPr>
-        </p:nvSpPr>
-        <p:spPr/>
-        <p:txBody>
-          <a:bodyPr/>
-          <a:lstStyle/>
-          <a:p>
-            <a:pPr/>
-            <a:r>
-              <a:rPr lang="th-TH" dirty="0"/>
-              <a:t>ขยายต่อได้</a:t>
-            </a:r>
-          </a:p>
-        </p:txBody>
-      </p:sp>
-      <p:sp>
-        <p:nvSpPr>
-          <p:cNvPr id="14" name="B3"/>
-          <p:cNvSpPr>
-            <a:spLocks noGrp="1"/>
-          </p:cNvSpPr>
-          <p:nvPr>
-            <p:ph type="body" idx="31"/>
-          </p:nvPr>
-        </p:nvSpPr>
-        <p:spPr/>
-        <p:txBody>
-          <a:bodyPr/>
-          <a:lstStyle/>
-          <a:p>
-            <a:pPr/>
-            <a:r>
-              <a:rPr lang="th-TH" dirty="0"/>
-              <a:t>เพิ่มกระบวนการใหม่โดยไม่แก้ของเดิม</a:t>
-            </a:r>
-          </a:p>
-        </p:txBody>
-      </p:sp>
-      <p:sp>
-        <p:nvSpPr>
-          <p:cNvPr id="15" name="BL"/>
-          <p:cNvSpPr>
-            <a:spLocks noGrp="1"/>
-          </p:cNvSpPr>
-          <p:nvPr>
-            <p:ph type="body" idx="32"/>
-          </p:nvPr>
-        </p:nvSpPr>
-        <p:spPr/>
-        <p:txBody>
-          <a:bodyPr/>
-          <a:lstStyle/>
-          <a:p>
-            <a:pPr/>
-            <a:r>
-              <a:rPr lang="th-TH" dirty="0"/>
-              <a:t>สรุป</a:t>
-            </a:r>
-          </a:p>
-        </p:txBody>
-      </p:sp>
-      <p:sp>
-        <p:nvSpPr>
-          <p:cNvPr id="16" name="BC"/>
-          <p:cNvSpPr>
-            <a:spLocks noGrp="1"/>
-          </p:cNvSpPr>
-          <p:nvPr>
-            <p:ph type="body" idx="33"/>
-          </p:nvPr>
-        </p:nvSpPr>
-        <p:spPr/>
-        <p:txBody>
-          <a:bodyPr/>
-          <a:lstStyle/>
-          <a:p>
-            <a:pPr/>
-            <a:r>
-              <a:rPr lang="th-TH" dirty="0"/>
-              <a:t>ทั้งสี่ข้อมาจากการแก้จุดเดียวกัน คือรวมจุดรับเอกสาร</a:t>
+              <a:t>ค่าใช้จ่ายคงที่ต่อเดือน</a:t>
             </a:r>
           </a:p>
         </p:txBody>
@@ -19942,19 +21402,19 @@
             <a:pPr/>
             <a:r>
               <a:rPr lang="th-TH" dirty="0"/>
-              <a:t>วิธีการทำงาน</a:t>
-            </a:r>
-          </a:p>
-        </p:txBody>
-      </p:sp>
-      <p:sp>
-        <p:nvSpPr>
-          <p:cNvPr id="3" name="Cap"/>
-          <p:cNvSpPr>
-            <a:spLocks noGrp="1"/>
-          </p:cNvSpPr>
-          <p:nvPr>
-            <p:ph type="body" idx="2"/>
+              <a:t>สี่ผลลัพธ์ที่ข้อเสนอนี้ให้</a:t>
+            </a:r>
+          </a:p>
+        </p:txBody>
+      </p:sp>
+      <p:sp>
+        <p:nvSpPr>
+          <p:cNvPr id="3" name="N0"/>
+          <p:cNvSpPr>
+            <a:spLocks noGrp="1"/>
+          </p:cNvSpPr>
+          <p:nvPr>
+            <p:ph type="body" idx="20"/>
           </p:nvPr>
         </p:nvSpPr>
         <p:spPr/>
@@ -19965,7 +21425,306 @@
             <a:pPr/>
             <a:r>
               <a:rPr lang="th-TH" dirty="0"/>
-              <a:t>กระบวนการ สถาปัตยกรรม และขอบเขตที่ตกลงกัน</a:t>
+              <a:t>01</a:t>
+            </a:r>
+          </a:p>
+        </p:txBody>
+      </p:sp>
+      <p:sp>
+        <p:nvSpPr>
+          <p:cNvPr id="4" name="H0"/>
+          <p:cNvSpPr>
+            <a:spLocks noGrp="1"/>
+          </p:cNvSpPr>
+          <p:nvPr>
+            <p:ph type="body" idx="21"/>
+          </p:nvPr>
+        </p:nvSpPr>
+        <p:spPr/>
+        <p:txBody>
+          <a:bodyPr/>
+          <a:lstStyle/>
+          <a:p>
+            <a:pPr/>
+            <a:r>
+              <a:rPr lang="th-TH" dirty="0"/>
+              <a:t>ลดงานคีย์ซ้ำ</a:t>
+            </a:r>
+          </a:p>
+        </p:txBody>
+      </p:sp>
+      <p:sp>
+        <p:nvSpPr>
+          <p:cNvPr id="5" name="B0"/>
+          <p:cNvSpPr>
+            <a:spLocks noGrp="1"/>
+          </p:cNvSpPr>
+          <p:nvPr>
+            <p:ph type="body" idx="22"/>
+          </p:nvPr>
+        </p:nvSpPr>
+        <p:spPr/>
+        <p:txBody>
+          <a:bodyPr/>
+          <a:lstStyle/>
+          <a:p>
+            <a:pPr/>
+            <a:r>
+              <a:rPr lang="th-TH" dirty="0"/>
+              <a:t>รับเอกสารเข้าระบบเดียว แล้วกระจายต่อให้ทุกปลายทางอัตโนมัติ</a:t>
+            </a:r>
+          </a:p>
+        </p:txBody>
+      </p:sp>
+      <p:sp>
+        <p:nvSpPr>
+          <p:cNvPr id="6" name="N1"/>
+          <p:cNvSpPr>
+            <a:spLocks noGrp="1"/>
+          </p:cNvSpPr>
+          <p:nvPr>
+            <p:ph type="body" idx="23"/>
+          </p:nvPr>
+        </p:nvSpPr>
+        <p:spPr/>
+        <p:txBody>
+          <a:bodyPr/>
+          <a:lstStyle/>
+          <a:p>
+            <a:pPr/>
+            <a:r>
+              <a:rPr lang="th-TH" dirty="0"/>
+              <a:t>02</a:t>
+            </a:r>
+          </a:p>
+        </p:txBody>
+      </p:sp>
+      <p:sp>
+        <p:nvSpPr>
+          <p:cNvPr id="7" name="H1"/>
+          <p:cNvSpPr>
+            <a:spLocks noGrp="1"/>
+          </p:cNvSpPr>
+          <p:nvPr>
+            <p:ph type="body" idx="24"/>
+          </p:nvPr>
+        </p:nvSpPr>
+        <p:spPr/>
+        <p:txBody>
+          <a:bodyPr/>
+          <a:lstStyle/>
+          <a:p>
+            <a:pPr/>
+            <a:r>
+              <a:rPr lang="th-TH" dirty="0"/>
+              <a:t>ตรวจสอบได้</a:t>
+            </a:r>
+          </a:p>
+        </p:txBody>
+      </p:sp>
+      <p:sp>
+        <p:nvSpPr>
+          <p:cNvPr id="8" name="B1"/>
+          <p:cNvSpPr>
+            <a:spLocks noGrp="1"/>
+          </p:cNvSpPr>
+          <p:nvPr>
+            <p:ph type="body" idx="25"/>
+          </p:nvPr>
+        </p:nvSpPr>
+        <p:spPr/>
+        <p:txBody>
+          <a:bodyPr/>
+          <a:lstStyle/>
+          <a:p>
+            <a:pPr/>
+            <a:r>
+              <a:rPr lang="th-TH" dirty="0"/>
+              <a:t>ทุกรายการมี audit trail ผู้ทำ เวลา และค่าก่อนหลัง</a:t>
+            </a:r>
+          </a:p>
+        </p:txBody>
+      </p:sp>
+      <p:sp>
+        <p:nvSpPr>
+          <p:cNvPr id="9" name="N2"/>
+          <p:cNvSpPr>
+            <a:spLocks noGrp="1"/>
+          </p:cNvSpPr>
+          <p:nvPr>
+            <p:ph type="body" idx="26"/>
+          </p:nvPr>
+        </p:nvSpPr>
+        <p:spPr/>
+        <p:txBody>
+          <a:bodyPr/>
+          <a:lstStyle/>
+          <a:p>
+            <a:pPr/>
+            <a:r>
+              <a:rPr lang="th-TH" dirty="0"/>
+              <a:t>03</a:t>
+            </a:r>
+          </a:p>
+        </p:txBody>
+      </p:sp>
+      <p:sp>
+        <p:nvSpPr>
+          <p:cNvPr id="10" name="H2"/>
+          <p:cNvSpPr>
+            <a:spLocks noGrp="1"/>
+          </p:cNvSpPr>
+          <p:nvPr>
+            <p:ph type="body" idx="27"/>
+          </p:nvPr>
+        </p:nvSpPr>
+        <p:spPr/>
+        <p:txBody>
+          <a:bodyPr/>
+          <a:lstStyle/>
+          <a:p>
+            <a:pPr/>
+            <a:r>
+              <a:rPr lang="th-TH" dirty="0"/>
+              <a:t>ปิดงบเร็วขึ้น</a:t>
+            </a:r>
+          </a:p>
+        </p:txBody>
+      </p:sp>
+      <p:sp>
+        <p:nvSpPr>
+          <p:cNvPr id="11" name="B2"/>
+          <p:cNvSpPr>
+            <a:spLocks noGrp="1"/>
+          </p:cNvSpPr>
+          <p:nvPr>
+            <p:ph type="body" idx="28"/>
+          </p:nvPr>
+        </p:nvSpPr>
+        <p:spPr/>
+        <p:txBody>
+          <a:bodyPr/>
+          <a:lstStyle/>
+          <a:p>
+            <a:pPr/>
+            <a:r>
+              <a:rPr lang="th-TH" dirty="0"/>
+              <a:t>กระทบยอดอัตโนมัติรายวัน ไม่ต้องรอสิ้นเดือน</a:t>
+            </a:r>
+          </a:p>
+        </p:txBody>
+      </p:sp>
+      <p:sp>
+        <p:nvSpPr>
+          <p:cNvPr id="12" name="N3"/>
+          <p:cNvSpPr>
+            <a:spLocks noGrp="1"/>
+          </p:cNvSpPr>
+          <p:nvPr>
+            <p:ph type="body" idx="29"/>
+          </p:nvPr>
+        </p:nvSpPr>
+        <p:spPr/>
+        <p:txBody>
+          <a:bodyPr/>
+          <a:lstStyle/>
+          <a:p>
+            <a:pPr/>
+            <a:r>
+              <a:rPr lang="th-TH" dirty="0"/>
+              <a:t>04</a:t>
+            </a:r>
+          </a:p>
+        </p:txBody>
+      </p:sp>
+      <p:sp>
+        <p:nvSpPr>
+          <p:cNvPr id="13" name="H3"/>
+          <p:cNvSpPr>
+            <a:spLocks noGrp="1"/>
+          </p:cNvSpPr>
+          <p:nvPr>
+            <p:ph type="body" idx="30"/>
+          </p:nvPr>
+        </p:nvSpPr>
+        <p:spPr/>
+        <p:txBody>
+          <a:bodyPr/>
+          <a:lstStyle/>
+          <a:p>
+            <a:pPr/>
+            <a:r>
+              <a:rPr lang="th-TH" dirty="0"/>
+              <a:t>ขยายต่อได้</a:t>
+            </a:r>
+          </a:p>
+        </p:txBody>
+      </p:sp>
+      <p:sp>
+        <p:nvSpPr>
+          <p:cNvPr id="14" name="B3"/>
+          <p:cNvSpPr>
+            <a:spLocks noGrp="1"/>
+          </p:cNvSpPr>
+          <p:nvPr>
+            <p:ph type="body" idx="31"/>
+          </p:nvPr>
+        </p:nvSpPr>
+        <p:spPr/>
+        <p:txBody>
+          <a:bodyPr/>
+          <a:lstStyle/>
+          <a:p>
+            <a:pPr/>
+            <a:r>
+              <a:rPr lang="th-TH" dirty="0"/>
+              <a:t>เพิ่มกระบวนการใหม่โดยไม่แก้ของเดิม</a:t>
+            </a:r>
+          </a:p>
+        </p:txBody>
+      </p:sp>
+      <p:sp>
+        <p:nvSpPr>
+          <p:cNvPr id="15" name="BL"/>
+          <p:cNvSpPr>
+            <a:spLocks noGrp="1"/>
+          </p:cNvSpPr>
+          <p:nvPr>
+            <p:ph type="body" idx="32"/>
+          </p:nvPr>
+        </p:nvSpPr>
+        <p:spPr/>
+        <p:txBody>
+          <a:bodyPr/>
+          <a:lstStyle/>
+          <a:p>
+            <a:pPr/>
+            <a:r>
+              <a:rPr lang="th-TH" dirty="0"/>
+              <a:t>สรุป</a:t>
+            </a:r>
+          </a:p>
+        </p:txBody>
+      </p:sp>
+      <p:sp>
+        <p:nvSpPr>
+          <p:cNvPr id="16" name="BC"/>
+          <p:cNvSpPr>
+            <a:spLocks noGrp="1"/>
+          </p:cNvSpPr>
+          <p:nvPr>
+            <p:ph type="body" idx="33"/>
+          </p:nvPr>
+        </p:nvSpPr>
+        <p:spPr/>
+        <p:txBody>
+          <a:bodyPr/>
+          <a:lstStyle/>
+          <a:p>
+            <a:pPr/>
+            <a:r>
+              <a:rPr lang="th-TH" dirty="0"/>
+              <a:t>ทั้งสี่ข้อมาจากการแก้จุดเดียวกัน คือรวมจุดรับเอกสาร</a:t>
             </a:r>
           </a:p>
         </p:txBody>
@@ -20013,19 +21772,19 @@
             <a:pPr/>
             <a:r>
               <a:rPr lang="th-TH" dirty="0"/>
-              <a:t>กระบวนการที่เสนอ</a:t>
-            </a:r>
-          </a:p>
-        </p:txBody>
-      </p:sp>
-      <p:sp>
-        <p:nvSpPr>
-          <p:cNvPr id="3" name="Sub"/>
-          <p:cNvSpPr>
-            <a:spLocks noGrp="1"/>
-          </p:cNvSpPr>
-          <p:nvPr>
-            <p:ph type="body" idx="1"/>
+              <a:t>วิธีการทำงาน</a:t>
+            </a:r>
+          </a:p>
+        </p:txBody>
+      </p:sp>
+      <p:sp>
+        <p:nvSpPr>
+          <p:cNvPr id="3" name="Cap"/>
+          <p:cNvSpPr>
+            <a:spLocks noGrp="1"/>
+          </p:cNvSpPr>
+          <p:nvPr>
+            <p:ph type="body" idx="2"/>
           </p:nvPr>
         </p:nvSpPr>
         <p:spPr/>
@@ -20036,398 +21795,7 @@
             <a:pPr/>
             <a:r>
               <a:rPr lang="th-TH" dirty="0"/>
-              <a:t>ห้าขั้นตอน ทำงานต่อเนื่องโดยไม่ต้องคีย์ซ้ำ</a:t>
-            </a:r>
-          </a:p>
-        </p:txBody>
-      </p:sp>
-      <p:sp>
-        <p:nvSpPr>
-          <p:cNvPr id="4" name="C0"/>
-          <p:cNvSpPr>
-            <a:spLocks noGrp="1"/>
-          </p:cNvSpPr>
-          <p:nvPr>
-            <p:ph type="body" idx="20"/>
-          </p:nvPr>
-        </p:nvSpPr>
-        <p:spPr/>
-        <p:txBody>
-          <a:bodyPr/>
-          <a:lstStyle/>
-          <a:p>
-            <a:pPr/>
-            <a:r>
-              <a:rPr lang="th-TH" dirty="0"/>
-              <a:t>1</a:t>
-            </a:r>
-          </a:p>
-        </p:txBody>
-      </p:sp>
-      <p:sp>
-        <p:nvSpPr>
-          <p:cNvPr id="5" name="H0"/>
-          <p:cNvSpPr>
-            <a:spLocks noGrp="1"/>
-          </p:cNvSpPr>
-          <p:nvPr>
-            <p:ph type="body" idx="21"/>
-          </p:nvPr>
-        </p:nvSpPr>
-        <p:spPr/>
-        <p:txBody>
-          <a:bodyPr/>
-          <a:lstStyle/>
-          <a:p>
-            <a:pPr/>
-            <a:r>
-              <a:rPr lang="th-TH" dirty="0"/>
-              <a:t>รับเอกสาร</a:t>
-            </a:r>
-          </a:p>
-        </p:txBody>
-      </p:sp>
-      <p:sp>
-        <p:nvSpPr>
-          <p:cNvPr id="6" name="B0"/>
-          <p:cNvSpPr>
-            <a:spLocks noGrp="1"/>
-          </p:cNvSpPr>
-          <p:nvPr>
-            <p:ph type="body" idx="22"/>
-          </p:nvPr>
-        </p:nvSpPr>
-        <p:spPr/>
-        <p:txBody>
-          <a:bodyPr/>
-          <a:lstStyle/>
-          <a:p>
-            <a:pPr/>
-            <a:r>
-              <a:rPr lang="th-TH" dirty="0"/>
-              <a:t>สแกนหรือรับไฟล์เข้าคิวกลาง</a:t>
-            </a:r>
-          </a:p>
-        </p:txBody>
-      </p:sp>
-      <p:sp>
-        <p:nvSpPr>
-          <p:cNvPr id="7" name="C1"/>
-          <p:cNvSpPr>
-            <a:spLocks noGrp="1"/>
-          </p:cNvSpPr>
-          <p:nvPr>
-            <p:ph type="body" idx="23"/>
-          </p:nvPr>
-        </p:nvSpPr>
-        <p:spPr/>
-        <p:txBody>
-          <a:bodyPr/>
-          <a:lstStyle/>
-          <a:p>
-            <a:pPr/>
-            <a:r>
-              <a:rPr lang="th-TH" dirty="0"/>
-              <a:t>2</a:t>
-            </a:r>
-          </a:p>
-        </p:txBody>
-      </p:sp>
-      <p:sp>
-        <p:nvSpPr>
-          <p:cNvPr id="8" name="H1"/>
-          <p:cNvSpPr>
-            <a:spLocks noGrp="1"/>
-          </p:cNvSpPr>
-          <p:nvPr>
-            <p:ph type="body" idx="24"/>
-          </p:nvPr>
-        </p:nvSpPr>
-        <p:spPr/>
-        <p:txBody>
-          <a:bodyPr/>
-          <a:lstStyle/>
-          <a:p>
-            <a:pPr/>
-            <a:r>
-              <a:rPr lang="th-TH" dirty="0"/>
-              <a:t>อ่านข้อมูล</a:t>
-            </a:r>
-          </a:p>
-        </p:txBody>
-      </p:sp>
-      <p:sp>
-        <p:nvSpPr>
-          <p:cNvPr id="9" name="B1"/>
-          <p:cNvSpPr>
-            <a:spLocks noGrp="1"/>
-          </p:cNvSpPr>
-          <p:nvPr>
-            <p:ph type="body" idx="25"/>
-          </p:nvPr>
-        </p:nvSpPr>
-        <p:spPr/>
-        <p:txBody>
-          <a:bodyPr/>
-          <a:lstStyle/>
-          <a:p>
-            <a:pPr/>
-            <a:r>
-              <a:rPr lang="th-TH" dirty="0"/>
-              <a:t>ดึงฟิลด์สำคัญ ตรวจกับต้นทาง</a:t>
-            </a:r>
-          </a:p>
-        </p:txBody>
-      </p:sp>
-      <p:sp>
-        <p:nvSpPr>
-          <p:cNvPr id="10" name="C2"/>
-          <p:cNvSpPr>
-            <a:spLocks noGrp="1"/>
-          </p:cNvSpPr>
-          <p:nvPr>
-            <p:ph type="body" idx="26"/>
-          </p:nvPr>
-        </p:nvSpPr>
-        <p:spPr/>
-        <p:txBody>
-          <a:bodyPr/>
-          <a:lstStyle/>
-          <a:p>
-            <a:pPr/>
-            <a:r>
-              <a:rPr lang="th-TH" dirty="0"/>
-              <a:t>3</a:t>
-            </a:r>
-          </a:p>
-        </p:txBody>
-      </p:sp>
-      <p:sp>
-        <p:nvSpPr>
-          <p:cNvPr id="11" name="H2"/>
-          <p:cNvSpPr>
-            <a:spLocks noGrp="1"/>
-          </p:cNvSpPr>
-          <p:nvPr>
-            <p:ph type="body" idx="27"/>
-          </p:nvPr>
-        </p:nvSpPr>
-        <p:spPr/>
-        <p:txBody>
-          <a:bodyPr/>
-          <a:lstStyle/>
-          <a:p>
-            <a:pPr/>
-            <a:r>
-              <a:rPr lang="th-TH" dirty="0"/>
-              <a:t>ตรวจสอบ</a:t>
-            </a:r>
-          </a:p>
-        </p:txBody>
-      </p:sp>
-      <p:sp>
-        <p:nvSpPr>
-          <p:cNvPr id="12" name="B2"/>
-          <p:cNvSpPr>
-            <a:spLocks noGrp="1"/>
-          </p:cNvSpPr>
-          <p:nvPr>
-            <p:ph type="body" idx="28"/>
-          </p:nvPr>
-        </p:nvSpPr>
-        <p:spPr/>
-        <p:txBody>
-          <a:bodyPr/>
-          <a:lstStyle/>
-          <a:p>
-            <a:pPr/>
-            <a:r>
-              <a:rPr lang="th-TH" dirty="0"/>
-              <a:t>กฎธุรกิจและวงเงินอนุมัติ</a:t>
-            </a:r>
-          </a:p>
-        </p:txBody>
-      </p:sp>
-      <p:sp>
-        <p:nvSpPr>
-          <p:cNvPr id="13" name="C3"/>
-          <p:cNvSpPr>
-            <a:spLocks noGrp="1"/>
-          </p:cNvSpPr>
-          <p:nvPr>
-            <p:ph type="body" idx="29"/>
-          </p:nvPr>
-        </p:nvSpPr>
-        <p:spPr/>
-        <p:txBody>
-          <a:bodyPr/>
-          <a:lstStyle/>
-          <a:p>
-            <a:pPr/>
-            <a:r>
-              <a:rPr lang="th-TH" dirty="0"/>
-              <a:t>4</a:t>
-            </a:r>
-          </a:p>
-        </p:txBody>
-      </p:sp>
-      <p:sp>
-        <p:nvSpPr>
-          <p:cNvPr id="14" name="H3"/>
-          <p:cNvSpPr>
-            <a:spLocks noGrp="1"/>
-          </p:cNvSpPr>
-          <p:nvPr>
-            <p:ph type="body" idx="30"/>
-          </p:nvPr>
-        </p:nvSpPr>
-        <p:spPr/>
-        <p:txBody>
-          <a:bodyPr/>
-          <a:lstStyle/>
-          <a:p>
-            <a:pPr/>
-            <a:r>
-              <a:rPr lang="th-TH" dirty="0"/>
-              <a:t>บันทึก</a:t>
-            </a:r>
-          </a:p>
-        </p:txBody>
-      </p:sp>
-      <p:sp>
-        <p:nvSpPr>
-          <p:cNvPr id="15" name="B3"/>
-          <p:cNvSpPr>
-            <a:spLocks noGrp="1"/>
-          </p:cNvSpPr>
-          <p:nvPr>
-            <p:ph type="body" idx="31"/>
-          </p:nvPr>
-        </p:nvSpPr>
-        <p:spPr/>
-        <p:txBody>
-          <a:bodyPr/>
-          <a:lstStyle/>
-          <a:p>
-            <a:pPr/>
-            <a:r>
-              <a:rPr lang="th-TH" dirty="0"/>
-              <a:t>ลงระบบบัญชีพร้อม audit trail</a:t>
-            </a:r>
-          </a:p>
-        </p:txBody>
-      </p:sp>
-      <p:sp>
-        <p:nvSpPr>
-          <p:cNvPr id="16" name="C4"/>
-          <p:cNvSpPr>
-            <a:spLocks noGrp="1"/>
-          </p:cNvSpPr>
-          <p:nvPr>
-            <p:ph type="body" idx="32"/>
-          </p:nvPr>
-        </p:nvSpPr>
-        <p:spPr/>
-        <p:txBody>
-          <a:bodyPr/>
-          <a:lstStyle/>
-          <a:p>
-            <a:pPr/>
-            <a:r>
-              <a:rPr lang="th-TH" dirty="0"/>
-              <a:t>5</a:t>
-            </a:r>
-          </a:p>
-        </p:txBody>
-      </p:sp>
-      <p:sp>
-        <p:nvSpPr>
-          <p:cNvPr id="17" name="H4"/>
-          <p:cNvSpPr>
-            <a:spLocks noGrp="1"/>
-          </p:cNvSpPr>
-          <p:nvPr>
-            <p:ph type="body" idx="33"/>
-          </p:nvPr>
-        </p:nvSpPr>
-        <p:spPr/>
-        <p:txBody>
-          <a:bodyPr/>
-          <a:lstStyle/>
-          <a:p>
-            <a:pPr/>
-            <a:r>
-              <a:rPr lang="th-TH" dirty="0"/>
-              <a:t>กระทบยอด</a:t>
-            </a:r>
-          </a:p>
-        </p:txBody>
-      </p:sp>
-      <p:sp>
-        <p:nvSpPr>
-          <p:cNvPr id="18" name="B4"/>
-          <p:cNvSpPr>
-            <a:spLocks noGrp="1"/>
-          </p:cNvSpPr>
-          <p:nvPr>
-            <p:ph type="body" idx="34"/>
-          </p:nvPr>
-        </p:nvSpPr>
-        <p:spPr/>
-        <p:txBody>
-          <a:bodyPr/>
-          <a:lstStyle/>
-          <a:p>
-            <a:pPr/>
-            <a:r>
-              <a:rPr lang="th-TH" dirty="0"/>
-              <a:t>จับคู่อัตโนมัติ ส่งรายงาน</a:t>
-            </a:r>
-          </a:p>
-        </p:txBody>
-      </p:sp>
-      <p:sp>
-        <p:nvSpPr>
-          <p:cNvPr id="19" name="RL"/>
-          <p:cNvSpPr>
-            <a:spLocks noGrp="1"/>
-          </p:cNvSpPr>
-          <p:nvPr>
-            <p:ph type="body" idx="35"/>
-          </p:nvPr>
-        </p:nvSpPr>
-        <p:spPr/>
-        <p:txBody>
-          <a:bodyPr/>
-          <a:lstStyle/>
-          <a:p>
-            <a:pPr/>
-            <a:r>
-              <a:rPr lang="th-TH" dirty="0"/>
-              <a:t>ผลลัพธ์</a:t>
-            </a:r>
-          </a:p>
-        </p:txBody>
-      </p:sp>
-      <p:sp>
-        <p:nvSpPr>
-          <p:cNvPr id="20" name="RC"/>
-          <p:cNvSpPr>
-            <a:spLocks noGrp="1"/>
-          </p:cNvSpPr>
-          <p:nvPr>
-            <p:ph type="body" idx="36"/>
-          </p:nvPr>
-        </p:nvSpPr>
-        <p:spPr/>
-        <p:txBody>
-          <a:bodyPr/>
-          <a:lstStyle/>
-          <a:p>
-            <a:pPr/>
-            <a:r>
-              <a:rPr lang="th-TH" dirty="0"/>
-              <a:t>เอกสารหนึ่งใบผ่านครบห้าขั้นโดยไม่มีการคีย์ซ้ำเลย</a:t>
+              <a:t>กระบวนการ สถาปัตยกรรม และขอบเขตที่ตกลงกัน</a:t>
             </a:r>
           </a:p>
         </p:txBody>
@@ -20475,7 +21843,7 @@
             <a:pPr/>
             <a:r>
               <a:rPr lang="th-TH" dirty="0"/>
-              <a:t>ภาพรวมสถาปัตยกรรมระบบ</a:t>
+              <a:t>กระบวนการที่เสนอ</a:t>
             </a:r>
           </a:p>
         </p:txBody>
@@ -20498,19 +21866,19 @@
             <a:pPr/>
             <a:r>
               <a:rPr lang="th-TH" dirty="0"/>
-              <a:t>ใช้ชุดชิ้นส่วนมาตรฐาน — กล่องมุมตรง เส้นหักมุมฉาก ไม่มีเงา</a:t>
-            </a:r>
-          </a:p>
-        </p:txBody>
-      </p:sp>
-      <p:sp>
-        <p:nvSpPr>
-          <p:cNvPr id="4" name="Leg"/>
-          <p:cNvSpPr>
-            <a:spLocks noGrp="1"/>
-          </p:cNvSpPr>
-          <p:nvPr>
-            <p:ph type="body" idx="2"/>
+              <a:t>ห้าขั้นตอน ทำงานต่อเนื่องโดยไม่ต้องคีย์ซ้ำ</a:t>
+            </a:r>
+          </a:p>
+        </p:txBody>
+      </p:sp>
+      <p:sp>
+        <p:nvSpPr>
+          <p:cNvPr id="4" name="C0"/>
+          <p:cNvSpPr>
+            <a:spLocks noGrp="1"/>
+          </p:cNvSpPr>
+          <p:nvPr>
+            <p:ph type="body" idx="20"/>
           </p:nvPr>
         </p:nvSpPr>
         <p:spPr/>
@@ -20521,19 +21889,19 @@
             <a:pPr/>
             <a:r>
               <a:rPr lang="th-TH" dirty="0"/>
-              <a:t>กล่องทึบ = ระบบที่มีอยู่  ·  กล่องมีสีหมวด = ส่วนที่เพิ่ม  ·  เส้นทึบ = ข้อมูลไหลอัตโนมัติ</a:t>
-            </a:r>
-          </a:p>
-        </p:txBody>
-      </p:sp>
-      <p:sp>
-        <p:nvSpPr>
-          <p:cNvPr id="5" name="TL"/>
-          <p:cNvSpPr>
-            <a:spLocks noGrp="1"/>
-          </p:cNvSpPr>
-          <p:nvPr>
-            <p:ph type="body" idx="3"/>
+              <a:t>1</a:t>
+            </a:r>
+          </a:p>
+        </p:txBody>
+      </p:sp>
+      <p:sp>
+        <p:nvSpPr>
+          <p:cNvPr id="5" name="H0"/>
+          <p:cNvSpPr>
+            <a:spLocks noGrp="1"/>
+          </p:cNvSpPr>
+          <p:nvPr>
+            <p:ph type="body" idx="21"/>
           </p:nvPr>
         </p:nvSpPr>
         <p:spPr/>
@@ -20544,19 +21912,19 @@
             <a:pPr/>
             <a:r>
               <a:rPr lang="th-TH" dirty="0"/>
-              <a:t>สรุป</a:t>
-            </a:r>
-          </a:p>
-        </p:txBody>
-      </p:sp>
-      <p:sp>
-        <p:nvSpPr>
-          <p:cNvPr id="6" name="TC"/>
-          <p:cNvSpPr>
-            <a:spLocks noGrp="1"/>
-          </p:cNvSpPr>
-          <p:nvPr>
-            <p:ph type="body" idx="4"/>
+              <a:t>รับเอกสาร</a:t>
+            </a:r>
+          </a:p>
+        </p:txBody>
+      </p:sp>
+      <p:sp>
+        <p:nvSpPr>
+          <p:cNvPr id="6" name="B0"/>
+          <p:cNvSpPr>
+            <a:spLocks noGrp="1"/>
+          </p:cNvSpPr>
+          <p:nvPr>
+            <p:ph type="body" idx="22"/>
           </p:nvPr>
         </p:nvSpPr>
         <p:spPr/>
@@ -20567,457 +21935,329 @@
             <a:pPr/>
             <a:r>
               <a:rPr lang="th-TH" dirty="0"/>
-              <a:t>ระบบเดิมไม่ถูกแก้ ของใหม่แทรกเป็นคิวและตัวตรวจกฎคั่นกลางเท่านั้น</a:t>
-            </a:r>
-          </a:p>
-        </p:txBody>
-      </p:sp>
-      <p:sp>
-        <p:nvSpPr>
-          <p:cNvPr id="10" name="Group Zone"/>
-          <p:cNvSpPr/>
-          <p:nvPr/>
-        </p:nvSpPr>
-        <p:spPr>
-          <a:xfrm>
-            <a:off x="3566160" y="2766060"/>
-            <a:ext cx="5257800" cy="1645920"/>
-          </a:xfrm>
-          <a:prstGeom prst="rect">
-            <a:avLst/>
-          </a:prstGeom>
-          <a:solidFill>
-            <a:srgbClr val="E8F6F5"/>
-          </a:solidFill>
-          <a:ln>
-            <a:noFill/>
-          </a:ln>
-        </p:spPr>
+              <a:t>สแกนหรือรับไฟล์เข้าคิวกลาง</a:t>
+            </a:r>
+          </a:p>
+        </p:txBody>
+      </p:sp>
+      <p:sp>
+        <p:nvSpPr>
+          <p:cNvPr id="7" name="C1"/>
+          <p:cNvSpPr>
+            <a:spLocks noGrp="1"/>
+          </p:cNvSpPr>
+          <p:nvPr>
+            <p:ph type="body" idx="23"/>
+          </p:nvPr>
+        </p:nvSpPr>
+        <p:spPr/>
         <p:txBody>
           <a:bodyPr/>
           <a:lstStyle/>
           <a:p>
-            <a:endParaRPr lang="th-TH"/>
-          </a:p>
-        </p:txBody>
-      </p:sp>
-      <p:sp>
-        <p:nvSpPr>
-          <p:cNvPr id="11" name="Group Label"/>
-          <p:cNvSpPr/>
-          <p:nvPr/>
-        </p:nvSpPr>
-        <p:spPr>
-          <a:xfrm>
-            <a:off x="3840480" y="2926080"/>
-            <a:ext cx="3200400" cy="228600"/>
-          </a:xfrm>
-          <a:prstGeom prst="rect">
-            <a:avLst/>
-          </a:prstGeom>
-          <a:noFill/>
-          <a:ln>
-            <a:noFill/>
-          </a:ln>
-        </p:spPr>
-        <p:txBody>
-          <a:bodyPr wrap="square" anchor="ctr" lIns="0" tIns="0" rIns="0" bIns="0" rtlCol="0"/>
-          <a:lstStyle/>
-          <a:p>
-            <a:pPr algn="l" marL="0" indent="0">
-              <a:lnSpc>
-                <a:spcPct val="100000"/>
-              </a:lnSpc>
-              <a:buNone/>
-            </a:pPr>
-            <a:r>
-              <a:rPr lang="th-TH" sz="1200" b="1" spc="120" dirty="0">
-                <a:solidFill>
-                  <a:srgbClr val="216B7F"/>
-                </a:solidFill>
-                <a:latin typeface="+mn-lt"/>
-                <a:ea typeface="+mn-ea"/>
-                <a:cs typeface="+mn-cs"/>
-              </a:rPr>
-              <a:t>ส่วนที่เพิ่มใหม่</a:t>
-            </a:r>
-          </a:p>
-        </p:txBody>
-      </p:sp>
-      <p:sp>
-        <p:nvSpPr>
-          <p:cNvPr id="12" name="Box 1"/>
-          <p:cNvSpPr/>
-          <p:nvPr/>
-        </p:nvSpPr>
-        <p:spPr>
-          <a:xfrm>
-            <a:off x="1143000" y="3223260"/>
-            <a:ext cx="2011680" cy="731520"/>
-          </a:xfrm>
-          <a:prstGeom prst="rect">
-            <a:avLst/>
-          </a:prstGeom>
-          <a:solidFill>
-            <a:srgbClr val="23436D"/>
-          </a:solidFill>
-          <a:ln>
-            <a:noFill/>
-          </a:ln>
-        </p:spPr>
-        <p:txBody>
-          <a:bodyPr wrap="square" anchor="ctr" lIns="0" tIns="0" rIns="0" bIns="0" rtlCol="0"/>
-          <a:lstStyle/>
-          <a:p>
-            <a:pPr algn="ctr" marL="0" indent="0">
-              <a:lnSpc>
-                <a:spcPct val="110000"/>
-              </a:lnSpc>
-              <a:buNone/>
-            </a:pPr>
-            <a:r>
-              <a:rPr lang="th-TH" sz="1200" dirty="0">
-                <a:solidFill>
-                  <a:srgbClr val="FFFFFF"/>
-                </a:solidFill>
-                <a:latin typeface="+mn-lt"/>
-                <a:ea typeface="+mn-ea"/>
-                <a:cs typeface="+mn-cs"/>
-              </a:rPr>
-              <a:t>ระบบ ERP ปัจจุบัน</a:t>
-            </a:r>
-          </a:p>
-        </p:txBody>
-      </p:sp>
-      <p:sp>
-        <p:nvSpPr>
-          <p:cNvPr id="13" name="Box 2"/>
-          <p:cNvSpPr/>
-          <p:nvPr/>
-        </p:nvSpPr>
-        <p:spPr>
-          <a:xfrm>
-            <a:off x="3840480" y="3223260"/>
-            <a:ext cx="2011680" cy="731520"/>
-          </a:xfrm>
-          <a:prstGeom prst="rect">
-            <a:avLst/>
-          </a:prstGeom>
-          <a:solidFill>
-            <a:srgbClr val="FFFFFF"/>
-          </a:solidFill>
-          <a:ln w="12700">
-            <a:solidFill>
-              <a:srgbClr val="23436D"/>
-            </a:solidFill>
-          </a:ln>
-        </p:spPr>
-        <p:txBody>
-          <a:bodyPr wrap="square" anchor="ctr" lIns="0" tIns="0" rIns="0" bIns="0" rtlCol="0"/>
-          <a:lstStyle/>
-          <a:p>
-            <a:pPr algn="ctr" marL="0" indent="0">
-              <a:lnSpc>
-                <a:spcPct val="110000"/>
-              </a:lnSpc>
-              <a:buNone/>
-            </a:pPr>
-            <a:r>
-              <a:rPr lang="th-TH" sz="1200" dirty="0">
-                <a:solidFill>
-                  <a:srgbClr val="333333"/>
-                </a:solidFill>
-                <a:latin typeface="+mn-lt"/>
-                <a:ea typeface="+mn-ea"/>
-                <a:cs typeface="+mn-cs"/>
-              </a:rPr>
-              <a:t>คิวเอกสารกลาง</a:t>
-            </a:r>
-          </a:p>
-        </p:txBody>
-      </p:sp>
-      <p:sp>
-        <p:nvSpPr>
-          <p:cNvPr id="113" name="Box 2 Tab"/>
-          <p:cNvSpPr/>
-          <p:nvPr/>
-        </p:nvSpPr>
-        <p:spPr>
-          <a:xfrm>
-            <a:off x="3954780" y="3337560"/>
-            <a:ext cx="205740" cy="45720"/>
-          </a:xfrm>
-          <a:prstGeom prst="rect">
-            <a:avLst/>
-          </a:prstGeom>
-          <a:solidFill>
-            <a:srgbClr val="23436D"/>
-          </a:solidFill>
-          <a:ln>
-            <a:noFill/>
-          </a:ln>
-        </p:spPr>
+            <a:pPr/>
+            <a:r>
+              <a:rPr lang="th-TH" dirty="0"/>
+              <a:t>2</a:t>
+            </a:r>
+          </a:p>
+        </p:txBody>
+      </p:sp>
+      <p:sp>
+        <p:nvSpPr>
+          <p:cNvPr id="8" name="H1"/>
+          <p:cNvSpPr>
+            <a:spLocks noGrp="1"/>
+          </p:cNvSpPr>
+          <p:nvPr>
+            <p:ph type="body" idx="24"/>
+          </p:nvPr>
+        </p:nvSpPr>
+        <p:spPr/>
         <p:txBody>
           <a:bodyPr/>
           <a:lstStyle/>
           <a:p>
-            <a:endParaRPr lang="th-TH"/>
-          </a:p>
-        </p:txBody>
-      </p:sp>
-      <p:sp>
-        <p:nvSpPr>
-          <p:cNvPr id="14" name="Box 3"/>
-          <p:cNvSpPr/>
-          <p:nvPr/>
-        </p:nvSpPr>
-        <p:spPr>
-          <a:xfrm>
-            <a:off x="6537960" y="3223260"/>
-            <a:ext cx="2011680" cy="731520"/>
-          </a:xfrm>
-          <a:prstGeom prst="rect">
-            <a:avLst/>
-          </a:prstGeom>
-          <a:solidFill>
-            <a:srgbClr val="FFFFFF"/>
-          </a:solidFill>
-          <a:ln w="12700">
-            <a:solidFill>
-              <a:srgbClr val="216B7F"/>
-            </a:solidFill>
-          </a:ln>
-        </p:spPr>
-        <p:txBody>
-          <a:bodyPr wrap="square" anchor="ctr" lIns="0" tIns="0" rIns="0" bIns="0" rtlCol="0"/>
-          <a:lstStyle/>
-          <a:p>
-            <a:pPr algn="ctr" marL="0" indent="0">
-              <a:lnSpc>
-                <a:spcPct val="110000"/>
-              </a:lnSpc>
-              <a:buNone/>
-            </a:pPr>
-            <a:r>
-              <a:rPr lang="th-TH" sz="1200" dirty="0">
-                <a:solidFill>
-                  <a:srgbClr val="333333"/>
-                </a:solidFill>
-                <a:latin typeface="+mn-lt"/>
-                <a:ea typeface="+mn-ea"/>
-                <a:cs typeface="+mn-cs"/>
-              </a:rPr>
-              <a:t>ตัวตรวจกฎธุรกิจ</a:t>
-            </a:r>
-          </a:p>
-        </p:txBody>
-      </p:sp>
-      <p:sp>
-        <p:nvSpPr>
-          <p:cNvPr id="114" name="Box 3 Tab"/>
-          <p:cNvSpPr/>
-          <p:nvPr/>
-        </p:nvSpPr>
-        <p:spPr>
-          <a:xfrm>
-            <a:off x="6652260" y="3337560"/>
-            <a:ext cx="205740" cy="45720"/>
-          </a:xfrm>
-          <a:prstGeom prst="rect">
-            <a:avLst/>
-          </a:prstGeom>
-          <a:solidFill>
-            <a:srgbClr val="216B7F"/>
-          </a:solidFill>
-          <a:ln>
-            <a:noFill/>
-          </a:ln>
-        </p:spPr>
+            <a:pPr/>
+            <a:r>
+              <a:rPr lang="th-TH" dirty="0"/>
+              <a:t>อ่านข้อมูล</a:t>
+            </a:r>
+          </a:p>
+        </p:txBody>
+      </p:sp>
+      <p:sp>
+        <p:nvSpPr>
+          <p:cNvPr id="9" name="B1"/>
+          <p:cNvSpPr>
+            <a:spLocks noGrp="1"/>
+          </p:cNvSpPr>
+          <p:nvPr>
+            <p:ph type="body" idx="25"/>
+          </p:nvPr>
+        </p:nvSpPr>
+        <p:spPr/>
         <p:txBody>
           <a:bodyPr/>
           <a:lstStyle/>
           <a:p>
-            <a:endParaRPr lang="th-TH"/>
-          </a:p>
-        </p:txBody>
-      </p:sp>
-      <p:sp>
-        <p:nvSpPr>
-          <p:cNvPr id="15" name="Box 4"/>
-          <p:cNvSpPr/>
-          <p:nvPr/>
-        </p:nvSpPr>
-        <p:spPr>
-          <a:xfrm>
-            <a:off x="9235440" y="3223260"/>
-            <a:ext cx="2011680" cy="731520"/>
-          </a:xfrm>
-          <a:prstGeom prst="rect">
-            <a:avLst/>
-          </a:prstGeom>
-          <a:solidFill>
-            <a:srgbClr val="23436D"/>
-          </a:solidFill>
-          <a:ln>
-            <a:noFill/>
-          </a:ln>
-        </p:spPr>
-        <p:txBody>
-          <a:bodyPr wrap="square" anchor="ctr" lIns="0" tIns="0" rIns="0" bIns="0" rtlCol="0"/>
-          <a:lstStyle/>
-          <a:p>
-            <a:pPr algn="ctr" marL="0" indent="0">
-              <a:lnSpc>
-                <a:spcPct val="110000"/>
-              </a:lnSpc>
-              <a:buNone/>
-            </a:pPr>
-            <a:r>
-              <a:rPr lang="th-TH" sz="1200" dirty="0">
-                <a:solidFill>
-                  <a:srgbClr val="FFFFFF"/>
-                </a:solidFill>
-                <a:latin typeface="+mn-lt"/>
-                <a:ea typeface="+mn-ea"/>
-                <a:cs typeface="+mn-cs"/>
-              </a:rPr>
-              <a:t>ระบบบัญชี</a:t>
-            </a:r>
-          </a:p>
-        </p:txBody>
-      </p:sp>
-      <p:sp>
-        <p:nvSpPr>
-          <p:cNvPr id="16" name="Link 1"/>
-          <p:cNvSpPr/>
-          <p:nvPr/>
-        </p:nvSpPr>
-        <p:spPr>
-          <a:xfrm>
-            <a:off x="3268980" y="3589020"/>
-            <a:ext cx="457200" cy="0"/>
-          </a:xfrm>
-          <a:prstGeom prst="line">
-            <a:avLst/>
-          </a:prstGeom>
-          <a:noFill/>
-          <a:ln w="15875" cap="flat">
-            <a:solidFill>
-              <a:srgbClr val="216B7F"/>
-            </a:solidFill>
-            <a:prstDash val="solid"/>
-            <a:tailEnd type="triangle" w="med" len="med"/>
-          </a:ln>
-        </p:spPr>
+            <a:pPr/>
+            <a:r>
+              <a:rPr lang="th-TH" dirty="0"/>
+              <a:t>ดึงฟิลด์สำคัญ ตรวจกับต้นทาง</a:t>
+            </a:r>
+          </a:p>
+        </p:txBody>
+      </p:sp>
+      <p:sp>
+        <p:nvSpPr>
+          <p:cNvPr id="10" name="C2"/>
+          <p:cNvSpPr>
+            <a:spLocks noGrp="1"/>
+          </p:cNvSpPr>
+          <p:nvPr>
+            <p:ph type="body" idx="26"/>
+          </p:nvPr>
+        </p:nvSpPr>
+        <p:spPr/>
         <p:txBody>
           <a:bodyPr/>
           <a:lstStyle/>
           <a:p>
-            <a:endParaRPr lang="th-TH"/>
-          </a:p>
-        </p:txBody>
-      </p:sp>
-      <p:sp>
-        <p:nvSpPr>
-          <p:cNvPr id="17" name="Link 2"/>
-          <p:cNvSpPr/>
-          <p:nvPr/>
-        </p:nvSpPr>
-        <p:spPr>
-          <a:xfrm>
-            <a:off x="5966460" y="3589020"/>
-            <a:ext cx="457200" cy="0"/>
-          </a:xfrm>
-          <a:prstGeom prst="line">
-            <a:avLst/>
-          </a:prstGeom>
-          <a:noFill/>
-          <a:ln w="15875" cap="flat">
-            <a:solidFill>
-              <a:srgbClr val="216B7F"/>
-            </a:solidFill>
-            <a:prstDash val="solid"/>
-            <a:tailEnd type="triangle" w="med" len="med"/>
-          </a:ln>
-        </p:spPr>
+            <a:pPr/>
+            <a:r>
+              <a:rPr lang="th-TH" dirty="0"/>
+              <a:t>3</a:t>
+            </a:r>
+          </a:p>
+        </p:txBody>
+      </p:sp>
+      <p:sp>
+        <p:nvSpPr>
+          <p:cNvPr id="11" name="H2"/>
+          <p:cNvSpPr>
+            <a:spLocks noGrp="1"/>
+          </p:cNvSpPr>
+          <p:nvPr>
+            <p:ph type="body" idx="27"/>
+          </p:nvPr>
+        </p:nvSpPr>
+        <p:spPr/>
         <p:txBody>
           <a:bodyPr/>
           <a:lstStyle/>
           <a:p>
-            <a:endParaRPr lang="th-TH"/>
-          </a:p>
-        </p:txBody>
-      </p:sp>
-      <p:sp>
-        <p:nvSpPr>
-          <p:cNvPr id="18" name="Link 3"/>
-          <p:cNvSpPr/>
-          <p:nvPr/>
-        </p:nvSpPr>
-        <p:spPr>
-          <a:xfrm>
-            <a:off x="8663940" y="3589020"/>
-            <a:ext cx="457200" cy="0"/>
-          </a:xfrm>
-          <a:prstGeom prst="line">
-            <a:avLst/>
-          </a:prstGeom>
-          <a:noFill/>
-          <a:ln w="15875" cap="flat">
-            <a:solidFill>
-              <a:srgbClr val="216B7F"/>
-            </a:solidFill>
-            <a:prstDash val="solid"/>
-            <a:tailEnd type="triangle" w="med" len="med"/>
-          </a:ln>
-        </p:spPr>
+            <a:pPr/>
+            <a:r>
+              <a:rPr lang="th-TH" dirty="0"/>
+              <a:t>ตรวจสอบ</a:t>
+            </a:r>
+          </a:p>
+        </p:txBody>
+      </p:sp>
+      <p:sp>
+        <p:nvSpPr>
+          <p:cNvPr id="12" name="B2"/>
+          <p:cNvSpPr>
+            <a:spLocks noGrp="1"/>
+          </p:cNvSpPr>
+          <p:nvPr>
+            <p:ph type="body" idx="28"/>
+          </p:nvPr>
+        </p:nvSpPr>
+        <p:spPr/>
         <p:txBody>
           <a:bodyPr/>
           <a:lstStyle/>
           <a:p>
-            <a:endParaRPr lang="th-TH"/>
-          </a:p>
-        </p:txBody>
-      </p:sp>
-      <p:sp>
-        <p:nvSpPr>
-          <p:cNvPr id="19" name="Edge Label"/>
-          <p:cNvSpPr/>
-          <p:nvPr/>
-        </p:nvSpPr>
-        <p:spPr>
-          <a:xfrm>
-            <a:off x="5806440" y="3268980"/>
-            <a:ext cx="822960" cy="228600"/>
-          </a:xfrm>
-          <a:prstGeom prst="rect">
-            <a:avLst/>
-          </a:prstGeom>
-          <a:noFill/>
-          <a:ln>
-            <a:noFill/>
-          </a:ln>
-        </p:spPr>
-        <p:txBody>
-          <a:bodyPr wrap="square" anchor="ctr" lIns="0" tIns="0" rIns="0" bIns="0" rtlCol="0"/>
-          <a:lstStyle/>
-          <a:p>
-            <a:pPr algn="ctr" marL="0" indent="0">
-              <a:lnSpc>
-                <a:spcPct val="100000"/>
-              </a:lnSpc>
-              <a:buNone/>
-            </a:pPr>
-            <a:r>
-              <a:rPr lang="th-TH" sz="1000" dirty="0">
-                <a:solidFill>
-                  <a:srgbClr val="5F5F5F"/>
-                </a:solidFill>
-                <a:latin typeface="+mn-lt"/>
-                <a:ea typeface="+mn-ea"/>
-                <a:cs typeface="+mn-cs"/>
-              </a:rPr>
-              <a:t>ผ่านกฎ</a:t>
+            <a:pPr/>
+            <a:r>
+              <a:rPr lang="th-TH" dirty="0"/>
+              <a:t>กฎธุรกิจและวงเงินอนุมัติ</a:t>
+            </a:r>
+          </a:p>
+        </p:txBody>
+      </p:sp>
+      <p:sp>
+        <p:nvSpPr>
+          <p:cNvPr id="13" name="C3"/>
+          <p:cNvSpPr>
+            <a:spLocks noGrp="1"/>
+          </p:cNvSpPr>
+          <p:nvPr>
+            <p:ph type="body" idx="29"/>
+          </p:nvPr>
+        </p:nvSpPr>
+        <p:spPr/>
+        <p:txBody>
+          <a:bodyPr/>
+          <a:lstStyle/>
+          <a:p>
+            <a:pPr/>
+            <a:r>
+              <a:rPr lang="th-TH" dirty="0"/>
+              <a:t>4</a:t>
+            </a:r>
+          </a:p>
+        </p:txBody>
+      </p:sp>
+      <p:sp>
+        <p:nvSpPr>
+          <p:cNvPr id="14" name="H3"/>
+          <p:cNvSpPr>
+            <a:spLocks noGrp="1"/>
+          </p:cNvSpPr>
+          <p:nvPr>
+            <p:ph type="body" idx="30"/>
+          </p:nvPr>
+        </p:nvSpPr>
+        <p:spPr/>
+        <p:txBody>
+          <a:bodyPr/>
+          <a:lstStyle/>
+          <a:p>
+            <a:pPr/>
+            <a:r>
+              <a:rPr lang="th-TH" dirty="0"/>
+              <a:t>บันทึก</a:t>
+            </a:r>
+          </a:p>
+        </p:txBody>
+      </p:sp>
+      <p:sp>
+        <p:nvSpPr>
+          <p:cNvPr id="15" name="B3"/>
+          <p:cNvSpPr>
+            <a:spLocks noGrp="1"/>
+          </p:cNvSpPr>
+          <p:nvPr>
+            <p:ph type="body" idx="31"/>
+          </p:nvPr>
+        </p:nvSpPr>
+        <p:spPr/>
+        <p:txBody>
+          <a:bodyPr/>
+          <a:lstStyle/>
+          <a:p>
+            <a:pPr/>
+            <a:r>
+              <a:rPr lang="th-TH" dirty="0"/>
+              <a:t>ลงระบบบัญชีพร้อม audit trail</a:t>
+            </a:r>
+          </a:p>
+        </p:txBody>
+      </p:sp>
+      <p:sp>
+        <p:nvSpPr>
+          <p:cNvPr id="16" name="C4"/>
+          <p:cNvSpPr>
+            <a:spLocks noGrp="1"/>
+          </p:cNvSpPr>
+          <p:nvPr>
+            <p:ph type="body" idx="32"/>
+          </p:nvPr>
+        </p:nvSpPr>
+        <p:spPr/>
+        <p:txBody>
+          <a:bodyPr/>
+          <a:lstStyle/>
+          <a:p>
+            <a:pPr/>
+            <a:r>
+              <a:rPr lang="th-TH" dirty="0"/>
+              <a:t>5</a:t>
+            </a:r>
+          </a:p>
+        </p:txBody>
+      </p:sp>
+      <p:sp>
+        <p:nvSpPr>
+          <p:cNvPr id="17" name="H4"/>
+          <p:cNvSpPr>
+            <a:spLocks noGrp="1"/>
+          </p:cNvSpPr>
+          <p:nvPr>
+            <p:ph type="body" idx="33"/>
+          </p:nvPr>
+        </p:nvSpPr>
+        <p:spPr/>
+        <p:txBody>
+          <a:bodyPr/>
+          <a:lstStyle/>
+          <a:p>
+            <a:pPr/>
+            <a:r>
+              <a:rPr lang="th-TH" dirty="0"/>
+              <a:t>กระทบยอด</a:t>
+            </a:r>
+          </a:p>
+        </p:txBody>
+      </p:sp>
+      <p:sp>
+        <p:nvSpPr>
+          <p:cNvPr id="18" name="B4"/>
+          <p:cNvSpPr>
+            <a:spLocks noGrp="1"/>
+          </p:cNvSpPr>
+          <p:nvPr>
+            <p:ph type="body" idx="34"/>
+          </p:nvPr>
+        </p:nvSpPr>
+        <p:spPr/>
+        <p:txBody>
+          <a:bodyPr/>
+          <a:lstStyle/>
+          <a:p>
+            <a:pPr/>
+            <a:r>
+              <a:rPr lang="th-TH" dirty="0"/>
+              <a:t>จับคู่อัตโนมัติ ส่งรายงาน</a:t>
+            </a:r>
+          </a:p>
+        </p:txBody>
+      </p:sp>
+      <p:sp>
+        <p:nvSpPr>
+          <p:cNvPr id="19" name="RL"/>
+          <p:cNvSpPr>
+            <a:spLocks noGrp="1"/>
+          </p:cNvSpPr>
+          <p:nvPr>
+            <p:ph type="body" idx="35"/>
+          </p:nvPr>
+        </p:nvSpPr>
+        <p:spPr/>
+        <p:txBody>
+          <a:bodyPr/>
+          <a:lstStyle/>
+          <a:p>
+            <a:pPr/>
+            <a:r>
+              <a:rPr lang="th-TH" dirty="0"/>
+              <a:t>ผลลัพธ์</a:t>
+            </a:r>
+          </a:p>
+        </p:txBody>
+      </p:sp>
+      <p:sp>
+        <p:nvSpPr>
+          <p:cNvPr id="20" name="RC"/>
+          <p:cNvSpPr>
+            <a:spLocks noGrp="1"/>
+          </p:cNvSpPr>
+          <p:nvPr>
+            <p:ph type="body" idx="36"/>
+          </p:nvPr>
+        </p:nvSpPr>
+        <p:spPr/>
+        <p:txBody>
+          <a:bodyPr/>
+          <a:lstStyle/>
+          <a:p>
+            <a:pPr/>
+            <a:r>
+              <a:rPr lang="th-TH" dirty="0"/>
+              <a:t>เอกสารหนึ่งใบผ่านครบห้าขั้นโดยไม่มีการคีย์ซ้ำเลย</a:t>
             </a:r>
           </a:p>
         </p:txBody>
@@ -21047,22 +22287,22 @@
         <a:srgbClr val="E8F6F5"/>
       </a:lt2>
       <a:accent1>
-        <a:srgbClr val="23436D"/>
+        <a:srgbClr val="2A5EA0"/>
       </a:accent1>
       <a:accent2>
-        <a:srgbClr val="216B7F"/>
+        <a:srgbClr val="BB731B"/>
       </a:accent2>
       <a:accent3>
-        <a:srgbClr val="4E8FA8"/>
+        <a:srgbClr val="0D9298"/>
       </a:accent3>
       <a:accent4>
-        <a:srgbClr val="16324F"/>
+        <a:srgbClr val="6C4289"/>
       </a:accent4>
       <a:accent5>
-        <a:srgbClr val="5F5F5F"/>
+        <a:srgbClr val="A4A4A4"/>
       </a:accent5>
       <a:accent6>
-        <a:srgbClr val="E8F6F5"/>
+        <a:srgbClr val="216B7F"/>
       </a:accent6>
       <a:hlink>
         <a:srgbClr val="216B7F"/>

--- a/NCT-Slide-Template-Demo.pptx
+++ b/NCT-Slide-Template-Demo.pptx
@@ -183,8 +183,32 @@
               <c:showPercent val="0"/>
               <c:showBubbleSize val="0"/>
             </c:dLbl>
+            <c:spPr>
+              <a:noFill/>
+              <a:ln>
+                <a:noFill/>
+              </a:ln>
+            </c:spPr>
+            <c:txPr>
+              <a:bodyPr/>
+              <a:lstStyle/>
+              <a:p>
+                <a:pPr>
+                  <a:defRPr sz="1200">
+                    <a:solidFill>
+                      <a:srgbClr val="5F5F5F"/>
+                    </a:solidFill>
+                    <a:latin typeface="+mn-lt"/>
+                    <a:ea typeface="+mn-ea"/>
+                    <a:cs typeface="+mn-cs"/>
+                  </a:defRPr>
+                </a:pPr>
+                <a:endParaRPr lang="th-TH"/>
+              </a:p>
+            </c:txPr>
+            <c:dLblPos val="outEnd"/>
             <c:showLegendKey val="0"/>
-            <c:showVal val="0"/>
+            <c:showVal val="1"/>
             <c:showCatName val="0"/>
             <c:showSerName val="0"/>
             <c:showPercent val="0"/>
@@ -565,7 +589,7 @@
           </a:prstGeom>
           <a:solidFill>
             <a:srgbClr val="FFFFFF">
-              <a:alpha val="70000"/>
+              <a:alpha val="72000"/>
             </a:srgbClr>
           </a:solidFill>
           <a:ln>
@@ -610,7 +634,7 @@
               <a:defRPr lang="th-TH" sz="2000" dirty="0">
                 <a:solidFill>
                   <a:srgbClr val="FFFFFF">
-                    <a:alpha val="82000"/>
+                    <a:alpha val="80000"/>
                   </a:srgbClr>
                 </a:solidFill>
                 <a:latin typeface="+mn-lt"/>
@@ -630,7 +654,7 @@
               <a:rPr lang="th-TH" sz="2000" dirty="0">
                 <a:solidFill>
                   <a:srgbClr val="FFFFFF">
-                    <a:alpha val="82000"/>
+                    <a:alpha val="80000"/>
                   </a:srgbClr>
                 </a:solidFill>
                 <a:latin typeface="+mn-lt"/>
@@ -704,7 +728,7 @@
           </a:prstGeom>
           <a:solidFill>
             <a:srgbClr val="FFFFFF">
-              <a:alpha val="22000"/>
+              <a:alpha val="28000"/>
             </a:srgbClr>
           </a:solidFill>
           <a:ln>
@@ -866,7 +890,7 @@
               <a:rPr lang="th-TH" sz="1000">
                 <a:solidFill>
                   <a:srgbClr val="FFFFFF">
-                    <a:alpha val="60000"/>
+                    <a:alpha val="72000"/>
                   </a:srgbClr>
                 </a:solidFill>
                 <a:latin typeface="+mn-lt"/>
@@ -1203,7 +1227,7 @@
           </a:prstGeom>
           <a:solidFill>
             <a:srgbClr val="FFFFFF">
-              <a:alpha val="70000"/>
+              <a:alpha val="72000"/>
             </a:srgbClr>
           </a:solidFill>
           <a:ln>
@@ -1248,7 +1272,7 @@
               <a:defRPr lang="th-TH" sz="1200" b="1" spc="120" dirty="0">
                 <a:solidFill>
                   <a:srgbClr val="FFFFFF">
-                    <a:alpha val="75000"/>
+                    <a:alpha val="80000"/>
                   </a:srgbClr>
                 </a:solidFill>
                 <a:latin typeface="+mn-lt"/>
@@ -1268,7 +1292,7 @@
               <a:rPr lang="th-TH" sz="1200" b="1" spc="120" dirty="0">
                 <a:solidFill>
                   <a:srgbClr val="FFFFFF">
-                    <a:alpha val="75000"/>
+                    <a:alpha val="80000"/>
                   </a:srgbClr>
                 </a:solidFill>
                 <a:latin typeface="+mn-lt"/>
@@ -1446,7 +1470,7 @@
               <a:defRPr lang="th-TH" sz="1400" dirty="0">
                 <a:solidFill>
                   <a:srgbClr val="FFFFFF">
-                    <a:alpha val="88000"/>
+                    <a:alpha val="92000"/>
                   </a:srgbClr>
                 </a:solidFill>
                 <a:latin typeface="+mn-lt"/>
@@ -1466,7 +1490,7 @@
               <a:rPr lang="th-TH" sz="1400" dirty="0">
                 <a:solidFill>
                   <a:srgbClr val="FFFFFF">
-                    <a:alpha val="88000"/>
+                    <a:alpha val="92000"/>
                   </a:srgbClr>
                 </a:solidFill>
                 <a:latin typeface="+mn-lt"/>
@@ -1540,7 +1564,7 @@
           </a:prstGeom>
           <a:solidFill>
             <a:srgbClr val="FFFFFF">
-              <a:alpha val="22000"/>
+              <a:alpha val="28000"/>
             </a:srgbClr>
           </a:solidFill>
           <a:ln>
@@ -1702,7 +1726,7 @@
               <a:rPr lang="th-TH" sz="1000">
                 <a:solidFill>
                   <a:srgbClr val="FFFFFF">
-                    <a:alpha val="60000"/>
+                    <a:alpha val="72000"/>
                   </a:srgbClr>
                 </a:solidFill>
                 <a:latin typeface="+mn-lt"/>
@@ -1983,7 +2007,7 @@
               <a:defRPr lang="th-TH" sz="1200" dirty="0">
                 <a:solidFill>
                   <a:srgbClr val="FFFFFF">
-                    <a:alpha val="88000"/>
+                    <a:alpha val="92000"/>
                   </a:srgbClr>
                 </a:solidFill>
                 <a:latin typeface="+mn-lt"/>
@@ -2007,7 +2031,7 @@
               <a:defRPr lang="th-TH" sz="1200" dirty="0">
                 <a:solidFill>
                   <a:srgbClr val="FFFFFF">
-                    <a:alpha val="73000"/>
+                    <a:alpha val="77000"/>
                   </a:srgbClr>
                 </a:solidFill>
                 <a:latin typeface="+mn-lt"/>
@@ -2035,7 +2059,7 @@
               <a:rPr lang="th-TH" sz="1200" dirty="0">
                 <a:solidFill>
                   <a:srgbClr val="FFFFFF">
-                    <a:alpha val="88000"/>
+                    <a:alpha val="92000"/>
                   </a:srgbClr>
                 </a:solidFill>
                 <a:latin typeface="+mn-lt"/>
@@ -2064,7 +2088,7 @@
               <a:rPr lang="th-TH" sz="1200" dirty="0">
                 <a:solidFill>
                   <a:srgbClr val="FFFFFF">
-                    <a:alpha val="73000"/>
+                    <a:alpha val="77000"/>
                   </a:srgbClr>
                 </a:solidFill>
                 <a:latin typeface="+mn-lt"/>
@@ -6781,7 +6805,7 @@
               <a:defRPr lang="th-TH" sz="1800" dirty="0">
                 <a:solidFill>
                   <a:srgbClr val="FFFFFF">
-                    <a:alpha val="88000"/>
+                    <a:alpha val="92000"/>
                   </a:srgbClr>
                 </a:solidFill>
                 <a:latin typeface="+mn-lt"/>
@@ -6805,7 +6829,7 @@
               <a:defRPr lang="th-TH" sz="1800" dirty="0">
                 <a:solidFill>
                   <a:srgbClr val="FFFFFF">
-                    <a:alpha val="88000"/>
+                    <a:alpha val="92000"/>
                   </a:srgbClr>
                 </a:solidFill>
                 <a:latin typeface="+mn-lt"/>
@@ -6829,7 +6853,7 @@
               <a:defRPr lang="th-TH" sz="1800" dirty="0">
                 <a:solidFill>
                   <a:srgbClr val="FFFFFF">
-                    <a:alpha val="88000"/>
+                    <a:alpha val="92000"/>
                   </a:srgbClr>
                 </a:solidFill>
                 <a:latin typeface="+mn-lt"/>
@@ -6857,7 +6881,7 @@
               <a:rPr lang="th-TH" sz="1800" dirty="0">
                 <a:solidFill>
                   <a:srgbClr val="FFFFFF">
-                    <a:alpha val="88000"/>
+                    <a:alpha val="92000"/>
                   </a:srgbClr>
                 </a:solidFill>
                 <a:latin typeface="+mn-lt"/>
@@ -6886,7 +6910,7 @@
               <a:rPr lang="th-TH" sz="1800" dirty="0">
                 <a:solidFill>
                   <a:srgbClr val="FFFFFF">
-                    <a:alpha val="88000"/>
+                    <a:alpha val="92000"/>
                   </a:srgbClr>
                 </a:solidFill>
                 <a:latin typeface="+mn-lt"/>
@@ -6915,7 +6939,7 @@
               <a:rPr lang="th-TH" sz="1800" dirty="0">
                 <a:solidFill>
                   <a:srgbClr val="FFFFFF">
-                    <a:alpha val="88000"/>
+                    <a:alpha val="92000"/>
                   </a:srgbClr>
                 </a:solidFill>
                 <a:latin typeface="+mn-lt"/>
@@ -6943,7 +6967,7 @@
           </a:prstGeom>
           <a:solidFill>
             <a:srgbClr val="FFFFFF">
-              <a:alpha val="22000"/>
+              <a:alpha val="28000"/>
             </a:srgbClr>
           </a:solidFill>
           <a:ln>
@@ -7105,7 +7129,7 @@
               <a:rPr lang="th-TH" sz="1000">
                 <a:solidFill>
                   <a:srgbClr val="FFFFFF">
-                    <a:alpha val="60000"/>
+                    <a:alpha val="72000"/>
                   </a:srgbClr>
                 </a:solidFill>
                 <a:latin typeface="+mn-lt"/>
@@ -8373,7 +8397,7 @@
           </a:prstGeom>
           <a:solidFill>
             <a:srgbClr val="FFFFFF">
-              <a:alpha val="32000"/>
+              <a:alpha val="28000"/>
             </a:srgbClr>
           </a:solidFill>
           <a:ln>
@@ -10936,7 +10960,7 @@
               <a:defRPr lang="th-TH" sz="1800" dirty="0">
                 <a:solidFill>
                   <a:srgbClr val="FFFFFF">
-                    <a:alpha val="78000"/>
+                    <a:alpha val="80000"/>
                   </a:srgbClr>
                 </a:solidFill>
                 <a:latin typeface="+mn-lt"/>
@@ -10956,7 +10980,7 @@
               <a:rPr lang="th-TH" sz="1800" dirty="0">
                 <a:solidFill>
                   <a:srgbClr val="FFFFFF">
-                    <a:alpha val="78000"/>
+                    <a:alpha val="80000"/>
                   </a:srgbClr>
                 </a:solidFill>
                 <a:latin typeface="+mn-lt"/>
@@ -10984,7 +11008,7 @@
           </a:prstGeom>
           <a:solidFill>
             <a:srgbClr val="FFFFFF">
-              <a:alpha val="22000"/>
+              <a:alpha val="28000"/>
             </a:srgbClr>
           </a:solidFill>
           <a:ln>
@@ -11146,7 +11170,7 @@
               <a:rPr lang="th-TH" sz="1000">
                 <a:solidFill>
                   <a:srgbClr val="FFFFFF">
-                    <a:alpha val="60000"/>
+                    <a:alpha val="72000"/>
                   </a:srgbClr>
                 </a:solidFill>
                 <a:latin typeface="+mn-lt"/>
@@ -14731,7 +14755,7 @@
           </a:prstGeom>
           <a:solidFill>
             <a:srgbClr val="FFFFFF">
-              <a:alpha val="22000"/>
+              <a:alpha val="28000"/>
             </a:srgbClr>
           </a:solidFill>
           <a:ln>
@@ -14893,7 +14917,7 @@
               <a:rPr lang="th-TH" sz="1000">
                 <a:solidFill>
                   <a:srgbClr val="FFFFFF">
-                    <a:alpha val="60000"/>
+                    <a:alpha val="72000"/>
                   </a:srgbClr>
                 </a:solidFill>
                 <a:latin typeface="+mn-lt"/>
